--- a/04-proposal/figures/proposal-figures.pptx
+++ b/04-proposal/figures/proposal-figures.pptx
@@ -8,10 +8,9 @@
     <p:sldId id="256" r:id="rId2"/>
     <p:sldId id="257" r:id="rId3"/>
     <p:sldId id="258" r:id="rId4"/>
-    <p:sldId id="259" r:id="rId5"/>
   </p:sldIdLst>
   <p:notesMasterIdLst>
-    <p:notesMasterId r:id="rId6"/>
+    <p:notesMasterId r:id="rId5"/>
   </p:notesMasterIdLst>
   <p:sldSz cx="9144000" cy="5143500"/>
   <p:notesSz cx="5143500" cy="9144000"/>
@@ -108,498 +107,6 @@
     </a:lvl9pPr>
   </p:defaultTextStyle>
 </p:presentation>
-</file>
-
-<file path=ppt/charts/chart1.xml><?xml version="1.0" encoding="utf-8"?>
-<c:chartSpace xmlns:c="http://schemas.openxmlformats.org/drawingml/2006/chart" xmlns:a="http://schemas.openxmlformats.org/drawingml/2006/main" xmlns:r="http://schemas.openxmlformats.org/officeDocument/2006/relationships">
-  <c:date1904 val="0"/>
-  <c:roundedCorners val="1"/>
-  <c:chart>
-    <c:autoTitleDeleted val="1"/>
-    <c:plotArea>
-      <c:layout/>
-      <c:barChart>
-        <c:barDir val="col"/>
-        <c:grouping val="clustered"/>
-        <c:varyColors val="0"/>
-        <c:ser>
-          <c:idx val="0"/>
-          <c:order val="0"/>
-          <c:tx>
-            <c:strRef>
-              <c:f>Sheet1!$B$1</c:f>
-              <c:strCache>
-                <c:ptCount val="1"/>
-                <c:pt idx="0">
-                  <c:v>Avg Wait (ms)</c:v>
-                </c:pt>
-              </c:strCache>
-            </c:strRef>
-          </c:tx>
-          <c:spPr>
-            <a:solidFill>
-              <a:srgbClr val="333333"/>
-            </a:solidFill>
-            <a:effectLst/>
-          </c:spPr>
-          <c:invertIfNegative val="0"/>
-          <c:dLbls>
-            <c:numFmt formatCode="#,##0" sourceLinked="0"/>
-            <c:txPr>
-              <a:bodyPr/>
-              <a:lstStyle/>
-              <a:p>
-                <a:pPr>
-                  <a:defRPr b="0" i="0" strike="noStrike" sz="1200" u="none">
-                    <a:solidFill>
-                      <a:srgbClr val="000000"/>
-                    </a:solidFill>
-                    <a:latin typeface="Arial"/>
-                  </a:defRPr>
-                </a:pPr>
-              </a:p>
-            </c:txPr>
-            <c:showLegendKey val="0"/>
-            <c:showVal val="1"/>
-            <c:showCatName val="0"/>
-            <c:showSerName val="0"/>
-            <c:showPercent val="0"/>
-            <c:showBubbleSize val="0"/>
-            <c:showLeaderLines val="0"/>
-          </c:dLbls>
-          <c:cat>
-            <c:multiLvlStrRef>
-              <c:f>Sheet1!$A$2:$A$5</c:f>
-              <c:multiLvlStrCache>
-                <c:ptCount val="4"/>
-                <c:lvl>
-                  <c:pt idx="0">
-                    <c:v>FCFS</c:v>
-                  </c:pt>
-                  <c:pt idx="1">
-                    <c:v>Priority</c:v>
-                  </c:pt>
-                  <c:pt idx="2">
-                    <c:v>MLFQ</c:v>
-                  </c:pt>
-                  <c:pt idx="3">
-                    <c:v>WFQ</c:v>
-                  </c:pt>
-                </c:lvl>
-              </c:multiLvlStrCache>
-            </c:multiLvlStrRef>
-          </c:cat>
-          <c:val>
-            <c:numRef>
-              <c:f>Sheet1!$B$2:$B$5</c:f>
-              <c:numCache>
-                <c:formatCode>General</c:formatCode>
-                <c:ptCount val="4"/>
-                <c:pt idx="0">
-                  <c:v>2572</c:v>
-                </c:pt>
-                <c:pt idx="1">
-                  <c:v>2826</c:v>
-                </c:pt>
-                <c:pt idx="2">
-                  <c:v>2572</c:v>
-                </c:pt>
-                <c:pt idx="3">
-                  <c:v>2819</c:v>
-                </c:pt>
-              </c:numCache>
-            </c:numRef>
-          </c:val>
-        </c:ser>
-        <c:dLbls>
-          <c:numFmt formatCode="#,##0" sourceLinked="0"/>
-          <c:txPr>
-            <a:bodyPr/>
-            <a:lstStyle/>
-            <a:p>
-              <a:pPr>
-                <a:defRPr b="0" i="0" strike="noStrike" sz="1200" u="none">
-                  <a:solidFill>
-                    <a:srgbClr val="000000"/>
-                  </a:solidFill>
-                  <a:latin typeface="Arial"/>
-                </a:defRPr>
-              </a:pPr>
-            </a:p>
-          </c:txPr>
-          <c:showLegendKey val="0"/>
-          <c:showVal val="1"/>
-          <c:showCatName val="0"/>
-          <c:showSerName val="0"/>
-          <c:showPercent val="0"/>
-          <c:showBubbleSize val="0"/>
-          <c:showLeaderLines val="0"/>
-        </c:dLbls>
-        <c:gapWidth val="150"/>
-        <c:overlap val="0"/>
-        <c:axId val="2094734554"/>
-        <c:axId val="2094734552"/>
-        <c:axId val="2094734556"/>
-      </c:barChart>
-      <c:catAx>
-        <c:axId val="2094734554"/>
-        <c:scaling>
-          <c:orientation val="minMax"/>
-        </c:scaling>
-        <c:delete val="0"/>
-        <c:axPos val="b"/>
-        <c:numFmt formatCode="General" sourceLinked="1"/>
-        <c:majorTickMark val="out"/>
-        <c:minorTickMark val="none"/>
-        <c:tickLblPos val="low"/>
-        <c:spPr>
-          <a:ln w="12700" cap="flat">
-            <a:solidFill>
-              <a:srgbClr val="888888"/>
-            </a:solidFill>
-            <a:prstDash val="solid"/>
-            <a:round/>
-          </a:ln>
-        </c:spPr>
-        <c:txPr>
-          <a:bodyPr/>
-          <a:lstStyle/>
-          <a:p>
-            <a:pPr>
-              <a:defRPr sz="800" b="0" i="0" u="none" strike="noStrike">
-                <a:solidFill>
-                  <a:srgbClr val="000000"/>
-                </a:solidFill>
-                <a:latin typeface="Arial"/>
-              </a:defRPr>
-            </a:pPr>
-            <a:endParaRPr lang="en-US"/>
-          </a:p>
-        </c:txPr>
-        <c:crossAx val="2094734552"/>
-        <c:crosses val="autoZero"/>
-        <c:auto val="1"/>
-        <c:lblAlgn val="ctr"/>
-        <c:noMultiLvlLbl val="1"/>
-      </c:catAx>
-      <c:valAx>
-        <c:axId val="2094734552"/>
-        <c:scaling>
-          <c:orientation val="minMax"/>
-        </c:scaling>
-        <c:delete val="0"/>
-        <c:axPos val="l"/>
-        <c:majorGridlines>
-          <c:spPr>
-            <a:ln w="6350" cap="flat">
-              <a:solidFill>
-                <a:srgbClr val="DDDDDD"/>
-              </a:solidFill>
-              <a:prstDash val="dash"/>
-              <a:round/>
-            </a:ln>
-          </c:spPr>
-        </c:majorGridlines>
-        <c:numFmt formatCode="General" sourceLinked="0"/>
-        <c:majorTickMark val="out"/>
-        <c:minorTickMark val="none"/>
-        <c:tickLblPos val="nextTo"/>
-        <c:spPr>
-          <a:ln w="12700" cap="flat">
-            <a:solidFill>
-              <a:srgbClr val="888888"/>
-            </a:solidFill>
-            <a:prstDash val="solid"/>
-            <a:round/>
-          </a:ln>
-        </c:spPr>
-        <c:txPr>
-          <a:bodyPr/>
-          <a:lstStyle/>
-          <a:p>
-            <a:pPr>
-              <a:defRPr sz="700" b="0" i="0" u="none" strike="noStrike">
-                <a:solidFill>
-                  <a:srgbClr val="000000"/>
-                </a:solidFill>
-                <a:latin typeface="Arial"/>
-              </a:defRPr>
-            </a:pPr>
-            <a:endParaRPr lang="en-US"/>
-          </a:p>
-        </c:txPr>
-        <c:crossAx val="2094734554"/>
-        <c:crosses val="autoZero"/>
-        <c:crossBetween val="between"/>
-      </c:valAx>
-      <c:spPr>
-        <a:noFill/>
-        <a:ln>
-          <a:noFill/>
-        </a:ln>
-        <a:effectLst/>
-      </c:spPr>
-    </c:plotArea>
-    <c:plotVisOnly val="1"/>
-    <c:dispBlanksAs val="span"/>
-  </c:chart>
-  <c:spPr>
-    <a:noFill/>
-    <a:ln>
-      <a:noFill/>
-    </a:ln>
-    <a:effectLst/>
-  </c:spPr>
-  <c:externalData r:id="rId1">
-    <c:autoUpdate val="0"/>
-  </c:externalData>
-</c:chartSpace>
-</file>
-
-<file path=ppt/charts/chart2.xml><?xml version="1.0" encoding="utf-8"?>
-<c:chartSpace xmlns:c="http://schemas.openxmlformats.org/drawingml/2006/chart" xmlns:a="http://schemas.openxmlformats.org/drawingml/2006/main" xmlns:r="http://schemas.openxmlformats.org/officeDocument/2006/relationships">
-  <c:date1904 val="0"/>
-  <c:roundedCorners val="1"/>
-  <c:chart>
-    <c:autoTitleDeleted val="1"/>
-    <c:plotArea>
-      <c:layout/>
-      <c:barChart>
-        <c:barDir val="col"/>
-        <c:grouping val="clustered"/>
-        <c:varyColors val="0"/>
-        <c:ser>
-          <c:idx val="0"/>
-          <c:order val="0"/>
-          <c:tx>
-            <c:strRef>
-              <c:f>Sheet1!$B$1</c:f>
-              <c:strCache>
-                <c:ptCount val="1"/>
-                <c:pt idx="0">
-                  <c:v>Response (ms)</c:v>
-                </c:pt>
-              </c:strCache>
-            </c:strRef>
-          </c:tx>
-          <c:spPr>
-            <a:solidFill>
-              <a:srgbClr val="555555"/>
-            </a:solidFill>
-            <a:effectLst/>
-          </c:spPr>
-          <c:invertIfNegative val="0"/>
-          <c:dLbls>
-            <c:numFmt formatCode="#,##0" sourceLinked="0"/>
-            <c:txPr>
-              <a:bodyPr/>
-              <a:lstStyle/>
-              <a:p>
-                <a:pPr>
-                  <a:defRPr b="0" i="0" strike="noStrike" sz="1200" u="none">
-                    <a:solidFill>
-                      <a:srgbClr val="000000"/>
-                    </a:solidFill>
-                    <a:latin typeface="Arial"/>
-                  </a:defRPr>
-                </a:pPr>
-              </a:p>
-            </c:txPr>
-            <c:showLegendKey val="0"/>
-            <c:showVal val="1"/>
-            <c:showCatName val="0"/>
-            <c:showSerName val="0"/>
-            <c:showPercent val="0"/>
-            <c:showBubbleSize val="0"/>
-            <c:showLeaderLines val="0"/>
-          </c:dLbls>
-          <c:cat>
-            <c:multiLvlStrRef>
-              <c:f>Sheet1!$A$2:$A$5</c:f>
-              <c:multiLvlStrCache>
-                <c:ptCount val="4"/>
-                <c:lvl>
-                  <c:pt idx="0">
-                    <c:v>Enterprise</c:v>
-                  </c:pt>
-                  <c:pt idx="1">
-                    <c:v>Premium</c:v>
-                  </c:pt>
-                  <c:pt idx="2">
-                    <c:v>Standard</c:v>
-                  </c:pt>
-                  <c:pt idx="3">
-                    <c:v>Free</c:v>
-                  </c:pt>
-                </c:lvl>
-              </c:multiLvlStrCache>
-            </c:multiLvlStrRef>
-          </c:cat>
-          <c:val>
-            <c:numRef>
-              <c:f>Sheet1!$B$2:$B$5</c:f>
-              <c:numCache>
-                <c:formatCode>General</c:formatCode>
-                <c:ptCount val="4"/>
-                <c:pt idx="0">
-                  <c:v>849</c:v>
-                </c:pt>
-                <c:pt idx="1">
-                  <c:v>1256</c:v>
-                </c:pt>
-                <c:pt idx="2">
-                  <c:v>3278</c:v>
-                </c:pt>
-                <c:pt idx="3">
-                  <c:v>4894</c:v>
-                </c:pt>
-              </c:numCache>
-            </c:numRef>
-          </c:val>
-        </c:ser>
-        <c:dLbls>
-          <c:numFmt formatCode="#,##0" sourceLinked="0"/>
-          <c:txPr>
-            <a:bodyPr/>
-            <a:lstStyle/>
-            <a:p>
-              <a:pPr>
-                <a:defRPr b="0" i="0" strike="noStrike" sz="1200" u="none">
-                  <a:solidFill>
-                    <a:srgbClr val="000000"/>
-                  </a:solidFill>
-                  <a:latin typeface="Arial"/>
-                </a:defRPr>
-              </a:pPr>
-            </a:p>
-          </c:txPr>
-          <c:showLegendKey val="0"/>
-          <c:showVal val="1"/>
-          <c:showCatName val="0"/>
-          <c:showSerName val="0"/>
-          <c:showPercent val="0"/>
-          <c:showBubbleSize val="0"/>
-          <c:showLeaderLines val="0"/>
-        </c:dLbls>
-        <c:gapWidth val="150"/>
-        <c:overlap val="0"/>
-        <c:axId val="2094734554"/>
-        <c:axId val="2094734552"/>
-        <c:axId val="2094734556"/>
-      </c:barChart>
-      <c:catAx>
-        <c:axId val="2094734554"/>
-        <c:scaling>
-          <c:orientation val="minMax"/>
-        </c:scaling>
-        <c:delete val="0"/>
-        <c:axPos val="b"/>
-        <c:numFmt formatCode="General" sourceLinked="1"/>
-        <c:majorTickMark val="out"/>
-        <c:minorTickMark val="none"/>
-        <c:tickLblPos val="low"/>
-        <c:spPr>
-          <a:ln w="12700" cap="flat">
-            <a:solidFill>
-              <a:srgbClr val="888888"/>
-            </a:solidFill>
-            <a:prstDash val="solid"/>
-            <a:round/>
-          </a:ln>
-        </c:spPr>
-        <c:txPr>
-          <a:bodyPr/>
-          <a:lstStyle/>
-          <a:p>
-            <a:pPr>
-              <a:defRPr sz="700" b="0" i="0" u="none" strike="noStrike">
-                <a:solidFill>
-                  <a:srgbClr val="000000"/>
-                </a:solidFill>
-                <a:latin typeface="Arial"/>
-              </a:defRPr>
-            </a:pPr>
-            <a:endParaRPr lang="en-US"/>
-          </a:p>
-        </c:txPr>
-        <c:crossAx val="2094734552"/>
-        <c:crosses val="autoZero"/>
-        <c:auto val="1"/>
-        <c:lblAlgn val="ctr"/>
-        <c:noMultiLvlLbl val="1"/>
-      </c:catAx>
-      <c:valAx>
-        <c:axId val="2094734552"/>
-        <c:scaling>
-          <c:orientation val="minMax"/>
-        </c:scaling>
-        <c:delete val="0"/>
-        <c:axPos val="l"/>
-        <c:majorGridlines>
-          <c:spPr>
-            <a:ln w="6350" cap="flat">
-              <a:solidFill>
-                <a:srgbClr val="DDDDDD"/>
-              </a:solidFill>
-              <a:prstDash val="dash"/>
-              <a:round/>
-            </a:ln>
-          </c:spPr>
-        </c:majorGridlines>
-        <c:numFmt formatCode="General" sourceLinked="0"/>
-        <c:majorTickMark val="out"/>
-        <c:minorTickMark val="none"/>
-        <c:tickLblPos val="nextTo"/>
-        <c:spPr>
-          <a:ln w="12700" cap="flat">
-            <a:solidFill>
-              <a:srgbClr val="888888"/>
-            </a:solidFill>
-            <a:prstDash val="solid"/>
-            <a:round/>
-          </a:ln>
-        </c:spPr>
-        <c:txPr>
-          <a:bodyPr/>
-          <a:lstStyle/>
-          <a:p>
-            <a:pPr>
-              <a:defRPr sz="600" b="0" i="0" u="none" strike="noStrike">
-                <a:solidFill>
-                  <a:srgbClr val="000000"/>
-                </a:solidFill>
-                <a:latin typeface="Arial"/>
-              </a:defRPr>
-            </a:pPr>
-            <a:endParaRPr lang="en-US"/>
-          </a:p>
-        </c:txPr>
-        <c:crossAx val="2094734554"/>
-        <c:crosses val="autoZero"/>
-        <c:crossBetween val="between"/>
-      </c:valAx>
-      <c:spPr>
-        <a:noFill/>
-        <a:ln>
-          <a:noFill/>
-        </a:ln>
-        <a:effectLst/>
-      </c:spPr>
-    </c:plotArea>
-    <c:plotVisOnly val="1"/>
-    <c:dispBlanksAs val="span"/>
-  </c:chart>
-  <c:spPr>
-    <a:noFill/>
-    <a:ln>
-      <a:noFill/>
-    </a:ln>
-    <a:effectLst/>
-  </c:spPr>
-  <c:externalData r:id="rId1">
-    <c:autoUpdate val="0"/>
-  </c:externalData>
-</c:chartSpace>
 </file>
 
 <file path=ppt/notesMasters/notesMaster1.xml><?xml version="1.0" encoding="utf-8"?>
@@ -1197,94 +704,6 @@
             <a:fld id="{F7021451-1387-4CA6-816F-3879F97B5CBC}" type="slidenum">
               <a:rPr lang="en-US"/>
               <a:t>3</a:t>
-            </a:fld>
-            <a:endParaRPr lang="en-US"/>
-          </a:p>
-        </p:txBody>
-      </p:sp>
-    </p:spTree>
-    <p:extLst>
-      <p:ext uri="{BB962C8B-B14F-4D97-AF65-F5344CB8AC3E}">
-        <p14:creationId xmlns:p14="http://schemas.microsoft.com/office/powerpoint/2010/main" val="1024086991"/>
-      </p:ext>
-    </p:extLst>
-  </p:cSld>
-  <p:clrMapOvr>
-    <a:masterClrMapping/>
-  </p:clrMapOvr>
-</p:notes>
-</file>
-
-<file path=ppt/notesSlides/notesSlide4.xml><?xml version="1.0" encoding="utf-8"?>
-<p:notes xmlns:a="http://schemas.openxmlformats.org/drawingml/2006/main" xmlns:r="http://schemas.openxmlformats.org/officeDocument/2006/relationships" xmlns:p="http://schemas.openxmlformats.org/presentationml/2006/main">
-  <p:cSld>
-    <p:spTree>
-      <p:nvGrpSpPr>
-        <p:cNvPr id="1" name=""/>
-        <p:cNvGrpSpPr/>
-        <p:nvPr/>
-      </p:nvGrpSpPr>
-      <p:grpSpPr>
-        <a:xfrm>
-          <a:off x="0" y="0"/>
-          <a:ext cx="0" cy="0"/>
-          <a:chOff x="0" y="0"/>
-          <a:chExt cx="0" cy="0"/>
-        </a:xfrm>
-      </p:grpSpPr>
-      <p:sp>
-        <p:nvSpPr>
-          <p:cNvPr id="2" name="Slide Image Placeholder 1"/>
-          <p:cNvSpPr>
-            <a:spLocks noGrp="1" noRot="1" noChangeAspect="1"/>
-          </p:cNvSpPr>
-          <p:nvPr>
-            <p:ph type="sldImg"/>
-          </p:nvPr>
-        </p:nvSpPr>
-        <p:spPr/>
-      </p:sp>
-      <p:sp>
-        <p:nvSpPr>
-          <p:cNvPr id="3" name="Notes Placeholder 2"/>
-          <p:cNvSpPr>
-            <a:spLocks noGrp="1"/>
-          </p:cNvSpPr>
-          <p:nvPr>
-            <p:ph type="body" idx="1"/>
-          </p:nvPr>
-        </p:nvSpPr>
-        <p:spPr/>
-        <p:txBody>
-          <a:bodyPr/>
-          <a:lstStyle/>
-          <a:p>
-            <a:r>
-              <a:rPr lang="en-US" dirty="0"/>
-              <a:t/>
-            </a:r>
-            <a:endParaRPr lang="en-US" dirty="0"/>
-          </a:p>
-        </p:txBody>
-      </p:sp>
-      <p:sp>
-        <p:nvSpPr>
-          <p:cNvPr id="4" name="Slide Number Placeholder 3"/>
-          <p:cNvSpPr>
-            <a:spLocks noGrp="1"/>
-          </p:cNvSpPr>
-          <p:nvPr>
-            <p:ph type="sldNum" sz="quarter" idx="10"/>
-          </p:nvPr>
-        </p:nvSpPr>
-        <p:spPr/>
-        <p:txBody>
-          <a:bodyPr/>
-          <a:lstStyle/>
-          <a:p>
-            <a:fld id="{F7021451-1387-4CA6-816F-3879F97B5CBC}" type="slidenum">
-              <a:rPr lang="en-US"/>
-              <a:t>4</a:t>
             </a:fld>
             <a:endParaRPr lang="en-US"/>
           </a:p>
@@ -1643,7 +1062,7 @@
         <p:spPr>
           <a:xfrm>
             <a:off x="381000" y="304800"/>
-            <a:ext cx="2000250" cy="4191298"/>
+            <a:ext cx="2000250" cy="3518595"/>
           </a:xfrm>
           <a:prstGeom prst="rect">
             <a:avLst/>
@@ -1725,9 +1144,9 @@
                 <a:solidFill>
                   <a:srgbClr val="FFFFFF"/>
                 </a:solidFill>
-                <a:latin typeface="Times New Roman" pitchFamily="34" charset="0"/>
-                <a:ea typeface="Times New Roman" pitchFamily="34" charset="-122"/>
-                <a:cs typeface="Times New Roman" pitchFamily="34" charset="-120"/>
+                <a:latin typeface="Malgun Gothic" pitchFamily="34" charset="0"/>
+                <a:ea typeface="Malgun Gothic" pitchFamily="34" charset="-122"/>
+                <a:cs typeface="Malgun Gothic" pitchFamily="34" charset="-120"/>
               </a:rPr>
               <a:t>FCFS</a:t>
             </a:r>
@@ -1770,11 +1189,11 @@
                 <a:solidFill>
                   <a:srgbClr val="555555"/>
                 </a:solidFill>
-                <a:latin typeface="Times New Roman" pitchFamily="34" charset="0"/>
-                <a:ea typeface="Times New Roman" pitchFamily="34" charset="-122"/>
-                <a:cs typeface="Times New Roman" pitchFamily="34" charset="-120"/>
-              </a:rPr>
-              <a:t>First-Come First-Served</a:t>
+                <a:latin typeface="Malgun Gothic" pitchFamily="34" charset="0"/>
+                <a:ea typeface="Malgun Gothic" pitchFamily="34" charset="-122"/>
+                <a:cs typeface="Malgun Gothic" pitchFamily="34" charset="-120"/>
+              </a:rPr>
+              <a:t>선착순 처리</a:t>
             </a:r>
             <a:endParaRPr lang="en-US" sz="900" dirty="0"/>
           </a:p>
@@ -1832,11 +1251,11 @@
                 <a:solidFill>
                   <a:srgbClr val="333333"/>
                 </a:solidFill>
-                <a:latin typeface="Times New Roman" pitchFamily="34" charset="0"/>
-                <a:ea typeface="Times New Roman" pitchFamily="34" charset="-122"/>
-                <a:cs typeface="Times New Roman" pitchFamily="34" charset="-120"/>
-              </a:rPr>
-              <a:t>Characteristics</a:t>
+                <a:latin typeface="Malgun Gothic" pitchFamily="34" charset="0"/>
+                <a:ea typeface="Malgun Gothic" pitchFamily="34" charset="-122"/>
+                <a:cs typeface="Malgun Gothic" pitchFamily="34" charset="-120"/>
+              </a:rPr>
+              <a:t>특징</a:t>
             </a:r>
             <a:endParaRPr lang="en-US" sz="900" dirty="0"/>
           </a:p>
@@ -1851,7 +1270,7 @@
         <p:spPr>
           <a:xfrm>
             <a:off x="517475" y="1383804"/>
-            <a:ext cx="1727299" cy="342900"/>
+            <a:ext cx="1727299" cy="400050"/>
           </a:xfrm>
           <a:prstGeom prst="rect">
             <a:avLst/>
@@ -1872,11 +1291,11 @@
                 <a:solidFill>
                   <a:srgbClr val="333333"/>
                 </a:solidFill>
-                <a:latin typeface="Times New Roman" pitchFamily="34" charset="0"/>
-                <a:ea typeface="Times New Roman" pitchFamily="34" charset="-122"/>
-                <a:cs typeface="Times New Roman" pitchFamily="34" charset="-120"/>
-              </a:rPr>
-              <a:t>Simple FIFO queue</a:t>
+                <a:latin typeface="Malgun Gothic" pitchFamily="34" charset="0"/>
+                <a:ea typeface="Malgun Gothic" pitchFamily="34" charset="-122"/>
+                <a:cs typeface="Malgun Gothic" pitchFamily="34" charset="-120"/>
+              </a:rPr>
+              <a:t>단순 FIFO 큐</a:t>
             </a:r>
             <a:endParaRPr lang="en-US" sz="850" dirty="0"/>
           </a:p>
@@ -1890,11 +1309,11 @@
                 <a:solidFill>
                   <a:srgbClr val="333333"/>
                 </a:solidFill>
-                <a:latin typeface="Times New Roman" pitchFamily="34" charset="0"/>
-                <a:ea typeface="Times New Roman" pitchFamily="34" charset="-122"/>
-                <a:cs typeface="Times New Roman" pitchFamily="34" charset="-120"/>
-              </a:rPr>
-              <a:t>Non-preemptive</a:t>
+                <a:latin typeface="Malgun Gothic" pitchFamily="34" charset="0"/>
+                <a:ea typeface="Malgun Gothic" pitchFamily="34" charset="-122"/>
+                <a:cs typeface="Malgun Gothic" pitchFamily="34" charset="-120"/>
+              </a:rPr>
+              <a:t>비선점형</a:t>
             </a:r>
             <a:endParaRPr lang="en-US" sz="850" dirty="0"/>
           </a:p>
@@ -1908,11 +1327,11 @@
                 <a:solidFill>
                   <a:srgbClr val="333333"/>
                 </a:solidFill>
-                <a:latin typeface="Times New Roman" pitchFamily="34" charset="0"/>
-                <a:ea typeface="Times New Roman" pitchFamily="34" charset="-122"/>
-                <a:cs typeface="Times New Roman" pitchFamily="34" charset="-120"/>
-              </a:rPr>
-              <a:t>O(1) scheduling</a:t>
+                <a:latin typeface="Malgun Gothic" pitchFamily="34" charset="0"/>
+                <a:ea typeface="Malgun Gothic" pitchFamily="34" charset="-122"/>
+                <a:cs typeface="Malgun Gothic" pitchFamily="34" charset="-120"/>
+              </a:rPr>
+              <a:t>O(1) 스케줄링</a:t>
             </a:r>
             <a:endParaRPr lang="en-US" sz="850" dirty="0"/>
           </a:p>
@@ -1926,7 +1345,7 @@
         </p:nvSpPr>
         <p:spPr>
           <a:xfrm>
-            <a:off x="517475" y="2039243"/>
+            <a:off x="517475" y="2096393"/>
             <a:ext cx="1727299" cy="0"/>
           </a:xfrm>
           <a:prstGeom prst="line">
@@ -1949,7 +1368,7 @@
         </p:nvSpPr>
         <p:spPr>
           <a:xfrm>
-            <a:off x="517475" y="1853505"/>
+            <a:off x="517475" y="1910655"/>
             <a:ext cx="1761845" cy="142875"/>
           </a:xfrm>
           <a:prstGeom prst="rect">
@@ -1970,11 +1389,11 @@
                 <a:solidFill>
                   <a:srgbClr val="333333"/>
                 </a:solidFill>
-                <a:latin typeface="Times New Roman" pitchFamily="34" charset="0"/>
-                <a:ea typeface="Times New Roman" pitchFamily="34" charset="-122"/>
-                <a:cs typeface="Times New Roman" pitchFamily="34" charset="-120"/>
-              </a:rPr>
-              <a:t>Limitation</a:t>
+                <a:latin typeface="Malgun Gothic" pitchFamily="34" charset="0"/>
+                <a:ea typeface="Malgun Gothic" pitchFamily="34" charset="-122"/>
+                <a:cs typeface="Malgun Gothic" pitchFamily="34" charset="-120"/>
+              </a:rPr>
+              <a:t>한계</a:t>
             </a:r>
             <a:endParaRPr lang="en-US" sz="900" dirty="0"/>
           </a:p>
@@ -1988,8 +1407,8 @@
         </p:nvSpPr>
         <p:spPr>
           <a:xfrm>
-            <a:off x="517475" y="2132707"/>
-            <a:ext cx="1761845" cy="228600"/>
+            <a:off x="517475" y="2189857"/>
+            <a:ext cx="1761845" cy="133350"/>
           </a:xfrm>
           <a:prstGeom prst="rect">
             <a:avLst/>
@@ -2015,11 +1434,11 @@
                 <a:solidFill>
                   <a:srgbClr val="333333"/>
                 </a:solidFill>
-                <a:latin typeface="Times New Roman" pitchFamily="34" charset="0"/>
-                <a:ea typeface="Times New Roman" pitchFamily="34" charset="-122"/>
-                <a:cs typeface="Times New Roman" pitchFamily="34" charset="-120"/>
-              </a:rPr>
-              <a:t>Convoy effect; no service differentiation</a:t>
+                <a:latin typeface="Malgun Gothic" pitchFamily="34" charset="0"/>
+                <a:ea typeface="Malgun Gothic" pitchFamily="34" charset="-122"/>
+                <a:cs typeface="Malgun Gothic" pitchFamily="34" charset="-120"/>
+              </a:rPr>
+              <a:t>호위 효과 발생, 차등 서비스 불가</a:t>
             </a:r>
             <a:endParaRPr lang="en-US" sz="850" dirty="0"/>
           </a:p>
@@ -2034,7 +1453,7 @@
         <p:spPr>
           <a:xfrm>
             <a:off x="2508200" y="304800"/>
-            <a:ext cx="2000399" cy="4191298"/>
+            <a:ext cx="2000399" cy="3518595"/>
           </a:xfrm>
           <a:prstGeom prst="rect">
             <a:avLst/>
@@ -2116,9 +1535,9 @@
                 <a:solidFill>
                   <a:srgbClr val="FFFFFF"/>
                 </a:solidFill>
-                <a:latin typeface="Times New Roman" pitchFamily="34" charset="0"/>
-                <a:ea typeface="Times New Roman" pitchFamily="34" charset="-122"/>
-                <a:cs typeface="Times New Roman" pitchFamily="34" charset="-120"/>
+                <a:latin typeface="Malgun Gothic" pitchFamily="34" charset="0"/>
+                <a:ea typeface="Malgun Gothic" pitchFamily="34" charset="-122"/>
+                <a:cs typeface="Malgun Gothic" pitchFamily="34" charset="-120"/>
               </a:rPr>
               <a:t>Priority</a:t>
             </a:r>
@@ -2161,11 +1580,11 @@
                 <a:solidFill>
                   <a:srgbClr val="555555"/>
                 </a:solidFill>
-                <a:latin typeface="Times New Roman" pitchFamily="34" charset="0"/>
-                <a:ea typeface="Times New Roman" pitchFamily="34" charset="-122"/>
-                <a:cs typeface="Times New Roman" pitchFamily="34" charset="-120"/>
-              </a:rPr>
-              <a:t>Priority-based + Aging</a:t>
+                <a:latin typeface="Malgun Gothic" pitchFamily="34" charset="0"/>
+                <a:ea typeface="Malgun Gothic" pitchFamily="34" charset="-122"/>
+                <a:cs typeface="Malgun Gothic" pitchFamily="34" charset="-120"/>
+              </a:rPr>
+              <a:t>우선순위 기반 + 에이징</a:t>
             </a:r>
             <a:endParaRPr lang="en-US" sz="900" dirty="0"/>
           </a:p>
@@ -2223,11 +1642,11 @@
                 <a:solidFill>
                   <a:srgbClr val="333333"/>
                 </a:solidFill>
-                <a:latin typeface="Times New Roman" pitchFamily="34" charset="0"/>
-                <a:ea typeface="Times New Roman" pitchFamily="34" charset="-122"/>
-                <a:cs typeface="Times New Roman" pitchFamily="34" charset="-120"/>
-              </a:rPr>
-              <a:t>Characteristics</a:t>
+                <a:latin typeface="Malgun Gothic" pitchFamily="34" charset="0"/>
+                <a:ea typeface="Malgun Gothic" pitchFamily="34" charset="-122"/>
+                <a:cs typeface="Malgun Gothic" pitchFamily="34" charset="-120"/>
+              </a:rPr>
+              <a:t>특징</a:t>
             </a:r>
             <a:endParaRPr lang="en-US" sz="900" dirty="0"/>
           </a:p>
@@ -2242,7 +1661,7 @@
         <p:spPr>
           <a:xfrm>
             <a:off x="2644676" y="1383804"/>
-            <a:ext cx="1727448" cy="342900"/>
+            <a:ext cx="1727448" cy="400050"/>
           </a:xfrm>
           <a:prstGeom prst="rect">
             <a:avLst/>
@@ -2263,11 +1682,11 @@
                 <a:solidFill>
                   <a:srgbClr val="333333"/>
                 </a:solidFill>
-                <a:latin typeface="Times New Roman" pitchFamily="34" charset="0"/>
-                <a:ea typeface="Times New Roman" pitchFamily="34" charset="-122"/>
-                <a:cs typeface="Times New Roman" pitchFamily="34" charset="-120"/>
-              </a:rPr>
-              <a:t>4-level priority (URGENT~LOW)</a:t>
+                <a:latin typeface="Malgun Gothic" pitchFamily="34" charset="0"/>
+                <a:ea typeface="Malgun Gothic" pitchFamily="34" charset="-122"/>
+                <a:cs typeface="Malgun Gothic" pitchFamily="34" charset="-120"/>
+              </a:rPr>
+              <a:t>4단계 우선순위 (URGENT~LOW)</a:t>
             </a:r>
             <a:endParaRPr lang="en-US" sz="850" dirty="0"/>
           </a:p>
@@ -2281,11 +1700,11 @@
                 <a:solidFill>
                   <a:srgbClr val="333333"/>
                 </a:solidFill>
-                <a:latin typeface="Times New Roman" pitchFamily="34" charset="0"/>
-                <a:ea typeface="Times New Roman" pitchFamily="34" charset="-122"/>
-                <a:cs typeface="Times New Roman" pitchFamily="34" charset="-120"/>
-              </a:rPr>
-              <a:t>Aging for starvation prevention</a:t>
+                <a:latin typeface="Malgun Gothic" pitchFamily="34" charset="0"/>
+                <a:ea typeface="Malgun Gothic" pitchFamily="34" charset="-122"/>
+                <a:cs typeface="Malgun Gothic" pitchFamily="34" charset="-120"/>
+              </a:rPr>
+              <a:t>에이징으로 기아 방지</a:t>
             </a:r>
             <a:endParaRPr lang="en-US" sz="850" dirty="0"/>
           </a:p>
@@ -2299,11 +1718,11 @@
                 <a:solidFill>
                   <a:srgbClr val="333333"/>
                 </a:solidFill>
-                <a:latin typeface="Times New Roman" pitchFamily="34" charset="0"/>
-                <a:ea typeface="Times New Roman" pitchFamily="34" charset="-122"/>
-                <a:cs typeface="Times New Roman" pitchFamily="34" charset="-120"/>
-              </a:rPr>
-              <a:t>Dynamic priority adjustment</a:t>
+                <a:latin typeface="Malgun Gothic" pitchFamily="34" charset="0"/>
+                <a:ea typeface="Malgun Gothic" pitchFamily="34" charset="-122"/>
+                <a:cs typeface="Malgun Gothic" pitchFamily="34" charset="-120"/>
+              </a:rPr>
+              <a:t>동적 우선순위 조정</a:t>
             </a:r>
             <a:endParaRPr lang="en-US" sz="850" dirty="0"/>
           </a:p>
@@ -2317,7 +1736,7 @@
         </p:nvSpPr>
         <p:spPr>
           <a:xfrm>
-            <a:off x="2644676" y="2039243"/>
+            <a:off x="2644676" y="2096393"/>
             <a:ext cx="1727448" cy="0"/>
           </a:xfrm>
           <a:prstGeom prst="line">
@@ -2340,7 +1759,7 @@
         </p:nvSpPr>
         <p:spPr>
           <a:xfrm>
-            <a:off x="2644676" y="1853505"/>
+            <a:off x="2644676" y="1910655"/>
             <a:ext cx="1761997" cy="142875"/>
           </a:xfrm>
           <a:prstGeom prst="rect">
@@ -2361,11 +1780,11 @@
                 <a:solidFill>
                   <a:srgbClr val="333333"/>
                 </a:solidFill>
-                <a:latin typeface="Times New Roman" pitchFamily="34" charset="0"/>
-                <a:ea typeface="Times New Roman" pitchFamily="34" charset="-122"/>
-                <a:cs typeface="Times New Roman" pitchFamily="34" charset="-120"/>
-              </a:rPr>
-              <a:t>Limitation</a:t>
+                <a:latin typeface="Malgun Gothic" pitchFamily="34" charset="0"/>
+                <a:ea typeface="Malgun Gothic" pitchFamily="34" charset="-122"/>
+                <a:cs typeface="Malgun Gothic" pitchFamily="34" charset="-120"/>
+              </a:rPr>
+              <a:t>한계</a:t>
             </a:r>
             <a:endParaRPr lang="en-US" sz="900" dirty="0"/>
           </a:p>
@@ -2379,8 +1798,8 @@
         </p:nvSpPr>
         <p:spPr>
           <a:xfrm>
-            <a:off x="2644676" y="2132707"/>
-            <a:ext cx="1761997" cy="114300"/>
+            <a:off x="2644676" y="2189857"/>
+            <a:ext cx="1761997" cy="133350"/>
           </a:xfrm>
           <a:prstGeom prst="rect">
             <a:avLst/>
@@ -2406,11 +1825,11 @@
                 <a:solidFill>
                   <a:srgbClr val="333333"/>
                 </a:solidFill>
-                <a:latin typeface="Times New Roman" pitchFamily="34" charset="0"/>
-                <a:ea typeface="Times New Roman" pitchFamily="34" charset="-122"/>
-                <a:cs typeface="Times New Roman" pitchFamily="34" charset="-120"/>
-              </a:rPr>
-              <a:t>Potential starvation without aging</a:t>
+                <a:latin typeface="Malgun Gothic" pitchFamily="34" charset="0"/>
+                <a:ea typeface="Malgun Gothic" pitchFamily="34" charset="-122"/>
+                <a:cs typeface="Malgun Gothic" pitchFamily="34" charset="-120"/>
+              </a:rPr>
+              <a:t>에이징 없으면 기아 발생 가능</a:t>
             </a:r>
             <a:endParaRPr lang="en-US" sz="850" dirty="0"/>
           </a:p>
@@ -2425,7 +1844,7 @@
         <p:spPr>
           <a:xfrm>
             <a:off x="4635550" y="304800"/>
-            <a:ext cx="2000250" cy="4191298"/>
+            <a:ext cx="2000250" cy="3518595"/>
           </a:xfrm>
           <a:prstGeom prst="rect">
             <a:avLst/>
@@ -2507,9 +1926,9 @@
                 <a:solidFill>
                   <a:srgbClr val="FFFFFF"/>
                 </a:solidFill>
-                <a:latin typeface="Times New Roman" pitchFamily="34" charset="0"/>
-                <a:ea typeface="Times New Roman" pitchFamily="34" charset="-122"/>
-                <a:cs typeface="Times New Roman" pitchFamily="34" charset="-120"/>
+                <a:latin typeface="Malgun Gothic" pitchFamily="34" charset="0"/>
+                <a:ea typeface="Malgun Gothic" pitchFamily="34" charset="-122"/>
+                <a:cs typeface="Malgun Gothic" pitchFamily="34" charset="-120"/>
               </a:rPr>
               <a:t>MLFQ</a:t>
             </a:r>
@@ -2552,11 +1971,11 @@
                 <a:solidFill>
                   <a:srgbClr val="555555"/>
                 </a:solidFill>
-                <a:latin typeface="Times New Roman" pitchFamily="34" charset="0"/>
-                <a:ea typeface="Times New Roman" pitchFamily="34" charset="-122"/>
-                <a:cs typeface="Times New Roman" pitchFamily="34" charset="-120"/>
-              </a:rPr>
-              <a:t>Multi-Level Feedback Queue</a:t>
+                <a:latin typeface="Malgun Gothic" pitchFamily="34" charset="0"/>
+                <a:ea typeface="Malgun Gothic" pitchFamily="34" charset="-122"/>
+                <a:cs typeface="Malgun Gothic" pitchFamily="34" charset="-120"/>
+              </a:rPr>
+              <a:t>다단계 피드백 큐</a:t>
             </a:r>
             <a:endParaRPr lang="en-US" sz="900" dirty="0"/>
           </a:p>
@@ -2614,11 +2033,11 @@
                 <a:solidFill>
                   <a:srgbClr val="333333"/>
                 </a:solidFill>
-                <a:latin typeface="Times New Roman" pitchFamily="34" charset="0"/>
-                <a:ea typeface="Times New Roman" pitchFamily="34" charset="-122"/>
-                <a:cs typeface="Times New Roman" pitchFamily="34" charset="-120"/>
-              </a:rPr>
-              <a:t>Characteristics</a:t>
+                <a:latin typeface="Malgun Gothic" pitchFamily="34" charset="0"/>
+                <a:ea typeface="Malgun Gothic" pitchFamily="34" charset="-122"/>
+                <a:cs typeface="Malgun Gothic" pitchFamily="34" charset="-120"/>
+              </a:rPr>
+              <a:t>특징</a:t>
             </a:r>
             <a:endParaRPr lang="en-US" sz="900" dirty="0"/>
           </a:p>
@@ -2633,7 +2052,7 @@
         <p:spPr>
           <a:xfrm>
             <a:off x="4772025" y="1383804"/>
-            <a:ext cx="1727299" cy="342900"/>
+            <a:ext cx="1727299" cy="400050"/>
           </a:xfrm>
           <a:prstGeom prst="rect">
             <a:avLst/>
@@ -2654,11 +2073,11 @@
                 <a:solidFill>
                   <a:srgbClr val="333333"/>
                 </a:solidFill>
-                <a:latin typeface="Times New Roman" pitchFamily="34" charset="0"/>
-                <a:ea typeface="Times New Roman" pitchFamily="34" charset="-122"/>
-                <a:cs typeface="Times New Roman" pitchFamily="34" charset="-120"/>
-              </a:rPr>
-              <a:t>Adaptive classification</a:t>
+                <a:latin typeface="Malgun Gothic" pitchFamily="34" charset="0"/>
+                <a:ea typeface="Malgun Gothic" pitchFamily="34" charset="-122"/>
+                <a:cs typeface="Malgun Gothic" pitchFamily="34" charset="-120"/>
+              </a:rPr>
+              <a:t>적응형 분류</a:t>
             </a:r>
             <a:endParaRPr lang="en-US" sz="850" dirty="0"/>
           </a:p>
@@ -2672,11 +2091,11 @@
                 <a:solidFill>
                   <a:srgbClr val="333333"/>
                 </a:solidFill>
-                <a:latin typeface="Times New Roman" pitchFamily="34" charset="0"/>
-                <a:ea typeface="Times New Roman" pitchFamily="34" charset="-122"/>
-                <a:cs typeface="Times New Roman" pitchFamily="34" charset="-120"/>
-              </a:rPr>
-              <a:t>Time quantum per level</a:t>
+                <a:latin typeface="Malgun Gothic" pitchFamily="34" charset="0"/>
+                <a:ea typeface="Malgun Gothic" pitchFamily="34" charset="-122"/>
+                <a:cs typeface="Malgun Gothic" pitchFamily="34" charset="-120"/>
+              </a:rPr>
+              <a:t>큐별 타임 퀀텀</a:t>
             </a:r>
             <a:endParaRPr lang="en-US" sz="850" dirty="0"/>
           </a:p>
@@ -2690,11 +2109,11 @@
                 <a:solidFill>
                   <a:srgbClr val="333333"/>
                 </a:solidFill>
-                <a:latin typeface="Times New Roman" pitchFamily="34" charset="0"/>
-                <a:ea typeface="Times New Roman" pitchFamily="34" charset="-122"/>
-                <a:cs typeface="Times New Roman" pitchFamily="34" charset="-120"/>
-              </a:rPr>
-              <a:t>Preemptive scheduling</a:t>
+                <a:latin typeface="Malgun Gothic" pitchFamily="34" charset="0"/>
+                <a:ea typeface="Malgun Gothic" pitchFamily="34" charset="-122"/>
+                <a:cs typeface="Malgun Gothic" pitchFamily="34" charset="-120"/>
+              </a:rPr>
+              <a:t>선점형 스케줄링</a:t>
             </a:r>
             <a:endParaRPr lang="en-US" sz="850" dirty="0"/>
           </a:p>
@@ -2708,7 +2127,7 @@
         </p:nvSpPr>
         <p:spPr>
           <a:xfrm>
-            <a:off x="4772025" y="2039243"/>
+            <a:off x="4772025" y="2096393"/>
             <a:ext cx="1727299" cy="0"/>
           </a:xfrm>
           <a:prstGeom prst="line">
@@ -2731,7 +2150,7 @@
         </p:nvSpPr>
         <p:spPr>
           <a:xfrm>
-            <a:off x="4772025" y="1853505"/>
+            <a:off x="4772025" y="1910655"/>
             <a:ext cx="1761845" cy="142875"/>
           </a:xfrm>
           <a:prstGeom prst="rect">
@@ -2752,11 +2171,11 @@
                 <a:solidFill>
                   <a:srgbClr val="333333"/>
                 </a:solidFill>
-                <a:latin typeface="Times New Roman" pitchFamily="34" charset="0"/>
-                <a:ea typeface="Times New Roman" pitchFamily="34" charset="-122"/>
-                <a:cs typeface="Times New Roman" pitchFamily="34" charset="-120"/>
-              </a:rPr>
-              <a:t>Limitation</a:t>
+                <a:latin typeface="Malgun Gothic" pitchFamily="34" charset="0"/>
+                <a:ea typeface="Malgun Gothic" pitchFamily="34" charset="-122"/>
+                <a:cs typeface="Malgun Gothic" pitchFamily="34" charset="-120"/>
+              </a:rPr>
+              <a:t>한계</a:t>
             </a:r>
             <a:endParaRPr lang="en-US" sz="900" dirty="0"/>
           </a:p>
@@ -2770,8 +2189,8 @@
         </p:nvSpPr>
         <p:spPr>
           <a:xfrm>
-            <a:off x="4772025" y="2132707"/>
-            <a:ext cx="1761845" cy="114300"/>
+            <a:off x="4772025" y="2189857"/>
+            <a:ext cx="1761845" cy="133350"/>
           </a:xfrm>
           <a:prstGeom prst="rect">
             <a:avLst/>
@@ -2797,11 +2216,11 @@
                 <a:solidFill>
                   <a:srgbClr val="333333"/>
                 </a:solidFill>
-                <a:latin typeface="Times New Roman" pitchFamily="34" charset="0"/>
-                <a:ea typeface="Times New Roman" pitchFamily="34" charset="-122"/>
-                <a:cs typeface="Times New Roman" pitchFamily="34" charset="-120"/>
-              </a:rPr>
-              <a:t>Parameter tuning complexity</a:t>
+                <a:latin typeface="Malgun Gothic" pitchFamily="34" charset="0"/>
+                <a:ea typeface="Malgun Gothic" pitchFamily="34" charset="-122"/>
+                <a:cs typeface="Malgun Gothic" pitchFamily="34" charset="-120"/>
+              </a:rPr>
+              <a:t>파라미터 튜닝 복잡</a:t>
             </a:r>
             <a:endParaRPr lang="en-US" sz="850" dirty="0"/>
           </a:p>
@@ -2816,7 +2235,7 @@
         <p:spPr>
           <a:xfrm>
             <a:off x="6762750" y="304800"/>
-            <a:ext cx="2000250" cy="4191298"/>
+            <a:ext cx="2000250" cy="3518595"/>
           </a:xfrm>
           <a:prstGeom prst="rect">
             <a:avLst/>
@@ -2898,9 +2317,9 @@
                 <a:solidFill>
                   <a:srgbClr val="FFFFFF"/>
                 </a:solidFill>
-                <a:latin typeface="Times New Roman" pitchFamily="34" charset="0"/>
-                <a:ea typeface="Times New Roman" pitchFamily="34" charset="-122"/>
-                <a:cs typeface="Times New Roman" pitchFamily="34" charset="-120"/>
+                <a:latin typeface="Malgun Gothic" pitchFamily="34" charset="0"/>
+                <a:ea typeface="Malgun Gothic" pitchFamily="34" charset="-122"/>
+                <a:cs typeface="Malgun Gothic" pitchFamily="34" charset="-120"/>
               </a:rPr>
               <a:t>WFQ</a:t>
             </a:r>
@@ -2943,11 +2362,11 @@
                 <a:solidFill>
                   <a:srgbClr val="555555"/>
                 </a:solidFill>
-                <a:latin typeface="Times New Roman" pitchFamily="34" charset="0"/>
-                <a:ea typeface="Times New Roman" pitchFamily="34" charset="-122"/>
-                <a:cs typeface="Times New Roman" pitchFamily="34" charset="-120"/>
-              </a:rPr>
-              <a:t>Weighted Fair Queuing</a:t>
+                <a:latin typeface="Malgun Gothic" pitchFamily="34" charset="0"/>
+                <a:ea typeface="Malgun Gothic" pitchFamily="34" charset="-122"/>
+                <a:cs typeface="Malgun Gothic" pitchFamily="34" charset="-120"/>
+              </a:rPr>
+              <a:t>가중치 공정 큐잉</a:t>
             </a:r>
             <a:endParaRPr lang="en-US" sz="900" dirty="0"/>
           </a:p>
@@ -3005,11 +2424,11 @@
                 <a:solidFill>
                   <a:srgbClr val="333333"/>
                 </a:solidFill>
-                <a:latin typeface="Times New Roman" pitchFamily="34" charset="0"/>
-                <a:ea typeface="Times New Roman" pitchFamily="34" charset="-122"/>
-                <a:cs typeface="Times New Roman" pitchFamily="34" charset="-120"/>
-              </a:rPr>
-              <a:t>Characteristics</a:t>
+                <a:latin typeface="Malgun Gothic" pitchFamily="34" charset="0"/>
+                <a:ea typeface="Malgun Gothic" pitchFamily="34" charset="-122"/>
+                <a:cs typeface="Malgun Gothic" pitchFamily="34" charset="-120"/>
+              </a:rPr>
+              <a:t>특징</a:t>
             </a:r>
             <a:endParaRPr lang="en-US" sz="900" dirty="0"/>
           </a:p>
@@ -3024,7 +2443,7 @@
         <p:spPr>
           <a:xfrm>
             <a:off x="6899225" y="1383804"/>
-            <a:ext cx="1727299" cy="342900"/>
+            <a:ext cx="1727299" cy="400050"/>
           </a:xfrm>
           <a:prstGeom prst="rect">
             <a:avLst/>
@@ -3045,11 +2464,11 @@
                 <a:solidFill>
                   <a:srgbClr val="333333"/>
                 </a:solidFill>
-                <a:latin typeface="Times New Roman" pitchFamily="34" charset="0"/>
-                <a:ea typeface="Times New Roman" pitchFamily="34" charset="-122"/>
-                <a:cs typeface="Times New Roman" pitchFamily="34" charset="-120"/>
-              </a:rPr>
-              <a:t>Weight-proportional service</a:t>
+                <a:latin typeface="Malgun Gothic" pitchFamily="34" charset="0"/>
+                <a:ea typeface="Malgun Gothic" pitchFamily="34" charset="-122"/>
+                <a:cs typeface="Malgun Gothic" pitchFamily="34" charset="-120"/>
+              </a:rPr>
+              <a:t>가중치 비례 서비스</a:t>
             </a:r>
             <a:endParaRPr lang="en-US" sz="850" dirty="0"/>
           </a:p>
@@ -3063,11 +2482,11 @@
                 <a:solidFill>
                   <a:srgbClr val="333333"/>
                 </a:solidFill>
-                <a:latin typeface="Times New Roman" pitchFamily="34" charset="0"/>
-                <a:ea typeface="Times New Roman" pitchFamily="34" charset="-122"/>
-                <a:cs typeface="Times New Roman" pitchFamily="34" charset="-120"/>
-              </a:rPr>
-              <a:t>Virtual Finish Time</a:t>
+                <a:latin typeface="Malgun Gothic" pitchFamily="34" charset="0"/>
+                <a:ea typeface="Malgun Gothic" pitchFamily="34" charset="-122"/>
+                <a:cs typeface="Malgun Gothic" pitchFamily="34" charset="-120"/>
+              </a:rPr>
+              <a:t>가상 종료 시각 계산</a:t>
             </a:r>
             <a:endParaRPr lang="en-US" sz="850" dirty="0"/>
           </a:p>
@@ -3081,11 +2500,11 @@
                 <a:solidFill>
                   <a:srgbClr val="333333"/>
                 </a:solidFill>
-                <a:latin typeface="Times New Roman" pitchFamily="34" charset="0"/>
-                <a:ea typeface="Times New Roman" pitchFamily="34" charset="-122"/>
-                <a:cs typeface="Times New Roman" pitchFamily="34" charset="-120"/>
-              </a:rPr>
-              <a:t>JFI fairness metric</a:t>
+                <a:latin typeface="Malgun Gothic" pitchFamily="34" charset="0"/>
+                <a:ea typeface="Malgun Gothic" pitchFamily="34" charset="-122"/>
+                <a:cs typeface="Malgun Gothic" pitchFamily="34" charset="-120"/>
+              </a:rPr>
+              <a:t>JFI 공정성 지표</a:t>
             </a:r>
             <a:endParaRPr lang="en-US" sz="850" dirty="0"/>
           </a:p>
@@ -3099,7 +2518,7 @@
         </p:nvSpPr>
         <p:spPr>
           <a:xfrm>
-            <a:off x="6899225" y="2039243"/>
+            <a:off x="6899225" y="2096393"/>
             <a:ext cx="1727299" cy="0"/>
           </a:xfrm>
           <a:prstGeom prst="line">
@@ -3122,7 +2541,7 @@
         </p:nvSpPr>
         <p:spPr>
           <a:xfrm>
-            <a:off x="6899225" y="1853505"/>
+            <a:off x="6899225" y="1910655"/>
             <a:ext cx="1761845" cy="142875"/>
           </a:xfrm>
           <a:prstGeom prst="rect">
@@ -3143,11 +2562,11 @@
                 <a:solidFill>
                   <a:srgbClr val="333333"/>
                 </a:solidFill>
-                <a:latin typeface="Times New Roman" pitchFamily="34" charset="0"/>
-                <a:ea typeface="Times New Roman" pitchFamily="34" charset="-122"/>
-                <a:cs typeface="Times New Roman" pitchFamily="34" charset="-120"/>
-              </a:rPr>
-              <a:t>Limitation</a:t>
+                <a:latin typeface="Malgun Gothic" pitchFamily="34" charset="0"/>
+                <a:ea typeface="Malgun Gothic" pitchFamily="34" charset="-122"/>
+                <a:cs typeface="Malgun Gothic" pitchFamily="34" charset="-120"/>
+              </a:rPr>
+              <a:t>한계</a:t>
             </a:r>
             <a:endParaRPr lang="en-US" sz="900" dirty="0"/>
           </a:p>
@@ -3161,8 +2580,8 @@
         </p:nvSpPr>
         <p:spPr>
           <a:xfrm>
-            <a:off x="6899225" y="2132707"/>
-            <a:ext cx="1761845" cy="114300"/>
+            <a:off x="6899225" y="2189857"/>
+            <a:ext cx="1761845" cy="133350"/>
           </a:xfrm>
           <a:prstGeom prst="rect">
             <a:avLst/>
@@ -3188,11 +2607,11 @@
                 <a:solidFill>
                   <a:srgbClr val="333333"/>
                 </a:solidFill>
-                <a:latin typeface="Times New Roman" pitchFamily="34" charset="0"/>
-                <a:ea typeface="Times New Roman" pitchFamily="34" charset="-122"/>
-                <a:cs typeface="Times New Roman" pitchFamily="34" charset="-120"/>
-              </a:rPr>
-              <a:t>Computational overhead of VFT</a:t>
+                <a:latin typeface="Malgun Gothic" pitchFamily="34" charset="0"/>
+                <a:ea typeface="Malgun Gothic" pitchFamily="34" charset="-122"/>
+                <a:cs typeface="Malgun Gothic" pitchFamily="34" charset="-120"/>
+              </a:rPr>
+              <a:t>VFT 계산 부담</a:t>
             </a:r>
             <a:endParaRPr lang="en-US" sz="850" dirty="0"/>
           </a:p>
@@ -3200,13 +2619,312 @@
       </p:sp>
       <p:sp>
         <p:nvSpPr>
-          <p:cNvPr id="42" name="Shape 40"/>
-          <p:cNvSpPr/>
-          <p:nvPr/>
-        </p:nvSpPr>
-        <p:spPr>
-          <a:xfrm>
-            <a:off x="381000" y="4632573"/>
+          <p:cNvPr id="42" name="Text 40"/>
+          <p:cNvSpPr/>
+          <p:nvPr/>
+        </p:nvSpPr>
+        <p:spPr>
+          <a:xfrm>
+            <a:off x="381000" y="3899595"/>
+            <a:ext cx="8401050" cy="577453"/>
+          </a:xfrm>
+          <a:prstGeom prst="rect">
+            <a:avLst/>
+          </a:prstGeom>
+          <a:noFill/>
+          <a:ln w="9525">
+            <a:solidFill>
+              <a:srgbClr val="333333"/>
+            </a:solidFill>
+          </a:ln>
+        </p:spPr>
+        <p:txBody>
+          <a:bodyPr wrap="square" rtlCol="0" anchor="ctr"/>
+          <a:lstStyle/>
+          <a:p>
+            <a:pPr indent="0" marL="0">
+              <a:buNone/>
+            </a:pPr>
+            <a:endParaRPr lang="en-US" dirty="0"/>
+          </a:p>
+        </p:txBody>
+      </p:sp>
+      <p:sp>
+        <p:nvSpPr>
+          <p:cNvPr id="43" name="Text 41"/>
+          <p:cNvSpPr/>
+          <p:nvPr/>
+        </p:nvSpPr>
+        <p:spPr>
+          <a:xfrm>
+            <a:off x="390525" y="3909120"/>
+            <a:ext cx="8382000" cy="298252"/>
+          </a:xfrm>
+          <a:prstGeom prst="rect">
+            <a:avLst/>
+          </a:prstGeom>
+          <a:solidFill>
+            <a:srgbClr val="666666"/>
+          </a:solidFill>
+          <a:ln/>
+        </p:spPr>
+        <p:txBody>
+          <a:bodyPr wrap="square" rtlCol="0" anchor="ctr"/>
+          <a:lstStyle/>
+          <a:p>
+            <a:pPr indent="0" marL="0">
+              <a:buNone/>
+            </a:pPr>
+            <a:endParaRPr lang="en-US" dirty="0"/>
+          </a:p>
+        </p:txBody>
+      </p:sp>
+      <p:sp>
+        <p:nvSpPr>
+          <p:cNvPr id="44" name="Text 42"/>
+          <p:cNvSpPr/>
+          <p:nvPr/>
+        </p:nvSpPr>
+        <p:spPr>
+          <a:xfrm>
+            <a:off x="517475" y="3972520"/>
+            <a:ext cx="898380" cy="171450"/>
+          </a:xfrm>
+          <a:prstGeom prst="rect">
+            <a:avLst/>
+          </a:prstGeom>
+          <a:noFill/>
+          <a:ln/>
+        </p:spPr>
+        <p:txBody>
+          <a:bodyPr wrap="square" lIns="0" tIns="0" rIns="0" bIns="0" rtlCol="0" anchor="t"/>
+          <a:lstStyle/>
+          <a:p>
+            <a:pPr algn="l" indent="0" marL="0">
+              <a:buNone/>
+            </a:pPr>
+            <a:r>
+              <a:rPr lang="en-US" sz="1200" b="1" dirty="0">
+                <a:solidFill>
+                  <a:srgbClr val="FFFFFF"/>
+                </a:solidFill>
+                <a:latin typeface="Malgun Gothic" pitchFamily="34" charset="0"/>
+                <a:ea typeface="Malgun Gothic" pitchFamily="34" charset="-122"/>
+                <a:cs typeface="Malgun Gothic" pitchFamily="34" charset="-120"/>
+              </a:rPr>
+              <a:t>Rate Limiter</a:t>
+            </a:r>
+            <a:endParaRPr lang="en-US" sz="1200" dirty="0"/>
+          </a:p>
+        </p:txBody>
+      </p:sp>
+      <p:sp>
+        <p:nvSpPr>
+          <p:cNvPr id="45" name="Text 43"/>
+          <p:cNvSpPr/>
+          <p:nvPr/>
+        </p:nvSpPr>
+        <p:spPr>
+          <a:xfrm>
+            <a:off x="1550640" y="3991570"/>
+            <a:ext cx="822933" cy="133350"/>
+          </a:xfrm>
+          <a:prstGeom prst="rect">
+            <a:avLst/>
+          </a:prstGeom>
+          <a:noFill/>
+          <a:ln/>
+        </p:spPr>
+        <p:txBody>
+          <a:bodyPr wrap="square" lIns="0" tIns="0" rIns="0" bIns="0" rtlCol="0" anchor="t"/>
+          <a:lstStyle/>
+          <a:p>
+            <a:pPr algn="l" indent="0" marL="0">
+              <a:buNone/>
+            </a:pPr>
+            <a:r>
+              <a:rPr lang="en-US" sz="850" dirty="0">
+                <a:solidFill>
+                  <a:srgbClr val="DDDDDD"/>
+                </a:solidFill>
+                <a:latin typeface="Malgun Gothic" pitchFamily="34" charset="0"/>
+                <a:ea typeface="Malgun Gothic" pitchFamily="34" charset="-122"/>
+                <a:cs typeface="Malgun Gothic" pitchFamily="34" charset="-120"/>
+              </a:rPr>
+              <a:t>토큰 버킷 알고리즘</a:t>
+            </a:r>
+            <a:endParaRPr lang="en-US" sz="850" dirty="0"/>
+          </a:p>
+        </p:txBody>
+      </p:sp>
+      <p:sp>
+        <p:nvSpPr>
+          <p:cNvPr id="46" name="Text 44"/>
+          <p:cNvSpPr/>
+          <p:nvPr/>
+        </p:nvSpPr>
+        <p:spPr>
+          <a:xfrm>
+            <a:off x="517475" y="4270772"/>
+            <a:ext cx="1301725" cy="133350"/>
+          </a:xfrm>
+          <a:prstGeom prst="rect">
+            <a:avLst/>
+          </a:prstGeom>
+          <a:noFill/>
+          <a:ln/>
+        </p:spPr>
+        <p:txBody>
+          <a:bodyPr wrap="square" lIns="0" tIns="0" rIns="0" bIns="0" rtlCol="0" anchor="t"/>
+          <a:lstStyle/>
+          <a:p>
+            <a:pPr algn="l" indent="0" marL="0">
+              <a:buNone/>
+            </a:pPr>
+            <a:r>
+              <a:rPr lang="en-US" sz="850" b="1" dirty="0">
+                <a:solidFill>
+                  <a:srgbClr val="333333"/>
+                </a:solidFill>
+                <a:latin typeface="Malgun Gothic" pitchFamily="34" charset="0"/>
+                <a:ea typeface="Malgun Gothic" pitchFamily="34" charset="-122"/>
+                <a:cs typeface="Malgun Gothic" pitchFamily="34" charset="-120"/>
+              </a:rPr>
+              <a:t>역할:</a:t>
+            </a:r>
+            <a:pPr algn="l" indent="0" marL="0">
+              <a:buNone/>
+            </a:pPr>
+            <a:r>
+              <a:rPr lang="en-US" sz="850" dirty="0">
+                <a:solidFill>
+                  <a:srgbClr val="333333"/>
+                </a:solidFill>
+                <a:latin typeface="Malgun Gothic" pitchFamily="34" charset="0"/>
+                <a:ea typeface="Malgun Gothic" pitchFamily="34" charset="-122"/>
+                <a:cs typeface="Malgun Gothic" pitchFamily="34" charset="-120"/>
+              </a:rPr>
+              <a:t> 테넌트별 요청 빈도 제한</a:t>
+            </a:r>
+            <a:endParaRPr lang="en-US" sz="850" dirty="0"/>
+          </a:p>
+        </p:txBody>
+      </p:sp>
+      <p:sp>
+        <p:nvSpPr>
+          <p:cNvPr id="47" name="Text 45"/>
+          <p:cNvSpPr/>
+          <p:nvPr/>
+        </p:nvSpPr>
+        <p:spPr>
+          <a:xfrm>
+            <a:off x="2047577" y="4270772"/>
+            <a:ext cx="985364" cy="133350"/>
+          </a:xfrm>
+          <a:prstGeom prst="rect">
+            <a:avLst/>
+          </a:prstGeom>
+          <a:noFill/>
+          <a:ln/>
+        </p:spPr>
+        <p:txBody>
+          <a:bodyPr wrap="square" lIns="0" tIns="0" rIns="0" bIns="0" rtlCol="0" anchor="t"/>
+          <a:lstStyle/>
+          <a:p>
+            <a:pPr algn="l" indent="0" marL="0">
+              <a:buNone/>
+            </a:pPr>
+            <a:r>
+              <a:rPr lang="en-US" sz="850" b="1" dirty="0">
+                <a:solidFill>
+                  <a:srgbClr val="333333"/>
+                </a:solidFill>
+                <a:latin typeface="Malgun Gothic" pitchFamily="34" charset="0"/>
+                <a:ea typeface="Malgun Gothic" pitchFamily="34" charset="-122"/>
+                <a:cs typeface="Malgun Gothic" pitchFamily="34" charset="-120"/>
+              </a:rPr>
+              <a:t>방법:</a:t>
+            </a:r>
+            <a:pPr algn="l" indent="0" marL="0">
+              <a:buNone/>
+            </a:pPr>
+            <a:r>
+              <a:rPr lang="en-US" sz="850" dirty="0">
+                <a:solidFill>
+                  <a:srgbClr val="333333"/>
+                </a:solidFill>
+                <a:latin typeface="Malgun Gothic" pitchFamily="34" charset="0"/>
+                <a:ea typeface="Malgun Gothic" pitchFamily="34" charset="-122"/>
+                <a:cs typeface="Malgun Gothic" pitchFamily="34" charset="-120"/>
+              </a:rPr>
+              <a:t> 버스트 용량 제어</a:t>
+            </a:r>
+            <a:endParaRPr lang="en-US" sz="850" dirty="0"/>
+          </a:p>
+        </p:txBody>
+      </p:sp>
+      <p:sp>
+        <p:nvSpPr>
+          <p:cNvPr id="48" name="Text 46"/>
+          <p:cNvSpPr/>
+          <p:nvPr/>
+        </p:nvSpPr>
+        <p:spPr>
+          <a:xfrm>
+            <a:off x="3267521" y="4270772"/>
+            <a:ext cx="1279714" cy="133350"/>
+          </a:xfrm>
+          <a:prstGeom prst="rect">
+            <a:avLst/>
+          </a:prstGeom>
+          <a:noFill/>
+          <a:ln/>
+        </p:spPr>
+        <p:txBody>
+          <a:bodyPr wrap="square" lIns="0" tIns="0" rIns="0" bIns="0" rtlCol="0" anchor="t"/>
+          <a:lstStyle/>
+          <a:p>
+            <a:pPr algn="l" indent="0" marL="0">
+              <a:buNone/>
+            </a:pPr>
+            <a:r>
+              <a:rPr lang="en-US" sz="850" b="1" dirty="0">
+                <a:solidFill>
+                  <a:srgbClr val="333333"/>
+                </a:solidFill>
+                <a:latin typeface="Malgun Gothic" pitchFamily="34" charset="0"/>
+                <a:ea typeface="Malgun Gothic" pitchFamily="34" charset="-122"/>
+                <a:cs typeface="Malgun Gothic" pitchFamily="34" charset="-120"/>
+              </a:rPr>
+              <a:t>목적:</a:t>
+            </a:r>
+            <a:pPr algn="l" indent="0" marL="0">
+              <a:buNone/>
+            </a:pPr>
+            <a:r>
+              <a:rPr lang="en-US" sz="850" dirty="0">
+                <a:solidFill>
+                  <a:srgbClr val="333333"/>
+                </a:solidFill>
+                <a:latin typeface="Malgun Gothic" pitchFamily="34" charset="0"/>
+                <a:ea typeface="Malgun Gothic" pitchFamily="34" charset="-122"/>
+                <a:cs typeface="Malgun Gothic" pitchFamily="34" charset="-120"/>
+              </a:rPr>
+              <a:t> 과부하 방지 (보조 수단)</a:t>
+            </a:r>
+            <a:endParaRPr lang="en-US" sz="850" dirty="0"/>
+          </a:p>
+        </p:txBody>
+      </p:sp>
+      <p:sp>
+        <p:nvSpPr>
+          <p:cNvPr id="49" name="Shape 47"/>
+          <p:cNvSpPr/>
+          <p:nvPr/>
+        </p:nvSpPr>
+        <p:spPr>
+          <a:xfrm>
+            <a:off x="381000" y="4613523"/>
             <a:ext cx="8382000" cy="0"/>
           </a:xfrm>
           <a:prstGeom prst="line">
@@ -3223,14 +2941,14 @@
       </p:sp>
       <p:sp>
         <p:nvSpPr>
-          <p:cNvPr id="43" name="Text 41"/>
-          <p:cNvSpPr/>
-          <p:nvPr/>
-        </p:nvSpPr>
-        <p:spPr>
-          <a:xfrm>
-            <a:off x="381000" y="4680198"/>
-            <a:ext cx="281901" cy="104775"/>
+          <p:cNvPr id="50" name="Text 48"/>
+          <p:cNvSpPr/>
+          <p:nvPr/>
+        </p:nvSpPr>
+        <p:spPr>
+          <a:xfrm>
+            <a:off x="381000" y="4661148"/>
+            <a:ext cx="179281" cy="123825"/>
           </a:xfrm>
           <a:prstGeom prst="rect">
             <a:avLst/>
@@ -3250,11 +2968,11 @@
                 <a:solidFill>
                   <a:srgbClr val="555555"/>
                 </a:solidFill>
-                <a:latin typeface="Times New Roman" pitchFamily="34" charset="0"/>
-                <a:ea typeface="Times New Roman" pitchFamily="34" charset="-122"/>
-                <a:cs typeface="Times New Roman" pitchFamily="34" charset="-120"/>
-              </a:rPr>
-              <a:t>Simple</a:t>
+                <a:latin typeface="Malgun Gothic" pitchFamily="34" charset="0"/>
+                <a:ea typeface="Malgun Gothic" pitchFamily="34" charset="-122"/>
+                <a:cs typeface="Malgun Gothic" pitchFamily="34" charset="-120"/>
+              </a:rPr>
+              <a:t>단순</a:t>
             </a:r>
             <a:endParaRPr lang="en-US" sz="800" dirty="0"/>
           </a:p>
@@ -3262,14 +2980,14 @@
       </p:sp>
       <p:sp>
         <p:nvSpPr>
-          <p:cNvPr id="44" name="Text 42"/>
-          <p:cNvSpPr/>
-          <p:nvPr/>
-        </p:nvSpPr>
-        <p:spPr>
-          <a:xfrm>
-            <a:off x="3312914" y="4680198"/>
-            <a:ext cx="2482310" cy="104775"/>
+          <p:cNvPr id="51" name="Text 49"/>
+          <p:cNvSpPr/>
+          <p:nvPr/>
+        </p:nvSpPr>
+        <p:spPr>
+          <a:xfrm>
+            <a:off x="4012406" y="4661148"/>
+            <a:ext cx="1141571" cy="123825"/>
           </a:xfrm>
           <a:prstGeom prst="rect">
             <a:avLst/>
@@ -3289,11 +3007,11 @@
                 <a:solidFill>
                   <a:srgbClr val="555555"/>
                 </a:solidFill>
-                <a:latin typeface="Times New Roman" pitchFamily="34" charset="0"/>
-                <a:ea typeface="Times New Roman" pitchFamily="34" charset="-122"/>
-                <a:cs typeface="Times New Roman" pitchFamily="34" charset="-120"/>
-              </a:rPr>
-              <a:t>Implementation Complexity / Performance Optimization  →</a:t>
+                <a:latin typeface="Malgun Gothic" pitchFamily="34" charset="0"/>
+                <a:ea typeface="Malgun Gothic" pitchFamily="34" charset="-122"/>
+                <a:cs typeface="Malgun Gothic" pitchFamily="34" charset="-120"/>
+              </a:rPr>
+              <a:t>구현 복잡도 / 성능 최적화  →</a:t>
             </a:r>
             <a:endParaRPr lang="en-US" sz="800" dirty="0"/>
           </a:p>
@@ -3301,14 +3019,14 @@
       </p:sp>
       <p:sp>
         <p:nvSpPr>
-          <p:cNvPr id="45" name="Text 43"/>
-          <p:cNvSpPr/>
-          <p:nvPr/>
-        </p:nvSpPr>
-        <p:spPr>
-          <a:xfrm>
-            <a:off x="8401943" y="4680198"/>
-            <a:ext cx="368278" cy="104775"/>
+          <p:cNvPr id="52" name="Text 50"/>
+          <p:cNvSpPr/>
+          <p:nvPr/>
+        </p:nvSpPr>
+        <p:spPr>
+          <a:xfrm>
+            <a:off x="8587234" y="4661148"/>
+            <a:ext cx="179281" cy="123825"/>
           </a:xfrm>
           <a:prstGeom prst="rect">
             <a:avLst/>
@@ -3328,11 +3046,11 @@
                 <a:solidFill>
                   <a:srgbClr val="555555"/>
                 </a:solidFill>
-                <a:latin typeface="Times New Roman" pitchFamily="34" charset="0"/>
-                <a:ea typeface="Times New Roman" pitchFamily="34" charset="-122"/>
-                <a:cs typeface="Times New Roman" pitchFamily="34" charset="-120"/>
-              </a:rPr>
-              <a:t>Complex</a:t>
+                <a:latin typeface="Malgun Gothic" pitchFamily="34" charset="0"/>
+                <a:ea typeface="Malgun Gothic" pitchFamily="34" charset="-122"/>
+                <a:cs typeface="Malgun Gothic" pitchFamily="34" charset="-120"/>
+              </a:rPr>
+              <a:t>복잡</a:t>
             </a:r>
             <a:endParaRPr lang="en-US" sz="800" dirty="0"/>
           </a:p>
@@ -3340,7 +3058,7 @@
       </p:sp>
       <p:sp>
         <p:nvSpPr>
-          <p:cNvPr id="46" name="Shape 44"/>
+          <p:cNvPr id="53" name="Shape 51"/>
           <p:cNvSpPr/>
           <p:nvPr/>
         </p:nvSpPr>
@@ -3363,7 +3081,7 @@
       </p:sp>
       <p:sp>
         <p:nvSpPr>
-          <p:cNvPr id="47" name="Text 45"/>
+          <p:cNvPr id="54" name="Text 52"/>
           <p:cNvSpPr/>
           <p:nvPr/>
         </p:nvSpPr>
@@ -3390,11 +3108,11 @@
                 <a:solidFill>
                   <a:srgbClr val="999999"/>
                 </a:solidFill>
-                <a:latin typeface="Times New Roman" pitchFamily="34" charset="0"/>
-                <a:ea typeface="Times New Roman" pitchFamily="34" charset="-122"/>
-                <a:cs typeface="Times New Roman" pitchFamily="34" charset="-120"/>
-              </a:rPr>
-              <a:t>[1] Silberschatz et al., Operating System Concepts, 10th ed., 2018.  [2] Arpaci-Dusseau, OSTEP, 2018.</a:t>
+                <a:latin typeface="Malgun Gothic" pitchFamily="34" charset="0"/>
+                <a:ea typeface="Malgun Gothic" pitchFamily="34" charset="-122"/>
+                <a:cs typeface="Malgun Gothic" pitchFamily="34" charset="-120"/>
+              </a:rPr>
+              <a:t>[1] Silberschatz et al., Operating System Concepts, 10th ed., 2018.  [2] Arpaci-Dusseau, OSTEP, v1.10, 2023.  [3] Kurose &amp; Ross, Computer Networking, 8th ed., 2021.</a:t>
             </a:r>
             <a:endParaRPr lang="en-US" sz="700" dirty="0"/>
           </a:p>
@@ -3440,15 +3158,13 @@
         </p:nvSpPr>
         <p:spPr>
           <a:xfrm>
-            <a:off x="381000" y="304800"/>
-            <a:ext cx="3385691" cy="336352"/>
-          </a:xfrm>
-          <a:prstGeom prst="rect">
-            <a:avLst/>
-          </a:prstGeom>
-          <a:solidFill>
-            <a:srgbClr val="333333"/>
-          </a:solidFill>
+            <a:off x="381000" y="253901"/>
+            <a:ext cx="8382000" cy="453926"/>
+          </a:xfrm>
+          <a:prstGeom prst="rect">
+            <a:avLst/>
+          </a:prstGeom>
+          <a:noFill/>
           <a:ln w="19050">
             <a:solidFill>
               <a:srgbClr val="333333"/>
@@ -3474,32 +3190,140 @@
         </p:nvSpPr>
         <p:spPr>
           <a:xfrm>
-            <a:off x="431243" y="387251"/>
-            <a:ext cx="3285205" cy="171450"/>
-          </a:xfrm>
-          <a:prstGeom prst="rect">
-            <a:avLst/>
-          </a:prstGeom>
-          <a:noFill/>
-          <a:ln/>
-        </p:spPr>
-        <p:txBody>
-          <a:bodyPr wrap="square" lIns="0" tIns="0" rIns="0" bIns="0" rtlCol="0" anchor="t"/>
-          <a:lstStyle/>
-          <a:p>
-            <a:pPr algn="ctr" indent="0" marL="0">
-              <a:buNone/>
-            </a:pPr>
-            <a:r>
-              <a:rPr lang="en-US" sz="1200" b="1" dirty="0">
+            <a:off x="400050" y="272951"/>
+            <a:ext cx="2590800" cy="415826"/>
+          </a:xfrm>
+          <a:prstGeom prst="rect">
+            <a:avLst/>
+          </a:prstGeom>
+          <a:solidFill>
+            <a:srgbClr val="333333"/>
+          </a:solidFill>
+          <a:ln/>
+        </p:spPr>
+        <p:txBody>
+          <a:bodyPr wrap="square" rtlCol="0" anchor="ctr"/>
+          <a:lstStyle/>
+          <a:p>
+            <a:pPr indent="0" marL="0">
+              <a:buNone/>
+            </a:pPr>
+            <a:endParaRPr lang="en-US" dirty="0"/>
+          </a:p>
+        </p:txBody>
+      </p:sp>
+      <p:sp>
+        <p:nvSpPr>
+          <p:cNvPr id="4" name="Text 2"/>
+          <p:cNvSpPr/>
+          <p:nvPr/>
+        </p:nvSpPr>
+        <p:spPr>
+          <a:xfrm>
+            <a:off x="552450" y="399901"/>
+            <a:ext cx="2331720" cy="161925"/>
+          </a:xfrm>
+          <a:prstGeom prst="rect">
+            <a:avLst/>
+          </a:prstGeom>
+          <a:noFill/>
+          <a:ln/>
+        </p:spPr>
+        <p:txBody>
+          <a:bodyPr wrap="square" lIns="0" tIns="0" rIns="0" bIns="0" rtlCol="0" anchor="t"/>
+          <a:lstStyle/>
+          <a:p>
+            <a:pPr algn="l" indent="0" marL="0">
+              <a:buNone/>
+            </a:pPr>
+            <a:r>
+              <a:rPr lang="en-US" sz="1100" b="1" dirty="0">
                 <a:solidFill>
                   <a:srgbClr val="FFFFFF"/>
                 </a:solidFill>
-                <a:latin typeface="Times New Roman" pitchFamily="34" charset="0"/>
-                <a:ea typeface="Times New Roman" pitchFamily="34" charset="-122"/>
-                <a:cs typeface="Times New Roman" pitchFamily="34" charset="-120"/>
-              </a:rPr>
-              <a:t>Operating System Domain</a:t>
+                <a:latin typeface="Malgun Gothic" pitchFamily="34" charset="0"/>
+                <a:ea typeface="Malgun Gothic" pitchFamily="34" charset="-122"/>
+                <a:cs typeface="Malgun Gothic" pitchFamily="34" charset="-120"/>
+              </a:rPr>
+              <a:t>클라이언트 계층</a:t>
+            </a:r>
+            <a:endParaRPr lang="en-US" sz="1100" dirty="0"/>
+          </a:p>
+        </p:txBody>
+      </p:sp>
+      <p:sp>
+        <p:nvSpPr>
+          <p:cNvPr id="5" name="Text 3"/>
+          <p:cNvSpPr/>
+          <p:nvPr/>
+        </p:nvSpPr>
+        <p:spPr>
+          <a:xfrm>
+            <a:off x="3194000" y="404664"/>
+            <a:ext cx="1733002" cy="152400"/>
+          </a:xfrm>
+          <a:prstGeom prst="rect">
+            <a:avLst/>
+          </a:prstGeom>
+          <a:noFill/>
+          <a:ln/>
+        </p:spPr>
+        <p:txBody>
+          <a:bodyPr wrap="square" lIns="0" tIns="0" rIns="0" bIns="0" rtlCol="0" anchor="t"/>
+          <a:lstStyle/>
+          <a:p>
+            <a:pPr algn="l" indent="0" marL="0">
+              <a:buNone/>
+            </a:pPr>
+            <a:r>
+              <a:rPr lang="en-US" sz="1000" dirty="0">
+                <a:solidFill>
+                  <a:srgbClr val="333333"/>
+                </a:solidFill>
+                <a:latin typeface="Malgun Gothic" pitchFamily="34" charset="0"/>
+                <a:ea typeface="Malgun Gothic" pitchFamily="34" charset="-122"/>
+                <a:cs typeface="Malgun Gothic" pitchFamily="34" charset="-120"/>
+              </a:rPr>
+              <a:t>REST API 클라이언트 · 대시보드</a:t>
+            </a:r>
+            <a:endParaRPr lang="en-US" sz="1000" dirty="0"/>
+          </a:p>
+        </p:txBody>
+      </p:sp>
+      <p:sp>
+        <p:nvSpPr>
+          <p:cNvPr id="6" name="Text 4"/>
+          <p:cNvSpPr/>
+          <p:nvPr/>
+        </p:nvSpPr>
+        <p:spPr>
+          <a:xfrm>
+            <a:off x="4497288" y="784027"/>
+            <a:ext cx="152412" cy="180975"/>
+          </a:xfrm>
+          <a:prstGeom prst="rect">
+            <a:avLst/>
+          </a:prstGeom>
+          <a:noFill/>
+          <a:ln/>
+        </p:spPr>
+        <p:txBody>
+          <a:bodyPr wrap="square" lIns="0" tIns="0" rIns="0" bIns="0" rtlCol="0" anchor="t"/>
+          <a:lstStyle/>
+          <a:p>
+            <a:pPr algn="l" indent="0" marL="0">
+              <a:buNone/>
+            </a:pPr>
+            <a:r>
+              <a:rPr lang="en-US" sz="1200" dirty="0">
+                <a:solidFill>
+                  <a:srgbClr val="888888"/>
+                </a:solidFill>
+                <a:latin typeface="Malgun Gothic" pitchFamily="34" charset="0"/>
+                <a:ea typeface="Malgun Gothic" pitchFamily="34" charset="-122"/>
+                <a:cs typeface="Malgun Gothic" pitchFamily="34" charset="-120"/>
+              </a:rPr>
+              <a:t>▼</a:t>
             </a:r>
             <a:endParaRPr lang="en-US" sz="1200" dirty="0"/>
           </a:p>
@@ -3507,60 +3331,19 @@
       </p:sp>
       <p:sp>
         <p:nvSpPr>
-          <p:cNvPr id="4" name="Text 2"/>
-          <p:cNvSpPr/>
-          <p:nvPr/>
-        </p:nvSpPr>
-        <p:spPr>
-          <a:xfrm>
-            <a:off x="4342656" y="396776"/>
-            <a:ext cx="467710" cy="152400"/>
-          </a:xfrm>
-          <a:prstGeom prst="rect">
-            <a:avLst/>
-          </a:prstGeom>
-          <a:noFill/>
-          <a:ln/>
-        </p:spPr>
-        <p:txBody>
-          <a:bodyPr wrap="square" lIns="0" tIns="0" rIns="0" bIns="0" rtlCol="0" anchor="t"/>
-          <a:lstStyle/>
-          <a:p>
-            <a:pPr algn="l" indent="0" marL="0">
-              <a:buNone/>
-            </a:pPr>
-            <a:r>
-              <a:rPr lang="en-US" sz="1000" i="1" dirty="0">
-                <a:solidFill>
-                  <a:srgbClr val="999999"/>
-                </a:solidFill>
-                <a:latin typeface="Times New Roman" pitchFamily="34" charset="0"/>
-                <a:ea typeface="Times New Roman" pitchFamily="34" charset="-122"/>
-                <a:cs typeface="Times New Roman" pitchFamily="34" charset="-120"/>
-              </a:rPr>
-              <a:t>Mapping</a:t>
-            </a:r>
-            <a:endParaRPr lang="en-US" sz="1000" dirty="0"/>
-          </a:p>
-        </p:txBody>
-      </p:sp>
-      <p:sp>
-        <p:nvSpPr>
-          <p:cNvPr id="5" name="Text 3"/>
-          <p:cNvSpPr/>
-          <p:nvPr/>
-        </p:nvSpPr>
-        <p:spPr>
-          <a:xfrm>
-            <a:off x="5377160" y="304800"/>
-            <a:ext cx="3385840" cy="336352"/>
-          </a:xfrm>
-          <a:prstGeom prst="rect">
-            <a:avLst/>
-          </a:prstGeom>
-          <a:solidFill>
-            <a:srgbClr val="666666"/>
-          </a:solidFill>
+          <p:cNvPr id="7" name="Text 5"/>
+          <p:cNvSpPr/>
+          <p:nvPr/>
+        </p:nvSpPr>
+        <p:spPr>
+          <a:xfrm>
+            <a:off x="381000" y="1041202"/>
+            <a:ext cx="8382000" cy="568226"/>
+          </a:xfrm>
+          <a:prstGeom prst="rect">
+            <a:avLst/>
+          </a:prstGeom>
+          <a:noFill/>
           <a:ln w="19050">
             <a:solidFill>
               <a:srgbClr val="333333"/>
@@ -3580,38 +3363,185 @@
       </p:sp>
       <p:sp>
         <p:nvSpPr>
-          <p:cNvPr id="6" name="Text 4"/>
-          <p:cNvSpPr/>
-          <p:nvPr/>
-        </p:nvSpPr>
-        <p:spPr>
-          <a:xfrm>
-            <a:off x="5427402" y="387251"/>
-            <a:ext cx="3285357" cy="171450"/>
-          </a:xfrm>
-          <a:prstGeom prst="rect">
-            <a:avLst/>
-          </a:prstGeom>
-          <a:noFill/>
-          <a:ln/>
-        </p:spPr>
-        <p:txBody>
-          <a:bodyPr wrap="square" lIns="0" tIns="0" rIns="0" bIns="0" rtlCol="0" anchor="t"/>
-          <a:lstStyle/>
-          <a:p>
-            <a:pPr algn="ctr" indent="0" marL="0">
-              <a:buNone/>
-            </a:pPr>
-            <a:r>
-              <a:rPr lang="en-US" sz="1200" b="1" dirty="0">
+          <p:cNvPr id="8" name="Text 6"/>
+          <p:cNvSpPr/>
+          <p:nvPr/>
+        </p:nvSpPr>
+        <p:spPr>
+          <a:xfrm>
+            <a:off x="400050" y="1060252"/>
+            <a:ext cx="2590800" cy="530126"/>
+          </a:xfrm>
+          <a:prstGeom prst="rect">
+            <a:avLst/>
+          </a:prstGeom>
+          <a:solidFill>
+            <a:srgbClr val="555555"/>
+          </a:solidFill>
+          <a:ln/>
+        </p:spPr>
+        <p:txBody>
+          <a:bodyPr wrap="square" rtlCol="0" anchor="ctr"/>
+          <a:lstStyle/>
+          <a:p>
+            <a:pPr indent="0" marL="0">
+              <a:buNone/>
+            </a:pPr>
+            <a:endParaRPr lang="en-US" dirty="0"/>
+          </a:p>
+        </p:txBody>
+      </p:sp>
+      <p:sp>
+        <p:nvSpPr>
+          <p:cNvPr id="9" name="Text 7"/>
+          <p:cNvSpPr/>
+          <p:nvPr/>
+        </p:nvSpPr>
+        <p:spPr>
+          <a:xfrm>
+            <a:off x="552450" y="1187202"/>
+            <a:ext cx="2331720" cy="161925"/>
+          </a:xfrm>
+          <a:prstGeom prst="rect">
+            <a:avLst/>
+          </a:prstGeom>
+          <a:noFill/>
+          <a:ln/>
+        </p:spPr>
+        <p:txBody>
+          <a:bodyPr wrap="square" lIns="0" tIns="0" rIns="0" bIns="0" rtlCol="0" anchor="t"/>
+          <a:lstStyle/>
+          <a:p>
+            <a:pPr algn="l" indent="0" marL="0">
+              <a:buNone/>
+            </a:pPr>
+            <a:r>
+              <a:rPr lang="en-US" sz="1100" b="1" dirty="0">
                 <a:solidFill>
                   <a:srgbClr val="FFFFFF"/>
                 </a:solidFill>
-                <a:latin typeface="Times New Roman" pitchFamily="34" charset="0"/>
-                <a:ea typeface="Times New Roman" pitchFamily="34" charset="-122"/>
-                <a:cs typeface="Times New Roman" pitchFamily="34" charset="-120"/>
-              </a:rPr>
-              <a:t>LLM API Domain</a:t>
+                <a:latin typeface="Malgun Gothic" pitchFamily="34" charset="0"/>
+                <a:ea typeface="Malgun Gothic" pitchFamily="34" charset="-122"/>
+                <a:cs typeface="Malgun Gothic" pitchFamily="34" charset="-120"/>
+              </a:rPr>
+              <a:t>API 계층</a:t>
+            </a:r>
+            <a:endParaRPr lang="en-US" sz="1100" dirty="0"/>
+          </a:p>
+        </p:txBody>
+      </p:sp>
+      <p:sp>
+        <p:nvSpPr>
+          <p:cNvPr id="10" name="Text 8"/>
+          <p:cNvSpPr/>
+          <p:nvPr/>
+        </p:nvSpPr>
+        <p:spPr>
+          <a:xfrm>
+            <a:off x="552450" y="1349127"/>
+            <a:ext cx="2331720" cy="114300"/>
+          </a:xfrm>
+          <a:prstGeom prst="rect">
+            <a:avLst/>
+          </a:prstGeom>
+          <a:noFill/>
+          <a:ln/>
+        </p:spPr>
+        <p:txBody>
+          <a:bodyPr wrap="square" lIns="0" tIns="0" rIns="0" bIns="0" rtlCol="0" anchor="t"/>
+          <a:lstStyle/>
+          <a:p>
+            <a:pPr algn="l" indent="0" marL="0">
+              <a:buNone/>
+            </a:pPr>
+            <a:r>
+              <a:rPr lang="en-US" sz="800" dirty="0">
+                <a:solidFill>
+                  <a:srgbClr val="CCCCCC"/>
+                </a:solidFill>
+                <a:latin typeface="Malgun Gothic" pitchFamily="34" charset="0"/>
+                <a:ea typeface="Malgun Gothic" pitchFamily="34" charset="-122"/>
+                <a:cs typeface="Malgun Gothic" pitchFamily="34" charset="-120"/>
+              </a:rPr>
+              <a:t>(Express.js)</a:t>
+            </a:r>
+            <a:endParaRPr lang="en-US" sz="800" dirty="0"/>
+          </a:p>
+        </p:txBody>
+      </p:sp>
+      <p:sp>
+        <p:nvSpPr>
+          <p:cNvPr id="11" name="Text 9"/>
+          <p:cNvSpPr/>
+          <p:nvPr/>
+        </p:nvSpPr>
+        <p:spPr>
+          <a:xfrm>
+            <a:off x="3194000" y="1249114"/>
+            <a:ext cx="2596316" cy="152400"/>
+          </a:xfrm>
+          <a:prstGeom prst="rect">
+            <a:avLst/>
+          </a:prstGeom>
+          <a:noFill/>
+          <a:ln/>
+        </p:spPr>
+        <p:txBody>
+          <a:bodyPr wrap="square" lIns="0" tIns="0" rIns="0" bIns="0" rtlCol="0" anchor="t"/>
+          <a:lstStyle/>
+          <a:p>
+            <a:pPr algn="l" indent="0" marL="0">
+              <a:buNone/>
+            </a:pPr>
+            <a:r>
+              <a:rPr lang="en-US" sz="1000" dirty="0">
+                <a:solidFill>
+                  <a:srgbClr val="333333"/>
+                </a:solidFill>
+                <a:latin typeface="Malgun Gothic" pitchFamily="34" charset="0"/>
+                <a:ea typeface="Malgun Gothic" pitchFamily="34" charset="-122"/>
+                <a:cs typeface="Malgun Gothic" pitchFamily="34" charset="-120"/>
+              </a:rPr>
+              <a:t>요청 관리 · 스케줄러 관리 · 통계/공정성 · 상태 확인</a:t>
+            </a:r>
+            <a:endParaRPr lang="en-US" sz="1000" dirty="0"/>
+          </a:p>
+        </p:txBody>
+      </p:sp>
+      <p:sp>
+        <p:nvSpPr>
+          <p:cNvPr id="12" name="Text 10"/>
+          <p:cNvSpPr/>
+          <p:nvPr/>
+        </p:nvSpPr>
+        <p:spPr>
+          <a:xfrm>
+            <a:off x="4497288" y="1685627"/>
+            <a:ext cx="152412" cy="180975"/>
+          </a:xfrm>
+          <a:prstGeom prst="rect">
+            <a:avLst/>
+          </a:prstGeom>
+          <a:noFill/>
+          <a:ln/>
+        </p:spPr>
+        <p:txBody>
+          <a:bodyPr wrap="square" lIns="0" tIns="0" rIns="0" bIns="0" rtlCol="0" anchor="t"/>
+          <a:lstStyle/>
+          <a:p>
+            <a:pPr algn="l" indent="0" marL="0">
+              <a:buNone/>
+            </a:pPr>
+            <a:r>
+              <a:rPr lang="en-US" sz="1200" dirty="0">
+                <a:solidFill>
+                  <a:srgbClr val="888888"/>
+                </a:solidFill>
+                <a:latin typeface="Malgun Gothic" pitchFamily="34" charset="0"/>
+                <a:ea typeface="Malgun Gothic" pitchFamily="34" charset="-122"/>
+                <a:cs typeface="Malgun Gothic" pitchFamily="34" charset="-120"/>
+              </a:rPr>
+              <a:t>▼</a:t>
             </a:r>
             <a:endParaRPr lang="en-US" sz="1200" dirty="0"/>
           </a:p>
@@ -3619,14 +3549,154 @@
       </p:sp>
       <p:sp>
         <p:nvSpPr>
-          <p:cNvPr id="7" name="Text 5"/>
-          <p:cNvSpPr/>
-          <p:nvPr/>
-        </p:nvSpPr>
-        <p:spPr>
-          <a:xfrm>
-            <a:off x="381000" y="768102"/>
-            <a:ext cx="3407420" cy="333375"/>
+          <p:cNvPr id="13" name="Text 11"/>
+          <p:cNvSpPr/>
+          <p:nvPr/>
+        </p:nvSpPr>
+        <p:spPr>
+          <a:xfrm>
+            <a:off x="381000" y="1942802"/>
+            <a:ext cx="8382000" cy="669727"/>
+          </a:xfrm>
+          <a:prstGeom prst="rect">
+            <a:avLst/>
+          </a:prstGeom>
+          <a:noFill/>
+          <a:ln w="19050">
+            <a:solidFill>
+              <a:srgbClr val="333333"/>
+            </a:solidFill>
+          </a:ln>
+        </p:spPr>
+        <p:txBody>
+          <a:bodyPr wrap="square" rtlCol="0" anchor="ctr"/>
+          <a:lstStyle/>
+          <a:p>
+            <a:pPr indent="0" marL="0">
+              <a:buNone/>
+            </a:pPr>
+            <a:endParaRPr lang="en-US" dirty="0"/>
+          </a:p>
+        </p:txBody>
+      </p:sp>
+      <p:sp>
+        <p:nvSpPr>
+          <p:cNvPr id="14" name="Text 12"/>
+          <p:cNvSpPr/>
+          <p:nvPr/>
+        </p:nvSpPr>
+        <p:spPr>
+          <a:xfrm>
+            <a:off x="400050" y="2007840"/>
+            <a:ext cx="2590800" cy="539651"/>
+          </a:xfrm>
+          <a:prstGeom prst="rect">
+            <a:avLst/>
+          </a:prstGeom>
+          <a:solidFill>
+            <a:srgbClr val="333333"/>
+          </a:solidFill>
+          <a:ln/>
+        </p:spPr>
+        <p:txBody>
+          <a:bodyPr wrap="square" rtlCol="0" anchor="ctr"/>
+          <a:lstStyle/>
+          <a:p>
+            <a:pPr indent="0" marL="0">
+              <a:buNone/>
+            </a:pPr>
+            <a:endParaRPr lang="en-US" dirty="0"/>
+          </a:p>
+        </p:txBody>
+      </p:sp>
+      <p:sp>
+        <p:nvSpPr>
+          <p:cNvPr id="15" name="Text 13"/>
+          <p:cNvSpPr/>
+          <p:nvPr/>
+        </p:nvSpPr>
+        <p:spPr>
+          <a:xfrm>
+            <a:off x="552450" y="2134791"/>
+            <a:ext cx="2331720" cy="161925"/>
+          </a:xfrm>
+          <a:prstGeom prst="rect">
+            <a:avLst/>
+          </a:prstGeom>
+          <a:noFill/>
+          <a:ln/>
+        </p:spPr>
+        <p:txBody>
+          <a:bodyPr wrap="square" lIns="0" tIns="0" rIns="0" bIns="0" rtlCol="0" anchor="t"/>
+          <a:lstStyle/>
+          <a:p>
+            <a:pPr algn="l" indent="0" marL="0">
+              <a:buNone/>
+            </a:pPr>
+            <a:r>
+              <a:rPr lang="en-US" sz="1100" b="1" dirty="0">
+                <a:solidFill>
+                  <a:srgbClr val="FFFFFF"/>
+                </a:solidFill>
+                <a:latin typeface="Malgun Gothic" pitchFamily="34" charset="0"/>
+                <a:ea typeface="Malgun Gothic" pitchFamily="34" charset="-122"/>
+                <a:cs typeface="Malgun Gothic" pitchFamily="34" charset="-120"/>
+              </a:rPr>
+              <a:t>스케줄러 엔진</a:t>
+            </a:r>
+            <a:endParaRPr lang="en-US" sz="1100" dirty="0"/>
+          </a:p>
+        </p:txBody>
+      </p:sp>
+      <p:sp>
+        <p:nvSpPr>
+          <p:cNvPr id="16" name="Text 14"/>
+          <p:cNvSpPr/>
+          <p:nvPr/>
+        </p:nvSpPr>
+        <p:spPr>
+          <a:xfrm>
+            <a:off x="552450" y="2296716"/>
+            <a:ext cx="2331720" cy="123825"/>
+          </a:xfrm>
+          <a:prstGeom prst="rect">
+            <a:avLst/>
+          </a:prstGeom>
+          <a:noFill/>
+          <a:ln/>
+        </p:spPr>
+        <p:txBody>
+          <a:bodyPr wrap="square" lIns="0" tIns="0" rIns="0" bIns="0" rtlCol="0" anchor="t"/>
+          <a:lstStyle/>
+          <a:p>
+            <a:pPr algn="l" indent="0" marL="0">
+              <a:buNone/>
+            </a:pPr>
+            <a:r>
+              <a:rPr lang="en-US" sz="800" dirty="0">
+                <a:solidFill>
+                  <a:srgbClr val="CCCCCC"/>
+                </a:solidFill>
+                <a:latin typeface="Malgun Gothic" pitchFamily="34" charset="0"/>
+                <a:ea typeface="Malgun Gothic" pitchFamily="34" charset="-122"/>
+                <a:cs typeface="Malgun Gothic" pitchFamily="34" charset="-120"/>
+              </a:rPr>
+              <a:t>(런타임 교체 가능)</a:t>
+            </a:r>
+            <a:endParaRPr lang="en-US" sz="800" dirty="0"/>
+          </a:p>
+        </p:txBody>
+      </p:sp>
+      <p:sp>
+        <p:nvSpPr>
+          <p:cNvPr id="17" name="Text 15"/>
+          <p:cNvSpPr/>
+          <p:nvPr/>
+        </p:nvSpPr>
+        <p:spPr>
+          <a:xfrm>
+            <a:off x="3194000" y="2063353"/>
+            <a:ext cx="571500" cy="228600"/>
           </a:xfrm>
           <a:prstGeom prst="rect">
             <a:avLst/>
@@ -3651,14 +3721,14 @@
       </p:sp>
       <p:sp>
         <p:nvSpPr>
-          <p:cNvPr id="8" name="Text 6"/>
-          <p:cNvSpPr/>
-          <p:nvPr/>
-        </p:nvSpPr>
-        <p:spPr>
-          <a:xfrm>
-            <a:off x="1861096" y="853827"/>
-            <a:ext cx="456173" cy="161925"/>
+          <p:cNvPr id="18" name="Text 16"/>
+          <p:cNvSpPr/>
+          <p:nvPr/>
+        </p:nvSpPr>
+        <p:spPr>
+          <a:xfrm>
+            <a:off x="3330476" y="2110978"/>
+            <a:ext cx="304520" cy="133350"/>
           </a:xfrm>
           <a:prstGeom prst="rect">
             <a:avLst/>
@@ -3674,181 +3744,30 @@
               <a:buNone/>
             </a:pPr>
             <a:r>
-              <a:rPr lang="en-US" sz="1100" b="1" dirty="0">
+              <a:rPr lang="en-US" sz="900" b="1" dirty="0">
                 <a:solidFill>
                   <a:srgbClr val="333333"/>
                 </a:solidFill>
-                <a:latin typeface="Times New Roman" pitchFamily="34" charset="0"/>
-                <a:ea typeface="Times New Roman" pitchFamily="34" charset="-122"/>
-                <a:cs typeface="Times New Roman" pitchFamily="34" charset="-120"/>
-              </a:rPr>
-              <a:t>Process</a:t>
-            </a:r>
-            <a:endParaRPr lang="en-US" sz="1100" dirty="0"/>
-          </a:p>
-        </p:txBody>
-      </p:sp>
-      <p:sp>
-        <p:nvSpPr>
-          <p:cNvPr id="9" name="Text 7"/>
-          <p:cNvSpPr/>
-          <p:nvPr/>
-        </p:nvSpPr>
-        <p:spPr>
-          <a:xfrm>
-            <a:off x="4483001" y="777627"/>
-            <a:ext cx="181407" cy="209550"/>
-          </a:xfrm>
-          <a:prstGeom prst="rect">
-            <a:avLst/>
-          </a:prstGeom>
-          <a:noFill/>
-          <a:ln/>
-        </p:spPr>
-        <p:txBody>
-          <a:bodyPr wrap="square" lIns="0" tIns="0" rIns="0" bIns="0" rtlCol="0" anchor="t"/>
-          <a:lstStyle/>
-          <a:p>
-            <a:pPr algn="l" indent="0" marL="0">
-              <a:buNone/>
-            </a:pPr>
-            <a:r>
-              <a:rPr lang="en-US" sz="1400" dirty="0">
-                <a:solidFill>
-                  <a:srgbClr val="333333"/>
-                </a:solidFill>
-                <a:latin typeface="Times New Roman" pitchFamily="34" charset="0"/>
-                <a:ea typeface="Times New Roman" pitchFamily="34" charset="-122"/>
-                <a:cs typeface="Times New Roman" pitchFamily="34" charset="-120"/>
-              </a:rPr>
-              <a:t>→</a:t>
-            </a:r>
-            <a:endParaRPr lang="en-US" sz="1400" dirty="0"/>
-          </a:p>
-        </p:txBody>
-      </p:sp>
-      <p:sp>
-        <p:nvSpPr>
-          <p:cNvPr id="10" name="Text 8"/>
-          <p:cNvSpPr/>
-          <p:nvPr/>
-        </p:nvSpPr>
-        <p:spPr>
-          <a:xfrm>
-            <a:off x="4274344" y="987177"/>
-            <a:ext cx="607219" cy="104775"/>
-          </a:xfrm>
-          <a:prstGeom prst="rect">
-            <a:avLst/>
-          </a:prstGeom>
-          <a:noFill/>
-          <a:ln/>
-        </p:spPr>
-        <p:txBody>
-          <a:bodyPr wrap="square" lIns="0" tIns="0" rIns="0" bIns="0" rtlCol="0" anchor="t"/>
-          <a:lstStyle/>
-          <a:p>
-            <a:pPr algn="l" indent="0" marL="0">
-              <a:buNone/>
-            </a:pPr>
-            <a:r>
-              <a:rPr lang="en-US" sz="750" i="1" dirty="0">
-                <a:solidFill>
-                  <a:srgbClr val="888888"/>
-                </a:solidFill>
-                <a:latin typeface="Times New Roman" pitchFamily="34" charset="0"/>
-                <a:ea typeface="Times New Roman" pitchFamily="34" charset="-122"/>
-                <a:cs typeface="Times New Roman" pitchFamily="34" charset="-120"/>
-              </a:rPr>
-              <a:t>Scheduling unit</a:t>
-            </a:r>
-            <a:endParaRPr lang="en-US" sz="750" dirty="0"/>
-          </a:p>
-        </p:txBody>
-      </p:sp>
-      <p:sp>
-        <p:nvSpPr>
-          <p:cNvPr id="11" name="Text 9"/>
-          <p:cNvSpPr/>
-          <p:nvPr/>
-        </p:nvSpPr>
-        <p:spPr>
-          <a:xfrm>
-            <a:off x="5355580" y="768102"/>
-            <a:ext cx="3407420" cy="333375"/>
-          </a:xfrm>
-          <a:prstGeom prst="rect">
-            <a:avLst/>
-          </a:prstGeom>
-          <a:solidFill>
-            <a:srgbClr val="F5F5F5"/>
-          </a:solidFill>
-          <a:ln w="9525">
-            <a:solidFill>
-              <a:srgbClr val="666666"/>
-            </a:solidFill>
-          </a:ln>
-        </p:spPr>
-        <p:txBody>
-          <a:bodyPr wrap="square" rtlCol="0" anchor="ctr"/>
-          <a:lstStyle/>
-          <a:p>
-            <a:pPr indent="0" marL="0">
-              <a:buNone/>
-            </a:pPr>
-            <a:endParaRPr lang="en-US" dirty="0"/>
-          </a:p>
-        </p:txBody>
-      </p:sp>
-      <p:sp>
-        <p:nvSpPr>
-          <p:cNvPr id="12" name="Text 10"/>
-          <p:cNvSpPr/>
-          <p:nvPr/>
-        </p:nvSpPr>
-        <p:spPr>
-          <a:xfrm>
-            <a:off x="6508403" y="853827"/>
-            <a:ext cx="1123658" cy="161925"/>
-          </a:xfrm>
-          <a:prstGeom prst="rect">
-            <a:avLst/>
-          </a:prstGeom>
-          <a:noFill/>
-          <a:ln/>
-        </p:spPr>
-        <p:txBody>
-          <a:bodyPr wrap="square" lIns="0" tIns="0" rIns="0" bIns="0" rtlCol="0" anchor="t"/>
-          <a:lstStyle/>
-          <a:p>
-            <a:pPr algn="l" indent="0" marL="0">
-              <a:buNone/>
-            </a:pPr>
-            <a:r>
-              <a:rPr lang="en-US" sz="1100" b="1" dirty="0">
-                <a:solidFill>
-                  <a:srgbClr val="333333"/>
-                </a:solidFill>
-                <a:latin typeface="Times New Roman" pitchFamily="34" charset="0"/>
-                <a:ea typeface="Times New Roman" pitchFamily="34" charset="-122"/>
-                <a:cs typeface="Times New Roman" pitchFamily="34" charset="-120"/>
-              </a:rPr>
-              <a:t>LLM API Request</a:t>
-            </a:r>
-            <a:endParaRPr lang="en-US" sz="1100" dirty="0"/>
-          </a:p>
-        </p:txBody>
-      </p:sp>
-      <p:sp>
-        <p:nvSpPr>
-          <p:cNvPr id="13" name="Text 11"/>
-          <p:cNvSpPr/>
-          <p:nvPr/>
-        </p:nvSpPr>
-        <p:spPr>
-          <a:xfrm>
-            <a:off x="381000" y="1177677"/>
-            <a:ext cx="3407420" cy="333375"/>
+                <a:latin typeface="Malgun Gothic" pitchFamily="34" charset="0"/>
+                <a:ea typeface="Malgun Gothic" pitchFamily="34" charset="-122"/>
+                <a:cs typeface="Malgun Gothic" pitchFamily="34" charset="-120"/>
+              </a:rPr>
+              <a:t>FCFS</a:t>
+            </a:r>
+            <a:endParaRPr lang="en-US" sz="900" dirty="0"/>
+          </a:p>
+        </p:txBody>
+      </p:sp>
+      <p:sp>
+        <p:nvSpPr>
+          <p:cNvPr id="19" name="Text 17"/>
+          <p:cNvSpPr/>
+          <p:nvPr/>
+        </p:nvSpPr>
+        <p:spPr>
+          <a:xfrm>
+            <a:off x="3841700" y="2063353"/>
+            <a:ext cx="673150" cy="228600"/>
           </a:xfrm>
           <a:prstGeom prst="rect">
             <a:avLst/>
@@ -3873,14 +3792,14 @@
       </p:sp>
       <p:sp>
         <p:nvSpPr>
-          <p:cNvPr id="14" name="Text 12"/>
-          <p:cNvSpPr/>
-          <p:nvPr/>
-        </p:nvSpPr>
-        <p:spPr>
-          <a:xfrm>
-            <a:off x="1771055" y="1263402"/>
-            <a:ext cx="639705" cy="161925"/>
+          <p:cNvPr id="20" name="Text 18"/>
+          <p:cNvSpPr/>
+          <p:nvPr/>
+        </p:nvSpPr>
+        <p:spPr>
+          <a:xfrm>
+            <a:off x="3978176" y="2110978"/>
+            <a:ext cx="408203" cy="133350"/>
           </a:xfrm>
           <a:prstGeom prst="rect">
             <a:avLst/>
@@ -3896,181 +3815,30 @@
               <a:buNone/>
             </a:pPr>
             <a:r>
-              <a:rPr lang="en-US" sz="1100" b="1" dirty="0">
+              <a:rPr lang="en-US" sz="900" b="1" dirty="0">
                 <a:solidFill>
                   <a:srgbClr val="333333"/>
                 </a:solidFill>
-                <a:latin typeface="Times New Roman" pitchFamily="34" charset="0"/>
-                <a:ea typeface="Times New Roman" pitchFamily="34" charset="-122"/>
-                <a:cs typeface="Times New Roman" pitchFamily="34" charset="-120"/>
-              </a:rPr>
-              <a:t>CPU Time</a:t>
-            </a:r>
-            <a:endParaRPr lang="en-US" sz="1100" dirty="0"/>
-          </a:p>
-        </p:txBody>
-      </p:sp>
-      <p:sp>
-        <p:nvSpPr>
-          <p:cNvPr id="15" name="Text 13"/>
-          <p:cNvSpPr/>
-          <p:nvPr/>
-        </p:nvSpPr>
-        <p:spPr>
-          <a:xfrm>
-            <a:off x="4483001" y="1187202"/>
-            <a:ext cx="181407" cy="209550"/>
-          </a:xfrm>
-          <a:prstGeom prst="rect">
-            <a:avLst/>
-          </a:prstGeom>
-          <a:noFill/>
-          <a:ln/>
-        </p:spPr>
-        <p:txBody>
-          <a:bodyPr wrap="square" lIns="0" tIns="0" rIns="0" bIns="0" rtlCol="0" anchor="t"/>
-          <a:lstStyle/>
-          <a:p>
-            <a:pPr algn="l" indent="0" marL="0">
-              <a:buNone/>
-            </a:pPr>
-            <a:r>
-              <a:rPr lang="en-US" sz="1400" dirty="0">
-                <a:solidFill>
-                  <a:srgbClr val="333333"/>
-                </a:solidFill>
-                <a:latin typeface="Times New Roman" pitchFamily="34" charset="0"/>
-                <a:ea typeface="Times New Roman" pitchFamily="34" charset="-122"/>
-                <a:cs typeface="Times New Roman" pitchFamily="34" charset="-120"/>
-              </a:rPr>
-              <a:t>→</a:t>
-            </a:r>
-            <a:endParaRPr lang="en-US" sz="1400" dirty="0"/>
-          </a:p>
-        </p:txBody>
-      </p:sp>
-      <p:sp>
-        <p:nvSpPr>
-          <p:cNvPr id="16" name="Text 14"/>
-          <p:cNvSpPr/>
-          <p:nvPr/>
-        </p:nvSpPr>
-        <p:spPr>
-          <a:xfrm>
-            <a:off x="4214366" y="1396752"/>
-            <a:ext cx="729422" cy="104775"/>
-          </a:xfrm>
-          <a:prstGeom prst="rect">
-            <a:avLst/>
-          </a:prstGeom>
-          <a:noFill/>
-          <a:ln/>
-        </p:spPr>
-        <p:txBody>
-          <a:bodyPr wrap="square" lIns="0" tIns="0" rIns="0" bIns="0" rtlCol="0" anchor="t"/>
-          <a:lstStyle/>
-          <a:p>
-            <a:pPr algn="l" indent="0" marL="0">
-              <a:buNone/>
-            </a:pPr>
-            <a:r>
-              <a:rPr lang="en-US" sz="750" i="1" dirty="0">
-                <a:solidFill>
-                  <a:srgbClr val="888888"/>
-                </a:solidFill>
-                <a:latin typeface="Times New Roman" pitchFamily="34" charset="0"/>
-                <a:ea typeface="Times New Roman" pitchFamily="34" charset="-122"/>
-                <a:cs typeface="Times New Roman" pitchFamily="34" charset="-120"/>
-              </a:rPr>
-              <a:t>Allocated resource</a:t>
-            </a:r>
-            <a:endParaRPr lang="en-US" sz="750" dirty="0"/>
-          </a:p>
-        </p:txBody>
-      </p:sp>
-      <p:sp>
-        <p:nvSpPr>
-          <p:cNvPr id="17" name="Text 15"/>
-          <p:cNvSpPr/>
-          <p:nvPr/>
-        </p:nvSpPr>
-        <p:spPr>
-          <a:xfrm>
-            <a:off x="5355580" y="1177677"/>
-            <a:ext cx="3407420" cy="333375"/>
-          </a:xfrm>
-          <a:prstGeom prst="rect">
-            <a:avLst/>
-          </a:prstGeom>
-          <a:solidFill>
-            <a:srgbClr val="F5F5F5"/>
-          </a:solidFill>
-          <a:ln w="9525">
-            <a:solidFill>
-              <a:srgbClr val="666666"/>
-            </a:solidFill>
-          </a:ln>
-        </p:spPr>
-        <p:txBody>
-          <a:bodyPr wrap="square" rtlCol="0" anchor="ctr"/>
-          <a:lstStyle/>
-          <a:p>
-            <a:pPr indent="0" marL="0">
-              <a:buNone/>
-            </a:pPr>
-            <a:endParaRPr lang="en-US" dirty="0"/>
-          </a:p>
-        </p:txBody>
-      </p:sp>
-      <p:sp>
-        <p:nvSpPr>
-          <p:cNvPr id="18" name="Text 16"/>
-          <p:cNvSpPr/>
-          <p:nvPr/>
-        </p:nvSpPr>
-        <p:spPr>
-          <a:xfrm>
-            <a:off x="6593681" y="1263402"/>
-            <a:ext cx="949690" cy="161925"/>
-          </a:xfrm>
-          <a:prstGeom prst="rect">
-            <a:avLst/>
-          </a:prstGeom>
-          <a:noFill/>
-          <a:ln/>
-        </p:spPr>
-        <p:txBody>
-          <a:bodyPr wrap="square" lIns="0" tIns="0" rIns="0" bIns="0" rtlCol="0" anchor="t"/>
-          <a:lstStyle/>
-          <a:p>
-            <a:pPr algn="l" indent="0" marL="0">
-              <a:buNone/>
-            </a:pPr>
-            <a:r>
-              <a:rPr lang="en-US" sz="1100" b="1" dirty="0">
-                <a:solidFill>
-                  <a:srgbClr val="333333"/>
-                </a:solidFill>
-                <a:latin typeface="Times New Roman" pitchFamily="34" charset="0"/>
-                <a:ea typeface="Times New Roman" pitchFamily="34" charset="-122"/>
-                <a:cs typeface="Times New Roman" pitchFamily="34" charset="-120"/>
-              </a:rPr>
-              <a:t>API Call Quota</a:t>
-            </a:r>
-            <a:endParaRPr lang="en-US" sz="1100" dirty="0"/>
-          </a:p>
-        </p:txBody>
-      </p:sp>
-      <p:sp>
-        <p:nvSpPr>
-          <p:cNvPr id="19" name="Text 17"/>
-          <p:cNvSpPr/>
-          <p:nvPr/>
-        </p:nvSpPr>
-        <p:spPr>
-          <a:xfrm>
-            <a:off x="381000" y="1587252"/>
-            <a:ext cx="3407420" cy="333375"/>
+                <a:latin typeface="Malgun Gothic" pitchFamily="34" charset="0"/>
+                <a:ea typeface="Malgun Gothic" pitchFamily="34" charset="-122"/>
+                <a:cs typeface="Malgun Gothic" pitchFamily="34" charset="-120"/>
+              </a:rPr>
+              <a:t>Priority</a:t>
+            </a:r>
+            <a:endParaRPr lang="en-US" sz="900" dirty="0"/>
+          </a:p>
+        </p:txBody>
+      </p:sp>
+      <p:sp>
+        <p:nvSpPr>
+          <p:cNvPr id="21" name="Text 19"/>
+          <p:cNvSpPr/>
+          <p:nvPr/>
+        </p:nvSpPr>
+        <p:spPr>
+          <a:xfrm>
+            <a:off x="4591050" y="2063353"/>
+            <a:ext cx="596801" cy="228600"/>
           </a:xfrm>
           <a:prstGeom prst="rect">
             <a:avLst/>
@@ -4095,14 +3863,14 @@
       </p:sp>
       <p:sp>
         <p:nvSpPr>
-          <p:cNvPr id="20" name="Text 18"/>
-          <p:cNvSpPr/>
-          <p:nvPr/>
-        </p:nvSpPr>
-        <p:spPr>
-          <a:xfrm>
-            <a:off x="1848148" y="1672977"/>
-            <a:ext cx="482587" cy="161925"/>
+          <p:cNvPr id="22" name="Text 20"/>
+          <p:cNvSpPr/>
+          <p:nvPr/>
+        </p:nvSpPr>
+        <p:spPr>
+          <a:xfrm>
+            <a:off x="4727525" y="2110978"/>
+            <a:ext cx="330327" cy="133350"/>
           </a:xfrm>
           <a:prstGeom prst="rect">
             <a:avLst/>
@@ -4118,95 +3886,17 @@
               <a:buNone/>
             </a:pPr>
             <a:r>
-              <a:rPr lang="en-US" sz="1100" b="1" dirty="0">
+              <a:rPr lang="en-US" sz="900" b="1" dirty="0">
                 <a:solidFill>
                   <a:srgbClr val="333333"/>
                 </a:solidFill>
-                <a:latin typeface="Times New Roman" pitchFamily="34" charset="0"/>
-                <a:ea typeface="Times New Roman" pitchFamily="34" charset="-122"/>
-                <a:cs typeface="Times New Roman" pitchFamily="34" charset="-120"/>
-              </a:rPr>
-              <a:t>Priority</a:t>
-            </a:r>
-            <a:endParaRPr lang="en-US" sz="1100" dirty="0"/>
-          </a:p>
-        </p:txBody>
-      </p:sp>
-      <p:sp>
-        <p:nvSpPr>
-          <p:cNvPr id="21" name="Text 19"/>
-          <p:cNvSpPr/>
-          <p:nvPr/>
-        </p:nvSpPr>
-        <p:spPr>
-          <a:xfrm>
-            <a:off x="4483001" y="1596777"/>
-            <a:ext cx="181407" cy="209550"/>
-          </a:xfrm>
-          <a:prstGeom prst="rect">
-            <a:avLst/>
-          </a:prstGeom>
-          <a:noFill/>
-          <a:ln/>
-        </p:spPr>
-        <p:txBody>
-          <a:bodyPr wrap="square" lIns="0" tIns="0" rIns="0" bIns="0" rtlCol="0" anchor="t"/>
-          <a:lstStyle/>
-          <a:p>
-            <a:pPr algn="l" indent="0" marL="0">
-              <a:buNone/>
-            </a:pPr>
-            <a:r>
-              <a:rPr lang="en-US" sz="1400" dirty="0">
-                <a:solidFill>
-                  <a:srgbClr val="333333"/>
-                </a:solidFill>
-                <a:latin typeface="Times New Roman" pitchFamily="34" charset="0"/>
-                <a:ea typeface="Times New Roman" pitchFamily="34" charset="-122"/>
-                <a:cs typeface="Times New Roman" pitchFamily="34" charset="-120"/>
-              </a:rPr>
-              <a:t>→</a:t>
-            </a:r>
-            <a:endParaRPr lang="en-US" sz="1400" dirty="0"/>
-          </a:p>
-        </p:txBody>
-      </p:sp>
-      <p:sp>
-        <p:nvSpPr>
-          <p:cNvPr id="22" name="Text 20"/>
-          <p:cNvSpPr/>
-          <p:nvPr/>
-        </p:nvSpPr>
-        <p:spPr>
-          <a:xfrm>
-            <a:off x="4217789" y="1806327"/>
-            <a:ext cx="722439" cy="104775"/>
-          </a:xfrm>
-          <a:prstGeom prst="rect">
-            <a:avLst/>
-          </a:prstGeom>
-          <a:noFill/>
-          <a:ln/>
-        </p:spPr>
-        <p:txBody>
-          <a:bodyPr wrap="square" lIns="0" tIns="0" rIns="0" bIns="0" rtlCol="0" anchor="t"/>
-          <a:lstStyle/>
-          <a:p>
-            <a:pPr algn="l" indent="0" marL="0">
-              <a:buNone/>
-            </a:pPr>
-            <a:r>
-              <a:rPr lang="en-US" sz="750" i="1" dirty="0">
-                <a:solidFill>
-                  <a:srgbClr val="888888"/>
-                </a:solidFill>
-                <a:latin typeface="Times New Roman" pitchFamily="34" charset="0"/>
-                <a:ea typeface="Times New Roman" pitchFamily="34" charset="-122"/>
-                <a:cs typeface="Times New Roman" pitchFamily="34" charset="-120"/>
-              </a:rPr>
-              <a:t>Ordering criterion</a:t>
-            </a:r>
-            <a:endParaRPr lang="en-US" sz="750" dirty="0"/>
+                <a:latin typeface="Malgun Gothic" pitchFamily="34" charset="0"/>
+                <a:ea typeface="Malgun Gothic" pitchFamily="34" charset="-122"/>
+                <a:cs typeface="Malgun Gothic" pitchFamily="34" charset="-120"/>
+              </a:rPr>
+              <a:t>MLFQ</a:t>
+            </a:r>
+            <a:endParaRPr lang="en-US" sz="900" dirty="0"/>
           </a:p>
         </p:txBody>
       </p:sp>
@@ -4218,81 +3908,8 @@
         </p:nvSpPr>
         <p:spPr>
           <a:xfrm>
-            <a:off x="5355580" y="1587252"/>
-            <a:ext cx="3407420" cy="333375"/>
-          </a:xfrm>
-          <a:prstGeom prst="rect">
-            <a:avLst/>
-          </a:prstGeom>
-          <a:solidFill>
-            <a:srgbClr val="F5F5F5"/>
-          </a:solidFill>
-          <a:ln w="9525">
-            <a:solidFill>
-              <a:srgbClr val="666666"/>
-            </a:solidFill>
-          </a:ln>
-        </p:spPr>
-        <p:txBody>
-          <a:bodyPr wrap="square" rtlCol="0" anchor="ctr"/>
-          <a:lstStyle/>
-          <a:p>
-            <a:pPr indent="0" marL="0">
-              <a:buNone/>
-            </a:pPr>
-            <a:endParaRPr lang="en-US" dirty="0"/>
-          </a:p>
-        </p:txBody>
-      </p:sp>
-      <p:sp>
-        <p:nvSpPr>
-          <p:cNvPr id="24" name="Text 22"/>
-          <p:cNvSpPr/>
-          <p:nvPr/>
-        </p:nvSpPr>
-        <p:spPr>
-          <a:xfrm>
-            <a:off x="6338441" y="1672977"/>
-            <a:ext cx="1470532" cy="161925"/>
-          </a:xfrm>
-          <a:prstGeom prst="rect">
-            <a:avLst/>
-          </a:prstGeom>
-          <a:noFill/>
-          <a:ln/>
-        </p:spPr>
-        <p:txBody>
-          <a:bodyPr wrap="square" lIns="0" tIns="0" rIns="0" bIns="0" rtlCol="0" anchor="t"/>
-          <a:lstStyle/>
-          <a:p>
-            <a:pPr algn="l" indent="0" marL="0">
-              <a:buNone/>
-            </a:pPr>
-            <a:r>
-              <a:rPr lang="en-US" sz="1100" b="1" dirty="0">
-                <a:solidFill>
-                  <a:srgbClr val="333333"/>
-                </a:solidFill>
-                <a:latin typeface="Times New Roman" pitchFamily="34" charset="0"/>
-                <a:ea typeface="Times New Roman" pitchFamily="34" charset="-122"/>
-                <a:cs typeface="Times New Roman" pitchFamily="34" charset="-120"/>
-              </a:rPr>
-              <a:t>Tenant Grade / Urgency</a:t>
-            </a:r>
-            <a:endParaRPr lang="en-US" sz="1100" dirty="0"/>
-          </a:p>
-        </p:txBody>
-      </p:sp>
-      <p:sp>
-        <p:nvSpPr>
-          <p:cNvPr id="25" name="Text 23"/>
-          <p:cNvSpPr/>
-          <p:nvPr/>
-        </p:nvSpPr>
-        <p:spPr>
-          <a:xfrm>
-            <a:off x="381000" y="1996827"/>
-            <a:ext cx="3407420" cy="333375"/>
+            <a:off x="5264051" y="2063353"/>
+            <a:ext cx="539651" cy="228600"/>
           </a:xfrm>
           <a:prstGeom prst="rect">
             <a:avLst/>
@@ -4317,14 +3934,14 @@
       </p:sp>
       <p:sp>
         <p:nvSpPr>
-          <p:cNvPr id="26" name="Text 24"/>
-          <p:cNvSpPr/>
-          <p:nvPr/>
-        </p:nvSpPr>
-        <p:spPr>
-          <a:xfrm>
-            <a:off x="1430982" y="2082552"/>
-            <a:ext cx="1333604" cy="161925"/>
+          <p:cNvPr id="24" name="Text 22"/>
+          <p:cNvSpPr/>
+          <p:nvPr/>
+        </p:nvSpPr>
+        <p:spPr>
+          <a:xfrm>
+            <a:off x="5400526" y="2110978"/>
+            <a:ext cx="272034" cy="133350"/>
           </a:xfrm>
           <a:prstGeom prst="rect">
             <a:avLst/>
@@ -4340,181 +3957,30 @@
               <a:buNone/>
             </a:pPr>
             <a:r>
-              <a:rPr lang="en-US" sz="1100" b="1" dirty="0">
+              <a:rPr lang="en-US" sz="900" b="1" dirty="0">
                 <a:solidFill>
                   <a:srgbClr val="333333"/>
                 </a:solidFill>
-                <a:latin typeface="Times New Roman" pitchFamily="34" charset="0"/>
-                <a:ea typeface="Times New Roman" pitchFamily="34" charset="-122"/>
-                <a:cs typeface="Times New Roman" pitchFamily="34" charset="-120"/>
-              </a:rPr>
-              <a:t>Scheduling Algorithm</a:t>
-            </a:r>
-            <a:endParaRPr lang="en-US" sz="1100" dirty="0"/>
-          </a:p>
-        </p:txBody>
-      </p:sp>
-      <p:sp>
-        <p:nvSpPr>
-          <p:cNvPr id="27" name="Text 25"/>
-          <p:cNvSpPr/>
-          <p:nvPr/>
-        </p:nvSpPr>
-        <p:spPr>
-          <a:xfrm>
-            <a:off x="4483001" y="2006352"/>
-            <a:ext cx="181407" cy="209550"/>
-          </a:xfrm>
-          <a:prstGeom prst="rect">
-            <a:avLst/>
-          </a:prstGeom>
-          <a:noFill/>
-          <a:ln/>
-        </p:spPr>
-        <p:txBody>
-          <a:bodyPr wrap="square" lIns="0" tIns="0" rIns="0" bIns="0" rtlCol="0" anchor="t"/>
-          <a:lstStyle/>
-          <a:p>
-            <a:pPr algn="l" indent="0" marL="0">
-              <a:buNone/>
-            </a:pPr>
-            <a:r>
-              <a:rPr lang="en-US" sz="1400" dirty="0">
-                <a:solidFill>
-                  <a:srgbClr val="333333"/>
-                </a:solidFill>
-                <a:latin typeface="Times New Roman" pitchFamily="34" charset="0"/>
-                <a:ea typeface="Times New Roman" pitchFamily="34" charset="-122"/>
-                <a:cs typeface="Times New Roman" pitchFamily="34" charset="-120"/>
-              </a:rPr>
-              <a:t>→</a:t>
-            </a:r>
-            <a:endParaRPr lang="en-US" sz="1400" dirty="0"/>
-          </a:p>
-        </p:txBody>
-      </p:sp>
-      <p:sp>
-        <p:nvSpPr>
-          <p:cNvPr id="28" name="Text 26"/>
-          <p:cNvSpPr/>
-          <p:nvPr/>
-        </p:nvSpPr>
-        <p:spPr>
-          <a:xfrm>
-            <a:off x="4271665" y="2215902"/>
-            <a:ext cx="612532" cy="104775"/>
-          </a:xfrm>
-          <a:prstGeom prst="rect">
-            <a:avLst/>
-          </a:prstGeom>
-          <a:noFill/>
-          <a:ln/>
-        </p:spPr>
-        <p:txBody>
-          <a:bodyPr wrap="square" lIns="0" tIns="0" rIns="0" bIns="0" rtlCol="0" anchor="t"/>
-          <a:lstStyle/>
-          <a:p>
-            <a:pPr algn="l" indent="0" marL="0">
-              <a:buNone/>
-            </a:pPr>
-            <a:r>
-              <a:rPr lang="en-US" sz="750" i="1" dirty="0">
-                <a:solidFill>
-                  <a:srgbClr val="888888"/>
-                </a:solidFill>
-                <a:latin typeface="Times New Roman" pitchFamily="34" charset="0"/>
-                <a:ea typeface="Times New Roman" pitchFamily="34" charset="-122"/>
-                <a:cs typeface="Times New Roman" pitchFamily="34" charset="-120"/>
-              </a:rPr>
-              <a:t>Dispatch policy</a:t>
-            </a:r>
-            <a:endParaRPr lang="en-US" sz="750" dirty="0"/>
-          </a:p>
-        </p:txBody>
-      </p:sp>
-      <p:sp>
-        <p:nvSpPr>
-          <p:cNvPr id="29" name="Text 27"/>
-          <p:cNvSpPr/>
-          <p:nvPr/>
-        </p:nvSpPr>
-        <p:spPr>
-          <a:xfrm>
-            <a:off x="5355580" y="1996827"/>
-            <a:ext cx="3407420" cy="333375"/>
-          </a:xfrm>
-          <a:prstGeom prst="rect">
-            <a:avLst/>
-          </a:prstGeom>
-          <a:solidFill>
-            <a:srgbClr val="F5F5F5"/>
-          </a:solidFill>
-          <a:ln w="9525">
-            <a:solidFill>
-              <a:srgbClr val="666666"/>
-            </a:solidFill>
-          </a:ln>
-        </p:spPr>
-        <p:txBody>
-          <a:bodyPr wrap="square" rtlCol="0" anchor="ctr"/>
-          <a:lstStyle/>
-          <a:p>
-            <a:pPr indent="0" marL="0">
-              <a:buNone/>
-            </a:pPr>
-            <a:endParaRPr lang="en-US" dirty="0"/>
-          </a:p>
-        </p:txBody>
-      </p:sp>
-      <p:sp>
-        <p:nvSpPr>
-          <p:cNvPr id="30" name="Text 28"/>
-          <p:cNvSpPr/>
-          <p:nvPr/>
-        </p:nvSpPr>
-        <p:spPr>
-          <a:xfrm>
-            <a:off x="6280993" y="2082552"/>
-            <a:ext cx="1587725" cy="161925"/>
-          </a:xfrm>
-          <a:prstGeom prst="rect">
-            <a:avLst/>
-          </a:prstGeom>
-          <a:noFill/>
-          <a:ln/>
-        </p:spPr>
-        <p:txBody>
-          <a:bodyPr wrap="square" lIns="0" tIns="0" rIns="0" bIns="0" rtlCol="0" anchor="t"/>
-          <a:lstStyle/>
-          <a:p>
-            <a:pPr algn="l" indent="0" marL="0">
-              <a:buNone/>
-            </a:pPr>
-            <a:r>
-              <a:rPr lang="en-US" sz="1100" b="1" dirty="0">
-                <a:solidFill>
-                  <a:srgbClr val="333333"/>
-                </a:solidFill>
-                <a:latin typeface="Times New Roman" pitchFamily="34" charset="0"/>
-                <a:ea typeface="Times New Roman" pitchFamily="34" charset="-122"/>
-                <a:cs typeface="Times New Roman" pitchFamily="34" charset="-120"/>
-              </a:rPr>
-              <a:t>Request Processing Order</a:t>
-            </a:r>
-            <a:endParaRPr lang="en-US" sz="1100" dirty="0"/>
-          </a:p>
-        </p:txBody>
-      </p:sp>
-      <p:sp>
-        <p:nvSpPr>
-          <p:cNvPr id="31" name="Text 29"/>
-          <p:cNvSpPr/>
-          <p:nvPr/>
-        </p:nvSpPr>
-        <p:spPr>
-          <a:xfrm>
-            <a:off x="381000" y="2406402"/>
-            <a:ext cx="3407420" cy="333375"/>
+                <a:latin typeface="Malgun Gothic" pitchFamily="34" charset="0"/>
+                <a:ea typeface="Malgun Gothic" pitchFamily="34" charset="-122"/>
+                <a:cs typeface="Malgun Gothic" pitchFamily="34" charset="-120"/>
+              </a:rPr>
+              <a:t>WFQ</a:t>
+            </a:r>
+            <a:endParaRPr lang="en-US" sz="900" dirty="0"/>
+          </a:p>
+        </p:txBody>
+      </p:sp>
+      <p:sp>
+        <p:nvSpPr>
+          <p:cNvPr id="25" name="Text 23"/>
+          <p:cNvSpPr/>
+          <p:nvPr/>
+        </p:nvSpPr>
+        <p:spPr>
+          <a:xfrm>
+            <a:off x="5879902" y="2063353"/>
+            <a:ext cx="933599" cy="228600"/>
           </a:xfrm>
           <a:prstGeom prst="rect">
             <a:avLst/>
@@ -4539,14 +4005,14 @@
       </p:sp>
       <p:sp>
         <p:nvSpPr>
-          <p:cNvPr id="32" name="Text 30"/>
-          <p:cNvSpPr/>
-          <p:nvPr/>
-        </p:nvSpPr>
-        <p:spPr>
-          <a:xfrm>
-            <a:off x="1736973" y="2492127"/>
-            <a:ext cx="709383" cy="161925"/>
+          <p:cNvPr id="26" name="Text 24"/>
+          <p:cNvSpPr/>
+          <p:nvPr/>
+        </p:nvSpPr>
+        <p:spPr>
+          <a:xfrm>
+            <a:off x="6016377" y="2110978"/>
+            <a:ext cx="673861" cy="133350"/>
           </a:xfrm>
           <a:prstGeom prst="rect">
             <a:avLst/>
@@ -4562,30 +4028,30 @@
               <a:buNone/>
             </a:pPr>
             <a:r>
-              <a:rPr lang="en-US" sz="1100" b="1" dirty="0">
+              <a:rPr lang="en-US" sz="900" b="1" dirty="0">
                 <a:solidFill>
                   <a:srgbClr val="333333"/>
                 </a:solidFill>
-                <a:latin typeface="Times New Roman" pitchFamily="34" charset="0"/>
-                <a:ea typeface="Times New Roman" pitchFamily="34" charset="-122"/>
-                <a:cs typeface="Times New Roman" pitchFamily="34" charset="-120"/>
-              </a:rPr>
-              <a:t>Preemption</a:t>
-            </a:r>
-            <a:endParaRPr lang="en-US" sz="1100" dirty="0"/>
-          </a:p>
-        </p:txBody>
-      </p:sp>
-      <p:sp>
-        <p:nvSpPr>
-          <p:cNvPr id="33" name="Text 31"/>
-          <p:cNvSpPr/>
-          <p:nvPr/>
-        </p:nvSpPr>
-        <p:spPr>
-          <a:xfrm>
-            <a:off x="4483001" y="2415927"/>
-            <a:ext cx="181407" cy="209550"/>
+                <a:latin typeface="Malgun Gothic" pitchFamily="34" charset="0"/>
+                <a:ea typeface="Malgun Gothic" pitchFamily="34" charset="-122"/>
+                <a:cs typeface="Malgun Gothic" pitchFamily="34" charset="-120"/>
+              </a:rPr>
+              <a:t>Rate Limiter</a:t>
+            </a:r>
+            <a:endParaRPr lang="en-US" sz="900" dirty="0"/>
+          </a:p>
+        </p:txBody>
+      </p:sp>
+      <p:sp>
+        <p:nvSpPr>
+          <p:cNvPr id="27" name="Text 25"/>
+          <p:cNvSpPr/>
+          <p:nvPr/>
+        </p:nvSpPr>
+        <p:spPr>
+          <a:xfrm>
+            <a:off x="3194000" y="2368153"/>
+            <a:ext cx="1657100" cy="123825"/>
           </a:xfrm>
           <a:prstGeom prst="rect">
             <a:avLst/>
@@ -4601,30 +4067,30 @@
               <a:buNone/>
             </a:pPr>
             <a:r>
-              <a:rPr lang="en-US" sz="1400" dirty="0">
-                <a:solidFill>
-                  <a:srgbClr val="333333"/>
-                </a:solidFill>
-                <a:latin typeface="Times New Roman" pitchFamily="34" charset="0"/>
-                <a:ea typeface="Times New Roman" pitchFamily="34" charset="-122"/>
-                <a:cs typeface="Times New Roman" pitchFamily="34" charset="-120"/>
-              </a:rPr>
-              <a:t>→</a:t>
-            </a:r>
-            <a:endParaRPr lang="en-US" sz="1400" dirty="0"/>
-          </a:p>
-        </p:txBody>
-      </p:sp>
-      <p:sp>
-        <p:nvSpPr>
-          <p:cNvPr id="34" name="Text 32"/>
-          <p:cNvSpPr/>
-          <p:nvPr/>
-        </p:nvSpPr>
-        <p:spPr>
-          <a:xfrm>
-            <a:off x="4199334" y="2625477"/>
-            <a:ext cx="760238" cy="104775"/>
+              <a:rPr lang="en-US" sz="800" i="1" dirty="0">
+                <a:solidFill>
+                  <a:srgbClr val="666666"/>
+                </a:solidFill>
+                <a:latin typeface="Malgun Gothic" pitchFamily="34" charset="0"/>
+                <a:ea typeface="Malgun Gothic" pitchFamily="34" charset="-122"/>
+                <a:cs typeface="Malgun Gothic" pitchFamily="34" charset="-120"/>
+              </a:rPr>
+              <a:t>기능: 에이징, 부스트, 이중 수준 JFI 측정</a:t>
+            </a:r>
+            <a:endParaRPr lang="en-US" sz="800" dirty="0"/>
+          </a:p>
+        </p:txBody>
+      </p:sp>
+      <p:sp>
+        <p:nvSpPr>
+          <p:cNvPr id="28" name="Text 26"/>
+          <p:cNvSpPr/>
+          <p:nvPr/>
+        </p:nvSpPr>
+        <p:spPr>
+          <a:xfrm>
+            <a:off x="4497288" y="2688729"/>
+            <a:ext cx="152412" cy="180975"/>
           </a:xfrm>
           <a:prstGeom prst="rect">
             <a:avLst/>
@@ -4640,40 +4106,38 @@
               <a:buNone/>
             </a:pPr>
             <a:r>
-              <a:rPr lang="en-US" sz="750" i="1" dirty="0">
+              <a:rPr lang="en-US" sz="1200" dirty="0">
                 <a:solidFill>
                   <a:srgbClr val="888888"/>
                 </a:solidFill>
-                <a:latin typeface="Times New Roman" pitchFamily="34" charset="0"/>
-                <a:ea typeface="Times New Roman" pitchFamily="34" charset="-122"/>
-                <a:cs typeface="Times New Roman" pitchFamily="34" charset="-120"/>
-              </a:rPr>
-              <a:t>Control mechanism</a:t>
-            </a:r>
-            <a:endParaRPr lang="en-US" sz="750" dirty="0"/>
-          </a:p>
-        </p:txBody>
-      </p:sp>
-      <p:sp>
-        <p:nvSpPr>
-          <p:cNvPr id="35" name="Text 33"/>
-          <p:cNvSpPr/>
-          <p:nvPr/>
-        </p:nvSpPr>
-        <p:spPr>
-          <a:xfrm>
-            <a:off x="5355580" y="2406402"/>
-            <a:ext cx="3407420" cy="333375"/>
-          </a:xfrm>
-          <a:prstGeom prst="rect">
-            <a:avLst/>
-          </a:prstGeom>
-          <a:solidFill>
-            <a:srgbClr val="F5F5F5"/>
-          </a:solidFill>
-          <a:ln w="9525">
+                <a:latin typeface="Malgun Gothic" pitchFamily="34" charset="0"/>
+                <a:ea typeface="Malgun Gothic" pitchFamily="34" charset="-122"/>
+                <a:cs typeface="Malgun Gothic" pitchFamily="34" charset="-120"/>
+              </a:rPr>
+              <a:t>▼</a:t>
+            </a:r>
+            <a:endParaRPr lang="en-US" sz="1200" dirty="0"/>
+          </a:p>
+        </p:txBody>
+      </p:sp>
+      <p:sp>
+        <p:nvSpPr>
+          <p:cNvPr id="29" name="Text 27"/>
+          <p:cNvSpPr/>
+          <p:nvPr/>
+        </p:nvSpPr>
+        <p:spPr>
+          <a:xfrm>
+            <a:off x="381000" y="2945904"/>
+            <a:ext cx="8382000" cy="453926"/>
+          </a:xfrm>
+          <a:prstGeom prst="rect">
+            <a:avLst/>
+          </a:prstGeom>
+          <a:noFill/>
+          <a:ln w="19050">
             <a:solidFill>
-              <a:srgbClr val="666666"/>
+              <a:srgbClr val="333333"/>
             </a:solidFill>
           </a:ln>
         </p:spPr>
@@ -4690,14 +4154,44 @@
       </p:sp>
       <p:sp>
         <p:nvSpPr>
-          <p:cNvPr id="36" name="Text 34"/>
-          <p:cNvSpPr/>
-          <p:nvPr/>
-        </p:nvSpPr>
-        <p:spPr>
-          <a:xfrm>
-            <a:off x="6035129" y="2492127"/>
-            <a:ext cx="2089288" cy="161925"/>
+          <p:cNvPr id="30" name="Text 28"/>
+          <p:cNvSpPr/>
+          <p:nvPr/>
+        </p:nvSpPr>
+        <p:spPr>
+          <a:xfrm>
+            <a:off x="400050" y="2964954"/>
+            <a:ext cx="2590800" cy="415826"/>
+          </a:xfrm>
+          <a:prstGeom prst="rect">
+            <a:avLst/>
+          </a:prstGeom>
+          <a:solidFill>
+            <a:srgbClr val="555555"/>
+          </a:solidFill>
+          <a:ln/>
+        </p:spPr>
+        <p:txBody>
+          <a:bodyPr wrap="square" rtlCol="0" anchor="ctr"/>
+          <a:lstStyle/>
+          <a:p>
+            <a:pPr indent="0" marL="0">
+              <a:buNone/>
+            </a:pPr>
+            <a:endParaRPr lang="en-US" dirty="0"/>
+          </a:p>
+        </p:txBody>
+      </p:sp>
+      <p:sp>
+        <p:nvSpPr>
+          <p:cNvPr id="31" name="Text 29"/>
+          <p:cNvSpPr/>
+          <p:nvPr/>
+        </p:nvSpPr>
+        <p:spPr>
+          <a:xfrm>
+            <a:off x="552450" y="3091904"/>
+            <a:ext cx="2331720" cy="161925"/>
           </a:xfrm>
           <a:prstGeom prst="rect">
             <a:avLst/>
@@ -4715,27 +4209,66 @@
             <a:r>
               <a:rPr lang="en-US" sz="1100" b="1" dirty="0">
                 <a:solidFill>
+                  <a:srgbClr val="FFFFFF"/>
+                </a:solidFill>
+                <a:latin typeface="Malgun Gothic" pitchFamily="34" charset="0"/>
+                <a:ea typeface="Malgun Gothic" pitchFamily="34" charset="-122"/>
+                <a:cs typeface="Malgun Gothic" pitchFamily="34" charset="-120"/>
+              </a:rPr>
+              <a:t>저장소 계층</a:t>
+            </a:r>
+            <a:endParaRPr lang="en-US" sz="1100" dirty="0"/>
+          </a:p>
+        </p:txBody>
+      </p:sp>
+      <p:sp>
+        <p:nvSpPr>
+          <p:cNvPr id="32" name="Text 30"/>
+          <p:cNvSpPr/>
+          <p:nvPr/>
+        </p:nvSpPr>
+        <p:spPr>
+          <a:xfrm>
+            <a:off x="3194000" y="3096667"/>
+            <a:ext cx="3154501" cy="152400"/>
+          </a:xfrm>
+          <a:prstGeom prst="rect">
+            <a:avLst/>
+          </a:prstGeom>
+          <a:noFill/>
+          <a:ln/>
+        </p:spPr>
+        <p:txBody>
+          <a:bodyPr wrap="square" lIns="0" tIns="0" rIns="0" bIns="0" rtlCol="0" anchor="t"/>
+          <a:lstStyle/>
+          <a:p>
+            <a:pPr algn="l" indent="0" marL="0">
+              <a:buNone/>
+            </a:pPr>
+            <a:r>
+              <a:rPr lang="en-US" sz="1000" dirty="0">
+                <a:solidFill>
                   <a:srgbClr val="333333"/>
                 </a:solidFill>
-                <a:latin typeface="Times New Roman" pitchFamily="34" charset="0"/>
-                <a:ea typeface="Times New Roman" pitchFamily="34" charset="-122"/>
-                <a:cs typeface="Times New Roman" pitchFamily="34" charset="-120"/>
-              </a:rPr>
-              <a:t>Request Suspension / Queue Move</a:t>
-            </a:r>
-            <a:endParaRPr lang="en-US" sz="1100" dirty="0"/>
-          </a:p>
-        </p:txBody>
-      </p:sp>
-      <p:sp>
-        <p:nvSpPr>
-          <p:cNvPr id="37" name="Shape 35"/>
-          <p:cNvSpPr/>
-          <p:nvPr/>
-        </p:nvSpPr>
-        <p:spPr>
-          <a:xfrm>
-            <a:off x="381000" y="4856262"/>
+                <a:latin typeface="Malgun Gothic" pitchFamily="34" charset="0"/>
+                <a:ea typeface="Malgun Gothic" pitchFamily="34" charset="-122"/>
+                <a:cs typeface="Malgun Gothic" pitchFamily="34" charset="-120"/>
+              </a:rPr>
+              <a:t>메모리 배열 (큐) · JSON 파일 (로그) · Ollama (LLM 백엔드)</a:t>
+            </a:r>
+            <a:endParaRPr lang="en-US" sz="1000" dirty="0"/>
+          </a:p>
+        </p:txBody>
+      </p:sp>
+      <p:sp>
+        <p:nvSpPr>
+          <p:cNvPr id="33" name="Shape 31"/>
+          <p:cNvSpPr/>
+          <p:nvPr/>
+        </p:nvSpPr>
+        <p:spPr>
+          <a:xfrm>
+            <a:off x="381000" y="4872186"/>
             <a:ext cx="8382000" cy="0"/>
           </a:xfrm>
           <a:prstGeom prst="line">
@@ -4752,40 +4285,40 @@
       </p:sp>
       <p:sp>
         <p:nvSpPr>
-          <p:cNvPr id="38" name="Text 36"/>
-          <p:cNvSpPr/>
-          <p:nvPr/>
-        </p:nvSpPr>
-        <p:spPr>
-          <a:xfrm>
-            <a:off x="297180" y="4937224"/>
-            <a:ext cx="8549640" cy="104775"/>
-          </a:xfrm>
-          <a:prstGeom prst="rect">
-            <a:avLst/>
-          </a:prstGeom>
-          <a:noFill/>
-          <a:ln/>
-        </p:spPr>
-        <p:txBody>
-          <a:bodyPr wrap="square" lIns="0" tIns="0" rIns="0" bIns="0" rtlCol="0" anchor="t"/>
-          <a:lstStyle/>
-          <a:p>
-            <a:pPr algn="ctr" indent="0" marL="0">
-              <a:buNone/>
-            </a:pPr>
-            <a:r>
-              <a:rPr lang="en-US" sz="800" i="1" dirty="0">
-                <a:solidFill>
-                  <a:srgbClr val="666666"/>
-                </a:solidFill>
-                <a:latin typeface="Times New Roman" pitchFamily="34" charset="0"/>
-                <a:ea typeface="Times New Roman" pitchFamily="34" charset="-122"/>
-                <a:cs typeface="Times New Roman" pitchFamily="34" charset="-120"/>
-              </a:rPr>
-              <a:t>This research applies proven OS scheduling theory to LLM API request management domain.</a:t>
-            </a:r>
-            <a:endParaRPr lang="en-US" sz="800" dirty="0"/>
+          <p:cNvPr id="34" name="Text 32"/>
+          <p:cNvSpPr/>
+          <p:nvPr/>
+        </p:nvSpPr>
+        <p:spPr>
+          <a:xfrm>
+            <a:off x="381000" y="4927699"/>
+            <a:ext cx="8549640" cy="114300"/>
+          </a:xfrm>
+          <a:prstGeom prst="rect">
+            <a:avLst/>
+          </a:prstGeom>
+          <a:noFill/>
+          <a:ln/>
+        </p:spPr>
+        <p:txBody>
+          <a:bodyPr wrap="square" lIns="0" tIns="0" rIns="0" bIns="0" rtlCol="0" anchor="t"/>
+          <a:lstStyle/>
+          <a:p>
+            <a:pPr algn="l" indent="0" marL="0">
+              <a:buNone/>
+            </a:pPr>
+            <a:r>
+              <a:rPr lang="en-US" sz="750" i="1" dirty="0">
+                <a:solidFill>
+                  <a:srgbClr val="999999"/>
+                </a:solidFill>
+                <a:latin typeface="Malgun Gothic" pitchFamily="34" charset="0"/>
+                <a:ea typeface="Malgun Gothic" pitchFamily="34" charset="-122"/>
+                <a:cs typeface="Malgun Gothic" pitchFamily="34" charset="-120"/>
+              </a:rPr>
+              <a:t>Node.js 22 LTS + Express.js 4.18 + Jest 29.x (307 tests, 99.76% coverage)</a:t>
+            </a:r>
+            <a:endParaRPr lang="en-US" sz="750" dirty="0"/>
           </a:p>
         </p:txBody>
       </p:sp>
@@ -4829,13 +4362,54 @@
         </p:nvSpPr>
         <p:spPr>
           <a:xfrm>
-            <a:off x="381000" y="253901"/>
-            <a:ext cx="8382000" cy="453926"/>
-          </a:xfrm>
-          <a:prstGeom prst="rect">
-            <a:avLst/>
-          </a:prstGeom>
-          <a:noFill/>
+            <a:off x="406301" y="279202"/>
+            <a:ext cx="8498026" cy="123825"/>
+          </a:xfrm>
+          <a:prstGeom prst="rect">
+            <a:avLst/>
+          </a:prstGeom>
+          <a:noFill/>
+          <a:ln/>
+        </p:spPr>
+        <p:txBody>
+          <a:bodyPr wrap="square" lIns="0" tIns="0" rIns="0" bIns="0" rtlCol="0" anchor="t"/>
+          <a:lstStyle/>
+          <a:p>
+            <a:pPr algn="l" indent="0" marL="0">
+              <a:buNone/>
+            </a:pPr>
+            <a:r>
+              <a:rPr lang="en-US" sz="800" b="1" dirty="0">
+                <a:solidFill>
+                  <a:srgbClr val="888888"/>
+                </a:solidFill>
+                <a:latin typeface="Malgun Gothic" pitchFamily="34" charset="0"/>
+                <a:ea typeface="Malgun Gothic" pitchFamily="34" charset="-122"/>
+                <a:cs typeface="Malgun Gothic" pitchFamily="34" charset="-120"/>
+              </a:rPr>
+              <a:t>단계 1: 요청 수신</a:t>
+            </a:r>
+            <a:endParaRPr lang="en-US" sz="800" dirty="0"/>
+          </a:p>
+        </p:txBody>
+      </p:sp>
+      <p:sp>
+        <p:nvSpPr>
+          <p:cNvPr id="3" name="Text 1"/>
+          <p:cNvSpPr/>
+          <p:nvPr/>
+        </p:nvSpPr>
+        <p:spPr>
+          <a:xfrm>
+            <a:off x="304800" y="479078"/>
+            <a:ext cx="1561951" cy="631627"/>
+          </a:xfrm>
+          <a:prstGeom prst="rect">
+            <a:avLst/>
+          </a:prstGeom>
+          <a:solidFill>
+            <a:srgbClr val="333333"/>
+          </a:solidFill>
           <a:ln w="19050">
             <a:solidFill>
               <a:srgbClr val="333333"/>
@@ -4855,166 +4429,177 @@
       </p:sp>
       <p:sp>
         <p:nvSpPr>
-          <p:cNvPr id="3" name="Text 1"/>
-          <p:cNvSpPr/>
-          <p:nvPr/>
-        </p:nvSpPr>
-        <p:spPr>
-          <a:xfrm>
-            <a:off x="400050" y="272951"/>
-            <a:ext cx="2590800" cy="415826"/>
+          <p:cNvPr id="4" name="Text 2"/>
+          <p:cNvSpPr/>
+          <p:nvPr/>
+        </p:nvSpPr>
+        <p:spPr>
+          <a:xfrm>
+            <a:off x="438101" y="599629"/>
+            <a:ext cx="1295349" cy="152400"/>
+          </a:xfrm>
+          <a:prstGeom prst="rect">
+            <a:avLst/>
+          </a:prstGeom>
+          <a:noFill/>
+          <a:ln/>
+        </p:spPr>
+        <p:txBody>
+          <a:bodyPr wrap="square" lIns="0" tIns="0" rIns="0" bIns="0" rtlCol="0" anchor="t"/>
+          <a:lstStyle/>
+          <a:p>
+            <a:pPr algn="ctr" indent="0" marL="0">
+              <a:buNone/>
+            </a:pPr>
+            <a:r>
+              <a:rPr lang="en-US" sz="1000" b="1" dirty="0">
+                <a:solidFill>
+                  <a:srgbClr val="FFFFFF"/>
+                </a:solidFill>
+                <a:latin typeface="Malgun Gothic" pitchFamily="34" charset="0"/>
+                <a:ea typeface="Malgun Gothic" pitchFamily="34" charset="-122"/>
+                <a:cs typeface="Malgun Gothic" pitchFamily="34" charset="-120"/>
+              </a:rPr>
+              <a:t>클라이언트</a:t>
+            </a:r>
+            <a:endParaRPr lang="en-US" sz="1000" dirty="0"/>
+          </a:p>
+        </p:txBody>
+      </p:sp>
+      <p:sp>
+        <p:nvSpPr>
+          <p:cNvPr id="5" name="Text 3"/>
+          <p:cNvSpPr/>
+          <p:nvPr/>
+        </p:nvSpPr>
+        <p:spPr>
+          <a:xfrm>
+            <a:off x="438101" y="752029"/>
+            <a:ext cx="1295349" cy="123825"/>
+          </a:xfrm>
+          <a:prstGeom prst="rect">
+            <a:avLst/>
+          </a:prstGeom>
+          <a:noFill/>
+          <a:ln/>
+        </p:spPr>
+        <p:txBody>
+          <a:bodyPr wrap="square" lIns="0" tIns="0" rIns="0" bIns="0" rtlCol="0" anchor="t"/>
+          <a:lstStyle/>
+          <a:p>
+            <a:pPr algn="ctr" indent="0" marL="0">
+              <a:buNone/>
+            </a:pPr>
+            <a:r>
+              <a:rPr lang="en-US" sz="750" dirty="0">
+                <a:solidFill>
+                  <a:srgbClr val="CCCCCC"/>
+                </a:solidFill>
+                <a:latin typeface="Malgun Gothic" pitchFamily="34" charset="0"/>
+                <a:ea typeface="Malgun Gothic" pitchFamily="34" charset="-122"/>
+                <a:cs typeface="Malgun Gothic" pitchFamily="34" charset="-120"/>
+              </a:rPr>
+              <a:t>REST API 호출</a:t>
+            </a:r>
+            <a:endParaRPr lang="en-US" sz="750" dirty="0"/>
+          </a:p>
+        </p:txBody>
+      </p:sp>
+      <p:sp>
+        <p:nvSpPr>
+          <p:cNvPr id="6" name="Text 4"/>
+          <p:cNvSpPr/>
+          <p:nvPr/>
+        </p:nvSpPr>
+        <p:spPr>
+          <a:xfrm>
+            <a:off x="438101" y="875854"/>
+            <a:ext cx="1295349" cy="114300"/>
+          </a:xfrm>
+          <a:prstGeom prst="rect">
+            <a:avLst/>
+          </a:prstGeom>
+          <a:noFill/>
+          <a:ln/>
+        </p:spPr>
+        <p:txBody>
+          <a:bodyPr wrap="square" lIns="0" tIns="0" rIns="0" bIns="0" rtlCol="0" anchor="t"/>
+          <a:lstStyle/>
+          <a:p>
+            <a:pPr algn="ctr" indent="0" marL="0">
+              <a:buNone/>
+            </a:pPr>
+            <a:r>
+              <a:rPr lang="en-US" sz="750" dirty="0">
+                <a:solidFill>
+                  <a:srgbClr val="CCCCCC"/>
+                </a:solidFill>
+                <a:latin typeface="Malgun Gothic" pitchFamily="34" charset="0"/>
+                <a:ea typeface="Malgun Gothic" pitchFamily="34" charset="-122"/>
+                <a:cs typeface="Malgun Gothic" pitchFamily="34" charset="-120"/>
+              </a:rPr>
+              <a:t>POST /api/requests</a:t>
+            </a:r>
+            <a:endParaRPr lang="en-US" sz="750" dirty="0"/>
+          </a:p>
+        </p:txBody>
+      </p:sp>
+      <p:sp>
+        <p:nvSpPr>
+          <p:cNvPr id="7" name="Text 5"/>
+          <p:cNvSpPr/>
+          <p:nvPr/>
+        </p:nvSpPr>
+        <p:spPr>
+          <a:xfrm>
+            <a:off x="1942951" y="690116"/>
+            <a:ext cx="181407" cy="209550"/>
+          </a:xfrm>
+          <a:prstGeom prst="rect">
+            <a:avLst/>
+          </a:prstGeom>
+          <a:noFill/>
+          <a:ln/>
+        </p:spPr>
+        <p:txBody>
+          <a:bodyPr wrap="square" lIns="0" tIns="0" rIns="0" bIns="0" rtlCol="0" anchor="t"/>
+          <a:lstStyle/>
+          <a:p>
+            <a:pPr algn="l" indent="0" marL="0">
+              <a:buNone/>
+            </a:pPr>
+            <a:r>
+              <a:rPr lang="en-US" sz="1400" dirty="0">
+                <a:solidFill>
+                  <a:srgbClr val="333333"/>
+                </a:solidFill>
+                <a:latin typeface="Malgun Gothic" pitchFamily="34" charset="0"/>
+                <a:ea typeface="Malgun Gothic" pitchFamily="34" charset="-122"/>
+                <a:cs typeface="Malgun Gothic" pitchFamily="34" charset="-120"/>
+              </a:rPr>
+              <a:t>→</a:t>
+            </a:r>
+            <a:endParaRPr lang="en-US" sz="1400" dirty="0"/>
+          </a:p>
+        </p:txBody>
+      </p:sp>
+      <p:sp>
+        <p:nvSpPr>
+          <p:cNvPr id="8" name="Text 6"/>
+          <p:cNvSpPr/>
+          <p:nvPr/>
+        </p:nvSpPr>
+        <p:spPr>
+          <a:xfrm>
+            <a:off x="2197001" y="479078"/>
+            <a:ext cx="4749998" cy="631627"/>
           </a:xfrm>
           <a:prstGeom prst="rect">
             <a:avLst/>
           </a:prstGeom>
           <a:solidFill>
-            <a:srgbClr val="333333"/>
+            <a:srgbClr val="F5F5F5"/>
           </a:solidFill>
-          <a:ln/>
-        </p:spPr>
-        <p:txBody>
-          <a:bodyPr wrap="square" rtlCol="0" anchor="ctr"/>
-          <a:lstStyle/>
-          <a:p>
-            <a:pPr indent="0" marL="0">
-              <a:buNone/>
-            </a:pPr>
-            <a:endParaRPr lang="en-US" dirty="0"/>
-          </a:p>
-        </p:txBody>
-      </p:sp>
-      <p:sp>
-        <p:nvSpPr>
-          <p:cNvPr id="4" name="Text 2"/>
-          <p:cNvSpPr/>
-          <p:nvPr/>
-        </p:nvSpPr>
-        <p:spPr>
-          <a:xfrm>
-            <a:off x="552450" y="399901"/>
-            <a:ext cx="2331720" cy="161925"/>
-          </a:xfrm>
-          <a:prstGeom prst="rect">
-            <a:avLst/>
-          </a:prstGeom>
-          <a:noFill/>
-          <a:ln/>
-        </p:spPr>
-        <p:txBody>
-          <a:bodyPr wrap="square" lIns="0" tIns="0" rIns="0" bIns="0" rtlCol="0" anchor="t"/>
-          <a:lstStyle/>
-          <a:p>
-            <a:pPr algn="l" indent="0" marL="0">
-              <a:buNone/>
-            </a:pPr>
-            <a:r>
-              <a:rPr lang="en-US" sz="1100" b="1" dirty="0">
-                <a:solidFill>
-                  <a:srgbClr val="FFFFFF"/>
-                </a:solidFill>
-                <a:latin typeface="Times New Roman" pitchFamily="34" charset="0"/>
-                <a:ea typeface="Times New Roman" pitchFamily="34" charset="-122"/>
-                <a:cs typeface="Times New Roman" pitchFamily="34" charset="-120"/>
-              </a:rPr>
-              <a:t>Client Layer</a:t>
-            </a:r>
-            <a:endParaRPr lang="en-US" sz="1100" dirty="0"/>
-          </a:p>
-        </p:txBody>
-      </p:sp>
-      <p:sp>
-        <p:nvSpPr>
-          <p:cNvPr id="5" name="Text 3"/>
-          <p:cNvSpPr/>
-          <p:nvPr/>
-        </p:nvSpPr>
-        <p:spPr>
-          <a:xfrm>
-            <a:off x="3194000" y="404664"/>
-            <a:ext cx="1566169" cy="152400"/>
-          </a:xfrm>
-          <a:prstGeom prst="rect">
-            <a:avLst/>
-          </a:prstGeom>
-          <a:noFill/>
-          <a:ln/>
-        </p:spPr>
-        <p:txBody>
-          <a:bodyPr wrap="square" lIns="0" tIns="0" rIns="0" bIns="0" rtlCol="0" anchor="t"/>
-          <a:lstStyle/>
-          <a:p>
-            <a:pPr algn="l" indent="0" marL="0">
-              <a:buNone/>
-            </a:pPr>
-            <a:r>
-              <a:rPr lang="en-US" sz="1000" dirty="0">
-                <a:solidFill>
-                  <a:srgbClr val="333333"/>
-                </a:solidFill>
-                <a:latin typeface="Times New Roman" pitchFamily="34" charset="0"/>
-                <a:ea typeface="Times New Roman" pitchFamily="34" charset="-122"/>
-                <a:cs typeface="Times New Roman" pitchFamily="34" charset="-120"/>
-              </a:rPr>
-              <a:t>REST API Client · Dashboard</a:t>
-            </a:r>
-            <a:endParaRPr lang="en-US" sz="1000" dirty="0"/>
-          </a:p>
-        </p:txBody>
-      </p:sp>
-      <p:sp>
-        <p:nvSpPr>
-          <p:cNvPr id="6" name="Text 4"/>
-          <p:cNvSpPr/>
-          <p:nvPr/>
-        </p:nvSpPr>
-        <p:spPr>
-          <a:xfrm>
-            <a:off x="4496544" y="784027"/>
-            <a:ext cx="153930" cy="171450"/>
-          </a:xfrm>
-          <a:prstGeom prst="rect">
-            <a:avLst/>
-          </a:prstGeom>
-          <a:noFill/>
-          <a:ln/>
-        </p:spPr>
-        <p:txBody>
-          <a:bodyPr wrap="square" lIns="0" tIns="0" rIns="0" bIns="0" rtlCol="0" anchor="t"/>
-          <a:lstStyle/>
-          <a:p>
-            <a:pPr algn="l" indent="0" marL="0">
-              <a:buNone/>
-            </a:pPr>
-            <a:r>
-              <a:rPr lang="en-US" sz="1200" dirty="0">
-                <a:solidFill>
-                  <a:srgbClr val="888888"/>
-                </a:solidFill>
-                <a:latin typeface="Times New Roman" pitchFamily="34" charset="0"/>
-                <a:ea typeface="Times New Roman" pitchFamily="34" charset="-122"/>
-                <a:cs typeface="Times New Roman" pitchFamily="34" charset="-120"/>
-              </a:rPr>
-              <a:t>▼</a:t>
-            </a:r>
-            <a:endParaRPr lang="en-US" sz="1200" dirty="0"/>
-          </a:p>
-        </p:txBody>
-      </p:sp>
-      <p:sp>
-        <p:nvSpPr>
-          <p:cNvPr id="7" name="Text 5"/>
-          <p:cNvSpPr/>
-          <p:nvPr/>
-        </p:nvSpPr>
-        <p:spPr>
-          <a:xfrm>
-            <a:off x="381000" y="1031677"/>
-            <a:ext cx="8382000" cy="558701"/>
-          </a:xfrm>
-          <a:prstGeom prst="rect">
-            <a:avLst/>
-          </a:prstGeom>
-          <a:noFill/>
           <a:ln w="19050">
             <a:solidFill>
               <a:srgbClr val="333333"/>
@@ -5034,205 +4619,138 @@
       </p:sp>
       <p:sp>
         <p:nvSpPr>
-          <p:cNvPr id="8" name="Text 6"/>
-          <p:cNvSpPr/>
-          <p:nvPr/>
-        </p:nvSpPr>
-        <p:spPr>
-          <a:xfrm>
-            <a:off x="400050" y="1050727"/>
-            <a:ext cx="2590800" cy="520601"/>
+          <p:cNvPr id="9" name="Text 7"/>
+          <p:cNvSpPr/>
+          <p:nvPr/>
+        </p:nvSpPr>
+        <p:spPr>
+          <a:xfrm>
+            <a:off x="2298421" y="656779"/>
+            <a:ext cx="4547158" cy="152400"/>
+          </a:xfrm>
+          <a:prstGeom prst="rect">
+            <a:avLst/>
+          </a:prstGeom>
+          <a:noFill/>
+          <a:ln/>
+        </p:spPr>
+        <p:txBody>
+          <a:bodyPr wrap="square" lIns="0" tIns="0" rIns="0" bIns="0" rtlCol="0" anchor="t"/>
+          <a:lstStyle/>
+          <a:p>
+            <a:pPr algn="ctr" indent="0" marL="0">
+              <a:buNone/>
+            </a:pPr>
+            <a:r>
+              <a:rPr lang="en-US" sz="1000" b="1" dirty="0">
+                <a:solidFill>
+                  <a:srgbClr val="333333"/>
+                </a:solidFill>
+                <a:latin typeface="Malgun Gothic" pitchFamily="34" charset="0"/>
+                <a:ea typeface="Malgun Gothic" pitchFamily="34" charset="-122"/>
+                <a:cs typeface="Malgun Gothic" pitchFamily="34" charset="-120"/>
+              </a:rPr>
+              <a:t>API 계층 (Express.js)</a:t>
+            </a:r>
+            <a:endParaRPr lang="en-US" sz="1000" dirty="0"/>
+          </a:p>
+        </p:txBody>
+      </p:sp>
+      <p:sp>
+        <p:nvSpPr>
+          <p:cNvPr id="10" name="Text 8"/>
+          <p:cNvSpPr/>
+          <p:nvPr/>
+        </p:nvSpPr>
+        <p:spPr>
+          <a:xfrm>
+            <a:off x="2298421" y="809179"/>
+            <a:ext cx="4547158" cy="123825"/>
+          </a:xfrm>
+          <a:prstGeom prst="rect">
+            <a:avLst/>
+          </a:prstGeom>
+          <a:noFill/>
+          <a:ln/>
+        </p:spPr>
+        <p:txBody>
+          <a:bodyPr wrap="square" lIns="0" tIns="0" rIns="0" bIns="0" rtlCol="0" anchor="t"/>
+          <a:lstStyle/>
+          <a:p>
+            <a:pPr algn="ctr" indent="0" marL="0">
+              <a:buNone/>
+            </a:pPr>
+            <a:r>
+              <a:rPr lang="en-US" sz="750" dirty="0">
+                <a:solidFill>
+                  <a:srgbClr val="666666"/>
+                </a:solidFill>
+                <a:latin typeface="Malgun Gothic" pitchFamily="34" charset="0"/>
+                <a:ea typeface="Malgun Gothic" pitchFamily="34" charset="-122"/>
+                <a:cs typeface="Malgun Gothic" pitchFamily="34" charset="-120"/>
+              </a:rPr>
+              <a:t>요청 검증 · 테넌트 식별 · 우선순위 할당</a:t>
+            </a:r>
+            <a:endParaRPr lang="en-US" sz="750" dirty="0"/>
+          </a:p>
+        </p:txBody>
+      </p:sp>
+      <p:sp>
+        <p:nvSpPr>
+          <p:cNvPr id="11" name="Text 9"/>
+          <p:cNvSpPr/>
+          <p:nvPr/>
+        </p:nvSpPr>
+        <p:spPr>
+          <a:xfrm>
+            <a:off x="7023199" y="690116"/>
+            <a:ext cx="181407" cy="209550"/>
+          </a:xfrm>
+          <a:prstGeom prst="rect">
+            <a:avLst/>
+          </a:prstGeom>
+          <a:noFill/>
+          <a:ln/>
+        </p:spPr>
+        <p:txBody>
+          <a:bodyPr wrap="square" lIns="0" tIns="0" rIns="0" bIns="0" rtlCol="0" anchor="t"/>
+          <a:lstStyle/>
+          <a:p>
+            <a:pPr algn="l" indent="0" marL="0">
+              <a:buNone/>
+            </a:pPr>
+            <a:r>
+              <a:rPr lang="en-US" sz="1400" dirty="0">
+                <a:solidFill>
+                  <a:srgbClr val="333333"/>
+                </a:solidFill>
+                <a:latin typeface="Malgun Gothic" pitchFamily="34" charset="0"/>
+                <a:ea typeface="Malgun Gothic" pitchFamily="34" charset="-122"/>
+                <a:cs typeface="Malgun Gothic" pitchFamily="34" charset="-120"/>
+              </a:rPr>
+              <a:t>→</a:t>
+            </a:r>
+            <a:endParaRPr lang="en-US" sz="1400" dirty="0"/>
+          </a:p>
+        </p:txBody>
+      </p:sp>
+      <p:sp>
+        <p:nvSpPr>
+          <p:cNvPr id="12" name="Text 10"/>
+          <p:cNvSpPr/>
+          <p:nvPr/>
+        </p:nvSpPr>
+        <p:spPr>
+          <a:xfrm>
+            <a:off x="7277249" y="479078"/>
+            <a:ext cx="1561951" cy="631627"/>
           </a:xfrm>
           <a:prstGeom prst="rect">
             <a:avLst/>
           </a:prstGeom>
           <a:solidFill>
-            <a:srgbClr val="555555"/>
+            <a:srgbClr val="F5F5F5"/>
           </a:solidFill>
-          <a:ln/>
-        </p:spPr>
-        <p:txBody>
-          <a:bodyPr wrap="square" rtlCol="0" anchor="ctr"/>
-          <a:lstStyle/>
-          <a:p>
-            <a:pPr indent="0" marL="0">
-              <a:buNone/>
-            </a:pPr>
-            <a:endParaRPr lang="en-US" dirty="0"/>
-          </a:p>
-        </p:txBody>
-      </p:sp>
-      <p:sp>
-        <p:nvSpPr>
-          <p:cNvPr id="9" name="Text 7"/>
-          <p:cNvSpPr/>
-          <p:nvPr/>
-        </p:nvSpPr>
-        <p:spPr>
-          <a:xfrm>
-            <a:off x="552450" y="1177677"/>
-            <a:ext cx="2331720" cy="161925"/>
-          </a:xfrm>
-          <a:prstGeom prst="rect">
-            <a:avLst/>
-          </a:prstGeom>
-          <a:noFill/>
-          <a:ln/>
-        </p:spPr>
-        <p:txBody>
-          <a:bodyPr wrap="square" lIns="0" tIns="0" rIns="0" bIns="0" rtlCol="0" anchor="t"/>
-          <a:lstStyle/>
-          <a:p>
-            <a:pPr algn="l" indent="0" marL="0">
-              <a:buNone/>
-            </a:pPr>
-            <a:r>
-              <a:rPr lang="en-US" sz="1100" b="1" dirty="0">
-                <a:solidFill>
-                  <a:srgbClr val="FFFFFF"/>
-                </a:solidFill>
-                <a:latin typeface="Times New Roman" pitchFamily="34" charset="0"/>
-                <a:ea typeface="Times New Roman" pitchFamily="34" charset="-122"/>
-                <a:cs typeface="Times New Roman" pitchFamily="34" charset="-120"/>
-              </a:rPr>
-              <a:t>API Layer</a:t>
-            </a:r>
-            <a:endParaRPr lang="en-US" sz="1100" dirty="0"/>
-          </a:p>
-        </p:txBody>
-      </p:sp>
-      <p:sp>
-        <p:nvSpPr>
-          <p:cNvPr id="10" name="Text 8"/>
-          <p:cNvSpPr/>
-          <p:nvPr/>
-        </p:nvSpPr>
-        <p:spPr>
-          <a:xfrm>
-            <a:off x="552450" y="1339602"/>
-            <a:ext cx="2331720" cy="104775"/>
-          </a:xfrm>
-          <a:prstGeom prst="rect">
-            <a:avLst/>
-          </a:prstGeom>
-          <a:noFill/>
-          <a:ln/>
-        </p:spPr>
-        <p:txBody>
-          <a:bodyPr wrap="square" lIns="0" tIns="0" rIns="0" bIns="0" rtlCol="0" anchor="t"/>
-          <a:lstStyle/>
-          <a:p>
-            <a:pPr algn="l" indent="0" marL="0">
-              <a:buNone/>
-            </a:pPr>
-            <a:r>
-              <a:rPr lang="en-US" sz="800" dirty="0">
-                <a:solidFill>
-                  <a:srgbClr val="CCCCCC"/>
-                </a:solidFill>
-                <a:latin typeface="Times New Roman" pitchFamily="34" charset="0"/>
-                <a:ea typeface="Times New Roman" pitchFamily="34" charset="-122"/>
-                <a:cs typeface="Times New Roman" pitchFamily="34" charset="-120"/>
-              </a:rPr>
-              <a:t>(Express.js)</a:t>
-            </a:r>
-            <a:endParaRPr lang="en-US" sz="800" dirty="0"/>
-          </a:p>
-        </p:txBody>
-      </p:sp>
-      <p:sp>
-        <p:nvSpPr>
-          <p:cNvPr id="11" name="Text 9"/>
-          <p:cNvSpPr/>
-          <p:nvPr/>
-        </p:nvSpPr>
-        <p:spPr>
-          <a:xfrm>
-            <a:off x="3194000" y="1234827"/>
-            <a:ext cx="3600504" cy="152400"/>
-          </a:xfrm>
-          <a:prstGeom prst="rect">
-            <a:avLst/>
-          </a:prstGeom>
-          <a:noFill/>
-          <a:ln/>
-        </p:spPr>
-        <p:txBody>
-          <a:bodyPr wrap="square" lIns="0" tIns="0" rIns="0" bIns="0" rtlCol="0" anchor="t"/>
-          <a:lstStyle/>
-          <a:p>
-            <a:pPr algn="l" indent="0" marL="0">
-              <a:buNone/>
-            </a:pPr>
-            <a:r>
-              <a:rPr lang="en-US" sz="1000" dirty="0">
-                <a:solidFill>
-                  <a:srgbClr val="333333"/>
-                </a:solidFill>
-                <a:latin typeface="Times New Roman" pitchFamily="34" charset="0"/>
-                <a:ea typeface="Times New Roman" pitchFamily="34" charset="-122"/>
-                <a:cs typeface="Times New Roman" pitchFamily="34" charset="-120"/>
-              </a:rPr>
-              <a:t>Request Mgmt · Scheduler Mgmt · Statistics/Fairness · Health Check</a:t>
-            </a:r>
-            <a:endParaRPr lang="en-US" sz="1000" dirty="0"/>
-          </a:p>
-        </p:txBody>
-      </p:sp>
-      <p:sp>
-        <p:nvSpPr>
-          <p:cNvPr id="12" name="Text 10"/>
-          <p:cNvSpPr/>
-          <p:nvPr/>
-        </p:nvSpPr>
-        <p:spPr>
-          <a:xfrm>
-            <a:off x="4496544" y="1666577"/>
-            <a:ext cx="153930" cy="171450"/>
-          </a:xfrm>
-          <a:prstGeom prst="rect">
-            <a:avLst/>
-          </a:prstGeom>
-          <a:noFill/>
-          <a:ln/>
-        </p:spPr>
-        <p:txBody>
-          <a:bodyPr wrap="square" lIns="0" tIns="0" rIns="0" bIns="0" rtlCol="0" anchor="t"/>
-          <a:lstStyle/>
-          <a:p>
-            <a:pPr algn="l" indent="0" marL="0">
-              <a:buNone/>
-            </a:pPr>
-            <a:r>
-              <a:rPr lang="en-US" sz="1200" dirty="0">
-                <a:solidFill>
-                  <a:srgbClr val="888888"/>
-                </a:solidFill>
-                <a:latin typeface="Times New Roman" pitchFamily="34" charset="0"/>
-                <a:ea typeface="Times New Roman" pitchFamily="34" charset="-122"/>
-                <a:cs typeface="Times New Roman" pitchFamily="34" charset="-120"/>
-              </a:rPr>
-              <a:t>▼</a:t>
-            </a:r>
-            <a:endParaRPr lang="en-US" sz="1200" dirty="0"/>
-          </a:p>
-        </p:txBody>
-      </p:sp>
-      <p:sp>
-        <p:nvSpPr>
-          <p:cNvPr id="13" name="Text 11"/>
-          <p:cNvSpPr/>
-          <p:nvPr/>
-        </p:nvSpPr>
-        <p:spPr>
-          <a:xfrm>
-            <a:off x="381000" y="1914227"/>
-            <a:ext cx="8382000" cy="660202"/>
-          </a:xfrm>
-          <a:prstGeom prst="rect">
-            <a:avLst/>
-          </a:prstGeom>
-          <a:noFill/>
           <a:ln w="19050">
             <a:solidFill>
               <a:srgbClr val="333333"/>
@@ -5252,130 +4770,219 @@
       </p:sp>
       <p:sp>
         <p:nvSpPr>
+          <p:cNvPr id="13" name="Text 11"/>
+          <p:cNvSpPr/>
+          <p:nvPr/>
+        </p:nvSpPr>
+        <p:spPr>
+          <a:xfrm>
+            <a:off x="7410550" y="609154"/>
+            <a:ext cx="1295349" cy="142875"/>
+          </a:xfrm>
+          <a:prstGeom prst="rect">
+            <a:avLst/>
+          </a:prstGeom>
+          <a:noFill/>
+          <a:ln/>
+        </p:spPr>
+        <p:txBody>
+          <a:bodyPr wrap="square" lIns="0" tIns="0" rIns="0" bIns="0" rtlCol="0" anchor="t"/>
+          <a:lstStyle/>
+          <a:p>
+            <a:pPr algn="ctr" indent="0" marL="0">
+              <a:buNone/>
+            </a:pPr>
+            <a:r>
+              <a:rPr lang="en-US" sz="1000" b="1" dirty="0">
+                <a:solidFill>
+                  <a:srgbClr val="333333"/>
+                </a:solidFill>
+                <a:latin typeface="Malgun Gothic" pitchFamily="34" charset="0"/>
+                <a:ea typeface="Malgun Gothic" pitchFamily="34" charset="-122"/>
+                <a:cs typeface="Malgun Gothic" pitchFamily="34" charset="-120"/>
+              </a:rPr>
+              <a:t>Rate Limiter</a:t>
+            </a:r>
+            <a:endParaRPr lang="en-US" sz="1000" dirty="0"/>
+          </a:p>
+        </p:txBody>
+      </p:sp>
+      <p:sp>
+        <p:nvSpPr>
           <p:cNvPr id="14" name="Text 12"/>
           <p:cNvSpPr/>
           <p:nvPr/>
         </p:nvSpPr>
         <p:spPr>
           <a:xfrm>
-            <a:off x="400050" y="1984028"/>
-            <a:ext cx="2590800" cy="520601"/>
+            <a:off x="7410550" y="752029"/>
+            <a:ext cx="1295349" cy="123825"/>
+          </a:xfrm>
+          <a:prstGeom prst="rect">
+            <a:avLst/>
+          </a:prstGeom>
+          <a:noFill/>
+          <a:ln/>
+        </p:spPr>
+        <p:txBody>
+          <a:bodyPr wrap="square" lIns="0" tIns="0" rIns="0" bIns="0" rtlCol="0" anchor="t"/>
+          <a:lstStyle/>
+          <a:p>
+            <a:pPr algn="ctr" indent="0" marL="0">
+              <a:buNone/>
+            </a:pPr>
+            <a:r>
+              <a:rPr lang="en-US" sz="750" dirty="0">
+                <a:solidFill>
+                  <a:srgbClr val="666666"/>
+                </a:solidFill>
+                <a:latin typeface="Malgun Gothic" pitchFamily="34" charset="0"/>
+                <a:ea typeface="Malgun Gothic" pitchFamily="34" charset="-122"/>
+                <a:cs typeface="Malgun Gothic" pitchFamily="34" charset="-120"/>
+              </a:rPr>
+              <a:t>토큰 버킷 확인</a:t>
+            </a:r>
+            <a:endParaRPr lang="en-US" sz="750" dirty="0"/>
+          </a:p>
+        </p:txBody>
+      </p:sp>
+      <p:sp>
+        <p:nvSpPr>
+          <p:cNvPr id="15" name="Text 13"/>
+          <p:cNvSpPr/>
+          <p:nvPr/>
+        </p:nvSpPr>
+        <p:spPr>
+          <a:xfrm>
+            <a:off x="7410550" y="875854"/>
+            <a:ext cx="1295349" cy="104775"/>
+          </a:xfrm>
+          <a:prstGeom prst="rect">
+            <a:avLst/>
+          </a:prstGeom>
+          <a:noFill/>
+          <a:ln/>
+        </p:spPr>
+        <p:txBody>
+          <a:bodyPr wrap="square" lIns="0" tIns="0" rIns="0" bIns="0" rtlCol="0" anchor="t"/>
+          <a:lstStyle/>
+          <a:p>
+            <a:pPr algn="ctr" indent="0" marL="0">
+              <a:buNone/>
+            </a:pPr>
+            <a:r>
+              <a:rPr lang="en-US" sz="700" i="1" dirty="0">
+                <a:solidFill>
+                  <a:srgbClr val="999999"/>
+                </a:solidFill>
+                <a:latin typeface="Malgun Gothic" pitchFamily="34" charset="0"/>
+                <a:ea typeface="Malgun Gothic" pitchFamily="34" charset="-122"/>
+                <a:cs typeface="Malgun Gothic" pitchFamily="34" charset="-120"/>
+              </a:rPr>
+              <a:t>한도 초과 시 거부</a:t>
+            </a:r>
+            <a:endParaRPr lang="en-US" sz="700" dirty="0"/>
+          </a:p>
+        </p:txBody>
+      </p:sp>
+      <p:sp>
+        <p:nvSpPr>
+          <p:cNvPr id="16" name="Text 14"/>
+          <p:cNvSpPr/>
+          <p:nvPr/>
+        </p:nvSpPr>
+        <p:spPr>
+          <a:xfrm>
+            <a:off x="4497288" y="1161306"/>
+            <a:ext cx="152412" cy="180975"/>
+          </a:xfrm>
+          <a:prstGeom prst="rect">
+            <a:avLst/>
+          </a:prstGeom>
+          <a:noFill/>
+          <a:ln/>
+        </p:spPr>
+        <p:txBody>
+          <a:bodyPr wrap="square" lIns="0" tIns="0" rIns="0" bIns="0" rtlCol="0" anchor="t"/>
+          <a:lstStyle/>
+          <a:p>
+            <a:pPr algn="l" indent="0" marL="0">
+              <a:buNone/>
+            </a:pPr>
+            <a:r>
+              <a:rPr lang="en-US" sz="1200" dirty="0">
+                <a:solidFill>
+                  <a:srgbClr val="888888"/>
+                </a:solidFill>
+                <a:latin typeface="Malgun Gothic" pitchFamily="34" charset="0"/>
+                <a:ea typeface="Malgun Gothic" pitchFamily="34" charset="-122"/>
+                <a:cs typeface="Malgun Gothic" pitchFamily="34" charset="-120"/>
+              </a:rPr>
+              <a:t>▼</a:t>
+            </a:r>
+            <a:endParaRPr lang="en-US" sz="1200" dirty="0"/>
+          </a:p>
+        </p:txBody>
+      </p:sp>
+      <p:sp>
+        <p:nvSpPr>
+          <p:cNvPr id="17" name="Text 15"/>
+          <p:cNvSpPr/>
+          <p:nvPr/>
+        </p:nvSpPr>
+        <p:spPr>
+          <a:xfrm>
+            <a:off x="406301" y="1392882"/>
+            <a:ext cx="8498026" cy="123825"/>
+          </a:xfrm>
+          <a:prstGeom prst="rect">
+            <a:avLst/>
+          </a:prstGeom>
+          <a:noFill/>
+          <a:ln/>
+        </p:spPr>
+        <p:txBody>
+          <a:bodyPr wrap="square" lIns="0" tIns="0" rIns="0" bIns="0" rtlCol="0" anchor="t"/>
+          <a:lstStyle/>
+          <a:p>
+            <a:pPr algn="l" indent="0" marL="0">
+              <a:buNone/>
+            </a:pPr>
+            <a:r>
+              <a:rPr lang="en-US" sz="800" b="1" dirty="0">
+                <a:solidFill>
+                  <a:srgbClr val="888888"/>
+                </a:solidFill>
+                <a:latin typeface="Malgun Gothic" pitchFamily="34" charset="0"/>
+                <a:ea typeface="Malgun Gothic" pitchFamily="34" charset="-122"/>
+                <a:cs typeface="Malgun Gothic" pitchFamily="34" charset="-120"/>
+              </a:rPr>
+              <a:t>단계 2: 스케줄링 결정 (런타임 교체 가능)</a:t>
+            </a:r>
+            <a:endParaRPr lang="en-US" sz="800" dirty="0"/>
+          </a:p>
+        </p:txBody>
+      </p:sp>
+      <p:sp>
+        <p:nvSpPr>
+          <p:cNvPr id="18" name="Text 16"/>
+          <p:cNvSpPr/>
+          <p:nvPr/>
+        </p:nvSpPr>
+        <p:spPr>
+          <a:xfrm>
+            <a:off x="304800" y="1592759"/>
+            <a:ext cx="2076450" cy="514350"/>
           </a:xfrm>
           <a:prstGeom prst="rect">
             <a:avLst/>
           </a:prstGeom>
           <a:solidFill>
-            <a:srgbClr val="333333"/>
+            <a:srgbClr val="E8E8E8"/>
           </a:solidFill>
-          <a:ln/>
-        </p:spPr>
-        <p:txBody>
-          <a:bodyPr wrap="square" rtlCol="0" anchor="ctr"/>
-          <a:lstStyle/>
-          <a:p>
-            <a:pPr indent="0" marL="0">
-              <a:buNone/>
-            </a:pPr>
-            <a:endParaRPr lang="en-US" dirty="0"/>
-          </a:p>
-        </p:txBody>
-      </p:sp>
-      <p:sp>
-        <p:nvSpPr>
-          <p:cNvPr id="15" name="Text 13"/>
-          <p:cNvSpPr/>
-          <p:nvPr/>
-        </p:nvSpPr>
-        <p:spPr>
-          <a:xfrm>
-            <a:off x="552450" y="2110978"/>
-            <a:ext cx="2331720" cy="161925"/>
-          </a:xfrm>
-          <a:prstGeom prst="rect">
-            <a:avLst/>
-          </a:prstGeom>
-          <a:noFill/>
-          <a:ln/>
-        </p:spPr>
-        <p:txBody>
-          <a:bodyPr wrap="square" lIns="0" tIns="0" rIns="0" bIns="0" rtlCol="0" anchor="t"/>
-          <a:lstStyle/>
-          <a:p>
-            <a:pPr algn="l" indent="0" marL="0">
-              <a:buNone/>
-            </a:pPr>
-            <a:r>
-              <a:rPr lang="en-US" sz="1100" b="1" dirty="0">
-                <a:solidFill>
-                  <a:srgbClr val="FFFFFF"/>
-                </a:solidFill>
-                <a:latin typeface="Times New Roman" pitchFamily="34" charset="0"/>
-                <a:ea typeface="Times New Roman" pitchFamily="34" charset="-122"/>
-                <a:cs typeface="Times New Roman" pitchFamily="34" charset="-120"/>
-              </a:rPr>
-              <a:t>Scheduler Engine</a:t>
-            </a:r>
-            <a:endParaRPr lang="en-US" sz="1100" dirty="0"/>
-          </a:p>
-        </p:txBody>
-      </p:sp>
-      <p:sp>
-        <p:nvSpPr>
-          <p:cNvPr id="16" name="Text 14"/>
-          <p:cNvSpPr/>
-          <p:nvPr/>
-        </p:nvSpPr>
-        <p:spPr>
-          <a:xfrm>
-            <a:off x="552450" y="2272903"/>
-            <a:ext cx="2331720" cy="104775"/>
-          </a:xfrm>
-          <a:prstGeom prst="rect">
-            <a:avLst/>
-          </a:prstGeom>
-          <a:noFill/>
-          <a:ln/>
-        </p:spPr>
-        <p:txBody>
-          <a:bodyPr wrap="square" lIns="0" tIns="0" rIns="0" bIns="0" rtlCol="0" anchor="t"/>
-          <a:lstStyle/>
-          <a:p>
-            <a:pPr algn="l" indent="0" marL="0">
-              <a:buNone/>
-            </a:pPr>
-            <a:r>
-              <a:rPr lang="en-US" sz="800" dirty="0">
-                <a:solidFill>
-                  <a:srgbClr val="CCCCCC"/>
-                </a:solidFill>
-                <a:latin typeface="Times New Roman" pitchFamily="34" charset="0"/>
-                <a:ea typeface="Times New Roman" pitchFamily="34" charset="-122"/>
-                <a:cs typeface="Times New Roman" pitchFamily="34" charset="-120"/>
-              </a:rPr>
-              <a:t>(Runtime-swappable)</a:t>
-            </a:r>
-            <a:endParaRPr lang="en-US" sz="800" dirty="0"/>
-          </a:p>
-        </p:txBody>
-      </p:sp>
-      <p:sp>
-        <p:nvSpPr>
-          <p:cNvPr id="17" name="Text 15"/>
-          <p:cNvSpPr/>
-          <p:nvPr/>
-        </p:nvSpPr>
-        <p:spPr>
-          <a:xfrm>
-            <a:off x="3194000" y="2034778"/>
-            <a:ext cx="558701" cy="238125"/>
-          </a:xfrm>
-          <a:prstGeom prst="rect">
-            <a:avLst/>
-          </a:prstGeom>
-          <a:noFill/>
           <a:ln w="9525">
             <a:solidFill>
-              <a:srgbClr val="333333"/>
+              <a:srgbClr val="555555"/>
             </a:solidFill>
           </a:ln>
         </p:spPr>
@@ -5392,26 +4999,26 @@
       </p:sp>
       <p:sp>
         <p:nvSpPr>
-          <p:cNvPr id="18" name="Text 16"/>
-          <p:cNvSpPr/>
-          <p:nvPr/>
-        </p:nvSpPr>
-        <p:spPr>
-          <a:xfrm>
-            <a:off x="3330476" y="2082403"/>
-            <a:ext cx="291465" cy="142875"/>
-          </a:xfrm>
-          <a:prstGeom prst="rect">
-            <a:avLst/>
-          </a:prstGeom>
-          <a:noFill/>
-          <a:ln/>
-        </p:spPr>
-        <p:txBody>
-          <a:bodyPr wrap="square" lIns="0" tIns="0" rIns="0" bIns="0" rtlCol="0" anchor="t"/>
-          <a:lstStyle/>
-          <a:p>
-            <a:pPr algn="l" indent="0" marL="0">
+          <p:cNvPr id="19" name="Text 17"/>
+          <p:cNvSpPr/>
+          <p:nvPr/>
+        </p:nvSpPr>
+        <p:spPr>
+          <a:xfrm>
+            <a:off x="397282" y="1730871"/>
+            <a:ext cx="1891486" cy="133350"/>
+          </a:xfrm>
+          <a:prstGeom prst="rect">
+            <a:avLst/>
+          </a:prstGeom>
+          <a:noFill/>
+          <a:ln/>
+        </p:spPr>
+        <p:txBody>
+          <a:bodyPr wrap="square" lIns="0" tIns="0" rIns="0" bIns="0" rtlCol="0" anchor="t"/>
+          <a:lstStyle/>
+          <a:p>
+            <a:pPr algn="ctr" indent="0" marL="0">
               <a:buNone/>
             </a:pPr>
             <a:r>
@@ -5419,9 +5026,9 @@
                 <a:solidFill>
                   <a:srgbClr val="333333"/>
                 </a:solidFill>
-                <a:latin typeface="Times New Roman" pitchFamily="34" charset="0"/>
-                <a:ea typeface="Times New Roman" pitchFamily="34" charset="-122"/>
-                <a:cs typeface="Times New Roman" pitchFamily="34" charset="-120"/>
+                <a:latin typeface="Malgun Gothic" pitchFamily="34" charset="0"/>
+                <a:ea typeface="Malgun Gothic" pitchFamily="34" charset="-122"/>
+                <a:cs typeface="Malgun Gothic" pitchFamily="34" charset="-120"/>
               </a:rPr>
               <a:t>FCFS</a:t>
             </a:r>
@@ -5431,22 +5038,63 @@
       </p:sp>
       <p:sp>
         <p:nvSpPr>
-          <p:cNvPr id="19" name="Text 17"/>
-          <p:cNvSpPr/>
-          <p:nvPr/>
-        </p:nvSpPr>
-        <p:spPr>
-          <a:xfrm>
-            <a:off x="3828901" y="2034778"/>
-            <a:ext cx="660202" cy="238125"/>
-          </a:xfrm>
-          <a:prstGeom prst="rect">
-            <a:avLst/>
-          </a:prstGeom>
-          <a:noFill/>
+          <p:cNvPr id="20" name="Text 18"/>
+          <p:cNvSpPr/>
+          <p:nvPr/>
+        </p:nvSpPr>
+        <p:spPr>
+          <a:xfrm>
+            <a:off x="397282" y="1864221"/>
+            <a:ext cx="1891486" cy="104775"/>
+          </a:xfrm>
+          <a:prstGeom prst="rect">
+            <a:avLst/>
+          </a:prstGeom>
+          <a:noFill/>
+          <a:ln/>
+        </p:spPr>
+        <p:txBody>
+          <a:bodyPr wrap="square" lIns="0" tIns="0" rIns="0" bIns="0" rtlCol="0" anchor="t"/>
+          <a:lstStyle/>
+          <a:p>
+            <a:pPr algn="ctr" indent="0" marL="0">
+              <a:buNone/>
+            </a:pPr>
+            <a:r>
+              <a:rPr lang="en-US" sz="700" dirty="0">
+                <a:solidFill>
+                  <a:srgbClr val="666666"/>
+                </a:solidFill>
+                <a:latin typeface="Malgun Gothic" pitchFamily="34" charset="0"/>
+                <a:ea typeface="Malgun Gothic" pitchFamily="34" charset="-122"/>
+                <a:cs typeface="Malgun Gothic" pitchFamily="34" charset="-120"/>
+              </a:rPr>
+              <a:t>도착 순서</a:t>
+            </a:r>
+            <a:endParaRPr lang="en-US" sz="700" dirty="0"/>
+          </a:p>
+        </p:txBody>
+      </p:sp>
+      <p:sp>
+        <p:nvSpPr>
+          <p:cNvPr id="21" name="Text 19"/>
+          <p:cNvSpPr/>
+          <p:nvPr/>
+        </p:nvSpPr>
+        <p:spPr>
+          <a:xfrm>
+            <a:off x="2457450" y="1592759"/>
+            <a:ext cx="2076450" cy="514350"/>
+          </a:xfrm>
+          <a:prstGeom prst="rect">
+            <a:avLst/>
+          </a:prstGeom>
+          <a:solidFill>
+            <a:srgbClr val="E8E8E8"/>
+          </a:solidFill>
           <a:ln w="9525">
             <a:solidFill>
-              <a:srgbClr val="333333"/>
+              <a:srgbClr val="555555"/>
             </a:solidFill>
           </a:ln>
         </p:spPr>
@@ -5463,26 +5111,26 @@
       </p:sp>
       <p:sp>
         <p:nvSpPr>
-          <p:cNvPr id="20" name="Text 18"/>
-          <p:cNvSpPr/>
-          <p:nvPr/>
-        </p:nvSpPr>
-        <p:spPr>
-          <a:xfrm>
-            <a:off x="3965377" y="2082403"/>
-            <a:ext cx="394996" cy="142875"/>
-          </a:xfrm>
-          <a:prstGeom prst="rect">
-            <a:avLst/>
-          </a:prstGeom>
-          <a:noFill/>
-          <a:ln/>
-        </p:spPr>
-        <p:txBody>
-          <a:bodyPr wrap="square" lIns="0" tIns="0" rIns="0" bIns="0" rtlCol="0" anchor="t"/>
-          <a:lstStyle/>
-          <a:p>
-            <a:pPr algn="l" indent="0" marL="0">
+          <p:cNvPr id="22" name="Text 20"/>
+          <p:cNvSpPr/>
+          <p:nvPr/>
+        </p:nvSpPr>
+        <p:spPr>
+          <a:xfrm>
+            <a:off x="2549932" y="1730871"/>
+            <a:ext cx="1891486" cy="133350"/>
+          </a:xfrm>
+          <a:prstGeom prst="rect">
+            <a:avLst/>
+          </a:prstGeom>
+          <a:noFill/>
+          <a:ln/>
+        </p:spPr>
+        <p:txBody>
+          <a:bodyPr wrap="square" lIns="0" tIns="0" rIns="0" bIns="0" rtlCol="0" anchor="t"/>
+          <a:lstStyle/>
+          <a:p>
+            <a:pPr algn="ctr" indent="0" marL="0">
               <a:buNone/>
             </a:pPr>
             <a:r>
@@ -5490,9 +5138,9 @@
                 <a:solidFill>
                   <a:srgbClr val="333333"/>
                 </a:solidFill>
-                <a:latin typeface="Times New Roman" pitchFamily="34" charset="0"/>
-                <a:ea typeface="Times New Roman" pitchFamily="34" charset="-122"/>
-                <a:cs typeface="Times New Roman" pitchFamily="34" charset="-120"/>
+                <a:latin typeface="Malgun Gothic" pitchFamily="34" charset="0"/>
+                <a:ea typeface="Malgun Gothic" pitchFamily="34" charset="-122"/>
+                <a:cs typeface="Malgun Gothic" pitchFamily="34" charset="-120"/>
               </a:rPr>
               <a:t>Priority</a:t>
             </a:r>
@@ -5502,22 +5150,63 @@
       </p:sp>
       <p:sp>
         <p:nvSpPr>
-          <p:cNvPr id="21" name="Text 19"/>
-          <p:cNvSpPr/>
-          <p:nvPr/>
-        </p:nvSpPr>
-        <p:spPr>
-          <a:xfrm>
-            <a:off x="4565303" y="2034778"/>
-            <a:ext cx="615851" cy="238125"/>
-          </a:xfrm>
-          <a:prstGeom prst="rect">
-            <a:avLst/>
-          </a:prstGeom>
-          <a:noFill/>
+          <p:cNvPr id="23" name="Text 21"/>
+          <p:cNvSpPr/>
+          <p:nvPr/>
+        </p:nvSpPr>
+        <p:spPr>
+          <a:xfrm>
+            <a:off x="2549932" y="1864221"/>
+            <a:ext cx="1891486" cy="104775"/>
+          </a:xfrm>
+          <a:prstGeom prst="rect">
+            <a:avLst/>
+          </a:prstGeom>
+          <a:noFill/>
+          <a:ln/>
+        </p:spPr>
+        <p:txBody>
+          <a:bodyPr wrap="square" lIns="0" tIns="0" rIns="0" bIns="0" rtlCol="0" anchor="t"/>
+          <a:lstStyle/>
+          <a:p>
+            <a:pPr algn="ctr" indent="0" marL="0">
+              <a:buNone/>
+            </a:pPr>
+            <a:r>
+              <a:rPr lang="en-US" sz="700" dirty="0">
+                <a:solidFill>
+                  <a:srgbClr val="666666"/>
+                </a:solidFill>
+                <a:latin typeface="Malgun Gothic" pitchFamily="34" charset="0"/>
+                <a:ea typeface="Malgun Gothic" pitchFamily="34" charset="-122"/>
+                <a:cs typeface="Malgun Gothic" pitchFamily="34" charset="-120"/>
+              </a:rPr>
+              <a:t>4단계 + 에이징</a:t>
+            </a:r>
+            <a:endParaRPr lang="en-US" sz="700" dirty="0"/>
+          </a:p>
+        </p:txBody>
+      </p:sp>
+      <p:sp>
+        <p:nvSpPr>
+          <p:cNvPr id="24" name="Text 22"/>
+          <p:cNvSpPr/>
+          <p:nvPr/>
+        </p:nvSpPr>
+        <p:spPr>
+          <a:xfrm>
+            <a:off x="4610100" y="1592759"/>
+            <a:ext cx="2076450" cy="514350"/>
+          </a:xfrm>
+          <a:prstGeom prst="rect">
+            <a:avLst/>
+          </a:prstGeom>
+          <a:solidFill>
+            <a:srgbClr val="D5E8F0"/>
+          </a:solidFill>
           <a:ln w="9525">
             <a:solidFill>
-              <a:srgbClr val="333333"/>
+              <a:srgbClr val="2B579A"/>
             </a:solidFill>
           </a:ln>
         </p:spPr>
@@ -5534,36 +5223,36 @@
       </p:sp>
       <p:sp>
         <p:nvSpPr>
-          <p:cNvPr id="22" name="Text 20"/>
-          <p:cNvSpPr/>
-          <p:nvPr/>
-        </p:nvSpPr>
-        <p:spPr>
-          <a:xfrm>
-            <a:off x="4701778" y="2082403"/>
-            <a:ext cx="349758" cy="142875"/>
-          </a:xfrm>
-          <a:prstGeom prst="rect">
-            <a:avLst/>
-          </a:prstGeom>
-          <a:noFill/>
-          <a:ln/>
-        </p:spPr>
-        <p:txBody>
-          <a:bodyPr wrap="square" lIns="0" tIns="0" rIns="0" bIns="0" rtlCol="0" anchor="t"/>
-          <a:lstStyle/>
-          <a:p>
-            <a:pPr algn="l" indent="0" marL="0">
+          <p:cNvPr id="25" name="Text 23"/>
+          <p:cNvSpPr/>
+          <p:nvPr/>
+        </p:nvSpPr>
+        <p:spPr>
+          <a:xfrm>
+            <a:off x="4702582" y="1678484"/>
+            <a:ext cx="1891486" cy="133350"/>
+          </a:xfrm>
+          <a:prstGeom prst="rect">
+            <a:avLst/>
+          </a:prstGeom>
+          <a:noFill/>
+          <a:ln/>
+        </p:spPr>
+        <p:txBody>
+          <a:bodyPr wrap="square" lIns="0" tIns="0" rIns="0" bIns="0" rtlCol="0" anchor="t"/>
+          <a:lstStyle/>
+          <a:p>
+            <a:pPr algn="ctr" indent="0" marL="0">
               <a:buNone/>
             </a:pPr>
             <a:r>
               <a:rPr lang="en-US" sz="900" b="1" dirty="0">
                 <a:solidFill>
-                  <a:srgbClr val="333333"/>
-                </a:solidFill>
-                <a:latin typeface="Times New Roman" pitchFamily="34" charset="0"/>
-                <a:ea typeface="Times New Roman" pitchFamily="34" charset="-122"/>
-                <a:cs typeface="Times New Roman" pitchFamily="34" charset="-120"/>
+                  <a:srgbClr val="2B579A"/>
+                </a:solidFill>
+                <a:latin typeface="Malgun Gothic" pitchFamily="34" charset="0"/>
+                <a:ea typeface="Malgun Gothic" pitchFamily="34" charset="-122"/>
+                <a:cs typeface="Malgun Gothic" pitchFamily="34" charset="-120"/>
               </a:rPr>
               <a:t>MLFQ</a:t>
             </a:r>
@@ -5573,22 +5262,102 @@
       </p:sp>
       <p:sp>
         <p:nvSpPr>
-          <p:cNvPr id="23" name="Text 21"/>
-          <p:cNvSpPr/>
-          <p:nvPr/>
-        </p:nvSpPr>
-        <p:spPr>
-          <a:xfrm>
-            <a:off x="5257354" y="2034778"/>
-            <a:ext cx="546050" cy="238125"/>
-          </a:xfrm>
-          <a:prstGeom prst="rect">
-            <a:avLst/>
-          </a:prstGeom>
-          <a:noFill/>
+          <p:cNvPr id="26" name="Text 24"/>
+          <p:cNvSpPr/>
+          <p:nvPr/>
+        </p:nvSpPr>
+        <p:spPr>
+          <a:xfrm>
+            <a:off x="4702582" y="1811834"/>
+            <a:ext cx="1891486" cy="104775"/>
+          </a:xfrm>
+          <a:prstGeom prst="rect">
+            <a:avLst/>
+          </a:prstGeom>
+          <a:noFill/>
+          <a:ln/>
+        </p:spPr>
+        <p:txBody>
+          <a:bodyPr wrap="square" lIns="0" tIns="0" rIns="0" bIns="0" rtlCol="0" anchor="t"/>
+          <a:lstStyle/>
+          <a:p>
+            <a:pPr algn="ctr" indent="0" marL="0">
+              <a:buNone/>
+            </a:pPr>
+            <a:r>
+              <a:rPr lang="en-US" sz="700" dirty="0">
+                <a:solidFill>
+                  <a:srgbClr val="555555"/>
+                </a:solidFill>
+                <a:latin typeface="Malgun Gothic" pitchFamily="34" charset="0"/>
+                <a:ea typeface="Malgun Gothic" pitchFamily="34" charset="-122"/>
+                <a:cs typeface="Malgun Gothic" pitchFamily="34" charset="-120"/>
+              </a:rPr>
+              <a:t>4단계 큐 + 선점</a:t>
+            </a:r>
+            <a:endParaRPr lang="en-US" sz="700" dirty="0"/>
+          </a:p>
+        </p:txBody>
+      </p:sp>
+      <p:sp>
+        <p:nvSpPr>
+          <p:cNvPr id="27" name="Text 25"/>
+          <p:cNvSpPr/>
+          <p:nvPr/>
+        </p:nvSpPr>
+        <p:spPr>
+          <a:xfrm>
+            <a:off x="4702582" y="1916609"/>
+            <a:ext cx="1891486" cy="104775"/>
+          </a:xfrm>
+          <a:prstGeom prst="rect">
+            <a:avLst/>
+          </a:prstGeom>
+          <a:noFill/>
+          <a:ln/>
+        </p:spPr>
+        <p:txBody>
+          <a:bodyPr wrap="square" lIns="0" tIns="0" rIns="0" bIns="0" rtlCol="0" anchor="t"/>
+          <a:lstStyle/>
+          <a:p>
+            <a:pPr algn="ctr" indent="0" marL="0">
+              <a:buNone/>
+            </a:pPr>
+            <a:r>
+              <a:rPr lang="en-US" sz="650" i="1" dirty="0">
+                <a:solidFill>
+                  <a:srgbClr val="888888"/>
+                </a:solidFill>
+                <a:latin typeface="Malgun Gothic" pitchFamily="34" charset="0"/>
+                <a:ea typeface="Malgun Gothic" pitchFamily="34" charset="-122"/>
+                <a:cs typeface="Malgun Gothic" pitchFamily="34" charset="-120"/>
+              </a:rPr>
+              <a:t>Q0:500ms Q1:1.5s Q2:4s Q3:무제한</a:t>
+            </a:r>
+            <a:endParaRPr lang="en-US" sz="650" dirty="0"/>
+          </a:p>
+        </p:txBody>
+      </p:sp>
+      <p:sp>
+        <p:nvSpPr>
+          <p:cNvPr id="28" name="Text 26"/>
+          <p:cNvSpPr/>
+          <p:nvPr/>
+        </p:nvSpPr>
+        <p:spPr>
+          <a:xfrm>
+            <a:off x="6762750" y="1592759"/>
+            <a:ext cx="2076450" cy="514350"/>
+          </a:xfrm>
+          <a:prstGeom prst="rect">
+            <a:avLst/>
+          </a:prstGeom>
+          <a:solidFill>
+            <a:srgbClr val="D5E8F0"/>
+          </a:solidFill>
           <a:ln w="9525">
             <a:solidFill>
-              <a:srgbClr val="333333"/>
+              <a:srgbClr val="2B579A"/>
             </a:solidFill>
           </a:ln>
         </p:spPr>
@@ -5605,14 +5374,131 @@
       </p:sp>
       <p:sp>
         <p:nvSpPr>
-          <p:cNvPr id="24" name="Text 22"/>
-          <p:cNvSpPr/>
-          <p:nvPr/>
-        </p:nvSpPr>
-        <p:spPr>
-          <a:xfrm>
-            <a:off x="5393829" y="2082403"/>
-            <a:ext cx="278562" cy="142875"/>
+          <p:cNvPr id="29" name="Text 27"/>
+          <p:cNvSpPr/>
+          <p:nvPr/>
+        </p:nvSpPr>
+        <p:spPr>
+          <a:xfrm>
+            <a:off x="6855232" y="1678484"/>
+            <a:ext cx="1891486" cy="133350"/>
+          </a:xfrm>
+          <a:prstGeom prst="rect">
+            <a:avLst/>
+          </a:prstGeom>
+          <a:noFill/>
+          <a:ln/>
+        </p:spPr>
+        <p:txBody>
+          <a:bodyPr wrap="square" lIns="0" tIns="0" rIns="0" bIns="0" rtlCol="0" anchor="t"/>
+          <a:lstStyle/>
+          <a:p>
+            <a:pPr algn="ctr" indent="0" marL="0">
+              <a:buNone/>
+            </a:pPr>
+            <a:r>
+              <a:rPr lang="en-US" sz="900" b="1" dirty="0">
+                <a:solidFill>
+                  <a:srgbClr val="2B579A"/>
+                </a:solidFill>
+                <a:latin typeface="Malgun Gothic" pitchFamily="34" charset="0"/>
+                <a:ea typeface="Malgun Gothic" pitchFamily="34" charset="-122"/>
+                <a:cs typeface="Malgun Gothic" pitchFamily="34" charset="-120"/>
+              </a:rPr>
+              <a:t>WFQ</a:t>
+            </a:r>
+            <a:endParaRPr lang="en-US" sz="900" dirty="0"/>
+          </a:p>
+        </p:txBody>
+      </p:sp>
+      <p:sp>
+        <p:nvSpPr>
+          <p:cNvPr id="30" name="Text 28"/>
+          <p:cNvSpPr/>
+          <p:nvPr/>
+        </p:nvSpPr>
+        <p:spPr>
+          <a:xfrm>
+            <a:off x="6855232" y="1811834"/>
+            <a:ext cx="1891486" cy="104775"/>
+          </a:xfrm>
+          <a:prstGeom prst="rect">
+            <a:avLst/>
+          </a:prstGeom>
+          <a:noFill/>
+          <a:ln/>
+        </p:spPr>
+        <p:txBody>
+          <a:bodyPr wrap="square" lIns="0" tIns="0" rIns="0" bIns="0" rtlCol="0" anchor="t"/>
+          <a:lstStyle/>
+          <a:p>
+            <a:pPr algn="ctr" indent="0" marL="0">
+              <a:buNone/>
+            </a:pPr>
+            <a:r>
+              <a:rPr lang="en-US" sz="700" dirty="0">
+                <a:solidFill>
+                  <a:srgbClr val="555555"/>
+                </a:solidFill>
+                <a:latin typeface="Malgun Gothic" pitchFamily="34" charset="0"/>
+                <a:ea typeface="Malgun Gothic" pitchFamily="34" charset="-122"/>
+                <a:cs typeface="Malgun Gothic" pitchFamily="34" charset="-120"/>
+              </a:rPr>
+              <a:t>가상 종료 시각</a:t>
+            </a:r>
+            <a:endParaRPr lang="en-US" sz="700" dirty="0"/>
+          </a:p>
+        </p:txBody>
+      </p:sp>
+      <p:sp>
+        <p:nvSpPr>
+          <p:cNvPr id="31" name="Text 29"/>
+          <p:cNvSpPr/>
+          <p:nvPr/>
+        </p:nvSpPr>
+        <p:spPr>
+          <a:xfrm>
+            <a:off x="6855232" y="1916609"/>
+            <a:ext cx="1891486" cy="104775"/>
+          </a:xfrm>
+          <a:prstGeom prst="rect">
+            <a:avLst/>
+          </a:prstGeom>
+          <a:noFill/>
+          <a:ln/>
+        </p:spPr>
+        <p:txBody>
+          <a:bodyPr wrap="square" lIns="0" tIns="0" rIns="0" bIns="0" rtlCol="0" anchor="t"/>
+          <a:lstStyle/>
+          <a:p>
+            <a:pPr algn="ctr" indent="0" marL="0">
+              <a:buNone/>
+            </a:pPr>
+            <a:r>
+              <a:rPr lang="en-US" sz="650" i="1" dirty="0">
+                <a:solidFill>
+                  <a:srgbClr val="888888"/>
+                </a:solidFill>
+                <a:latin typeface="Malgun Gothic" pitchFamily="34" charset="0"/>
+                <a:ea typeface="Malgun Gothic" pitchFamily="34" charset="-122"/>
+                <a:cs typeface="Malgun Gothic" pitchFamily="34" charset="-120"/>
+              </a:rPr>
+              <a:t>가중치: 100/50/10/1</a:t>
+            </a:r>
+            <a:endParaRPr lang="en-US" sz="650" dirty="0"/>
+          </a:p>
+        </p:txBody>
+      </p:sp>
+      <p:sp>
+        <p:nvSpPr>
+          <p:cNvPr id="32" name="Text 30"/>
+          <p:cNvSpPr/>
+          <p:nvPr/>
+        </p:nvSpPr>
+        <p:spPr>
+          <a:xfrm>
+            <a:off x="3470225" y="2145060"/>
+            <a:ext cx="2247620" cy="114300"/>
           </a:xfrm>
           <a:prstGeom prst="rect">
             <a:avLst/>
@@ -5628,62 +5514,30 @@
               <a:buNone/>
             </a:pPr>
             <a:r>
-              <a:rPr lang="en-US" sz="900" b="1" dirty="0">
-                <a:solidFill>
-                  <a:srgbClr val="333333"/>
-                </a:solidFill>
-                <a:latin typeface="Times New Roman" pitchFamily="34" charset="0"/>
-                <a:ea typeface="Times New Roman" pitchFamily="34" charset="-122"/>
-                <a:cs typeface="Times New Roman" pitchFamily="34" charset="-120"/>
-              </a:rPr>
-              <a:t>WFQ</a:t>
-            </a:r>
-            <a:endParaRPr lang="en-US" sz="900" dirty="0"/>
-          </a:p>
-        </p:txBody>
-      </p:sp>
-      <p:sp>
-        <p:nvSpPr>
-          <p:cNvPr id="25" name="Text 23"/>
-          <p:cNvSpPr/>
-          <p:nvPr/>
-        </p:nvSpPr>
-        <p:spPr>
-          <a:xfrm>
-            <a:off x="5879604" y="2034778"/>
-            <a:ext cx="904577" cy="238125"/>
-          </a:xfrm>
-          <a:prstGeom prst="rect">
-            <a:avLst/>
-          </a:prstGeom>
-          <a:noFill/>
-          <a:ln w="9525">
-            <a:solidFill>
-              <a:srgbClr val="333333"/>
-            </a:solidFill>
-          </a:ln>
-        </p:spPr>
-        <p:txBody>
-          <a:bodyPr wrap="square" rtlCol="0" anchor="ctr"/>
-          <a:lstStyle/>
-          <a:p>
-            <a:pPr indent="0" marL="0">
-              <a:buNone/>
-            </a:pPr>
-            <a:endParaRPr lang="en-US" dirty="0"/>
-          </a:p>
-        </p:txBody>
-      </p:sp>
-      <p:sp>
-        <p:nvSpPr>
-          <p:cNvPr id="26" name="Text 24"/>
-          <p:cNvSpPr/>
-          <p:nvPr/>
-        </p:nvSpPr>
-        <p:spPr>
-          <a:xfrm>
-            <a:off x="6016079" y="2082403"/>
-            <a:ext cx="644259" cy="142875"/>
+              <a:rPr lang="en-US" sz="700" i="1" dirty="0">
+                <a:solidFill>
+                  <a:srgbClr val="999999"/>
+                </a:solidFill>
+                <a:latin typeface="Malgun Gothic" pitchFamily="34" charset="0"/>
+                <a:ea typeface="Malgun Gothic" pitchFamily="34" charset="-122"/>
+                <a:cs typeface="Malgun Gothic" pitchFamily="34" charset="-120"/>
+              </a:rPr>
+              <a:t>PUT /api/scheduler → 런타임 알고리즘 전환 (재시작 불필요)</a:t>
+            </a:r>
+            <a:endParaRPr lang="en-US" sz="700" dirty="0"/>
+          </a:p>
+        </p:txBody>
+      </p:sp>
+      <p:sp>
+        <p:nvSpPr>
+          <p:cNvPr id="33" name="Text 31"/>
+          <p:cNvSpPr/>
+          <p:nvPr/>
+        </p:nvSpPr>
+        <p:spPr>
+          <a:xfrm>
+            <a:off x="4497288" y="2297311"/>
+            <a:ext cx="152412" cy="180975"/>
           </a:xfrm>
           <a:prstGeom prst="rect">
             <a:avLst/>
@@ -5699,30 +5553,30 @@
               <a:buNone/>
             </a:pPr>
             <a:r>
-              <a:rPr lang="en-US" sz="900" b="1" dirty="0">
-                <a:solidFill>
-                  <a:srgbClr val="333333"/>
-                </a:solidFill>
-                <a:latin typeface="Times New Roman" pitchFamily="34" charset="0"/>
-                <a:ea typeface="Times New Roman" pitchFamily="34" charset="-122"/>
-                <a:cs typeface="Times New Roman" pitchFamily="34" charset="-120"/>
-              </a:rPr>
-              <a:t>Rate Limiter</a:t>
-            </a:r>
-            <a:endParaRPr lang="en-US" sz="900" dirty="0"/>
-          </a:p>
-        </p:txBody>
-      </p:sp>
-      <p:sp>
-        <p:nvSpPr>
-          <p:cNvPr id="27" name="Text 25"/>
-          <p:cNvSpPr/>
-          <p:nvPr/>
-        </p:nvSpPr>
-        <p:spPr>
-          <a:xfrm>
-            <a:off x="3194000" y="2349103"/>
-            <a:ext cx="2190693" cy="104775"/>
+              <a:rPr lang="en-US" sz="1200" dirty="0">
+                <a:solidFill>
+                  <a:srgbClr val="888888"/>
+                </a:solidFill>
+                <a:latin typeface="Malgun Gothic" pitchFamily="34" charset="0"/>
+                <a:ea typeface="Malgun Gothic" pitchFamily="34" charset="-122"/>
+                <a:cs typeface="Malgun Gothic" pitchFamily="34" charset="-120"/>
+              </a:rPr>
+              <a:t>▼</a:t>
+            </a:r>
+            <a:endParaRPr lang="en-US" sz="1200" dirty="0"/>
+          </a:p>
+        </p:txBody>
+      </p:sp>
+      <p:sp>
+        <p:nvSpPr>
+          <p:cNvPr id="34" name="Text 32"/>
+          <p:cNvSpPr/>
+          <p:nvPr/>
+        </p:nvSpPr>
+        <p:spPr>
+          <a:xfrm>
+            <a:off x="406301" y="2528888"/>
+            <a:ext cx="8498026" cy="123825"/>
           </a:xfrm>
           <a:prstGeom prst="rect">
             <a:avLst/>
@@ -5738,15 +5592,15 @@
               <a:buNone/>
             </a:pPr>
             <a:r>
-              <a:rPr lang="en-US" sz="800" i="1" dirty="0">
-                <a:solidFill>
-                  <a:srgbClr val="666666"/>
-                </a:solidFill>
-                <a:latin typeface="Times New Roman" pitchFamily="34" charset="0"/>
-                <a:ea typeface="Times New Roman" pitchFamily="34" charset="-122"/>
-                <a:cs typeface="Times New Roman" pitchFamily="34" charset="-120"/>
-              </a:rPr>
-              <a:t>Features: Aging, Boost, Dual-level JFI measurement</a:t>
+              <a:rPr lang="en-US" sz="800" b="1" dirty="0">
+                <a:solidFill>
+                  <a:srgbClr val="888888"/>
+                </a:solidFill>
+                <a:latin typeface="Malgun Gothic" pitchFamily="34" charset="0"/>
+                <a:ea typeface="Malgun Gothic" pitchFamily="34" charset="-122"/>
+                <a:cs typeface="Malgun Gothic" pitchFamily="34" charset="-120"/>
+              </a:rPr>
+              <a:t>단계 3: 실행 및 응답</a:t>
             </a:r>
             <a:endParaRPr lang="en-US" sz="800" dirty="0"/>
           </a:p>
@@ -5754,58 +5608,21 @@
       </p:sp>
       <p:sp>
         <p:nvSpPr>
-          <p:cNvPr id="28" name="Text 26"/>
-          <p:cNvSpPr/>
-          <p:nvPr/>
-        </p:nvSpPr>
-        <p:spPr>
-          <a:xfrm>
-            <a:off x="4496544" y="2650629"/>
-            <a:ext cx="153930" cy="171450"/>
-          </a:xfrm>
-          <a:prstGeom prst="rect">
-            <a:avLst/>
-          </a:prstGeom>
-          <a:noFill/>
-          <a:ln/>
-        </p:spPr>
-        <p:txBody>
-          <a:bodyPr wrap="square" lIns="0" tIns="0" rIns="0" bIns="0" rtlCol="0" anchor="t"/>
-          <a:lstStyle/>
-          <a:p>
-            <a:pPr algn="l" indent="0" marL="0">
-              <a:buNone/>
-            </a:pPr>
-            <a:r>
-              <a:rPr lang="en-US" sz="1200" dirty="0">
-                <a:solidFill>
-                  <a:srgbClr val="888888"/>
-                </a:solidFill>
-                <a:latin typeface="Times New Roman" pitchFamily="34" charset="0"/>
-                <a:ea typeface="Times New Roman" pitchFamily="34" charset="-122"/>
-                <a:cs typeface="Times New Roman" pitchFamily="34" charset="-120"/>
-              </a:rPr>
-              <a:t>▼</a:t>
-            </a:r>
-            <a:endParaRPr lang="en-US" sz="1200" dirty="0"/>
-          </a:p>
-        </p:txBody>
-      </p:sp>
-      <p:sp>
-        <p:nvSpPr>
-          <p:cNvPr id="29" name="Text 27"/>
-          <p:cNvSpPr/>
-          <p:nvPr/>
-        </p:nvSpPr>
-        <p:spPr>
-          <a:xfrm>
-            <a:off x="381000" y="2898279"/>
-            <a:ext cx="8382000" cy="453926"/>
-          </a:xfrm>
-          <a:prstGeom prst="rect">
-            <a:avLst/>
-          </a:prstGeom>
-          <a:noFill/>
+          <p:cNvPr id="35" name="Text 33"/>
+          <p:cNvSpPr/>
+          <p:nvPr/>
+        </p:nvSpPr>
+        <p:spPr>
+          <a:xfrm>
+            <a:off x="304800" y="2728764"/>
+            <a:ext cx="4749998" cy="641152"/>
+          </a:xfrm>
+          <a:prstGeom prst="rect">
+            <a:avLst/>
+          </a:prstGeom>
+          <a:solidFill>
+            <a:srgbClr val="F5F5F5"/>
+          </a:solidFill>
           <a:ln w="19050">
             <a:solidFill>
               <a:srgbClr val="333333"/>
@@ -5825,22 +5642,143 @@
       </p:sp>
       <p:sp>
         <p:nvSpPr>
-          <p:cNvPr id="30" name="Text 28"/>
-          <p:cNvSpPr/>
-          <p:nvPr/>
-        </p:nvSpPr>
-        <p:spPr>
-          <a:xfrm>
-            <a:off x="400050" y="2917329"/>
-            <a:ext cx="2590800" cy="415826"/>
+          <p:cNvPr id="36" name="Text 34"/>
+          <p:cNvSpPr/>
+          <p:nvPr/>
+        </p:nvSpPr>
+        <p:spPr>
+          <a:xfrm>
+            <a:off x="406220" y="2911227"/>
+            <a:ext cx="4547158" cy="152400"/>
+          </a:xfrm>
+          <a:prstGeom prst="rect">
+            <a:avLst/>
+          </a:prstGeom>
+          <a:noFill/>
+          <a:ln/>
+        </p:spPr>
+        <p:txBody>
+          <a:bodyPr wrap="square" lIns="0" tIns="0" rIns="0" bIns="0" rtlCol="0" anchor="t"/>
+          <a:lstStyle/>
+          <a:p>
+            <a:pPr algn="ctr" indent="0" marL="0">
+              <a:buNone/>
+            </a:pPr>
+            <a:r>
+              <a:rPr lang="en-US" sz="1000" b="1" dirty="0">
+                <a:solidFill>
+                  <a:srgbClr val="333333"/>
+                </a:solidFill>
+                <a:latin typeface="Malgun Gothic" pitchFamily="34" charset="0"/>
+                <a:ea typeface="Malgun Gothic" pitchFamily="34" charset="-122"/>
+                <a:cs typeface="Malgun Gothic" pitchFamily="34" charset="-120"/>
+              </a:rPr>
+              <a:t>요청 관리자</a:t>
+            </a:r>
+            <a:endParaRPr lang="en-US" sz="1000" dirty="0"/>
+          </a:p>
+        </p:txBody>
+      </p:sp>
+      <p:sp>
+        <p:nvSpPr>
+          <p:cNvPr id="37" name="Text 35"/>
+          <p:cNvSpPr/>
+          <p:nvPr/>
+        </p:nvSpPr>
+        <p:spPr>
+          <a:xfrm>
+            <a:off x="406220" y="3063627"/>
+            <a:ext cx="4547158" cy="123825"/>
+          </a:xfrm>
+          <a:prstGeom prst="rect">
+            <a:avLst/>
+          </a:prstGeom>
+          <a:noFill/>
+          <a:ln/>
+        </p:spPr>
+        <p:txBody>
+          <a:bodyPr wrap="square" lIns="0" tIns="0" rIns="0" bIns="0" rtlCol="0" anchor="t"/>
+          <a:lstStyle/>
+          <a:p>
+            <a:pPr algn="ctr" indent="0" marL="0">
+              <a:buNone/>
+            </a:pPr>
+            <a:r>
+              <a:rPr lang="en-US" sz="750" dirty="0">
+                <a:solidFill>
+                  <a:srgbClr val="666666"/>
+                </a:solidFill>
+                <a:latin typeface="Malgun Gothic" pitchFamily="34" charset="0"/>
+                <a:ea typeface="Malgun Gothic" pitchFamily="34" charset="-122"/>
+                <a:cs typeface="Malgun Gothic" pitchFamily="34" charset="-120"/>
+              </a:rPr>
+              <a:t>다음 요청 추출 · LLM 백엔드로 전달</a:t>
+            </a:r>
+            <a:endParaRPr lang="en-US" sz="750" dirty="0"/>
+          </a:p>
+        </p:txBody>
+      </p:sp>
+      <p:sp>
+        <p:nvSpPr>
+          <p:cNvPr id="38" name="Text 36"/>
+          <p:cNvSpPr/>
+          <p:nvPr/>
+        </p:nvSpPr>
+        <p:spPr>
+          <a:xfrm>
+            <a:off x="5130998" y="2944564"/>
+            <a:ext cx="181407" cy="209550"/>
+          </a:xfrm>
+          <a:prstGeom prst="rect">
+            <a:avLst/>
+          </a:prstGeom>
+          <a:noFill/>
+          <a:ln/>
+        </p:spPr>
+        <p:txBody>
+          <a:bodyPr wrap="square" lIns="0" tIns="0" rIns="0" bIns="0" rtlCol="0" anchor="t"/>
+          <a:lstStyle/>
+          <a:p>
+            <a:pPr algn="l" indent="0" marL="0">
+              <a:buNone/>
+            </a:pPr>
+            <a:r>
+              <a:rPr lang="en-US" sz="1400" dirty="0">
+                <a:solidFill>
+                  <a:srgbClr val="333333"/>
+                </a:solidFill>
+                <a:latin typeface="Malgun Gothic" pitchFamily="34" charset="0"/>
+                <a:ea typeface="Malgun Gothic" pitchFamily="34" charset="-122"/>
+                <a:cs typeface="Malgun Gothic" pitchFamily="34" charset="-120"/>
+              </a:rPr>
+              <a:t>→</a:t>
+            </a:r>
+            <a:endParaRPr lang="en-US" sz="1400" dirty="0"/>
+          </a:p>
+        </p:txBody>
+      </p:sp>
+      <p:sp>
+        <p:nvSpPr>
+          <p:cNvPr id="39" name="Text 37"/>
+          <p:cNvSpPr/>
+          <p:nvPr/>
+        </p:nvSpPr>
+        <p:spPr>
+          <a:xfrm>
+            <a:off x="5385048" y="2728764"/>
+            <a:ext cx="1688902" cy="641152"/>
           </a:xfrm>
           <a:prstGeom prst="rect">
             <a:avLst/>
           </a:prstGeom>
           <a:solidFill>
-            <a:srgbClr val="555555"/>
+            <a:srgbClr val="333333"/>
           </a:solidFill>
-          <a:ln/>
+          <a:ln w="19050">
+            <a:solidFill>
+              <a:srgbClr val="333333"/>
+            </a:solidFill>
+          </a:ln>
         </p:spPr>
         <p:txBody>
           <a:bodyPr wrap="square" rtlCol="0" anchor="ctr"/>
@@ -5855,14 +5793,92 @@
       </p:sp>
       <p:sp>
         <p:nvSpPr>
-          <p:cNvPr id="31" name="Text 29"/>
-          <p:cNvSpPr/>
-          <p:nvPr/>
-        </p:nvSpPr>
-        <p:spPr>
-          <a:xfrm>
-            <a:off x="552450" y="3044279"/>
-            <a:ext cx="2331720" cy="161925"/>
+          <p:cNvPr id="40" name="Text 38"/>
+          <p:cNvSpPr/>
+          <p:nvPr/>
+        </p:nvSpPr>
+        <p:spPr>
+          <a:xfrm>
+            <a:off x="5517079" y="2915989"/>
+            <a:ext cx="1424839" cy="142875"/>
+          </a:xfrm>
+          <a:prstGeom prst="rect">
+            <a:avLst/>
+          </a:prstGeom>
+          <a:noFill/>
+          <a:ln/>
+        </p:spPr>
+        <p:txBody>
+          <a:bodyPr wrap="square" lIns="0" tIns="0" rIns="0" bIns="0" rtlCol="0" anchor="t"/>
+          <a:lstStyle/>
+          <a:p>
+            <a:pPr algn="ctr" indent="0" marL="0">
+              <a:buNone/>
+            </a:pPr>
+            <a:r>
+              <a:rPr lang="en-US" sz="1000" b="1" dirty="0">
+                <a:solidFill>
+                  <a:srgbClr val="FFFFFF"/>
+                </a:solidFill>
+                <a:latin typeface="Malgun Gothic" pitchFamily="34" charset="0"/>
+                <a:ea typeface="Malgun Gothic" pitchFamily="34" charset="-122"/>
+                <a:cs typeface="Malgun Gothic" pitchFamily="34" charset="-120"/>
+              </a:rPr>
+              <a:t>Ollama (LLM)</a:t>
+            </a:r>
+            <a:endParaRPr lang="en-US" sz="1000" dirty="0"/>
+          </a:p>
+        </p:txBody>
+      </p:sp>
+      <p:sp>
+        <p:nvSpPr>
+          <p:cNvPr id="41" name="Text 39"/>
+          <p:cNvSpPr/>
+          <p:nvPr/>
+        </p:nvSpPr>
+        <p:spPr>
+          <a:xfrm>
+            <a:off x="5517079" y="3058864"/>
+            <a:ext cx="1424839" cy="123825"/>
+          </a:xfrm>
+          <a:prstGeom prst="rect">
+            <a:avLst/>
+          </a:prstGeom>
+          <a:noFill/>
+          <a:ln/>
+        </p:spPr>
+        <p:txBody>
+          <a:bodyPr wrap="square" lIns="0" tIns="0" rIns="0" bIns="0" rtlCol="0" anchor="t"/>
+          <a:lstStyle/>
+          <a:p>
+            <a:pPr algn="ctr" indent="0" marL="0">
+              <a:buNone/>
+            </a:pPr>
+            <a:r>
+              <a:rPr lang="en-US" sz="750" dirty="0">
+                <a:solidFill>
+                  <a:srgbClr val="CCCCCC"/>
+                </a:solidFill>
+                <a:latin typeface="Malgun Gothic" pitchFamily="34" charset="0"/>
+                <a:ea typeface="Malgun Gothic" pitchFamily="34" charset="-122"/>
+                <a:cs typeface="Malgun Gothic" pitchFamily="34" charset="-120"/>
+              </a:rPr>
+              <a:t>로컬 추론</a:t>
+            </a:r>
+            <a:endParaRPr lang="en-US" sz="750" dirty="0"/>
+          </a:p>
+        </p:txBody>
+      </p:sp>
+      <p:sp>
+        <p:nvSpPr>
+          <p:cNvPr id="42" name="Text 40"/>
+          <p:cNvSpPr/>
+          <p:nvPr/>
+        </p:nvSpPr>
+        <p:spPr>
+          <a:xfrm>
+            <a:off x="7150150" y="2944564"/>
+            <a:ext cx="181407" cy="209550"/>
           </a:xfrm>
           <a:prstGeom prst="rect">
             <a:avLst/>
@@ -5878,30 +5894,213 @@
               <a:buNone/>
             </a:pPr>
             <a:r>
-              <a:rPr lang="en-US" sz="1100" b="1" dirty="0">
-                <a:solidFill>
-                  <a:srgbClr val="FFFFFF"/>
-                </a:solidFill>
-                <a:latin typeface="Times New Roman" pitchFamily="34" charset="0"/>
-                <a:ea typeface="Times New Roman" pitchFamily="34" charset="-122"/>
-                <a:cs typeface="Times New Roman" pitchFamily="34" charset="-120"/>
-              </a:rPr>
-              <a:t>Storage Layer</a:t>
-            </a:r>
-            <a:endParaRPr lang="en-US" sz="1100" dirty="0"/>
-          </a:p>
-        </p:txBody>
-      </p:sp>
-      <p:sp>
-        <p:nvSpPr>
-          <p:cNvPr id="32" name="Text 30"/>
-          <p:cNvSpPr/>
-          <p:nvPr/>
-        </p:nvSpPr>
-        <p:spPr>
-          <a:xfrm>
-            <a:off x="3194000" y="3049042"/>
-            <a:ext cx="3675799" cy="152400"/>
+              <a:rPr lang="en-US" sz="1400" dirty="0">
+                <a:solidFill>
+                  <a:srgbClr val="333333"/>
+                </a:solidFill>
+                <a:latin typeface="Malgun Gothic" pitchFamily="34" charset="0"/>
+                <a:ea typeface="Malgun Gothic" pitchFamily="34" charset="-122"/>
+                <a:cs typeface="Malgun Gothic" pitchFamily="34" charset="-120"/>
+              </a:rPr>
+              <a:t>→</a:t>
+            </a:r>
+            <a:endParaRPr lang="en-US" sz="1400" dirty="0"/>
+          </a:p>
+        </p:txBody>
+      </p:sp>
+      <p:sp>
+        <p:nvSpPr>
+          <p:cNvPr id="43" name="Text 41"/>
+          <p:cNvSpPr/>
+          <p:nvPr/>
+        </p:nvSpPr>
+        <p:spPr>
+          <a:xfrm>
+            <a:off x="7404199" y="2728764"/>
+            <a:ext cx="1435001" cy="641152"/>
+          </a:xfrm>
+          <a:prstGeom prst="rect">
+            <a:avLst/>
+          </a:prstGeom>
+          <a:solidFill>
+            <a:srgbClr val="F5F5F5"/>
+          </a:solidFill>
+          <a:ln w="19050">
+            <a:solidFill>
+              <a:srgbClr val="333333"/>
+            </a:solidFill>
+          </a:ln>
+        </p:spPr>
+        <p:txBody>
+          <a:bodyPr wrap="square" rtlCol="0" anchor="ctr"/>
+          <a:lstStyle/>
+          <a:p>
+            <a:pPr indent="0" marL="0">
+              <a:buNone/>
+            </a:pPr>
+            <a:endParaRPr lang="en-US" dirty="0"/>
+          </a:p>
+        </p:txBody>
+      </p:sp>
+      <p:sp>
+        <p:nvSpPr>
+          <p:cNvPr id="44" name="Text 42"/>
+          <p:cNvSpPr/>
+          <p:nvPr/>
+        </p:nvSpPr>
+        <p:spPr>
+          <a:xfrm>
+            <a:off x="7538770" y="2849314"/>
+            <a:ext cx="1165860" cy="152400"/>
+          </a:xfrm>
+          <a:prstGeom prst="rect">
+            <a:avLst/>
+          </a:prstGeom>
+          <a:noFill/>
+          <a:ln/>
+        </p:spPr>
+        <p:txBody>
+          <a:bodyPr wrap="square" lIns="0" tIns="0" rIns="0" bIns="0" rtlCol="0" anchor="t"/>
+          <a:lstStyle/>
+          <a:p>
+            <a:pPr algn="ctr" indent="0" marL="0">
+              <a:buNone/>
+            </a:pPr>
+            <a:r>
+              <a:rPr lang="en-US" sz="1000" b="1" dirty="0">
+                <a:solidFill>
+                  <a:srgbClr val="333333"/>
+                </a:solidFill>
+                <a:latin typeface="Malgun Gothic" pitchFamily="34" charset="0"/>
+                <a:ea typeface="Malgun Gothic" pitchFamily="34" charset="-122"/>
+                <a:cs typeface="Malgun Gothic" pitchFamily="34" charset="-120"/>
+              </a:rPr>
+              <a:t>응답</a:t>
+            </a:r>
+            <a:endParaRPr lang="en-US" sz="1000" dirty="0"/>
+          </a:p>
+        </p:txBody>
+      </p:sp>
+      <p:sp>
+        <p:nvSpPr>
+          <p:cNvPr id="45" name="Text 43"/>
+          <p:cNvSpPr/>
+          <p:nvPr/>
+        </p:nvSpPr>
+        <p:spPr>
+          <a:xfrm>
+            <a:off x="7538770" y="3001714"/>
+            <a:ext cx="1165860" cy="123825"/>
+          </a:xfrm>
+          <a:prstGeom prst="rect">
+            <a:avLst/>
+          </a:prstGeom>
+          <a:noFill/>
+          <a:ln/>
+        </p:spPr>
+        <p:txBody>
+          <a:bodyPr wrap="square" lIns="0" tIns="0" rIns="0" bIns="0" rtlCol="0" anchor="t"/>
+          <a:lstStyle/>
+          <a:p>
+            <a:pPr algn="ctr" indent="0" marL="0">
+              <a:buNone/>
+            </a:pPr>
+            <a:r>
+              <a:rPr lang="en-US" sz="750" dirty="0">
+                <a:solidFill>
+                  <a:srgbClr val="666666"/>
+                </a:solidFill>
+                <a:latin typeface="Malgun Gothic" pitchFamily="34" charset="0"/>
+                <a:ea typeface="Malgun Gothic" pitchFamily="34" charset="-122"/>
+                <a:cs typeface="Malgun Gothic" pitchFamily="34" charset="-120"/>
+              </a:rPr>
+              <a:t>대기시간 기록</a:t>
+            </a:r>
+            <a:endParaRPr lang="en-US" sz="750" dirty="0"/>
+          </a:p>
+        </p:txBody>
+      </p:sp>
+      <p:sp>
+        <p:nvSpPr>
+          <p:cNvPr id="46" name="Text 44"/>
+          <p:cNvSpPr/>
+          <p:nvPr/>
+        </p:nvSpPr>
+        <p:spPr>
+          <a:xfrm>
+            <a:off x="7538770" y="3125539"/>
+            <a:ext cx="1165860" cy="123825"/>
+          </a:xfrm>
+          <a:prstGeom prst="rect">
+            <a:avLst/>
+          </a:prstGeom>
+          <a:noFill/>
+          <a:ln/>
+        </p:spPr>
+        <p:txBody>
+          <a:bodyPr wrap="square" lIns="0" tIns="0" rIns="0" bIns="0" rtlCol="0" anchor="t"/>
+          <a:lstStyle/>
+          <a:p>
+            <a:pPr algn="ctr" indent="0" marL="0">
+              <a:buNone/>
+            </a:pPr>
+            <a:r>
+              <a:rPr lang="en-US" sz="750" dirty="0">
+                <a:solidFill>
+                  <a:srgbClr val="666666"/>
+                </a:solidFill>
+                <a:latin typeface="Malgun Gothic" pitchFamily="34" charset="0"/>
+                <a:ea typeface="Malgun Gothic" pitchFamily="34" charset="-122"/>
+                <a:cs typeface="Malgun Gothic" pitchFamily="34" charset="-120"/>
+              </a:rPr>
+              <a:t>JFI 계산</a:t>
+            </a:r>
+            <a:endParaRPr lang="en-US" sz="750" dirty="0"/>
+          </a:p>
+        </p:txBody>
+      </p:sp>
+      <p:sp>
+        <p:nvSpPr>
+          <p:cNvPr id="47" name="Text 45"/>
+          <p:cNvSpPr/>
+          <p:nvPr/>
+        </p:nvSpPr>
+        <p:spPr>
+          <a:xfrm>
+            <a:off x="304800" y="3471416"/>
+            <a:ext cx="2777133" cy="479227"/>
+          </a:xfrm>
+          <a:prstGeom prst="rect">
+            <a:avLst/>
+          </a:prstGeom>
+          <a:noFill/>
+          <a:ln w="9525">
+            <a:solidFill>
+              <a:srgbClr val="CCCCCC"/>
+            </a:solidFill>
+          </a:ln>
+        </p:spPr>
+        <p:txBody>
+          <a:bodyPr wrap="square" rtlCol="0" anchor="ctr"/>
+          <a:lstStyle/>
+          <a:p>
+            <a:pPr indent="0" marL="0">
+              <a:buNone/>
+            </a:pPr>
+            <a:endParaRPr lang="en-US" dirty="0"/>
+          </a:p>
+        </p:txBody>
+      </p:sp>
+      <p:sp>
+        <p:nvSpPr>
+          <p:cNvPr id="48" name="Text 46"/>
+          <p:cNvSpPr/>
+          <p:nvPr/>
+        </p:nvSpPr>
+        <p:spPr>
+          <a:xfrm>
+            <a:off x="415826" y="3544342"/>
+            <a:ext cx="2606183" cy="123825"/>
           </a:xfrm>
           <a:prstGeom prst="rect">
             <a:avLst/>
@@ -5917,30 +6116,406 @@
               <a:buNone/>
             </a:pPr>
             <a:r>
-              <a:rPr lang="en-US" sz="1000" dirty="0">
+              <a:rPr lang="en-US" sz="800" b="1" dirty="0">
                 <a:solidFill>
                   <a:srgbClr val="333333"/>
                 </a:solidFill>
-                <a:latin typeface="Times New Roman" pitchFamily="34" charset="0"/>
-                <a:ea typeface="Times New Roman" pitchFamily="34" charset="-122"/>
-                <a:cs typeface="Times New Roman" pitchFamily="34" charset="-120"/>
-              </a:rPr>
-              <a:t>Memory Arrays (Queue) · JSON Files (Log) · Ollama (LLM Backend)</a:t>
-            </a:r>
-            <a:endParaRPr lang="en-US" sz="1000" dirty="0"/>
-          </a:p>
-        </p:txBody>
-      </p:sp>
-      <p:sp>
-        <p:nvSpPr>
-          <p:cNvPr id="33" name="Shape 31"/>
-          <p:cNvSpPr/>
-          <p:nvPr/>
-        </p:nvSpPr>
-        <p:spPr>
-          <a:xfrm>
-            <a:off x="381000" y="4881711"/>
-            <a:ext cx="8382000" cy="0"/>
+                <a:latin typeface="Malgun Gothic" pitchFamily="34" charset="0"/>
+                <a:ea typeface="Malgun Gothic" pitchFamily="34" charset="-122"/>
+                <a:cs typeface="Malgun Gothic" pitchFamily="34" charset="-120"/>
+              </a:rPr>
+              <a:t>기아 방지</a:t>
+            </a:r>
+            <a:endParaRPr lang="en-US" sz="800" dirty="0"/>
+          </a:p>
+        </p:txBody>
+      </p:sp>
+      <p:sp>
+        <p:nvSpPr>
+          <p:cNvPr id="49" name="Text 47"/>
+          <p:cNvSpPr/>
+          <p:nvPr/>
+        </p:nvSpPr>
+        <p:spPr>
+          <a:xfrm>
+            <a:off x="415826" y="3668167"/>
+            <a:ext cx="2606183" cy="104775"/>
+          </a:xfrm>
+          <a:prstGeom prst="rect">
+            <a:avLst/>
+          </a:prstGeom>
+          <a:noFill/>
+          <a:ln/>
+        </p:spPr>
+        <p:txBody>
+          <a:bodyPr wrap="square" lIns="0" tIns="0" rIns="0" bIns="0" rtlCol="0" anchor="t"/>
+          <a:lstStyle/>
+          <a:p>
+            <a:pPr algn="l" indent="0" marL="0">
+              <a:buNone/>
+            </a:pPr>
+            <a:r>
+              <a:rPr lang="en-US" sz="700" dirty="0">
+                <a:solidFill>
+                  <a:srgbClr val="666666"/>
+                </a:solidFill>
+                <a:latin typeface="Malgun Gothic" pitchFamily="34" charset="0"/>
+                <a:ea typeface="Malgun Gothic" pitchFamily="34" charset="-122"/>
+                <a:cs typeface="Malgun Gothic" pitchFamily="34" charset="-120"/>
+              </a:rPr>
+              <a:t>Priority: 에이징 (자동 승격)</a:t>
+            </a:r>
+            <a:endParaRPr lang="en-US" sz="700" dirty="0"/>
+          </a:p>
+        </p:txBody>
+      </p:sp>
+      <p:sp>
+        <p:nvSpPr>
+          <p:cNvPr id="50" name="Text 48"/>
+          <p:cNvSpPr/>
+          <p:nvPr/>
+        </p:nvSpPr>
+        <p:spPr>
+          <a:xfrm>
+            <a:off x="415826" y="3772942"/>
+            <a:ext cx="2606183" cy="104775"/>
+          </a:xfrm>
+          <a:prstGeom prst="rect">
+            <a:avLst/>
+          </a:prstGeom>
+          <a:noFill/>
+          <a:ln/>
+        </p:spPr>
+        <p:txBody>
+          <a:bodyPr wrap="square" lIns="0" tIns="0" rIns="0" bIns="0" rtlCol="0" anchor="t"/>
+          <a:lstStyle/>
+          <a:p>
+            <a:pPr algn="l" indent="0" marL="0">
+              <a:buNone/>
+            </a:pPr>
+            <a:r>
+              <a:rPr lang="en-US" sz="700" dirty="0">
+                <a:solidFill>
+                  <a:srgbClr val="666666"/>
+                </a:solidFill>
+                <a:latin typeface="Malgun Gothic" pitchFamily="34" charset="0"/>
+                <a:ea typeface="Malgun Gothic" pitchFamily="34" charset="-122"/>
+                <a:cs typeface="Malgun Gothic" pitchFamily="34" charset="-120"/>
+              </a:rPr>
+              <a:t>MLFQ: 주기적 부스트 (전체 → Q0)</a:t>
+            </a:r>
+            <a:endParaRPr lang="en-US" sz="700" dirty="0"/>
+          </a:p>
+        </p:txBody>
+      </p:sp>
+      <p:sp>
+        <p:nvSpPr>
+          <p:cNvPr id="51" name="Text 49"/>
+          <p:cNvSpPr/>
+          <p:nvPr/>
+        </p:nvSpPr>
+        <p:spPr>
+          <a:xfrm>
+            <a:off x="3183434" y="3471416"/>
+            <a:ext cx="2777133" cy="479227"/>
+          </a:xfrm>
+          <a:prstGeom prst="rect">
+            <a:avLst/>
+          </a:prstGeom>
+          <a:noFill/>
+          <a:ln w="9525">
+            <a:solidFill>
+              <a:srgbClr val="CCCCCC"/>
+            </a:solidFill>
+          </a:ln>
+        </p:spPr>
+        <p:txBody>
+          <a:bodyPr wrap="square" rtlCol="0" anchor="ctr"/>
+          <a:lstStyle/>
+          <a:p>
+            <a:pPr indent="0" marL="0">
+              <a:buNone/>
+            </a:pPr>
+            <a:endParaRPr lang="en-US" dirty="0"/>
+          </a:p>
+        </p:txBody>
+      </p:sp>
+      <p:sp>
+        <p:nvSpPr>
+          <p:cNvPr id="52" name="Text 50"/>
+          <p:cNvSpPr/>
+          <p:nvPr/>
+        </p:nvSpPr>
+        <p:spPr>
+          <a:xfrm>
+            <a:off x="3294459" y="3544342"/>
+            <a:ext cx="2606183" cy="123825"/>
+          </a:xfrm>
+          <a:prstGeom prst="rect">
+            <a:avLst/>
+          </a:prstGeom>
+          <a:noFill/>
+          <a:ln/>
+        </p:spPr>
+        <p:txBody>
+          <a:bodyPr wrap="square" lIns="0" tIns="0" rIns="0" bIns="0" rtlCol="0" anchor="t"/>
+          <a:lstStyle/>
+          <a:p>
+            <a:pPr algn="l" indent="0" marL="0">
+              <a:buNone/>
+            </a:pPr>
+            <a:r>
+              <a:rPr lang="en-US" sz="800" b="1" dirty="0">
+                <a:solidFill>
+                  <a:srgbClr val="333333"/>
+                </a:solidFill>
+                <a:latin typeface="Malgun Gothic" pitchFamily="34" charset="0"/>
+                <a:ea typeface="Malgun Gothic" pitchFamily="34" charset="-122"/>
+                <a:cs typeface="Malgun Gothic" pitchFamily="34" charset="-120"/>
+              </a:rPr>
+              <a:t>MLFQ 선점</a:t>
+            </a:r>
+            <a:endParaRPr lang="en-US" sz="800" dirty="0"/>
+          </a:p>
+        </p:txBody>
+      </p:sp>
+      <p:sp>
+        <p:nvSpPr>
+          <p:cNvPr id="53" name="Text 51"/>
+          <p:cNvSpPr/>
+          <p:nvPr/>
+        </p:nvSpPr>
+        <p:spPr>
+          <a:xfrm>
+            <a:off x="3294459" y="3668167"/>
+            <a:ext cx="2606183" cy="104775"/>
+          </a:xfrm>
+          <a:prstGeom prst="rect">
+            <a:avLst/>
+          </a:prstGeom>
+          <a:noFill/>
+          <a:ln/>
+        </p:spPr>
+        <p:txBody>
+          <a:bodyPr wrap="square" lIns="0" tIns="0" rIns="0" bIns="0" rtlCol="0" anchor="t"/>
+          <a:lstStyle/>
+          <a:p>
+            <a:pPr algn="l" indent="0" marL="0">
+              <a:buNone/>
+            </a:pPr>
+            <a:r>
+              <a:rPr lang="en-US" sz="700" dirty="0">
+                <a:solidFill>
+                  <a:srgbClr val="666666"/>
+                </a:solidFill>
+                <a:latin typeface="Malgun Gothic" pitchFamily="34" charset="0"/>
+                <a:ea typeface="Malgun Gothic" pitchFamily="34" charset="-122"/>
+                <a:cs typeface="Malgun Gothic" pitchFamily="34" charset="-120"/>
+              </a:rPr>
+              <a:t>시간 슬라이스: 500ms 확인 주기</a:t>
+            </a:r>
+            <a:endParaRPr lang="en-US" sz="700" dirty="0"/>
+          </a:p>
+        </p:txBody>
+      </p:sp>
+      <p:sp>
+        <p:nvSpPr>
+          <p:cNvPr id="54" name="Text 52"/>
+          <p:cNvSpPr/>
+          <p:nvPr/>
+        </p:nvSpPr>
+        <p:spPr>
+          <a:xfrm>
+            <a:off x="3294459" y="3772942"/>
+            <a:ext cx="2606183" cy="104775"/>
+          </a:xfrm>
+          <a:prstGeom prst="rect">
+            <a:avLst/>
+          </a:prstGeom>
+          <a:noFill/>
+          <a:ln/>
+        </p:spPr>
+        <p:txBody>
+          <a:bodyPr wrap="square" lIns="0" tIns="0" rIns="0" bIns="0" rtlCol="0" anchor="t"/>
+          <a:lstStyle/>
+          <a:p>
+            <a:pPr algn="l" indent="0" marL="0">
+              <a:buNone/>
+            </a:pPr>
+            <a:r>
+              <a:rPr lang="en-US" sz="700" dirty="0">
+                <a:solidFill>
+                  <a:srgbClr val="666666"/>
+                </a:solidFill>
+                <a:latin typeface="Malgun Gothic" pitchFamily="34" charset="0"/>
+                <a:ea typeface="Malgun Gothic" pitchFamily="34" charset="-122"/>
+                <a:cs typeface="Malgun Gothic" pitchFamily="34" charset="-120"/>
+              </a:rPr>
+              <a:t>퀀텀 초과 → 하위 큐로 이동</a:t>
+            </a:r>
+            <a:endParaRPr lang="en-US" sz="700" dirty="0"/>
+          </a:p>
+        </p:txBody>
+      </p:sp>
+      <p:sp>
+        <p:nvSpPr>
+          <p:cNvPr id="55" name="Text 53"/>
+          <p:cNvSpPr/>
+          <p:nvPr/>
+        </p:nvSpPr>
+        <p:spPr>
+          <a:xfrm>
+            <a:off x="6062067" y="3471416"/>
+            <a:ext cx="2777133" cy="479227"/>
+          </a:xfrm>
+          <a:prstGeom prst="rect">
+            <a:avLst/>
+          </a:prstGeom>
+          <a:noFill/>
+          <a:ln w="9525">
+            <a:solidFill>
+              <a:srgbClr val="CCCCCC"/>
+            </a:solidFill>
+          </a:ln>
+        </p:spPr>
+        <p:txBody>
+          <a:bodyPr wrap="square" rtlCol="0" anchor="ctr"/>
+          <a:lstStyle/>
+          <a:p>
+            <a:pPr indent="0" marL="0">
+              <a:buNone/>
+            </a:pPr>
+            <a:endParaRPr lang="en-US" dirty="0"/>
+          </a:p>
+        </p:txBody>
+      </p:sp>
+      <p:sp>
+        <p:nvSpPr>
+          <p:cNvPr id="56" name="Text 54"/>
+          <p:cNvSpPr/>
+          <p:nvPr/>
+        </p:nvSpPr>
+        <p:spPr>
+          <a:xfrm>
+            <a:off x="6173093" y="3544342"/>
+            <a:ext cx="2606183" cy="123825"/>
+          </a:xfrm>
+          <a:prstGeom prst="rect">
+            <a:avLst/>
+          </a:prstGeom>
+          <a:noFill/>
+          <a:ln/>
+        </p:spPr>
+        <p:txBody>
+          <a:bodyPr wrap="square" lIns="0" tIns="0" rIns="0" bIns="0" rtlCol="0" anchor="t"/>
+          <a:lstStyle/>
+          <a:p>
+            <a:pPr algn="l" indent="0" marL="0">
+              <a:buNone/>
+            </a:pPr>
+            <a:r>
+              <a:rPr lang="en-US" sz="800" b="1" dirty="0">
+                <a:solidFill>
+                  <a:srgbClr val="333333"/>
+                </a:solidFill>
+                <a:latin typeface="Malgun Gothic" pitchFamily="34" charset="0"/>
+                <a:ea typeface="Malgun Gothic" pitchFamily="34" charset="-122"/>
+                <a:cs typeface="Malgun Gothic" pitchFamily="34" charset="-120"/>
+              </a:rPr>
+              <a:t>이중 수준 공정성</a:t>
+            </a:r>
+            <a:endParaRPr lang="en-US" sz="800" dirty="0"/>
+          </a:p>
+        </p:txBody>
+      </p:sp>
+      <p:sp>
+        <p:nvSpPr>
+          <p:cNvPr id="57" name="Text 55"/>
+          <p:cNvSpPr/>
+          <p:nvPr/>
+        </p:nvSpPr>
+        <p:spPr>
+          <a:xfrm>
+            <a:off x="6173093" y="3668167"/>
+            <a:ext cx="2606183" cy="104775"/>
+          </a:xfrm>
+          <a:prstGeom prst="rect">
+            <a:avLst/>
+          </a:prstGeom>
+          <a:noFill/>
+          <a:ln/>
+        </p:spPr>
+        <p:txBody>
+          <a:bodyPr wrap="square" lIns="0" tIns="0" rIns="0" bIns="0" rtlCol="0" anchor="t"/>
+          <a:lstStyle/>
+          <a:p>
+            <a:pPr algn="l" indent="0" marL="0">
+              <a:buNone/>
+            </a:pPr>
+            <a:r>
+              <a:rPr lang="en-US" sz="700" dirty="0">
+                <a:solidFill>
+                  <a:srgbClr val="666666"/>
+                </a:solidFill>
+                <a:latin typeface="Malgun Gothic" pitchFamily="34" charset="0"/>
+                <a:ea typeface="Malgun Gothic" pitchFamily="34" charset="-122"/>
+                <a:cs typeface="Malgun Gothic" pitchFamily="34" charset="-120"/>
+              </a:rPr>
+              <a:t>시스템 JFI: 전체 테넌트 간</a:t>
+            </a:r>
+            <a:endParaRPr lang="en-US" sz="700" dirty="0"/>
+          </a:p>
+        </p:txBody>
+      </p:sp>
+      <p:sp>
+        <p:nvSpPr>
+          <p:cNvPr id="58" name="Text 56"/>
+          <p:cNvSpPr/>
+          <p:nvPr/>
+        </p:nvSpPr>
+        <p:spPr>
+          <a:xfrm>
+            <a:off x="6173093" y="3772942"/>
+            <a:ext cx="2606183" cy="104775"/>
+          </a:xfrm>
+          <a:prstGeom prst="rect">
+            <a:avLst/>
+          </a:prstGeom>
+          <a:noFill/>
+          <a:ln/>
+        </p:spPr>
+        <p:txBody>
+          <a:bodyPr wrap="square" lIns="0" tIns="0" rIns="0" bIns="0" rtlCol="0" anchor="t"/>
+          <a:lstStyle/>
+          <a:p>
+            <a:pPr algn="l" indent="0" marL="0">
+              <a:buNone/>
+            </a:pPr>
+            <a:r>
+              <a:rPr lang="en-US" sz="700" dirty="0">
+                <a:solidFill>
+                  <a:srgbClr val="666666"/>
+                </a:solidFill>
+                <a:latin typeface="Malgun Gothic" pitchFamily="34" charset="0"/>
+                <a:ea typeface="Malgun Gothic" pitchFamily="34" charset="-122"/>
+                <a:cs typeface="Malgun Gothic" pitchFamily="34" charset="-120"/>
+              </a:rPr>
+              <a:t>테넌트 JFI: 동일 등급 내 (0.92~0.98)</a:t>
+            </a:r>
+            <a:endParaRPr lang="en-US" sz="700" dirty="0"/>
+          </a:p>
+        </p:txBody>
+      </p:sp>
+      <p:sp>
+        <p:nvSpPr>
+          <p:cNvPr id="59" name="Shape 57"/>
+          <p:cNvSpPr/>
+          <p:nvPr/>
+        </p:nvSpPr>
+        <p:spPr>
+          <a:xfrm>
+            <a:off x="304800" y="4881711"/>
+            <a:ext cx="8534400" cy="0"/>
           </a:xfrm>
           <a:prstGeom prst="line">
             <a:avLst/>
@@ -5956,14 +6531,14 @@
       </p:sp>
       <p:sp>
         <p:nvSpPr>
-          <p:cNvPr id="34" name="Text 32"/>
-          <p:cNvSpPr/>
-          <p:nvPr/>
-        </p:nvSpPr>
-        <p:spPr>
-          <a:xfrm>
-            <a:off x="381000" y="4937224"/>
-            <a:ext cx="8549640" cy="104775"/>
+          <p:cNvPr id="60" name="Text 58"/>
+          <p:cNvSpPr/>
+          <p:nvPr/>
+        </p:nvSpPr>
+        <p:spPr>
+          <a:xfrm>
+            <a:off x="304800" y="4937224"/>
+            <a:ext cx="8705088" cy="104775"/>
           </a:xfrm>
           <a:prstGeom prst="rect">
             <a:avLst/>
@@ -5979,763 +6554,20 @@
               <a:buNone/>
             </a:pPr>
             <a:r>
-              <a:rPr lang="en-US" sz="750" i="1" dirty="0">
+              <a:rPr lang="en-US" sz="700" i="1" dirty="0">
                 <a:solidFill>
                   <a:srgbClr val="999999"/>
                 </a:solidFill>
-                <a:latin typeface="Times New Roman" pitchFamily="34" charset="0"/>
-                <a:ea typeface="Times New Roman" pitchFamily="34" charset="-122"/>
-                <a:cs typeface="Times New Roman" pitchFamily="34" charset="-120"/>
-              </a:rPr>
-              <a:t>Stack: Node.js 22 LTS + Express.js 4.18 + Jest 29.x (307 tests, 99.76% coverage)</a:t>
-            </a:r>
-            <a:endParaRPr lang="en-US" sz="750" dirty="0"/>
-          </a:p>
-        </p:txBody>
-      </p:sp>
-    </p:spTree>
-  </p:cSld>
-  <p:clrMapOvr>
-    <a:masterClrMapping/>
-  </p:clrMapOvr>
-</p:sld>
-</file>
-
-<file path=ppt/slides/slide4.xml><?xml version="1.0" encoding="utf-8"?>
-<p:sld xmlns:a="http://schemas.openxmlformats.org/drawingml/2006/main" xmlns:r="http://schemas.openxmlformats.org/officeDocument/2006/relationships" xmlns:p="http://schemas.openxmlformats.org/presentationml/2006/main">
-  <p:cSld name="Slide 4">
-    <p:bg>
-      <p:bgPr>
-        <a:solidFill>
-          <a:srgbClr val="FFFFFF"/>
-        </a:solidFill>
-      </p:bgPr>
-    </p:bg>
-    <p:spTree>
-      <p:nvGrpSpPr>
-        <p:cNvPr id="1" name=""/>
-        <p:cNvGrpSpPr/>
-        <p:nvPr/>
-      </p:nvGrpSpPr>
-      <p:grpSpPr>
-        <a:xfrm>
-          <a:off x="0" y="0"/>
-          <a:ext cx="0" cy="0"/>
-          <a:chOff x="0" y="0"/>
-          <a:chExt cx="0" cy="0"/>
-        </a:xfrm>
-      </p:grpSpPr>
-      <p:sp>
-        <p:nvSpPr>
-          <p:cNvPr id="2" name="Text 0"/>
-          <p:cNvSpPr/>
-          <p:nvPr/>
-        </p:nvSpPr>
-        <p:spPr>
-          <a:xfrm>
-            <a:off x="355550" y="228600"/>
-            <a:ext cx="4044988" cy="152400"/>
-          </a:xfrm>
-          <a:prstGeom prst="rect">
-            <a:avLst/>
-          </a:prstGeom>
-          <a:noFill/>
-          <a:ln/>
-        </p:spPr>
-        <p:txBody>
-          <a:bodyPr wrap="square" lIns="0" tIns="0" rIns="0" bIns="0" rtlCol="0" anchor="t"/>
-          <a:lstStyle/>
-          <a:p>
-            <a:pPr algn="l" indent="0" marL="0">
-              <a:spcAft>
-                <a:spcPts val="400"/>
-              </a:spcAft>
-              <a:buNone/>
-            </a:pPr>
-            <a:r>
-              <a:rPr lang="en-US" sz="1000" b="1" dirty="0">
-                <a:solidFill>
-                  <a:srgbClr val="333333"/>
-                </a:solidFill>
-                <a:latin typeface="Times New Roman" pitchFamily="34" charset="0"/>
-                <a:ea typeface="Times New Roman" pitchFamily="34" charset="-122"/>
-                <a:cs typeface="Times New Roman" pitchFamily="34" charset="-120"/>
-              </a:rPr>
-              <a:t>Average Wait Time (ms)</a:t>
-            </a:r>
-            <a:endParaRPr lang="en-US" sz="1000" dirty="0"/>
-          </a:p>
-        </p:txBody>
-      </p:sp>
-      <p:sp>
-        <p:nvSpPr>
-          <p:cNvPr id="3" name="Text 1"/>
-          <p:cNvSpPr/>
-          <p:nvPr/>
-        </p:nvSpPr>
-        <p:spPr>
-          <a:xfrm>
-            <a:off x="4498925" y="228600"/>
-            <a:ext cx="4289524" cy="3264247"/>
-          </a:xfrm>
-          <a:prstGeom prst="rect">
-            <a:avLst/>
-          </a:prstGeom>
-          <a:noFill/>
-          <a:ln w="9525">
-            <a:solidFill>
-              <a:srgbClr val="333333"/>
-            </a:solidFill>
-          </a:ln>
-        </p:spPr>
-        <p:txBody>
-          <a:bodyPr wrap="square" rtlCol="0" anchor="ctr"/>
-          <a:lstStyle/>
-          <a:p>
-            <a:pPr indent="0" marL="0">
-              <a:buNone/>
-            </a:pPr>
-            <a:endParaRPr lang="en-US" dirty="0"/>
-          </a:p>
-        </p:txBody>
-      </p:sp>
-      <p:sp>
-        <p:nvSpPr>
-          <p:cNvPr id="4" name="Text 2"/>
-          <p:cNvSpPr/>
-          <p:nvPr/>
-        </p:nvSpPr>
-        <p:spPr>
-          <a:xfrm>
-            <a:off x="4660850" y="365075"/>
-            <a:ext cx="4044988" cy="152400"/>
-          </a:xfrm>
-          <a:prstGeom prst="rect">
-            <a:avLst/>
-          </a:prstGeom>
-          <a:noFill/>
-          <a:ln/>
-        </p:spPr>
-        <p:txBody>
-          <a:bodyPr wrap="square" lIns="0" tIns="0" rIns="0" bIns="0" rtlCol="0" anchor="t"/>
-          <a:lstStyle/>
-          <a:p>
-            <a:pPr algn="l" indent="0" marL="0">
-              <a:spcAft>
-                <a:spcPts val="600"/>
-              </a:spcAft>
-              <a:buNone/>
-            </a:pPr>
-            <a:r>
-              <a:rPr lang="en-US" sz="1000" b="1" dirty="0">
-                <a:solidFill>
-                  <a:srgbClr val="333333"/>
-                </a:solidFill>
-                <a:latin typeface="Times New Roman" pitchFamily="34" charset="0"/>
-                <a:ea typeface="Times New Roman" pitchFamily="34" charset="-122"/>
-                <a:cs typeface="Times New Roman" pitchFamily="34" charset="-120"/>
-              </a:rPr>
-              <a:t>Key Findings</a:t>
-            </a:r>
-            <a:endParaRPr lang="en-US" sz="1000" dirty="0"/>
-          </a:p>
-        </p:txBody>
-      </p:sp>
-      <p:sp>
-        <p:nvSpPr>
-          <p:cNvPr id="5" name="Shape 3"/>
-          <p:cNvSpPr/>
-          <p:nvPr/>
-        </p:nvSpPr>
-        <p:spPr>
-          <a:xfrm>
-            <a:off x="4660850" y="953839"/>
-            <a:ext cx="3965674" cy="0"/>
-          </a:xfrm>
-          <a:prstGeom prst="line">
-            <a:avLst/>
-          </a:prstGeom>
-          <a:noFill/>
-          <a:ln w="9525">
-            <a:solidFill>
-              <a:srgbClr val="DDDDDD"/>
-            </a:solidFill>
-            <a:prstDash val="solid"/>
-          </a:ln>
-        </p:spPr>
-      </p:sp>
-      <p:sp>
-        <p:nvSpPr>
-          <p:cNvPr id="6" name="Text 4"/>
-          <p:cNvSpPr/>
-          <p:nvPr/>
-        </p:nvSpPr>
-        <p:spPr>
-          <a:xfrm>
-            <a:off x="4660850" y="657076"/>
-            <a:ext cx="4044988" cy="228600"/>
-          </a:xfrm>
-          <a:prstGeom prst="rect">
-            <a:avLst/>
-          </a:prstGeom>
-          <a:noFill/>
-          <a:ln/>
-        </p:spPr>
-        <p:txBody>
-          <a:bodyPr wrap="square" lIns="0" tIns="0" rIns="0" bIns="0" rtlCol="0" anchor="t"/>
-          <a:lstStyle/>
-          <a:p>
-            <a:pPr algn="l" indent="0" marL="0">
-              <a:buNone/>
-            </a:pPr>
-            <a:r>
-              <a:rPr lang="en-US" sz="850" b="1" dirty="0">
-                <a:solidFill>
-                  <a:srgbClr val="333333"/>
-                </a:solidFill>
-                <a:latin typeface="Times New Roman" pitchFamily="34" charset="0"/>
-                <a:ea typeface="Times New Roman" pitchFamily="34" charset="-122"/>
-                <a:cs typeface="Times New Roman" pitchFamily="34" charset="-120"/>
-              </a:rPr>
-              <a:t>RQ1 (Priority):</a:t>
-            </a:r>
-            <a:pPr algn="l" indent="0" marL="0">
-              <a:buNone/>
-            </a:pPr>
-            <a:r>
-              <a:rPr lang="en-US" sz="850" dirty="0">
-                <a:solidFill>
-                  <a:srgbClr val="333333"/>
-                </a:solidFill>
-                <a:latin typeface="Times New Roman" pitchFamily="34" charset="0"/>
-                <a:ea typeface="Times New Roman" pitchFamily="34" charset="-122"/>
-                <a:cs typeface="Times New Roman" pitchFamily="34" charset="-120"/>
-              </a:rPr>
-              <a:t> URGENT requests processed 62% faster than FCFS baseline (Cohen's d = 0.78, p &lt; 0.001)</a:t>
-            </a:r>
-            <a:endParaRPr lang="en-US" sz="850" dirty="0"/>
-          </a:p>
-        </p:txBody>
-      </p:sp>
-      <p:sp>
-        <p:nvSpPr>
-          <p:cNvPr id="7" name="Shape 5"/>
-          <p:cNvSpPr/>
-          <p:nvPr/>
-        </p:nvSpPr>
-        <p:spPr>
-          <a:xfrm>
-            <a:off x="4660850" y="1204466"/>
-            <a:ext cx="3965674" cy="0"/>
-          </a:xfrm>
-          <a:prstGeom prst="line">
-            <a:avLst/>
-          </a:prstGeom>
-          <a:noFill/>
-          <a:ln w="9525">
-            <a:solidFill>
-              <a:srgbClr val="DDDDDD"/>
-            </a:solidFill>
-            <a:prstDash val="solid"/>
-          </a:ln>
-        </p:spPr>
-      </p:sp>
-      <p:sp>
-        <p:nvSpPr>
-          <p:cNvPr id="8" name="Text 6"/>
-          <p:cNvSpPr/>
-          <p:nvPr/>
-        </p:nvSpPr>
-        <p:spPr>
-          <a:xfrm>
-            <a:off x="4660850" y="1022003"/>
-            <a:ext cx="4044988" cy="114300"/>
-          </a:xfrm>
-          <a:prstGeom prst="rect">
-            <a:avLst/>
-          </a:prstGeom>
-          <a:noFill/>
-          <a:ln/>
-        </p:spPr>
-        <p:txBody>
-          <a:bodyPr wrap="square" lIns="0" tIns="0" rIns="0" bIns="0" rtlCol="0" anchor="t"/>
-          <a:lstStyle/>
-          <a:p>
-            <a:pPr algn="l" indent="0" marL="0">
-              <a:buNone/>
-            </a:pPr>
-            <a:r>
-              <a:rPr lang="en-US" sz="850" b="1" dirty="0">
-                <a:solidFill>
-                  <a:srgbClr val="333333"/>
-                </a:solidFill>
-                <a:latin typeface="Times New Roman" pitchFamily="34" charset="0"/>
-                <a:ea typeface="Times New Roman" pitchFamily="34" charset="-122"/>
-                <a:cs typeface="Times New Roman" pitchFamily="34" charset="-120"/>
-              </a:rPr>
-              <a:t>RQ2 (MLFQ):</a:t>
-            </a:r>
-            <a:pPr algn="l" indent="0" marL="0">
-              <a:buNone/>
-            </a:pPr>
-            <a:r>
-              <a:rPr lang="en-US" sz="850" dirty="0">
-                <a:solidFill>
-                  <a:srgbClr val="333333"/>
-                </a:solidFill>
-                <a:latin typeface="Times New Roman" pitchFamily="34" charset="0"/>
-                <a:ea typeface="Times New Roman" pitchFamily="34" charset="-122"/>
-                <a:cs typeface="Times New Roman" pitchFamily="34" charset="-120"/>
-              </a:rPr>
-              <a:t> Short requests improved 73.78% (10 seeds, 95% CI: [72.36, 75.20])</a:t>
-            </a:r>
-            <a:endParaRPr lang="en-US" sz="850" dirty="0"/>
-          </a:p>
-        </p:txBody>
-      </p:sp>
-      <p:sp>
-        <p:nvSpPr>
-          <p:cNvPr id="9" name="Text 7"/>
-          <p:cNvSpPr/>
-          <p:nvPr/>
-        </p:nvSpPr>
-        <p:spPr>
-          <a:xfrm>
-            <a:off x="4660850" y="1272629"/>
-            <a:ext cx="4044988" cy="114300"/>
-          </a:xfrm>
-          <a:prstGeom prst="rect">
-            <a:avLst/>
-          </a:prstGeom>
-          <a:noFill/>
-          <a:ln/>
-        </p:spPr>
-        <p:txBody>
-          <a:bodyPr wrap="square" lIns="0" tIns="0" rIns="0" bIns="0" rtlCol="0" anchor="t"/>
-          <a:lstStyle/>
-          <a:p>
-            <a:pPr algn="l" indent="0" marL="0">
-              <a:buNone/>
-            </a:pPr>
-            <a:r>
-              <a:rPr lang="en-US" sz="850" b="1" dirty="0">
-                <a:solidFill>
-                  <a:srgbClr val="333333"/>
-                </a:solidFill>
-                <a:latin typeface="Times New Roman" pitchFamily="34" charset="0"/>
-                <a:ea typeface="Times New Roman" pitchFamily="34" charset="-122"/>
-                <a:cs typeface="Times New Roman" pitchFamily="34" charset="-120"/>
-              </a:rPr>
-              <a:t>RQ3 (WFQ):</a:t>
-            </a:r>
-            <a:pPr algn="l" indent="0" marL="0">
-              <a:buNone/>
-            </a:pPr>
-            <a:r>
-              <a:rPr lang="en-US" sz="850" dirty="0">
-                <a:solidFill>
-                  <a:srgbClr val="333333"/>
-                </a:solidFill>
-                <a:latin typeface="Times New Roman" pitchFamily="34" charset="0"/>
-                <a:ea typeface="Times New Roman" pitchFamily="34" charset="-122"/>
-                <a:cs typeface="Times New Roman" pitchFamily="34" charset="-120"/>
-              </a:rPr>
-              <a:t> Enterprise tier 5.8x faster than Free tier (JFI: system 0.89, tenant 0.92-0.98)</a:t>
-            </a:r>
-            <a:endParaRPr lang="en-US" sz="850" dirty="0"/>
-          </a:p>
-        </p:txBody>
-      </p:sp>
-      <p:sp>
-        <p:nvSpPr>
-          <p:cNvPr id="10" name="Text 8"/>
-          <p:cNvSpPr/>
-          <p:nvPr/>
-        </p:nvSpPr>
-        <p:spPr>
-          <a:xfrm>
-            <a:off x="355550" y="3594348"/>
-            <a:ext cx="4070946" cy="142875"/>
-          </a:xfrm>
-          <a:prstGeom prst="rect">
-            <a:avLst/>
-          </a:prstGeom>
-          <a:noFill/>
-          <a:ln/>
-        </p:spPr>
-        <p:txBody>
-          <a:bodyPr wrap="square" lIns="0" tIns="0" rIns="0" bIns="0" rtlCol="0" anchor="t"/>
-          <a:lstStyle/>
-          <a:p>
-            <a:pPr algn="l" indent="0" marL="0">
-              <a:spcAft>
-                <a:spcPts val="300"/>
-              </a:spcAft>
-              <a:buNone/>
-            </a:pPr>
-            <a:r>
-              <a:rPr lang="en-US" sz="900" b="1" dirty="0">
-                <a:solidFill>
-                  <a:srgbClr val="333333"/>
-                </a:solidFill>
-                <a:latin typeface="Times New Roman" pitchFamily="34" charset="0"/>
-                <a:ea typeface="Times New Roman" pitchFamily="34" charset="-122"/>
-                <a:cs typeface="Times New Roman" pitchFamily="34" charset="-120"/>
-              </a:rPr>
-              <a:t>WFQ Tenant Response Time</a:t>
-            </a:r>
-            <a:endParaRPr lang="en-US" sz="900" dirty="0"/>
-          </a:p>
-        </p:txBody>
-      </p:sp>
-      <p:sp>
-        <p:nvSpPr>
-          <p:cNvPr id="11" name="Text 9"/>
-          <p:cNvSpPr/>
-          <p:nvPr/>
-        </p:nvSpPr>
-        <p:spPr>
-          <a:xfrm>
-            <a:off x="4524375" y="3594348"/>
-            <a:ext cx="4264075" cy="1215926"/>
-          </a:xfrm>
-          <a:prstGeom prst="rect">
-            <a:avLst/>
-          </a:prstGeom>
-          <a:noFill/>
-          <a:ln w="9525">
-            <a:solidFill>
-              <a:srgbClr val="333333"/>
-            </a:solidFill>
-          </a:ln>
-        </p:spPr>
-        <p:txBody>
-          <a:bodyPr wrap="square" rtlCol="0" anchor="ctr"/>
-          <a:lstStyle/>
-          <a:p>
-            <a:pPr indent="0" marL="0">
-              <a:buNone/>
-            </a:pPr>
-            <a:endParaRPr lang="en-US" dirty="0"/>
-          </a:p>
-        </p:txBody>
-      </p:sp>
-      <p:sp>
-        <p:nvSpPr>
-          <p:cNvPr id="12" name="Text 10"/>
-          <p:cNvSpPr/>
-          <p:nvPr/>
-        </p:nvSpPr>
-        <p:spPr>
-          <a:xfrm>
-            <a:off x="4660850" y="3705374"/>
-            <a:ext cx="4070946" cy="142875"/>
-          </a:xfrm>
-          <a:prstGeom prst="rect">
-            <a:avLst/>
-          </a:prstGeom>
-          <a:noFill/>
-          <a:ln/>
-        </p:spPr>
-        <p:txBody>
-          <a:bodyPr wrap="square" lIns="0" tIns="0" rIns="0" bIns="0" rtlCol="0" anchor="t"/>
-          <a:lstStyle/>
-          <a:p>
-            <a:pPr algn="l" indent="0" marL="0">
-              <a:spcAft>
-                <a:spcPts val="400"/>
-              </a:spcAft>
-              <a:buNone/>
-            </a:pPr>
-            <a:r>
-              <a:rPr lang="en-US" sz="900" b="1" dirty="0">
-                <a:solidFill>
-                  <a:srgbClr val="333333"/>
-                </a:solidFill>
-                <a:latin typeface="Times New Roman" pitchFamily="34" charset="0"/>
-                <a:ea typeface="Times New Roman" pitchFamily="34" charset="-122"/>
-                <a:cs typeface="Times New Roman" pitchFamily="34" charset="-120"/>
-              </a:rPr>
-              <a:t>MLFQ Multi-Seed Validation</a:t>
-            </a:r>
-            <a:endParaRPr lang="en-US" sz="900" dirty="0"/>
-          </a:p>
-        </p:txBody>
-      </p:sp>
-      <p:sp>
-        <p:nvSpPr>
-          <p:cNvPr id="13" name="Text 11"/>
-          <p:cNvSpPr/>
-          <p:nvPr/>
-        </p:nvSpPr>
-        <p:spPr>
-          <a:xfrm>
-            <a:off x="4660850" y="3898999"/>
-            <a:ext cx="4070946" cy="114300"/>
-          </a:xfrm>
-          <a:prstGeom prst="rect">
-            <a:avLst/>
-          </a:prstGeom>
-          <a:noFill/>
-          <a:ln/>
-        </p:spPr>
-        <p:txBody>
-          <a:bodyPr wrap="square" lIns="0" tIns="0" rIns="0" bIns="0" rtlCol="0" anchor="t"/>
-          <a:lstStyle/>
-          <a:p>
-            <a:pPr algn="l" indent="0" marL="0">
-              <a:spcBef>
-                <a:spcPts val="100"/>
-              </a:spcBef>
-              <a:spcAft>
-                <a:spcPts val="100"/>
-              </a:spcAft>
-              <a:buNone/>
-            </a:pPr>
-            <a:r>
-              <a:rPr lang="en-US" sz="850" dirty="0">
-                <a:solidFill>
-                  <a:srgbClr val="333333"/>
-                </a:solidFill>
-                <a:latin typeface="Times New Roman" pitchFamily="34" charset="0"/>
-                <a:ea typeface="Times New Roman" pitchFamily="34" charset="-122"/>
-                <a:cs typeface="Times New Roman" pitchFamily="34" charset="-120"/>
-              </a:rPr>
-              <a:t>Mean improvement: 73.78%</a:t>
-            </a:r>
-            <a:endParaRPr lang="en-US" sz="850" dirty="0"/>
-          </a:p>
-        </p:txBody>
-      </p:sp>
-      <p:sp>
-        <p:nvSpPr>
-          <p:cNvPr id="14" name="Text 12"/>
-          <p:cNvSpPr/>
-          <p:nvPr/>
-        </p:nvSpPr>
-        <p:spPr>
-          <a:xfrm>
-            <a:off x="4660850" y="4025950"/>
-            <a:ext cx="4070946" cy="114300"/>
-          </a:xfrm>
-          <a:prstGeom prst="rect">
-            <a:avLst/>
-          </a:prstGeom>
-          <a:noFill/>
-          <a:ln/>
-        </p:spPr>
-        <p:txBody>
-          <a:bodyPr wrap="square" lIns="0" tIns="0" rIns="0" bIns="0" rtlCol="0" anchor="t"/>
-          <a:lstStyle/>
-          <a:p>
-            <a:pPr algn="l" indent="0" marL="0">
-              <a:spcBef>
-                <a:spcPts val="100"/>
-              </a:spcBef>
-              <a:spcAft>
-                <a:spcPts val="100"/>
-              </a:spcAft>
-              <a:buNone/>
-            </a:pPr>
-            <a:r>
-              <a:rPr lang="en-US" sz="850" dirty="0">
-                <a:solidFill>
-                  <a:srgbClr val="333333"/>
-                </a:solidFill>
-                <a:latin typeface="Times New Roman" pitchFamily="34" charset="0"/>
-                <a:ea typeface="Times New Roman" pitchFamily="34" charset="-122"/>
-                <a:cs typeface="Times New Roman" pitchFamily="34" charset="-120"/>
-              </a:rPr>
-              <a:t>Std. dev.: 1.98% | CV: 2.68%</a:t>
-            </a:r>
-            <a:endParaRPr lang="en-US" sz="850" dirty="0"/>
-          </a:p>
-        </p:txBody>
-      </p:sp>
-      <p:sp>
-        <p:nvSpPr>
-          <p:cNvPr id="15" name="Text 13"/>
-          <p:cNvSpPr/>
-          <p:nvPr/>
-        </p:nvSpPr>
-        <p:spPr>
-          <a:xfrm>
-            <a:off x="4660850" y="4152900"/>
-            <a:ext cx="4070946" cy="114300"/>
-          </a:xfrm>
-          <a:prstGeom prst="rect">
-            <a:avLst/>
-          </a:prstGeom>
-          <a:noFill/>
-          <a:ln/>
-        </p:spPr>
-        <p:txBody>
-          <a:bodyPr wrap="square" lIns="0" tIns="0" rIns="0" bIns="0" rtlCol="0" anchor="t"/>
-          <a:lstStyle/>
-          <a:p>
-            <a:pPr algn="l" indent="0" marL="0">
-              <a:spcBef>
-                <a:spcPts val="100"/>
-              </a:spcBef>
-              <a:spcAft>
-                <a:spcPts val="100"/>
-              </a:spcAft>
-              <a:buNone/>
-            </a:pPr>
-            <a:r>
-              <a:rPr lang="en-US" sz="850" dirty="0">
-                <a:solidFill>
-                  <a:srgbClr val="333333"/>
-                </a:solidFill>
-                <a:latin typeface="Times New Roman" pitchFamily="34" charset="0"/>
-                <a:ea typeface="Times New Roman" pitchFamily="34" charset="-122"/>
-                <a:cs typeface="Times New Roman" pitchFamily="34" charset="-120"/>
-              </a:rPr>
-              <a:t>95% CI: [72.36, 75.20]</a:t>
-            </a:r>
-            <a:endParaRPr lang="en-US" sz="850" dirty="0"/>
-          </a:p>
-        </p:txBody>
-      </p:sp>
-      <p:sp>
-        <p:nvSpPr>
-          <p:cNvPr id="16" name="Text 14"/>
-          <p:cNvSpPr/>
-          <p:nvPr/>
-        </p:nvSpPr>
-        <p:spPr>
-          <a:xfrm>
-            <a:off x="4660850" y="4279850"/>
-            <a:ext cx="4070946" cy="114300"/>
-          </a:xfrm>
-          <a:prstGeom prst="rect">
-            <a:avLst/>
-          </a:prstGeom>
-          <a:noFill/>
-          <a:ln/>
-        </p:spPr>
-        <p:txBody>
-          <a:bodyPr wrap="square" lIns="0" tIns="0" rIns="0" bIns="0" rtlCol="0" anchor="t"/>
-          <a:lstStyle/>
-          <a:p>
-            <a:pPr algn="l" indent="0" marL="0">
-              <a:spcBef>
-                <a:spcPts val="100"/>
-              </a:spcBef>
-              <a:spcAft>
-                <a:spcPts val="100"/>
-              </a:spcAft>
-              <a:buNone/>
-            </a:pPr>
-            <a:r>
-              <a:rPr lang="en-US" sz="850" dirty="0">
-                <a:solidFill>
-                  <a:srgbClr val="333333"/>
-                </a:solidFill>
-                <a:latin typeface="Times New Roman" pitchFamily="34" charset="0"/>
-                <a:ea typeface="Times New Roman" pitchFamily="34" charset="-122"/>
-                <a:cs typeface="Times New Roman" pitchFamily="34" charset="-120"/>
-              </a:rPr>
-              <a:t>p &lt; 0.001 | Cohen's d = 15.9</a:t>
-            </a:r>
-            <a:endParaRPr lang="en-US" sz="850" dirty="0"/>
-          </a:p>
-        </p:txBody>
-      </p:sp>
-      <p:sp>
-        <p:nvSpPr>
-          <p:cNvPr id="17" name="Shape 15"/>
-          <p:cNvSpPr/>
-          <p:nvPr/>
-        </p:nvSpPr>
-        <p:spPr>
-          <a:xfrm>
-            <a:off x="355550" y="4891236"/>
-            <a:ext cx="8432899" cy="0"/>
-          </a:xfrm>
-          <a:prstGeom prst="line">
-            <a:avLst/>
-          </a:prstGeom>
-          <a:noFill/>
-          <a:ln w="9525">
-            <a:solidFill>
-              <a:srgbClr val="CCCCCC"/>
-            </a:solidFill>
-            <a:prstDash val="solid"/>
-          </a:ln>
-        </p:spPr>
-      </p:sp>
-      <p:sp>
-        <p:nvSpPr>
-          <p:cNvPr id="18" name="Text 16"/>
-          <p:cNvSpPr/>
-          <p:nvPr/>
-        </p:nvSpPr>
-        <p:spPr>
-          <a:xfrm>
-            <a:off x="355550" y="4946749"/>
-            <a:ext cx="8601557" cy="95250"/>
-          </a:xfrm>
-          <a:prstGeom prst="rect">
-            <a:avLst/>
-          </a:prstGeom>
-          <a:noFill/>
-          <a:ln/>
-        </p:spPr>
-        <p:txBody>
-          <a:bodyPr wrap="square" lIns="0" tIns="0" rIns="0" bIns="0" rtlCol="0" anchor="t"/>
-          <a:lstStyle/>
-          <a:p>
-            <a:pPr algn="l" indent="0" marL="0">
-              <a:buNone/>
-            </a:pPr>
-            <a:r>
-              <a:rPr lang="en-US" sz="700" i="1" dirty="0">
-                <a:solidFill>
-                  <a:srgbClr val="999999"/>
-                </a:solidFill>
-                <a:latin typeface="Times New Roman" pitchFamily="34" charset="0"/>
-                <a:ea typeface="Times New Roman" pitchFamily="34" charset="-122"/>
-                <a:cs typeface="Times New Roman" pitchFamily="34" charset="-120"/>
-              </a:rPr>
-              <a:t>Experiment: 100 requests, 4 tenants (Enterprise/Premium/Standard/Free), Ollama LLM backend.</a:t>
+                <a:latin typeface="Malgun Gothic" pitchFamily="34" charset="0"/>
+                <a:ea typeface="Malgun Gothic" pitchFamily="34" charset="-122"/>
+                <a:cs typeface="Malgun Gothic" pitchFamily="34" charset="-120"/>
+              </a:rPr>
+              <a:t>Node.js 22 LTS + Express.js 4.18 | 메모리 배열 + JSON 파일 | 307 tests, 99.76% coverage</a:t>
             </a:r>
             <a:endParaRPr lang="en-US" sz="700" dirty="0"/>
           </a:p>
         </p:txBody>
       </p:sp>
-      <p:graphicFrame>
-        <p:nvGraphicFramePr>
-          <p:cNvPr id="19" name="Chart 0" descr=""/>
-          <p:cNvGraphicFramePr/>
-          <p:nvPr/>
-        </p:nvGraphicFramePr>
-        <p:xfrm>
-          <a:off x="355550" y="431750"/>
-          <a:ext cx="3965674" cy="3061097"/>
-        </p:xfrm>
-        <a:graphic xmlns:a="http://schemas.openxmlformats.org/drawingml/2006/main">
-          <a:graphicData uri="http://schemas.openxmlformats.org/drawingml/2006/chart">
-            <c:chart xmlns:c="http://schemas.openxmlformats.org/drawingml/2006/chart" r:id="rId1"/>
-          </a:graphicData>
-        </a:graphic>
-      </p:graphicFrame>
-      <p:graphicFrame>
-        <p:nvGraphicFramePr>
-          <p:cNvPr id="20" name="Chart 1" descr=""/>
-          <p:cNvGraphicFramePr/>
-          <p:nvPr/>
-        </p:nvGraphicFramePr>
-        <p:xfrm>
-          <a:off x="355550" y="3775323"/>
-          <a:ext cx="3991124" cy="1034951"/>
-        </p:xfrm>
-        <a:graphic xmlns:a="http://schemas.openxmlformats.org/drawingml/2006/main">
-          <a:graphicData uri="http://schemas.openxmlformats.org/drawingml/2006/chart">
-            <c:chart xmlns:c="http://schemas.openxmlformats.org/drawingml/2006/chart" r:id="rId2"/>
-          </a:graphicData>
-        </a:graphic>
-      </p:graphicFrame>
     </p:spTree>
   </p:cSld>
   <p:clrMapOvr>

--- a/04-proposal/figures/proposal-figures.pptx
+++ b/04-proposal/figures/proposal-figures.pptx
@@ -4129,7 +4129,7 @@
         <p:spPr>
           <a:xfrm>
             <a:off x="381000" y="2945904"/>
-            <a:ext cx="8382000" cy="453926"/>
+            <a:ext cx="5857429" cy="577751"/>
           </a:xfrm>
           <a:prstGeom prst="rect">
             <a:avLst/>
@@ -4160,7 +4160,7 @@
         </p:nvSpPr>
         <p:spPr>
           <a:xfrm>
-            <a:off x="400050" y="2964954"/>
+            <a:off x="400050" y="3026866"/>
             <a:ext cx="2590800" cy="415826"/>
           </a:xfrm>
           <a:prstGeom prst="rect">
@@ -4190,7 +4190,7 @@
         </p:nvSpPr>
         <p:spPr>
           <a:xfrm>
-            <a:off x="552450" y="3091904"/>
+            <a:off x="552450" y="3153817"/>
             <a:ext cx="2331720" cy="161925"/>
           </a:xfrm>
           <a:prstGeom prst="rect">
@@ -4229,8 +4229,8 @@
         </p:nvSpPr>
         <p:spPr>
           <a:xfrm>
-            <a:off x="3194000" y="3096667"/>
-            <a:ext cx="3154501" cy="152400"/>
+            <a:off x="3194000" y="3158579"/>
+            <a:ext cx="1890120" cy="152400"/>
           </a:xfrm>
           <a:prstGeom prst="rect">
             <a:avLst/>
@@ -4254,7 +4254,7 @@
                 <a:ea typeface="Malgun Gothic" pitchFamily="34" charset="-122"/>
                 <a:cs typeface="Malgun Gothic" pitchFamily="34" charset="-120"/>
               </a:rPr>
-              <a:t>메모리 배열 (큐) · JSON 파일 (로그) · Ollama (LLM 백엔드)</a:t>
+              <a:t>메모리 배열 (큐) · JSON 파일 (로그)</a:t>
             </a:r>
             <a:endParaRPr lang="en-US" sz="1000" dirty="0"/>
           </a:p>
@@ -4262,7 +4262,225 @@
       </p:sp>
       <p:sp>
         <p:nvSpPr>
-          <p:cNvPr id="33" name="Shape 31"/>
+          <p:cNvPr id="33" name="Text 31"/>
+          <p:cNvSpPr/>
+          <p:nvPr/>
+        </p:nvSpPr>
+        <p:spPr>
+          <a:xfrm>
+            <a:off x="6339929" y="2945904"/>
+            <a:ext cx="2423071" cy="577751"/>
+          </a:xfrm>
+          <a:prstGeom prst="rect">
+            <a:avLst/>
+          </a:prstGeom>
+          <a:noFill/>
+          <a:ln w="19050">
+            <a:solidFill>
+              <a:srgbClr val="333333"/>
+            </a:solidFill>
+          </a:ln>
+        </p:spPr>
+        <p:txBody>
+          <a:bodyPr wrap="square" rtlCol="0" anchor="ctr"/>
+          <a:lstStyle/>
+          <a:p>
+            <a:pPr indent="0" marL="0">
+              <a:buNone/>
+            </a:pPr>
+            <a:endParaRPr lang="en-US" dirty="0"/>
+          </a:p>
+        </p:txBody>
+      </p:sp>
+      <p:sp>
+        <p:nvSpPr>
+          <p:cNvPr id="34" name="Text 32"/>
+          <p:cNvSpPr/>
+          <p:nvPr/>
+        </p:nvSpPr>
+        <p:spPr>
+          <a:xfrm>
+            <a:off x="6358979" y="2964954"/>
+            <a:ext cx="992981" cy="539651"/>
+          </a:xfrm>
+          <a:prstGeom prst="rect">
+            <a:avLst/>
+          </a:prstGeom>
+          <a:solidFill>
+            <a:srgbClr val="333333"/>
+          </a:solidFill>
+          <a:ln/>
+        </p:spPr>
+        <p:txBody>
+          <a:bodyPr wrap="square" rtlCol="0" anchor="ctr"/>
+          <a:lstStyle/>
+          <a:p>
+            <a:pPr indent="0" marL="0">
+              <a:buNone/>
+            </a:pPr>
+            <a:endParaRPr lang="en-US" dirty="0"/>
+          </a:p>
+        </p:txBody>
+      </p:sp>
+      <p:sp>
+        <p:nvSpPr>
+          <p:cNvPr id="35" name="Text 33"/>
+          <p:cNvSpPr/>
+          <p:nvPr/>
+        </p:nvSpPr>
+        <p:spPr>
+          <a:xfrm>
+            <a:off x="6511379" y="3091904"/>
+            <a:ext cx="701945" cy="161925"/>
+          </a:xfrm>
+          <a:prstGeom prst="rect">
+            <a:avLst/>
+          </a:prstGeom>
+          <a:noFill/>
+          <a:ln/>
+        </p:spPr>
+        <p:txBody>
+          <a:bodyPr wrap="square" lIns="0" tIns="0" rIns="0" bIns="0" rtlCol="0" anchor="t"/>
+          <a:lstStyle/>
+          <a:p>
+            <a:pPr algn="l" indent="0" marL="0">
+              <a:buNone/>
+            </a:pPr>
+            <a:r>
+              <a:rPr lang="en-US" sz="1100" b="1" dirty="0">
+                <a:solidFill>
+                  <a:srgbClr val="FFFFFF"/>
+                </a:solidFill>
+                <a:latin typeface="Malgun Gothic" pitchFamily="34" charset="0"/>
+                <a:ea typeface="Malgun Gothic" pitchFamily="34" charset="-122"/>
+                <a:cs typeface="Malgun Gothic" pitchFamily="34" charset="-120"/>
+              </a:rPr>
+              <a:t>LLM 백엔드</a:t>
+            </a:r>
+            <a:endParaRPr lang="en-US" sz="1100" dirty="0"/>
+          </a:p>
+        </p:txBody>
+      </p:sp>
+      <p:sp>
+        <p:nvSpPr>
+          <p:cNvPr id="36" name="Text 34"/>
+          <p:cNvSpPr/>
+          <p:nvPr/>
+        </p:nvSpPr>
+        <p:spPr>
+          <a:xfrm>
+            <a:off x="6511379" y="3253829"/>
+            <a:ext cx="701945" cy="123825"/>
+          </a:xfrm>
+          <a:prstGeom prst="rect">
+            <a:avLst/>
+          </a:prstGeom>
+          <a:noFill/>
+          <a:ln/>
+        </p:spPr>
+        <p:txBody>
+          <a:bodyPr wrap="square" lIns="0" tIns="0" rIns="0" bIns="0" rtlCol="0" anchor="t"/>
+          <a:lstStyle/>
+          <a:p>
+            <a:pPr algn="l" indent="0" marL="0">
+              <a:buNone/>
+            </a:pPr>
+            <a:r>
+              <a:rPr lang="en-US" sz="800" dirty="0">
+                <a:solidFill>
+                  <a:srgbClr val="CCCCCC"/>
+                </a:solidFill>
+                <a:latin typeface="Malgun Gothic" pitchFamily="34" charset="0"/>
+                <a:ea typeface="Malgun Gothic" pitchFamily="34" charset="-122"/>
+                <a:cs typeface="Malgun Gothic" pitchFamily="34" charset="-120"/>
+              </a:rPr>
+              <a:t>(외부 서비스)</a:t>
+            </a:r>
+            <a:endParaRPr lang="en-US" sz="800" dirty="0"/>
+          </a:p>
+        </p:txBody>
+      </p:sp>
+      <p:sp>
+        <p:nvSpPr>
+          <p:cNvPr id="37" name="Text 35"/>
+          <p:cNvSpPr/>
+          <p:nvPr/>
+        </p:nvSpPr>
+        <p:spPr>
+          <a:xfrm>
+            <a:off x="7555111" y="3163342"/>
+            <a:ext cx="410328" cy="142875"/>
+          </a:xfrm>
+          <a:prstGeom prst="rect">
+            <a:avLst/>
+          </a:prstGeom>
+          <a:noFill/>
+          <a:ln/>
+        </p:spPr>
+        <p:txBody>
+          <a:bodyPr wrap="square" lIns="0" tIns="0" rIns="0" bIns="0" rtlCol="0" anchor="t"/>
+          <a:lstStyle/>
+          <a:p>
+            <a:pPr algn="l" indent="0" marL="0">
+              <a:buNone/>
+            </a:pPr>
+            <a:r>
+              <a:rPr lang="en-US" sz="1000" dirty="0">
+                <a:solidFill>
+                  <a:srgbClr val="333333"/>
+                </a:solidFill>
+                <a:latin typeface="Malgun Gothic" pitchFamily="34" charset="0"/>
+                <a:ea typeface="Malgun Gothic" pitchFamily="34" charset="-122"/>
+                <a:cs typeface="Malgun Gothic" pitchFamily="34" charset="-120"/>
+              </a:rPr>
+              <a:t>Ollama</a:t>
+            </a:r>
+            <a:endParaRPr lang="en-US" sz="1000" dirty="0"/>
+          </a:p>
+        </p:txBody>
+      </p:sp>
+      <p:sp>
+        <p:nvSpPr>
+          <p:cNvPr id="38" name="Text 36"/>
+          <p:cNvSpPr/>
+          <p:nvPr/>
+        </p:nvSpPr>
+        <p:spPr>
+          <a:xfrm>
+            <a:off x="7957393" y="3172867"/>
+            <a:ext cx="595074" cy="123825"/>
+          </a:xfrm>
+          <a:prstGeom prst="rect">
+            <a:avLst/>
+          </a:prstGeom>
+          <a:noFill/>
+          <a:ln/>
+        </p:spPr>
+        <p:txBody>
+          <a:bodyPr wrap="square" lIns="0" tIns="0" rIns="0" bIns="0" rtlCol="0" anchor="t"/>
+          <a:lstStyle/>
+          <a:p>
+            <a:pPr algn="l" indent="0" marL="0">
+              <a:buNone/>
+            </a:pPr>
+            <a:r>
+              <a:rPr lang="en-US" sz="800" dirty="0">
+                <a:solidFill>
+                  <a:srgbClr val="666666"/>
+                </a:solidFill>
+                <a:latin typeface="Malgun Gothic" pitchFamily="34" charset="0"/>
+                <a:ea typeface="Malgun Gothic" pitchFamily="34" charset="-122"/>
+                <a:cs typeface="Malgun Gothic" pitchFamily="34" charset="-120"/>
+              </a:rPr>
+              <a:t>로컬 추론 엔진</a:t>
+            </a:r>
+            <a:endParaRPr lang="en-US" sz="800" dirty="0"/>
+          </a:p>
+        </p:txBody>
+      </p:sp>
+      <p:sp>
+        <p:nvSpPr>
+          <p:cNvPr id="39" name="Shape 37"/>
           <p:cNvSpPr/>
           <p:nvPr/>
         </p:nvSpPr>
@@ -4285,7 +4503,7 @@
       </p:sp>
       <p:sp>
         <p:nvSpPr>
-          <p:cNvPr id="34" name="Text 32"/>
+          <p:cNvPr id="40" name="Text 38"/>
           <p:cNvSpPr/>
           <p:nvPr/>
         </p:nvSpPr>

--- a/04-proposal/figures/proposal-figures.pptx
+++ b/04-proposal/figures/proposal-figures.pptx
@@ -6279,460 +6279,13 @@
       </p:sp>
       <p:sp>
         <p:nvSpPr>
-          <p:cNvPr id="47" name="Text 45"/>
-          <p:cNvSpPr/>
-          <p:nvPr/>
-        </p:nvSpPr>
-        <p:spPr>
-          <a:xfrm>
-            <a:off x="304800" y="3471416"/>
-            <a:ext cx="2777133" cy="479227"/>
-          </a:xfrm>
-          <a:prstGeom prst="rect">
-            <a:avLst/>
-          </a:prstGeom>
-          <a:noFill/>
-          <a:ln w="9525">
-            <a:solidFill>
-              <a:srgbClr val="CCCCCC"/>
-            </a:solidFill>
-          </a:ln>
-        </p:spPr>
-        <p:txBody>
-          <a:bodyPr wrap="square" rtlCol="0" anchor="ctr"/>
-          <a:lstStyle/>
-          <a:p>
-            <a:pPr indent="0" marL="0">
-              <a:buNone/>
-            </a:pPr>
-            <a:endParaRPr lang="en-US" dirty="0"/>
-          </a:p>
-        </p:txBody>
-      </p:sp>
-      <p:sp>
-        <p:nvSpPr>
-          <p:cNvPr id="48" name="Text 46"/>
-          <p:cNvSpPr/>
-          <p:nvPr/>
-        </p:nvSpPr>
-        <p:spPr>
-          <a:xfrm>
-            <a:off x="415826" y="3544342"/>
-            <a:ext cx="2606183" cy="123825"/>
-          </a:xfrm>
-          <a:prstGeom prst="rect">
-            <a:avLst/>
-          </a:prstGeom>
-          <a:noFill/>
-          <a:ln/>
-        </p:spPr>
-        <p:txBody>
-          <a:bodyPr wrap="square" lIns="0" tIns="0" rIns="0" bIns="0" rtlCol="0" anchor="t"/>
-          <a:lstStyle/>
-          <a:p>
-            <a:pPr algn="l" indent="0" marL="0">
-              <a:buNone/>
-            </a:pPr>
-            <a:r>
-              <a:rPr lang="en-US" sz="800" b="1" dirty="0">
-                <a:solidFill>
-                  <a:srgbClr val="333333"/>
-                </a:solidFill>
-                <a:latin typeface="Malgun Gothic" pitchFamily="34" charset="0"/>
-                <a:ea typeface="Malgun Gothic" pitchFamily="34" charset="-122"/>
-                <a:cs typeface="Malgun Gothic" pitchFamily="34" charset="-120"/>
-              </a:rPr>
-              <a:t>기아 방지</a:t>
-            </a:r>
-            <a:endParaRPr lang="en-US" sz="800" dirty="0"/>
-          </a:p>
-        </p:txBody>
-      </p:sp>
-      <p:sp>
-        <p:nvSpPr>
-          <p:cNvPr id="49" name="Text 47"/>
-          <p:cNvSpPr/>
-          <p:nvPr/>
-        </p:nvSpPr>
-        <p:spPr>
-          <a:xfrm>
-            <a:off x="415826" y="3668167"/>
-            <a:ext cx="2606183" cy="104775"/>
-          </a:xfrm>
-          <a:prstGeom prst="rect">
-            <a:avLst/>
-          </a:prstGeom>
-          <a:noFill/>
-          <a:ln/>
-        </p:spPr>
-        <p:txBody>
-          <a:bodyPr wrap="square" lIns="0" tIns="0" rIns="0" bIns="0" rtlCol="0" anchor="t"/>
-          <a:lstStyle/>
-          <a:p>
-            <a:pPr algn="l" indent="0" marL="0">
-              <a:buNone/>
-            </a:pPr>
-            <a:r>
-              <a:rPr lang="en-US" sz="700" dirty="0">
-                <a:solidFill>
-                  <a:srgbClr val="666666"/>
-                </a:solidFill>
-                <a:latin typeface="Malgun Gothic" pitchFamily="34" charset="0"/>
-                <a:ea typeface="Malgun Gothic" pitchFamily="34" charset="-122"/>
-                <a:cs typeface="Malgun Gothic" pitchFamily="34" charset="-120"/>
-              </a:rPr>
-              <a:t>Priority: 에이징 (자동 승격)</a:t>
-            </a:r>
-            <a:endParaRPr lang="en-US" sz="700" dirty="0"/>
-          </a:p>
-        </p:txBody>
-      </p:sp>
-      <p:sp>
-        <p:nvSpPr>
-          <p:cNvPr id="50" name="Text 48"/>
-          <p:cNvSpPr/>
-          <p:nvPr/>
-        </p:nvSpPr>
-        <p:spPr>
-          <a:xfrm>
-            <a:off x="415826" y="3772942"/>
-            <a:ext cx="2606183" cy="104775"/>
-          </a:xfrm>
-          <a:prstGeom prst="rect">
-            <a:avLst/>
-          </a:prstGeom>
-          <a:noFill/>
-          <a:ln/>
-        </p:spPr>
-        <p:txBody>
-          <a:bodyPr wrap="square" lIns="0" tIns="0" rIns="0" bIns="0" rtlCol="0" anchor="t"/>
-          <a:lstStyle/>
-          <a:p>
-            <a:pPr algn="l" indent="0" marL="0">
-              <a:buNone/>
-            </a:pPr>
-            <a:r>
-              <a:rPr lang="en-US" sz="700" dirty="0">
-                <a:solidFill>
-                  <a:srgbClr val="666666"/>
-                </a:solidFill>
-                <a:latin typeface="Malgun Gothic" pitchFamily="34" charset="0"/>
-                <a:ea typeface="Malgun Gothic" pitchFamily="34" charset="-122"/>
-                <a:cs typeface="Malgun Gothic" pitchFamily="34" charset="-120"/>
-              </a:rPr>
-              <a:t>MLFQ: 주기적 부스트 (전체 → Q0)</a:t>
-            </a:r>
-            <a:endParaRPr lang="en-US" sz="700" dirty="0"/>
-          </a:p>
-        </p:txBody>
-      </p:sp>
-      <p:sp>
-        <p:nvSpPr>
-          <p:cNvPr id="51" name="Text 49"/>
-          <p:cNvSpPr/>
-          <p:nvPr/>
-        </p:nvSpPr>
-        <p:spPr>
-          <a:xfrm>
-            <a:off x="3183434" y="3471416"/>
-            <a:ext cx="2777133" cy="479227"/>
-          </a:xfrm>
-          <a:prstGeom prst="rect">
-            <a:avLst/>
-          </a:prstGeom>
-          <a:noFill/>
-          <a:ln w="9525">
-            <a:solidFill>
-              <a:srgbClr val="CCCCCC"/>
-            </a:solidFill>
-          </a:ln>
-        </p:spPr>
-        <p:txBody>
-          <a:bodyPr wrap="square" rtlCol="0" anchor="ctr"/>
-          <a:lstStyle/>
-          <a:p>
-            <a:pPr indent="0" marL="0">
-              <a:buNone/>
-            </a:pPr>
-            <a:endParaRPr lang="en-US" dirty="0"/>
-          </a:p>
-        </p:txBody>
-      </p:sp>
-      <p:sp>
-        <p:nvSpPr>
-          <p:cNvPr id="52" name="Text 50"/>
-          <p:cNvSpPr/>
-          <p:nvPr/>
-        </p:nvSpPr>
-        <p:spPr>
-          <a:xfrm>
-            <a:off x="3294459" y="3544342"/>
-            <a:ext cx="2606183" cy="123825"/>
-          </a:xfrm>
-          <a:prstGeom prst="rect">
-            <a:avLst/>
-          </a:prstGeom>
-          <a:noFill/>
-          <a:ln/>
-        </p:spPr>
-        <p:txBody>
-          <a:bodyPr wrap="square" lIns="0" tIns="0" rIns="0" bIns="0" rtlCol="0" anchor="t"/>
-          <a:lstStyle/>
-          <a:p>
-            <a:pPr algn="l" indent="0" marL="0">
-              <a:buNone/>
-            </a:pPr>
-            <a:r>
-              <a:rPr lang="en-US" sz="800" b="1" dirty="0">
-                <a:solidFill>
-                  <a:srgbClr val="333333"/>
-                </a:solidFill>
-                <a:latin typeface="Malgun Gothic" pitchFamily="34" charset="0"/>
-                <a:ea typeface="Malgun Gothic" pitchFamily="34" charset="-122"/>
-                <a:cs typeface="Malgun Gothic" pitchFamily="34" charset="-120"/>
-              </a:rPr>
-              <a:t>MLFQ 선점</a:t>
-            </a:r>
-            <a:endParaRPr lang="en-US" sz="800" dirty="0"/>
-          </a:p>
-        </p:txBody>
-      </p:sp>
-      <p:sp>
-        <p:nvSpPr>
-          <p:cNvPr id="53" name="Text 51"/>
-          <p:cNvSpPr/>
-          <p:nvPr/>
-        </p:nvSpPr>
-        <p:spPr>
-          <a:xfrm>
-            <a:off x="3294459" y="3668167"/>
-            <a:ext cx="2606183" cy="104775"/>
-          </a:xfrm>
-          <a:prstGeom prst="rect">
-            <a:avLst/>
-          </a:prstGeom>
-          <a:noFill/>
-          <a:ln/>
-        </p:spPr>
-        <p:txBody>
-          <a:bodyPr wrap="square" lIns="0" tIns="0" rIns="0" bIns="0" rtlCol="0" anchor="t"/>
-          <a:lstStyle/>
-          <a:p>
-            <a:pPr algn="l" indent="0" marL="0">
-              <a:buNone/>
-            </a:pPr>
-            <a:r>
-              <a:rPr lang="en-US" sz="700" dirty="0">
-                <a:solidFill>
-                  <a:srgbClr val="666666"/>
-                </a:solidFill>
-                <a:latin typeface="Malgun Gothic" pitchFamily="34" charset="0"/>
-                <a:ea typeface="Malgun Gothic" pitchFamily="34" charset="-122"/>
-                <a:cs typeface="Malgun Gothic" pitchFamily="34" charset="-120"/>
-              </a:rPr>
-              <a:t>시간 슬라이스: 500ms 확인 주기</a:t>
-            </a:r>
-            <a:endParaRPr lang="en-US" sz="700" dirty="0"/>
-          </a:p>
-        </p:txBody>
-      </p:sp>
-      <p:sp>
-        <p:nvSpPr>
-          <p:cNvPr id="54" name="Text 52"/>
-          <p:cNvSpPr/>
-          <p:nvPr/>
-        </p:nvSpPr>
-        <p:spPr>
-          <a:xfrm>
-            <a:off x="3294459" y="3772942"/>
-            <a:ext cx="2606183" cy="104775"/>
-          </a:xfrm>
-          <a:prstGeom prst="rect">
-            <a:avLst/>
-          </a:prstGeom>
-          <a:noFill/>
-          <a:ln/>
-        </p:spPr>
-        <p:txBody>
-          <a:bodyPr wrap="square" lIns="0" tIns="0" rIns="0" bIns="0" rtlCol="0" anchor="t"/>
-          <a:lstStyle/>
-          <a:p>
-            <a:pPr algn="l" indent="0" marL="0">
-              <a:buNone/>
-            </a:pPr>
-            <a:r>
-              <a:rPr lang="en-US" sz="700" dirty="0">
-                <a:solidFill>
-                  <a:srgbClr val="666666"/>
-                </a:solidFill>
-                <a:latin typeface="Malgun Gothic" pitchFamily="34" charset="0"/>
-                <a:ea typeface="Malgun Gothic" pitchFamily="34" charset="-122"/>
-                <a:cs typeface="Malgun Gothic" pitchFamily="34" charset="-120"/>
-              </a:rPr>
-              <a:t>퀀텀 초과 → 하위 큐로 이동</a:t>
-            </a:r>
-            <a:endParaRPr lang="en-US" sz="700" dirty="0"/>
-          </a:p>
-        </p:txBody>
-      </p:sp>
-      <p:sp>
-        <p:nvSpPr>
-          <p:cNvPr id="55" name="Text 53"/>
-          <p:cNvSpPr/>
-          <p:nvPr/>
-        </p:nvSpPr>
-        <p:spPr>
-          <a:xfrm>
-            <a:off x="6062067" y="3471416"/>
-            <a:ext cx="2777133" cy="479227"/>
-          </a:xfrm>
-          <a:prstGeom prst="rect">
-            <a:avLst/>
-          </a:prstGeom>
-          <a:noFill/>
-          <a:ln w="9525">
-            <a:solidFill>
-              <a:srgbClr val="CCCCCC"/>
-            </a:solidFill>
-          </a:ln>
-        </p:spPr>
-        <p:txBody>
-          <a:bodyPr wrap="square" rtlCol="0" anchor="ctr"/>
-          <a:lstStyle/>
-          <a:p>
-            <a:pPr indent="0" marL="0">
-              <a:buNone/>
-            </a:pPr>
-            <a:endParaRPr lang="en-US" dirty="0"/>
-          </a:p>
-        </p:txBody>
-      </p:sp>
-      <p:sp>
-        <p:nvSpPr>
-          <p:cNvPr id="56" name="Text 54"/>
-          <p:cNvSpPr/>
-          <p:nvPr/>
-        </p:nvSpPr>
-        <p:spPr>
-          <a:xfrm>
-            <a:off x="6173093" y="3544342"/>
-            <a:ext cx="2606183" cy="123825"/>
-          </a:xfrm>
-          <a:prstGeom prst="rect">
-            <a:avLst/>
-          </a:prstGeom>
-          <a:noFill/>
-          <a:ln/>
-        </p:spPr>
-        <p:txBody>
-          <a:bodyPr wrap="square" lIns="0" tIns="0" rIns="0" bIns="0" rtlCol="0" anchor="t"/>
-          <a:lstStyle/>
-          <a:p>
-            <a:pPr algn="l" indent="0" marL="0">
-              <a:buNone/>
-            </a:pPr>
-            <a:r>
-              <a:rPr lang="en-US" sz="800" b="1" dirty="0">
-                <a:solidFill>
-                  <a:srgbClr val="333333"/>
-                </a:solidFill>
-                <a:latin typeface="Malgun Gothic" pitchFamily="34" charset="0"/>
-                <a:ea typeface="Malgun Gothic" pitchFamily="34" charset="-122"/>
-                <a:cs typeface="Malgun Gothic" pitchFamily="34" charset="-120"/>
-              </a:rPr>
-              <a:t>이중 수준 공정성</a:t>
-            </a:r>
-            <a:endParaRPr lang="en-US" sz="800" dirty="0"/>
-          </a:p>
-        </p:txBody>
-      </p:sp>
-      <p:sp>
-        <p:nvSpPr>
-          <p:cNvPr id="57" name="Text 55"/>
-          <p:cNvSpPr/>
-          <p:nvPr/>
-        </p:nvSpPr>
-        <p:spPr>
-          <a:xfrm>
-            <a:off x="6173093" y="3668167"/>
-            <a:ext cx="2606183" cy="104775"/>
-          </a:xfrm>
-          <a:prstGeom prst="rect">
-            <a:avLst/>
-          </a:prstGeom>
-          <a:noFill/>
-          <a:ln/>
-        </p:spPr>
-        <p:txBody>
-          <a:bodyPr wrap="square" lIns="0" tIns="0" rIns="0" bIns="0" rtlCol="0" anchor="t"/>
-          <a:lstStyle/>
-          <a:p>
-            <a:pPr algn="l" indent="0" marL="0">
-              <a:buNone/>
-            </a:pPr>
-            <a:r>
-              <a:rPr lang="en-US" sz="700" dirty="0">
-                <a:solidFill>
-                  <a:srgbClr val="666666"/>
-                </a:solidFill>
-                <a:latin typeface="Malgun Gothic" pitchFamily="34" charset="0"/>
-                <a:ea typeface="Malgun Gothic" pitchFamily="34" charset="-122"/>
-                <a:cs typeface="Malgun Gothic" pitchFamily="34" charset="-120"/>
-              </a:rPr>
-              <a:t>시스템 JFI: 전체 테넌트 간</a:t>
-            </a:r>
-            <a:endParaRPr lang="en-US" sz="700" dirty="0"/>
-          </a:p>
-        </p:txBody>
-      </p:sp>
-      <p:sp>
-        <p:nvSpPr>
-          <p:cNvPr id="58" name="Text 56"/>
-          <p:cNvSpPr/>
-          <p:nvPr/>
-        </p:nvSpPr>
-        <p:spPr>
-          <a:xfrm>
-            <a:off x="6173093" y="3772942"/>
-            <a:ext cx="2606183" cy="104775"/>
-          </a:xfrm>
-          <a:prstGeom prst="rect">
-            <a:avLst/>
-          </a:prstGeom>
-          <a:noFill/>
-          <a:ln/>
-        </p:spPr>
-        <p:txBody>
-          <a:bodyPr wrap="square" lIns="0" tIns="0" rIns="0" bIns="0" rtlCol="0" anchor="t"/>
-          <a:lstStyle/>
-          <a:p>
-            <a:pPr algn="l" indent="0" marL="0">
-              <a:buNone/>
-            </a:pPr>
-            <a:r>
-              <a:rPr lang="en-US" sz="700" dirty="0">
-                <a:solidFill>
-                  <a:srgbClr val="666666"/>
-                </a:solidFill>
-                <a:latin typeface="Malgun Gothic" pitchFamily="34" charset="0"/>
-                <a:ea typeface="Malgun Gothic" pitchFamily="34" charset="-122"/>
-                <a:cs typeface="Malgun Gothic" pitchFamily="34" charset="-120"/>
-              </a:rPr>
-              <a:t>테넌트 JFI: 동일 등급 내 (0.92~0.98)</a:t>
-            </a:r>
-            <a:endParaRPr lang="en-US" sz="700" dirty="0"/>
-          </a:p>
-        </p:txBody>
-      </p:sp>
-      <p:sp>
-        <p:nvSpPr>
-          <p:cNvPr id="59" name="Shape 57"/>
-          <p:cNvSpPr/>
-          <p:nvPr/>
-        </p:nvSpPr>
-        <p:spPr>
-          <a:xfrm>
-            <a:off x="304800" y="4881711"/>
+          <p:cNvPr id="47" name="Shape 45"/>
+          <p:cNvSpPr/>
+          <p:nvPr/>
+        </p:nvSpPr>
+        <p:spPr>
+          <a:xfrm>
+            <a:off x="304800" y="4862661"/>
             <a:ext cx="8534400" cy="0"/>
           </a:xfrm>
           <a:prstGeom prst="line">
@@ -6749,14 +6302,14 @@
       </p:sp>
       <p:sp>
         <p:nvSpPr>
-          <p:cNvPr id="60" name="Text 58"/>
-          <p:cNvSpPr/>
-          <p:nvPr/>
-        </p:nvSpPr>
-        <p:spPr>
-          <a:xfrm>
-            <a:off x="304800" y="4937224"/>
-            <a:ext cx="8705088" cy="104775"/>
+          <p:cNvPr id="48" name="Text 46"/>
+          <p:cNvSpPr/>
+          <p:nvPr/>
+        </p:nvSpPr>
+        <p:spPr>
+          <a:xfrm>
+            <a:off x="304800" y="4918174"/>
+            <a:ext cx="8705088" cy="123825"/>
           </a:xfrm>
           <a:prstGeom prst="rect">
             <a:avLst/>
@@ -6772,7 +6325,7 @@
               <a:buNone/>
             </a:pPr>
             <a:r>
-              <a:rPr lang="en-US" sz="700" i="1" dirty="0">
+              <a:rPr lang="en-US" sz="750" i="1" dirty="0">
                 <a:solidFill>
                   <a:srgbClr val="999999"/>
                 </a:solidFill>
@@ -6780,9 +6333,9 @@
                 <a:ea typeface="Malgun Gothic" pitchFamily="34" charset="-122"/>
                 <a:cs typeface="Malgun Gothic" pitchFamily="34" charset="-120"/>
               </a:rPr>
-              <a:t>Node.js 22 LTS + Express.js 4.18 | 메모리 배열 + JSON 파일 | 307 tests, 99.76% coverage</a:t>
-            </a:r>
-            <a:endParaRPr lang="en-US" sz="700" dirty="0"/>
+              <a:t>핵심: 에이징/부스트로 기아 방지 · MLFQ 선점으로 짧은 요청 우선 · JFI로 공정성 측정</a:t>
+            </a:r>
+            <a:endParaRPr lang="en-US" sz="750" dirty="0"/>
           </a:p>
         </p:txBody>
       </p:sp>

--- a/04-proposal/figures/proposal-figures.pptx
+++ b/04-proposal/figures/proposal-figures.pptx
@@ -4534,7 +4534,7 @@
                 <a:ea typeface="Malgun Gothic" pitchFamily="34" charset="-122"/>
                 <a:cs typeface="Malgun Gothic" pitchFamily="34" charset="-120"/>
               </a:rPr>
-              <a:t>Node.js 22 LTS + Express.js 4.18 + Jest 29.x (307 tests, 99.76% coverage)</a:t>
+              <a:t>Node.js 22 LTS + Express.js 4.18</a:t>
             </a:r>
             <a:endParaRPr lang="en-US" sz="750" dirty="0"/>
           </a:p>

--- a/04-proposal/figures/proposal-figures.pptx
+++ b/04-proposal/figures/proposal-figures.pptx
@@ -1062,7 +1062,7 @@
         <p:spPr>
           <a:xfrm>
             <a:off x="381000" y="304800"/>
-            <a:ext cx="2000250" cy="3518595"/>
+            <a:ext cx="2000250" cy="3480495"/>
           </a:xfrm>
           <a:prstGeom prst="rect">
             <a:avLst/>
@@ -1070,7 +1070,7 @@
           <a:noFill/>
           <a:ln w="9525">
             <a:solidFill>
-              <a:srgbClr val="333333"/>
+              <a:srgbClr val="2B579A"/>
             </a:solidFill>
           </a:ln>
         </p:spPr>
@@ -1100,7 +1100,7 @@
             <a:avLst/>
           </a:prstGeom>
           <a:solidFill>
-            <a:srgbClr val="333333"/>
+            <a:srgbClr val="2B579A"/>
           </a:solidFill>
           <a:ln/>
         </p:spPr>
@@ -1163,7 +1163,7 @@
         <p:spPr>
           <a:xfrm>
             <a:off x="500202" y="809476"/>
-            <a:ext cx="1761845" cy="142875"/>
+            <a:ext cx="1761845" cy="152400"/>
           </a:xfrm>
           <a:prstGeom prst="rect">
             <a:avLst/>
@@ -1185,7 +1185,7 @@
               <a:buNone/>
             </a:pPr>
             <a:r>
-              <a:rPr lang="en-US" sz="900" dirty="0">
+              <a:rPr lang="en-US" sz="1000" dirty="0">
                 <a:solidFill>
                   <a:srgbClr val="555555"/>
                 </a:solidFill>
@@ -1195,7 +1195,7 @@
               </a:rPr>
               <a:t>선착순 처리</a:t>
             </a:r>
-            <a:endParaRPr lang="en-US" sz="900" dirty="0"/>
+            <a:endParaRPr lang="en-US" sz="1000" dirty="0"/>
           </a:p>
         </p:txBody>
       </p:sp>
@@ -1207,7 +1207,7 @@
         </p:nvSpPr>
         <p:spPr>
           <a:xfrm>
-            <a:off x="517475" y="1290340"/>
+            <a:off x="517475" y="1309390"/>
             <a:ext cx="1727299" cy="0"/>
           </a:xfrm>
           <a:prstGeom prst="line">
@@ -1230,8 +1230,8 @@
         </p:nvSpPr>
         <p:spPr>
           <a:xfrm>
-            <a:off x="517475" y="1104602"/>
-            <a:ext cx="1761845" cy="142875"/>
+            <a:off x="517475" y="1114127"/>
+            <a:ext cx="1761845" cy="152400"/>
           </a:xfrm>
           <a:prstGeom prst="rect">
             <a:avLst/>
@@ -1247,7 +1247,7 @@
               <a:buNone/>
             </a:pPr>
             <a:r>
-              <a:rPr lang="en-US" sz="900" b="1" dirty="0">
+              <a:rPr lang="en-US" sz="1000" b="1" dirty="0">
                 <a:solidFill>
                   <a:srgbClr val="333333"/>
                 </a:solidFill>
@@ -1257,7 +1257,7 @@
               </a:rPr>
               <a:t>특징</a:t>
             </a:r>
-            <a:endParaRPr lang="en-US" sz="900" dirty="0"/>
+            <a:endParaRPr lang="en-US" sz="1000" dirty="0"/>
           </a:p>
         </p:txBody>
       </p:sp>
@@ -1269,8 +1269,8 @@
         </p:nvSpPr>
         <p:spPr>
           <a:xfrm>
-            <a:off x="517475" y="1383804"/>
-            <a:ext cx="1727299" cy="400050"/>
+            <a:off x="517475" y="1402854"/>
+            <a:ext cx="1727299" cy="457200"/>
           </a:xfrm>
           <a:prstGeom prst="rect">
             <a:avLst/>
@@ -1287,7 +1287,7 @@
               <a:buChar char="•"/>
             </a:pPr>
             <a:r>
-              <a:rPr lang="en-US" sz="850" dirty="0">
+              <a:rPr lang="en-US" sz="950" dirty="0">
                 <a:solidFill>
                   <a:srgbClr val="333333"/>
                 </a:solidFill>
@@ -1297,7 +1297,7 @@
               </a:rPr>
               <a:t>단순 FIFO 큐</a:t>
             </a:r>
-            <a:endParaRPr lang="en-US" sz="850" dirty="0"/>
+            <a:endParaRPr lang="en-US" sz="950" dirty="0"/>
           </a:p>
           <a:p>
             <a:pPr algn="l" marL="88900" indent="-88900">
@@ -1305,7 +1305,7 @@
               <a:buChar char="•"/>
             </a:pPr>
             <a:r>
-              <a:rPr lang="en-US" sz="850" dirty="0">
+              <a:rPr lang="en-US" sz="950" dirty="0">
                 <a:solidFill>
                   <a:srgbClr val="333333"/>
                 </a:solidFill>
@@ -1315,7 +1315,7 @@
               </a:rPr>
               <a:t>비선점형</a:t>
             </a:r>
-            <a:endParaRPr lang="en-US" sz="850" dirty="0"/>
+            <a:endParaRPr lang="en-US" sz="950" dirty="0"/>
           </a:p>
           <a:p>
             <a:pPr algn="l" marL="88900" indent="-88900">
@@ -1323,7 +1323,7 @@
               <a:buChar char="•"/>
             </a:pPr>
             <a:r>
-              <a:rPr lang="en-US" sz="850" dirty="0">
+              <a:rPr lang="en-US" sz="950" dirty="0">
                 <a:solidFill>
                   <a:srgbClr val="333333"/>
                 </a:solidFill>
@@ -1333,7 +1333,7 @@
               </a:rPr>
               <a:t>O(1) 스케줄링</a:t>
             </a:r>
-            <a:endParaRPr lang="en-US" sz="850" dirty="0"/>
+            <a:endParaRPr lang="en-US" sz="950" dirty="0"/>
           </a:p>
         </p:txBody>
       </p:sp>
@@ -1345,7 +1345,7 @@
         </p:nvSpPr>
         <p:spPr>
           <a:xfrm>
-            <a:off x="517475" y="2096393"/>
+            <a:off x="517475" y="2182118"/>
             <a:ext cx="1727299" cy="0"/>
           </a:xfrm>
           <a:prstGeom prst="line">
@@ -1368,8 +1368,8 @@
         </p:nvSpPr>
         <p:spPr>
           <a:xfrm>
-            <a:off x="517475" y="1910655"/>
-            <a:ext cx="1761845" cy="142875"/>
+            <a:off x="517475" y="1986855"/>
+            <a:ext cx="1761845" cy="152400"/>
           </a:xfrm>
           <a:prstGeom prst="rect">
             <a:avLst/>
@@ -1385,7 +1385,7 @@
               <a:buNone/>
             </a:pPr>
             <a:r>
-              <a:rPr lang="en-US" sz="900" b="1" dirty="0">
+              <a:rPr lang="en-US" sz="1000" b="1" dirty="0">
                 <a:solidFill>
                   <a:srgbClr val="333333"/>
                 </a:solidFill>
@@ -1395,7 +1395,7 @@
               </a:rPr>
               <a:t>한계</a:t>
             </a:r>
-            <a:endParaRPr lang="en-US" sz="900" dirty="0"/>
+            <a:endParaRPr lang="en-US" sz="1000" dirty="0"/>
           </a:p>
         </p:txBody>
       </p:sp>
@@ -1407,8 +1407,8 @@
         </p:nvSpPr>
         <p:spPr>
           <a:xfrm>
-            <a:off x="517475" y="2189857"/>
-            <a:ext cx="1761845" cy="133350"/>
+            <a:off x="517475" y="2275582"/>
+            <a:ext cx="1761845" cy="152400"/>
           </a:xfrm>
           <a:prstGeom prst="rect">
             <a:avLst/>
@@ -1430,7 +1430,7 @@
               <a:buNone/>
             </a:pPr>
             <a:r>
-              <a:rPr lang="en-US" sz="850" dirty="0">
+              <a:rPr lang="en-US" sz="950" dirty="0">
                 <a:solidFill>
                   <a:srgbClr val="333333"/>
                 </a:solidFill>
@@ -1440,7 +1440,7 @@
               </a:rPr>
               <a:t>호위 효과 발생, 차등 서비스 불가</a:t>
             </a:r>
-            <a:endParaRPr lang="en-US" sz="850" dirty="0"/>
+            <a:endParaRPr lang="en-US" sz="950" dirty="0"/>
           </a:p>
         </p:txBody>
       </p:sp>
@@ -1453,7 +1453,7 @@
         <p:spPr>
           <a:xfrm>
             <a:off x="2508200" y="304800"/>
-            <a:ext cx="2000399" cy="3518595"/>
+            <a:ext cx="2000399" cy="3480495"/>
           </a:xfrm>
           <a:prstGeom prst="rect">
             <a:avLst/>
@@ -1461,7 +1461,7 @@
           <a:noFill/>
           <a:ln w="9525">
             <a:solidFill>
-              <a:srgbClr val="333333"/>
+              <a:srgbClr val="2B579A"/>
             </a:solidFill>
           </a:ln>
         </p:spPr>
@@ -1491,7 +1491,7 @@
             <a:avLst/>
           </a:prstGeom>
           <a:solidFill>
-            <a:srgbClr val="333333"/>
+            <a:srgbClr val="2B579A"/>
           </a:solidFill>
           <a:ln/>
         </p:spPr>
@@ -1554,7 +1554,7 @@
         <p:spPr>
           <a:xfrm>
             <a:off x="2627401" y="809476"/>
-            <a:ext cx="1761997" cy="142875"/>
+            <a:ext cx="1761997" cy="152400"/>
           </a:xfrm>
           <a:prstGeom prst="rect">
             <a:avLst/>
@@ -1576,7 +1576,7 @@
               <a:buNone/>
             </a:pPr>
             <a:r>
-              <a:rPr lang="en-US" sz="900" dirty="0">
+              <a:rPr lang="en-US" sz="1000" dirty="0">
                 <a:solidFill>
                   <a:srgbClr val="555555"/>
                 </a:solidFill>
@@ -1586,7 +1586,7 @@
               </a:rPr>
               <a:t>우선순위 기반 + 에이징</a:t>
             </a:r>
-            <a:endParaRPr lang="en-US" sz="900" dirty="0"/>
+            <a:endParaRPr lang="en-US" sz="1000" dirty="0"/>
           </a:p>
         </p:txBody>
       </p:sp>
@@ -1598,7 +1598,7 @@
         </p:nvSpPr>
         <p:spPr>
           <a:xfrm>
-            <a:off x="2644676" y="1290340"/>
+            <a:off x="2644676" y="1309390"/>
             <a:ext cx="1727448" cy="0"/>
           </a:xfrm>
           <a:prstGeom prst="line">
@@ -1621,8 +1621,8 @@
         </p:nvSpPr>
         <p:spPr>
           <a:xfrm>
-            <a:off x="2644676" y="1104602"/>
-            <a:ext cx="1761997" cy="142875"/>
+            <a:off x="2644676" y="1114127"/>
+            <a:ext cx="1761997" cy="152400"/>
           </a:xfrm>
           <a:prstGeom prst="rect">
             <a:avLst/>
@@ -1638,7 +1638,7 @@
               <a:buNone/>
             </a:pPr>
             <a:r>
-              <a:rPr lang="en-US" sz="900" b="1" dirty="0">
+              <a:rPr lang="en-US" sz="1000" b="1" dirty="0">
                 <a:solidFill>
                   <a:srgbClr val="333333"/>
                 </a:solidFill>
@@ -1648,7 +1648,7 @@
               </a:rPr>
               <a:t>특징</a:t>
             </a:r>
-            <a:endParaRPr lang="en-US" sz="900" dirty="0"/>
+            <a:endParaRPr lang="en-US" sz="1000" dirty="0"/>
           </a:p>
         </p:txBody>
       </p:sp>
@@ -1660,8 +1660,8 @@
         </p:nvSpPr>
         <p:spPr>
           <a:xfrm>
-            <a:off x="2644676" y="1383804"/>
-            <a:ext cx="1727448" cy="400050"/>
+            <a:off x="2644676" y="1402854"/>
+            <a:ext cx="1727448" cy="600075"/>
           </a:xfrm>
           <a:prstGeom prst="rect">
             <a:avLst/>
@@ -1678,7 +1678,7 @@
               <a:buChar char="•"/>
             </a:pPr>
             <a:r>
-              <a:rPr lang="en-US" sz="850" dirty="0">
+              <a:rPr lang="en-US" sz="950" dirty="0">
                 <a:solidFill>
                   <a:srgbClr val="333333"/>
                 </a:solidFill>
@@ -1688,7 +1688,7 @@
               </a:rPr>
               <a:t>4단계 우선순위 (URGENT~LOW)</a:t>
             </a:r>
-            <a:endParaRPr lang="en-US" sz="850" dirty="0"/>
+            <a:endParaRPr lang="en-US" sz="950" dirty="0"/>
           </a:p>
           <a:p>
             <a:pPr algn="l" marL="88900" indent="-88900">
@@ -1696,7 +1696,7 @@
               <a:buChar char="•"/>
             </a:pPr>
             <a:r>
-              <a:rPr lang="en-US" sz="850" dirty="0">
+              <a:rPr lang="en-US" sz="950" dirty="0">
                 <a:solidFill>
                   <a:srgbClr val="333333"/>
                 </a:solidFill>
@@ -1706,7 +1706,7 @@
               </a:rPr>
               <a:t>에이징으로 기아 방지</a:t>
             </a:r>
-            <a:endParaRPr lang="en-US" sz="850" dirty="0"/>
+            <a:endParaRPr lang="en-US" sz="950" dirty="0"/>
           </a:p>
           <a:p>
             <a:pPr algn="l" marL="88900" indent="-88900">
@@ -1714,7 +1714,7 @@
               <a:buChar char="•"/>
             </a:pPr>
             <a:r>
-              <a:rPr lang="en-US" sz="850" dirty="0">
+              <a:rPr lang="en-US" sz="950" dirty="0">
                 <a:solidFill>
                   <a:srgbClr val="333333"/>
                 </a:solidFill>
@@ -1724,7 +1724,7 @@
               </a:rPr>
               <a:t>동적 우선순위 조정</a:t>
             </a:r>
-            <a:endParaRPr lang="en-US" sz="850" dirty="0"/>
+            <a:endParaRPr lang="en-US" sz="950" dirty="0"/>
           </a:p>
         </p:txBody>
       </p:sp>
@@ -1736,7 +1736,7 @@
         </p:nvSpPr>
         <p:spPr>
           <a:xfrm>
-            <a:off x="2644676" y="2096393"/>
+            <a:off x="2644676" y="2324993"/>
             <a:ext cx="1727448" cy="0"/>
           </a:xfrm>
           <a:prstGeom prst="line">
@@ -1759,8 +1759,8 @@
         </p:nvSpPr>
         <p:spPr>
           <a:xfrm>
-            <a:off x="2644676" y="1910655"/>
-            <a:ext cx="1761997" cy="142875"/>
+            <a:off x="2644676" y="2129730"/>
+            <a:ext cx="1761997" cy="152400"/>
           </a:xfrm>
           <a:prstGeom prst="rect">
             <a:avLst/>
@@ -1776,7 +1776,7 @@
               <a:buNone/>
             </a:pPr>
             <a:r>
-              <a:rPr lang="en-US" sz="900" b="1" dirty="0">
+              <a:rPr lang="en-US" sz="1000" b="1" dirty="0">
                 <a:solidFill>
                   <a:srgbClr val="333333"/>
                 </a:solidFill>
@@ -1786,7 +1786,7 @@
               </a:rPr>
               <a:t>한계</a:t>
             </a:r>
-            <a:endParaRPr lang="en-US" sz="900" dirty="0"/>
+            <a:endParaRPr lang="en-US" sz="1000" dirty="0"/>
           </a:p>
         </p:txBody>
       </p:sp>
@@ -1798,8 +1798,8 @@
         </p:nvSpPr>
         <p:spPr>
           <a:xfrm>
-            <a:off x="2644676" y="2189857"/>
-            <a:ext cx="1761997" cy="133350"/>
+            <a:off x="2644676" y="2418457"/>
+            <a:ext cx="1761997" cy="152400"/>
           </a:xfrm>
           <a:prstGeom prst="rect">
             <a:avLst/>
@@ -1821,7 +1821,7 @@
               <a:buNone/>
             </a:pPr>
             <a:r>
-              <a:rPr lang="en-US" sz="850" dirty="0">
+              <a:rPr lang="en-US" sz="950" dirty="0">
                 <a:solidFill>
                   <a:srgbClr val="333333"/>
                 </a:solidFill>
@@ -1831,7 +1831,7 @@
               </a:rPr>
               <a:t>에이징 없으면 기아 발생 가능</a:t>
             </a:r>
-            <a:endParaRPr lang="en-US" sz="850" dirty="0"/>
+            <a:endParaRPr lang="en-US" sz="950" dirty="0"/>
           </a:p>
         </p:txBody>
       </p:sp>
@@ -1844,7 +1844,7 @@
         <p:spPr>
           <a:xfrm>
             <a:off x="4635550" y="304800"/>
-            <a:ext cx="2000250" cy="3518595"/>
+            <a:ext cx="2000250" cy="3480495"/>
           </a:xfrm>
           <a:prstGeom prst="rect">
             <a:avLst/>
@@ -1852,7 +1852,7 @@
           <a:noFill/>
           <a:ln w="9525">
             <a:solidFill>
-              <a:srgbClr val="333333"/>
+              <a:srgbClr val="2B579A"/>
             </a:solidFill>
           </a:ln>
         </p:spPr>
@@ -1882,7 +1882,7 @@
             <a:avLst/>
           </a:prstGeom>
           <a:solidFill>
-            <a:srgbClr val="333333"/>
+            <a:srgbClr val="2B579A"/>
           </a:solidFill>
           <a:ln/>
         </p:spPr>
@@ -1945,7 +1945,7 @@
         <p:spPr>
           <a:xfrm>
             <a:off x="4754752" y="809476"/>
-            <a:ext cx="1761845" cy="142875"/>
+            <a:ext cx="1761845" cy="152400"/>
           </a:xfrm>
           <a:prstGeom prst="rect">
             <a:avLst/>
@@ -1967,7 +1967,7 @@
               <a:buNone/>
             </a:pPr>
             <a:r>
-              <a:rPr lang="en-US" sz="900" dirty="0">
+              <a:rPr lang="en-US" sz="1000" dirty="0">
                 <a:solidFill>
                   <a:srgbClr val="555555"/>
                 </a:solidFill>
@@ -1977,7 +1977,7 @@
               </a:rPr>
               <a:t>다단계 피드백 큐</a:t>
             </a:r>
-            <a:endParaRPr lang="en-US" sz="900" dirty="0"/>
+            <a:endParaRPr lang="en-US" sz="1000" dirty="0"/>
           </a:p>
         </p:txBody>
       </p:sp>
@@ -1989,7 +1989,7 @@
         </p:nvSpPr>
         <p:spPr>
           <a:xfrm>
-            <a:off x="4772025" y="1290340"/>
+            <a:off x="4772025" y="1309390"/>
             <a:ext cx="1727299" cy="0"/>
           </a:xfrm>
           <a:prstGeom prst="line">
@@ -2012,8 +2012,8 @@
         </p:nvSpPr>
         <p:spPr>
           <a:xfrm>
-            <a:off x="4772025" y="1104602"/>
-            <a:ext cx="1761845" cy="142875"/>
+            <a:off x="4772025" y="1114127"/>
+            <a:ext cx="1761845" cy="152400"/>
           </a:xfrm>
           <a:prstGeom prst="rect">
             <a:avLst/>
@@ -2029,7 +2029,7 @@
               <a:buNone/>
             </a:pPr>
             <a:r>
-              <a:rPr lang="en-US" sz="900" b="1" dirty="0">
+              <a:rPr lang="en-US" sz="1000" b="1" dirty="0">
                 <a:solidFill>
                   <a:srgbClr val="333333"/>
                 </a:solidFill>
@@ -2039,7 +2039,7 @@
               </a:rPr>
               <a:t>특징</a:t>
             </a:r>
-            <a:endParaRPr lang="en-US" sz="900" dirty="0"/>
+            <a:endParaRPr lang="en-US" sz="1000" dirty="0"/>
           </a:p>
         </p:txBody>
       </p:sp>
@@ -2051,8 +2051,8 @@
         </p:nvSpPr>
         <p:spPr>
           <a:xfrm>
-            <a:off x="4772025" y="1383804"/>
-            <a:ext cx="1727299" cy="400050"/>
+            <a:off x="4772025" y="1402854"/>
+            <a:ext cx="1727299" cy="457200"/>
           </a:xfrm>
           <a:prstGeom prst="rect">
             <a:avLst/>
@@ -2069,7 +2069,7 @@
               <a:buChar char="•"/>
             </a:pPr>
             <a:r>
-              <a:rPr lang="en-US" sz="850" dirty="0">
+              <a:rPr lang="en-US" sz="950" dirty="0">
                 <a:solidFill>
                   <a:srgbClr val="333333"/>
                 </a:solidFill>
@@ -2079,7 +2079,7 @@
               </a:rPr>
               <a:t>적응형 분류</a:t>
             </a:r>
-            <a:endParaRPr lang="en-US" sz="850" dirty="0"/>
+            <a:endParaRPr lang="en-US" sz="950" dirty="0"/>
           </a:p>
           <a:p>
             <a:pPr algn="l" marL="88900" indent="-88900">
@@ -2087,7 +2087,7 @@
               <a:buChar char="•"/>
             </a:pPr>
             <a:r>
-              <a:rPr lang="en-US" sz="850" dirty="0">
+              <a:rPr lang="en-US" sz="950" dirty="0">
                 <a:solidFill>
                   <a:srgbClr val="333333"/>
                 </a:solidFill>
@@ -2097,7 +2097,7 @@
               </a:rPr>
               <a:t>큐별 타임 퀀텀</a:t>
             </a:r>
-            <a:endParaRPr lang="en-US" sz="850" dirty="0"/>
+            <a:endParaRPr lang="en-US" sz="950" dirty="0"/>
           </a:p>
           <a:p>
             <a:pPr algn="l" marL="88900" indent="-88900">
@@ -2105,7 +2105,7 @@
               <a:buChar char="•"/>
             </a:pPr>
             <a:r>
-              <a:rPr lang="en-US" sz="850" dirty="0">
+              <a:rPr lang="en-US" sz="950" dirty="0">
                 <a:solidFill>
                   <a:srgbClr val="333333"/>
                 </a:solidFill>
@@ -2115,7 +2115,7 @@
               </a:rPr>
               <a:t>선점형 스케줄링</a:t>
             </a:r>
-            <a:endParaRPr lang="en-US" sz="850" dirty="0"/>
+            <a:endParaRPr lang="en-US" sz="950" dirty="0"/>
           </a:p>
         </p:txBody>
       </p:sp>
@@ -2127,7 +2127,7 @@
         </p:nvSpPr>
         <p:spPr>
           <a:xfrm>
-            <a:off x="4772025" y="2096393"/>
+            <a:off x="4772025" y="2182118"/>
             <a:ext cx="1727299" cy="0"/>
           </a:xfrm>
           <a:prstGeom prst="line">
@@ -2150,8 +2150,8 @@
         </p:nvSpPr>
         <p:spPr>
           <a:xfrm>
-            <a:off x="4772025" y="1910655"/>
-            <a:ext cx="1761845" cy="142875"/>
+            <a:off x="4772025" y="1986855"/>
+            <a:ext cx="1761845" cy="152400"/>
           </a:xfrm>
           <a:prstGeom prst="rect">
             <a:avLst/>
@@ -2167,7 +2167,7 @@
               <a:buNone/>
             </a:pPr>
             <a:r>
-              <a:rPr lang="en-US" sz="900" b="1" dirty="0">
+              <a:rPr lang="en-US" sz="1000" b="1" dirty="0">
                 <a:solidFill>
                   <a:srgbClr val="333333"/>
                 </a:solidFill>
@@ -2177,7 +2177,7 @@
               </a:rPr>
               <a:t>한계</a:t>
             </a:r>
-            <a:endParaRPr lang="en-US" sz="900" dirty="0"/>
+            <a:endParaRPr lang="en-US" sz="1000" dirty="0"/>
           </a:p>
         </p:txBody>
       </p:sp>
@@ -2189,8 +2189,8 @@
         </p:nvSpPr>
         <p:spPr>
           <a:xfrm>
-            <a:off x="4772025" y="2189857"/>
-            <a:ext cx="1761845" cy="133350"/>
+            <a:off x="4772025" y="2275582"/>
+            <a:ext cx="1761845" cy="152400"/>
           </a:xfrm>
           <a:prstGeom prst="rect">
             <a:avLst/>
@@ -2212,7 +2212,7 @@
               <a:buNone/>
             </a:pPr>
             <a:r>
-              <a:rPr lang="en-US" sz="850" dirty="0">
+              <a:rPr lang="en-US" sz="950" dirty="0">
                 <a:solidFill>
                   <a:srgbClr val="333333"/>
                 </a:solidFill>
@@ -2222,7 +2222,7 @@
               </a:rPr>
               <a:t>파라미터 튜닝 복잡</a:t>
             </a:r>
-            <a:endParaRPr lang="en-US" sz="850" dirty="0"/>
+            <a:endParaRPr lang="en-US" sz="950" dirty="0"/>
           </a:p>
         </p:txBody>
       </p:sp>
@@ -2235,7 +2235,7 @@
         <p:spPr>
           <a:xfrm>
             <a:off x="6762750" y="304800"/>
-            <a:ext cx="2000250" cy="3518595"/>
+            <a:ext cx="2000250" cy="3480495"/>
           </a:xfrm>
           <a:prstGeom prst="rect">
             <a:avLst/>
@@ -2243,7 +2243,7 @@
           <a:noFill/>
           <a:ln w="9525">
             <a:solidFill>
-              <a:srgbClr val="333333"/>
+              <a:srgbClr val="2B579A"/>
             </a:solidFill>
           </a:ln>
         </p:spPr>
@@ -2273,7 +2273,7 @@
             <a:avLst/>
           </a:prstGeom>
           <a:solidFill>
-            <a:srgbClr val="333333"/>
+            <a:srgbClr val="2B579A"/>
           </a:solidFill>
           <a:ln/>
         </p:spPr>
@@ -2336,7 +2336,7 @@
         <p:spPr>
           <a:xfrm>
             <a:off x="6881952" y="809476"/>
-            <a:ext cx="1761845" cy="142875"/>
+            <a:ext cx="1761845" cy="152400"/>
           </a:xfrm>
           <a:prstGeom prst="rect">
             <a:avLst/>
@@ -2358,7 +2358,7 @@
               <a:buNone/>
             </a:pPr>
             <a:r>
-              <a:rPr lang="en-US" sz="900" dirty="0">
+              <a:rPr lang="en-US" sz="1000" dirty="0">
                 <a:solidFill>
                   <a:srgbClr val="555555"/>
                 </a:solidFill>
@@ -2368,7 +2368,7 @@
               </a:rPr>
               <a:t>가중치 공정 큐잉</a:t>
             </a:r>
-            <a:endParaRPr lang="en-US" sz="900" dirty="0"/>
+            <a:endParaRPr lang="en-US" sz="1000" dirty="0"/>
           </a:p>
         </p:txBody>
       </p:sp>
@@ -2380,7 +2380,7 @@
         </p:nvSpPr>
         <p:spPr>
           <a:xfrm>
-            <a:off x="6899225" y="1290340"/>
+            <a:off x="6899225" y="1309390"/>
             <a:ext cx="1727299" cy="0"/>
           </a:xfrm>
           <a:prstGeom prst="line">
@@ -2403,8 +2403,8 @@
         </p:nvSpPr>
         <p:spPr>
           <a:xfrm>
-            <a:off x="6899225" y="1104602"/>
-            <a:ext cx="1761845" cy="142875"/>
+            <a:off x="6899225" y="1114127"/>
+            <a:ext cx="1761845" cy="152400"/>
           </a:xfrm>
           <a:prstGeom prst="rect">
             <a:avLst/>
@@ -2420,7 +2420,7 @@
               <a:buNone/>
             </a:pPr>
             <a:r>
-              <a:rPr lang="en-US" sz="900" b="1" dirty="0">
+              <a:rPr lang="en-US" sz="1000" b="1" dirty="0">
                 <a:solidFill>
                   <a:srgbClr val="333333"/>
                 </a:solidFill>
@@ -2430,7 +2430,7 @@
               </a:rPr>
               <a:t>특징</a:t>
             </a:r>
-            <a:endParaRPr lang="en-US" sz="900" dirty="0"/>
+            <a:endParaRPr lang="en-US" sz="1000" dirty="0"/>
           </a:p>
         </p:txBody>
       </p:sp>
@@ -2442,8 +2442,8 @@
         </p:nvSpPr>
         <p:spPr>
           <a:xfrm>
-            <a:off x="6899225" y="1383804"/>
-            <a:ext cx="1727299" cy="400050"/>
+            <a:off x="6899225" y="1402854"/>
+            <a:ext cx="1727299" cy="457200"/>
           </a:xfrm>
           <a:prstGeom prst="rect">
             <a:avLst/>
@@ -2460,7 +2460,7 @@
               <a:buChar char="•"/>
             </a:pPr>
             <a:r>
-              <a:rPr lang="en-US" sz="850" dirty="0">
+              <a:rPr lang="en-US" sz="950" dirty="0">
                 <a:solidFill>
                   <a:srgbClr val="333333"/>
                 </a:solidFill>
@@ -2470,7 +2470,7 @@
               </a:rPr>
               <a:t>가중치 비례 서비스</a:t>
             </a:r>
-            <a:endParaRPr lang="en-US" sz="850" dirty="0"/>
+            <a:endParaRPr lang="en-US" sz="950" dirty="0"/>
           </a:p>
           <a:p>
             <a:pPr algn="l" marL="88900" indent="-88900">
@@ -2478,7 +2478,7 @@
               <a:buChar char="•"/>
             </a:pPr>
             <a:r>
-              <a:rPr lang="en-US" sz="850" dirty="0">
+              <a:rPr lang="en-US" sz="950" dirty="0">
                 <a:solidFill>
                   <a:srgbClr val="333333"/>
                 </a:solidFill>
@@ -2488,7 +2488,7 @@
               </a:rPr>
               <a:t>가상 종료 시각 계산</a:t>
             </a:r>
-            <a:endParaRPr lang="en-US" sz="850" dirty="0"/>
+            <a:endParaRPr lang="en-US" sz="950" dirty="0"/>
           </a:p>
           <a:p>
             <a:pPr algn="l" marL="88900" indent="-88900">
@@ -2496,7 +2496,7 @@
               <a:buChar char="•"/>
             </a:pPr>
             <a:r>
-              <a:rPr lang="en-US" sz="850" dirty="0">
+              <a:rPr lang="en-US" sz="950" dirty="0">
                 <a:solidFill>
                   <a:srgbClr val="333333"/>
                 </a:solidFill>
@@ -2506,7 +2506,7 @@
               </a:rPr>
               <a:t>JFI 공정성 지표</a:t>
             </a:r>
-            <a:endParaRPr lang="en-US" sz="850" dirty="0"/>
+            <a:endParaRPr lang="en-US" sz="950" dirty="0"/>
           </a:p>
         </p:txBody>
       </p:sp>
@@ -2518,7 +2518,7 @@
         </p:nvSpPr>
         <p:spPr>
           <a:xfrm>
-            <a:off x="6899225" y="2096393"/>
+            <a:off x="6899225" y="2182118"/>
             <a:ext cx="1727299" cy="0"/>
           </a:xfrm>
           <a:prstGeom prst="line">
@@ -2541,8 +2541,8 @@
         </p:nvSpPr>
         <p:spPr>
           <a:xfrm>
-            <a:off x="6899225" y="1910655"/>
-            <a:ext cx="1761845" cy="142875"/>
+            <a:off x="6899225" y="1986855"/>
+            <a:ext cx="1761845" cy="152400"/>
           </a:xfrm>
           <a:prstGeom prst="rect">
             <a:avLst/>
@@ -2558,7 +2558,7 @@
               <a:buNone/>
             </a:pPr>
             <a:r>
-              <a:rPr lang="en-US" sz="900" b="1" dirty="0">
+              <a:rPr lang="en-US" sz="1000" b="1" dirty="0">
                 <a:solidFill>
                   <a:srgbClr val="333333"/>
                 </a:solidFill>
@@ -2568,7 +2568,7 @@
               </a:rPr>
               <a:t>한계</a:t>
             </a:r>
-            <a:endParaRPr lang="en-US" sz="900" dirty="0"/>
+            <a:endParaRPr lang="en-US" sz="1000" dirty="0"/>
           </a:p>
         </p:txBody>
       </p:sp>
@@ -2580,8 +2580,8 @@
         </p:nvSpPr>
         <p:spPr>
           <a:xfrm>
-            <a:off x="6899225" y="2189857"/>
-            <a:ext cx="1761845" cy="133350"/>
+            <a:off x="6899225" y="2275582"/>
+            <a:ext cx="1761845" cy="152400"/>
           </a:xfrm>
           <a:prstGeom prst="rect">
             <a:avLst/>
@@ -2603,7 +2603,7 @@
               <a:buNone/>
             </a:pPr>
             <a:r>
-              <a:rPr lang="en-US" sz="850" dirty="0">
+              <a:rPr lang="en-US" sz="950" dirty="0">
                 <a:solidFill>
                   <a:srgbClr val="333333"/>
                 </a:solidFill>
@@ -2613,7 +2613,7 @@
               </a:rPr>
               <a:t>VFT 계산 부담</a:t>
             </a:r>
-            <a:endParaRPr lang="en-US" sz="850" dirty="0"/>
+            <a:endParaRPr lang="en-US" sz="950" dirty="0"/>
           </a:p>
         </p:txBody>
       </p:sp>
@@ -2625,8 +2625,8 @@
         </p:nvSpPr>
         <p:spPr>
           <a:xfrm>
-            <a:off x="381000" y="3899595"/>
-            <a:ext cx="8401050" cy="577453"/>
+            <a:off x="381000" y="3861495"/>
+            <a:ext cx="8401050" cy="596503"/>
           </a:xfrm>
           <a:prstGeom prst="rect">
             <a:avLst/>
@@ -2634,7 +2634,7 @@
           <a:noFill/>
           <a:ln w="9525">
             <a:solidFill>
-              <a:srgbClr val="333333"/>
+              <a:srgbClr val="2B579A"/>
             </a:solidFill>
           </a:ln>
         </p:spPr>
@@ -2657,14 +2657,14 @@
         </p:nvSpPr>
         <p:spPr>
           <a:xfrm>
-            <a:off x="390525" y="3909120"/>
+            <a:off x="390525" y="3871020"/>
             <a:ext cx="8382000" cy="298252"/>
           </a:xfrm>
           <a:prstGeom prst="rect">
             <a:avLst/>
           </a:prstGeom>
           <a:solidFill>
-            <a:srgbClr val="666666"/>
+            <a:srgbClr val="4472C4"/>
           </a:solidFill>
           <a:ln/>
         </p:spPr>
@@ -2687,7 +2687,7 @@
         </p:nvSpPr>
         <p:spPr>
           <a:xfrm>
-            <a:off x="517475" y="3972520"/>
+            <a:off x="517475" y="3934420"/>
             <a:ext cx="898380" cy="171450"/>
           </a:xfrm>
           <a:prstGeom prst="rect">
@@ -2726,7 +2726,7 @@
         </p:nvSpPr>
         <p:spPr>
           <a:xfrm>
-            <a:off x="1550640" y="3991570"/>
+            <a:off x="1550640" y="3953470"/>
             <a:ext cx="822933" cy="133350"/>
           </a:xfrm>
           <a:prstGeom prst="rect">
@@ -2765,8 +2765,8 @@
         </p:nvSpPr>
         <p:spPr>
           <a:xfrm>
-            <a:off x="517475" y="4270772"/>
-            <a:ext cx="1301725" cy="133350"/>
+            <a:off x="517475" y="4232672"/>
+            <a:ext cx="1454593" cy="152400"/>
           </a:xfrm>
           <a:prstGeom prst="rect">
             <a:avLst/>
@@ -2782,7 +2782,7 @@
               <a:buNone/>
             </a:pPr>
             <a:r>
-              <a:rPr lang="en-US" sz="850" b="1" dirty="0">
+              <a:rPr lang="en-US" sz="950" b="1" dirty="0">
                 <a:solidFill>
                   <a:srgbClr val="333333"/>
                 </a:solidFill>
@@ -2796,7 +2796,7 @@
               <a:buNone/>
             </a:pPr>
             <a:r>
-              <a:rPr lang="en-US" sz="850" dirty="0">
+              <a:rPr lang="en-US" sz="950" dirty="0">
                 <a:solidFill>
                   <a:srgbClr val="333333"/>
                 </a:solidFill>
@@ -2806,7 +2806,7 @@
               </a:rPr>
               <a:t> 테넌트별 요청 빈도 제한</a:t>
             </a:r>
-            <a:endParaRPr lang="en-US" sz="850" dirty="0"/>
+            <a:endParaRPr lang="en-US" sz="950" dirty="0"/>
           </a:p>
         </p:txBody>
       </p:sp>
@@ -2818,8 +2818,8 @@
         </p:nvSpPr>
         <p:spPr>
           <a:xfrm>
-            <a:off x="2047577" y="4270772"/>
-            <a:ext cx="985364" cy="133350"/>
+            <a:off x="2197447" y="4232672"/>
+            <a:ext cx="1101191" cy="152400"/>
           </a:xfrm>
           <a:prstGeom prst="rect">
             <a:avLst/>
@@ -2835,7 +2835,7 @@
               <a:buNone/>
             </a:pPr>
             <a:r>
-              <a:rPr lang="en-US" sz="850" b="1" dirty="0">
+              <a:rPr lang="en-US" sz="950" b="1" dirty="0">
                 <a:solidFill>
                   <a:srgbClr val="333333"/>
                 </a:solidFill>
@@ -2849,7 +2849,7 @@
               <a:buNone/>
             </a:pPr>
             <a:r>
-              <a:rPr lang="en-US" sz="850" dirty="0">
+              <a:rPr lang="en-US" sz="950" dirty="0">
                 <a:solidFill>
                   <a:srgbClr val="333333"/>
                 </a:solidFill>
@@ -2859,7 +2859,7 @@
               </a:rPr>
               <a:t> 버스트 용량 제어</a:t>
             </a:r>
-            <a:endParaRPr lang="en-US" sz="850" dirty="0"/>
+            <a:endParaRPr lang="en-US" sz="950" dirty="0"/>
           </a:p>
         </p:txBody>
       </p:sp>
@@ -2871,8 +2871,8 @@
         </p:nvSpPr>
         <p:spPr>
           <a:xfrm>
-            <a:off x="3267521" y="4270772"/>
-            <a:ext cx="1279714" cy="133350"/>
+            <a:off x="3530947" y="4232672"/>
+            <a:ext cx="1430000" cy="152400"/>
           </a:xfrm>
           <a:prstGeom prst="rect">
             <a:avLst/>
@@ -2888,7 +2888,7 @@
               <a:buNone/>
             </a:pPr>
             <a:r>
-              <a:rPr lang="en-US" sz="850" b="1" dirty="0">
+              <a:rPr lang="en-US" sz="950" b="1" dirty="0">
                 <a:solidFill>
                   <a:srgbClr val="333333"/>
                 </a:solidFill>
@@ -2902,7 +2902,7 @@
               <a:buNone/>
             </a:pPr>
             <a:r>
-              <a:rPr lang="en-US" sz="850" dirty="0">
+              <a:rPr lang="en-US" sz="950" dirty="0">
                 <a:solidFill>
                   <a:srgbClr val="333333"/>
                 </a:solidFill>
@@ -2912,7 +2912,7 @@
               </a:rPr>
               <a:t> 과부하 방지 (보조 수단)</a:t>
             </a:r>
-            <a:endParaRPr lang="en-US" sz="850" dirty="0"/>
+            <a:endParaRPr lang="en-US" sz="950" dirty="0"/>
           </a:p>
         </p:txBody>
       </p:sp>
@@ -2924,7 +2924,7 @@
         </p:nvSpPr>
         <p:spPr>
           <a:xfrm>
-            <a:off x="381000" y="4613523"/>
+            <a:off x="381000" y="4594473"/>
             <a:ext cx="8382000" cy="0"/>
           </a:xfrm>
           <a:prstGeom prst="line">
@@ -2933,7 +2933,7 @@
           <a:noFill/>
           <a:ln w="19050">
             <a:solidFill>
-              <a:srgbClr val="333333"/>
+              <a:srgbClr val="2B579A"/>
             </a:solidFill>
             <a:prstDash val="solid"/>
           </a:ln>
@@ -2947,8 +2947,8 @@
         </p:nvSpPr>
         <p:spPr>
           <a:xfrm>
-            <a:off x="381000" y="4661148"/>
-            <a:ext cx="179281" cy="123825"/>
+            <a:off x="381000" y="4642098"/>
+            <a:ext cx="201748" cy="142875"/>
           </a:xfrm>
           <a:prstGeom prst="rect">
             <a:avLst/>
@@ -2964,7 +2964,7 @@
               <a:buNone/>
             </a:pPr>
             <a:r>
-              <a:rPr lang="en-US" sz="800" i="1" dirty="0">
+              <a:rPr lang="en-US" sz="900" i="1" dirty="0">
                 <a:solidFill>
                   <a:srgbClr val="555555"/>
                 </a:solidFill>
@@ -2974,7 +2974,7 @@
               </a:rPr>
               <a:t>단순</a:t>
             </a:r>
-            <a:endParaRPr lang="en-US" sz="800" dirty="0"/>
+            <a:endParaRPr lang="en-US" sz="900" dirty="0"/>
           </a:p>
         </p:txBody>
       </p:sp>
@@ -2986,8 +2986,8 @@
         </p:nvSpPr>
         <p:spPr>
           <a:xfrm>
-            <a:off x="4012406" y="4661148"/>
-            <a:ext cx="1141571" cy="123825"/>
+            <a:off x="3942159" y="4642098"/>
+            <a:ext cx="1285027" cy="142875"/>
           </a:xfrm>
           <a:prstGeom prst="rect">
             <a:avLst/>
@@ -3003,7 +3003,7 @@
               <a:buNone/>
             </a:pPr>
             <a:r>
-              <a:rPr lang="en-US" sz="800" dirty="0">
+              <a:rPr lang="en-US" sz="900" dirty="0">
                 <a:solidFill>
                   <a:srgbClr val="555555"/>
                 </a:solidFill>
@@ -3013,7 +3013,7 @@
               </a:rPr>
               <a:t>구현 복잡도 / 성능 최적화  →</a:t>
             </a:r>
-            <a:endParaRPr lang="en-US" sz="800" dirty="0"/>
+            <a:endParaRPr lang="en-US" sz="900" dirty="0"/>
           </a:p>
         </p:txBody>
       </p:sp>
@@ -3025,8 +3025,8 @@
         </p:nvSpPr>
         <p:spPr>
           <a:xfrm>
-            <a:off x="8587234" y="4661148"/>
-            <a:ext cx="179281" cy="123825"/>
+            <a:off x="8565207" y="4642098"/>
+            <a:ext cx="201748" cy="142875"/>
           </a:xfrm>
           <a:prstGeom prst="rect">
             <a:avLst/>
@@ -3042,7 +3042,7 @@
               <a:buNone/>
             </a:pPr>
             <a:r>
-              <a:rPr lang="en-US" sz="800" i="1" dirty="0">
+              <a:rPr lang="en-US" sz="900" i="1" dirty="0">
                 <a:solidFill>
                   <a:srgbClr val="555555"/>
                 </a:solidFill>
@@ -3052,7 +3052,7 @@
               </a:rPr>
               <a:t>복잡</a:t>
             </a:r>
-            <a:endParaRPr lang="en-US" sz="800" dirty="0"/>
+            <a:endParaRPr lang="en-US" sz="900" dirty="0"/>
           </a:p>
         </p:txBody>
       </p:sp>
@@ -3167,7 +3167,7 @@
           <a:noFill/>
           <a:ln w="19050">
             <a:solidFill>
-              <a:srgbClr val="333333"/>
+              <a:srgbClr val="2B579A"/>
             </a:solidFill>
           </a:ln>
         </p:spPr>
@@ -3197,7 +3197,7 @@
             <a:avLst/>
           </a:prstGeom>
           <a:solidFill>
-            <a:srgbClr val="333333"/>
+            <a:srgbClr val="2B579A"/>
           </a:solidFill>
           <a:ln/>
         </p:spPr>
@@ -3338,7 +3338,7 @@
         <p:spPr>
           <a:xfrm>
             <a:off x="381000" y="1041202"/>
-            <a:ext cx="8382000" cy="568226"/>
+            <a:ext cx="8382000" cy="587276"/>
           </a:xfrm>
           <a:prstGeom prst="rect">
             <a:avLst/>
@@ -3346,7 +3346,7 @@
           <a:noFill/>
           <a:ln w="19050">
             <a:solidFill>
-              <a:srgbClr val="333333"/>
+              <a:srgbClr val="2B579A"/>
             </a:solidFill>
           </a:ln>
         </p:spPr>
@@ -3370,13 +3370,13 @@
         <p:spPr>
           <a:xfrm>
             <a:off x="400050" y="1060252"/>
-            <a:ext cx="2590800" cy="530126"/>
+            <a:ext cx="2590800" cy="549176"/>
           </a:xfrm>
           <a:prstGeom prst="rect">
             <a:avLst/>
           </a:prstGeom>
           <a:solidFill>
-            <a:srgbClr val="555555"/>
+            <a:srgbClr val="4472C4"/>
           </a:solidFill>
           <a:ln/>
         </p:spPr>
@@ -3439,7 +3439,7 @@
         <p:spPr>
           <a:xfrm>
             <a:off x="552450" y="1349127"/>
-            <a:ext cx="2331720" cy="114300"/>
+            <a:ext cx="2331720" cy="133350"/>
           </a:xfrm>
           <a:prstGeom prst="rect">
             <a:avLst/>
@@ -3455,7 +3455,7 @@
               <a:buNone/>
             </a:pPr>
             <a:r>
-              <a:rPr lang="en-US" sz="800" dirty="0">
+              <a:rPr lang="en-US" sz="900" dirty="0">
                 <a:solidFill>
                   <a:srgbClr val="CCCCCC"/>
                 </a:solidFill>
@@ -3465,7 +3465,7 @@
               </a:rPr>
               <a:t>(Express.js)</a:t>
             </a:r>
-            <a:endParaRPr lang="en-US" sz="800" dirty="0"/>
+            <a:endParaRPr lang="en-US" sz="900" dirty="0"/>
           </a:p>
         </p:txBody>
       </p:sp>
@@ -3477,7 +3477,7 @@
         </p:nvSpPr>
         <p:spPr>
           <a:xfrm>
-            <a:off x="3194000" y="1249114"/>
+            <a:off x="3194000" y="1258639"/>
             <a:ext cx="2596316" cy="152400"/>
           </a:xfrm>
           <a:prstGeom prst="rect">
@@ -3516,7 +3516,7 @@
         </p:nvSpPr>
         <p:spPr>
           <a:xfrm>
-            <a:off x="4497288" y="1685627"/>
+            <a:off x="4497288" y="1704677"/>
             <a:ext cx="152412" cy="180975"/>
           </a:xfrm>
           <a:prstGeom prst="rect">
@@ -3555,8 +3555,8 @@
         </p:nvSpPr>
         <p:spPr>
           <a:xfrm>
-            <a:off x="381000" y="1942802"/>
-            <a:ext cx="8382000" cy="669727"/>
+            <a:off x="381000" y="1961852"/>
+            <a:ext cx="8382000" cy="698302"/>
           </a:xfrm>
           <a:prstGeom prst="rect">
             <a:avLst/>
@@ -3564,7 +3564,7 @@
           <a:noFill/>
           <a:ln w="19050">
             <a:solidFill>
-              <a:srgbClr val="333333"/>
+              <a:srgbClr val="2B579A"/>
             </a:solidFill>
           </a:ln>
         </p:spPr>
@@ -3587,14 +3587,14 @@
         </p:nvSpPr>
         <p:spPr>
           <a:xfrm>
-            <a:off x="400050" y="2007840"/>
-            <a:ext cx="2590800" cy="539651"/>
+            <a:off x="400050" y="2031653"/>
+            <a:ext cx="2590800" cy="558701"/>
           </a:xfrm>
           <a:prstGeom prst="rect">
             <a:avLst/>
           </a:prstGeom>
           <a:solidFill>
-            <a:srgbClr val="333333"/>
+            <a:srgbClr val="2B579A"/>
           </a:solidFill>
           <a:ln/>
         </p:spPr>
@@ -3617,7 +3617,7 @@
         </p:nvSpPr>
         <p:spPr>
           <a:xfrm>
-            <a:off x="552450" y="2134791"/>
+            <a:off x="552450" y="2158603"/>
             <a:ext cx="2331720" cy="161925"/>
           </a:xfrm>
           <a:prstGeom prst="rect">
@@ -3656,8 +3656,8 @@
         </p:nvSpPr>
         <p:spPr>
           <a:xfrm>
-            <a:off x="552450" y="2296716"/>
-            <a:ext cx="2331720" cy="123825"/>
+            <a:off x="552450" y="2320528"/>
+            <a:ext cx="2331720" cy="142875"/>
           </a:xfrm>
           <a:prstGeom prst="rect">
             <a:avLst/>
@@ -3673,7 +3673,7 @@
               <a:buNone/>
             </a:pPr>
             <a:r>
-              <a:rPr lang="en-US" sz="800" dirty="0">
+              <a:rPr lang="en-US" sz="900" dirty="0">
                 <a:solidFill>
                   <a:srgbClr val="CCCCCC"/>
                 </a:solidFill>
@@ -3683,7 +3683,7 @@
               </a:rPr>
               <a:t>(런타임 교체 가능)</a:t>
             </a:r>
-            <a:endParaRPr lang="en-US" sz="800" dirty="0"/>
+            <a:endParaRPr lang="en-US" sz="900" dirty="0"/>
           </a:p>
         </p:txBody>
       </p:sp>
@@ -3695,8 +3695,8 @@
         </p:nvSpPr>
         <p:spPr>
           <a:xfrm>
-            <a:off x="3194000" y="2063353"/>
-            <a:ext cx="571500" cy="228600"/>
+            <a:off x="3194000" y="2082403"/>
+            <a:ext cx="604540" cy="238125"/>
           </a:xfrm>
           <a:prstGeom prst="rect">
             <a:avLst/>
@@ -3704,7 +3704,7 @@
           <a:noFill/>
           <a:ln w="9525">
             <a:solidFill>
-              <a:srgbClr val="333333"/>
+              <a:srgbClr val="2B579A"/>
             </a:solidFill>
           </a:ln>
         </p:spPr>
@@ -3727,8 +3727,8 @@
         </p:nvSpPr>
         <p:spPr>
           <a:xfrm>
-            <a:off x="3330476" y="2110978"/>
-            <a:ext cx="304520" cy="133350"/>
+            <a:off x="3330476" y="2130028"/>
+            <a:ext cx="338221" cy="142875"/>
           </a:xfrm>
           <a:prstGeom prst="rect">
             <a:avLst/>
@@ -3744,7 +3744,7 @@
               <a:buNone/>
             </a:pPr>
             <a:r>
-              <a:rPr lang="en-US" sz="900" b="1" dirty="0">
+              <a:rPr lang="en-US" sz="1000" b="1" dirty="0">
                 <a:solidFill>
                   <a:srgbClr val="333333"/>
                 </a:solidFill>
@@ -3754,7 +3754,7 @@
               </a:rPr>
               <a:t>FCFS</a:t>
             </a:r>
-            <a:endParaRPr lang="en-US" sz="900" dirty="0"/>
+            <a:endParaRPr lang="en-US" sz="1000" dirty="0"/>
           </a:p>
         </p:txBody>
       </p:sp>
@@ -3766,8 +3766,8 @@
         </p:nvSpPr>
         <p:spPr>
           <a:xfrm>
-            <a:off x="3841700" y="2063353"/>
-            <a:ext cx="673150" cy="228600"/>
+            <a:off x="3874740" y="2082403"/>
+            <a:ext cx="717500" cy="238125"/>
           </a:xfrm>
           <a:prstGeom prst="rect">
             <a:avLst/>
@@ -3775,7 +3775,7 @@
           <a:noFill/>
           <a:ln w="9525">
             <a:solidFill>
-              <a:srgbClr val="333333"/>
+              <a:srgbClr val="2B579A"/>
             </a:solidFill>
           </a:ln>
         </p:spPr>
@@ -3798,8 +3798,8 @@
         </p:nvSpPr>
         <p:spPr>
           <a:xfrm>
-            <a:off x="3978176" y="2110978"/>
-            <a:ext cx="408203" cy="133350"/>
+            <a:off x="4011216" y="2130028"/>
+            <a:ext cx="453441" cy="142875"/>
           </a:xfrm>
           <a:prstGeom prst="rect">
             <a:avLst/>
@@ -3815,7 +3815,7 @@
               <a:buNone/>
             </a:pPr>
             <a:r>
-              <a:rPr lang="en-US" sz="900" b="1" dirty="0">
+              <a:rPr lang="en-US" sz="1000" b="1" dirty="0">
                 <a:solidFill>
                   <a:srgbClr val="333333"/>
                 </a:solidFill>
@@ -3825,7 +3825,7 @@
               </a:rPr>
               <a:t>Priority</a:t>
             </a:r>
-            <a:endParaRPr lang="en-US" sz="900" dirty="0"/>
+            <a:endParaRPr lang="en-US" sz="1000" dirty="0"/>
           </a:p>
         </p:txBody>
       </p:sp>
@@ -3837,8 +3837,8 @@
         </p:nvSpPr>
         <p:spPr>
           <a:xfrm>
-            <a:off x="4591050" y="2063353"/>
-            <a:ext cx="596801" cy="228600"/>
+            <a:off x="4668441" y="2082403"/>
+            <a:ext cx="632668" cy="238125"/>
           </a:xfrm>
           <a:prstGeom prst="rect">
             <a:avLst/>
@@ -3846,7 +3846,7 @@
           <a:noFill/>
           <a:ln w="9525">
             <a:solidFill>
-              <a:srgbClr val="333333"/>
+              <a:srgbClr val="2B579A"/>
             </a:solidFill>
           </a:ln>
         </p:spPr>
@@ -3869,8 +3869,8 @@
         </p:nvSpPr>
         <p:spPr>
           <a:xfrm>
-            <a:off x="4727525" y="2110978"/>
-            <a:ext cx="330327" cy="133350"/>
+            <a:off x="4804916" y="2130028"/>
+            <a:ext cx="366912" cy="142875"/>
           </a:xfrm>
           <a:prstGeom prst="rect">
             <a:avLst/>
@@ -3886,7 +3886,7 @@
               <a:buNone/>
             </a:pPr>
             <a:r>
-              <a:rPr lang="en-US" sz="900" b="1" dirty="0">
+              <a:rPr lang="en-US" sz="1000" b="1" dirty="0">
                 <a:solidFill>
                   <a:srgbClr val="333333"/>
                 </a:solidFill>
@@ -3896,7 +3896,7 @@
               </a:rPr>
               <a:t>MLFQ</a:t>
             </a:r>
-            <a:endParaRPr lang="en-US" sz="900" dirty="0"/>
+            <a:endParaRPr lang="en-US" sz="1000" dirty="0"/>
           </a:p>
         </p:txBody>
       </p:sp>
@@ -3908,8 +3908,8 @@
         </p:nvSpPr>
         <p:spPr>
           <a:xfrm>
-            <a:off x="5264051" y="2063353"/>
-            <a:ext cx="539651" cy="228600"/>
+            <a:off x="5377309" y="2082403"/>
+            <a:ext cx="569119" cy="238125"/>
           </a:xfrm>
           <a:prstGeom prst="rect">
             <a:avLst/>
@@ -3917,7 +3917,7 @@
           <a:noFill/>
           <a:ln w="9525">
             <a:solidFill>
-              <a:srgbClr val="333333"/>
+              <a:srgbClr val="2B579A"/>
             </a:solidFill>
           </a:ln>
         </p:spPr>
@@ -3940,8 +3940,8 @@
         </p:nvSpPr>
         <p:spPr>
           <a:xfrm>
-            <a:off x="5400526" y="2110978"/>
-            <a:ext cx="272034" cy="133350"/>
+            <a:off x="5513784" y="2130028"/>
+            <a:ext cx="302091" cy="142875"/>
           </a:xfrm>
           <a:prstGeom prst="rect">
             <a:avLst/>
@@ -3957,7 +3957,7 @@
               <a:buNone/>
             </a:pPr>
             <a:r>
-              <a:rPr lang="en-US" sz="900" b="1" dirty="0">
+              <a:rPr lang="en-US" sz="1000" b="1" dirty="0">
                 <a:solidFill>
                   <a:srgbClr val="333333"/>
                 </a:solidFill>
@@ -3967,7 +3967,7 @@
               </a:rPr>
               <a:t>WFQ</a:t>
             </a:r>
-            <a:endParaRPr lang="en-US" sz="900" dirty="0"/>
+            <a:endParaRPr lang="en-US" sz="1000" dirty="0"/>
           </a:p>
         </p:txBody>
       </p:sp>
@@ -3979,8 +3979,8 @@
         </p:nvSpPr>
         <p:spPr>
           <a:xfrm>
-            <a:off x="5879902" y="2063353"/>
-            <a:ext cx="933599" cy="228600"/>
+            <a:off x="6022628" y="2082403"/>
+            <a:ext cx="1006822" cy="238125"/>
           </a:xfrm>
           <a:prstGeom prst="rect">
             <a:avLst/>
@@ -3988,7 +3988,7 @@
           <a:noFill/>
           <a:ln w="9525">
             <a:solidFill>
-              <a:srgbClr val="333333"/>
+              <a:srgbClr val="2B579A"/>
             </a:solidFill>
           </a:ln>
         </p:spPr>
@@ -4011,8 +4011,8 @@
         </p:nvSpPr>
         <p:spPr>
           <a:xfrm>
-            <a:off x="6016377" y="2110978"/>
-            <a:ext cx="673861" cy="133350"/>
+            <a:off x="6159103" y="2130028"/>
+            <a:ext cx="748549" cy="142875"/>
           </a:xfrm>
           <a:prstGeom prst="rect">
             <a:avLst/>
@@ -4028,7 +4028,7 @@
               <a:buNone/>
             </a:pPr>
             <a:r>
-              <a:rPr lang="en-US" sz="900" b="1" dirty="0">
+              <a:rPr lang="en-US" sz="1000" b="1" dirty="0">
                 <a:solidFill>
                   <a:srgbClr val="333333"/>
                 </a:solidFill>
@@ -4038,20 +4038,59 @@
               </a:rPr>
               <a:t>Rate Limiter</a:t>
             </a:r>
+            <a:endParaRPr lang="en-US" sz="1000" dirty="0"/>
+          </a:p>
+        </p:txBody>
+      </p:sp>
+      <p:sp>
+        <p:nvSpPr>
+          <p:cNvPr id="27" name="Text 25"/>
+          <p:cNvSpPr/>
+          <p:nvPr/>
+        </p:nvSpPr>
+        <p:spPr>
+          <a:xfrm>
+            <a:off x="3194000" y="2396728"/>
+            <a:ext cx="1865376" cy="142875"/>
+          </a:xfrm>
+          <a:prstGeom prst="rect">
+            <a:avLst/>
+          </a:prstGeom>
+          <a:noFill/>
+          <a:ln/>
+        </p:spPr>
+        <p:txBody>
+          <a:bodyPr wrap="square" lIns="0" tIns="0" rIns="0" bIns="0" rtlCol="0" anchor="t"/>
+          <a:lstStyle/>
+          <a:p>
+            <a:pPr algn="l" indent="0" marL="0">
+              <a:buNone/>
+            </a:pPr>
+            <a:r>
+              <a:rPr lang="en-US" sz="900" i="1" dirty="0">
+                <a:solidFill>
+                  <a:srgbClr val="666666"/>
+                </a:solidFill>
+                <a:latin typeface="Malgun Gothic" pitchFamily="34" charset="0"/>
+                <a:ea typeface="Malgun Gothic" pitchFamily="34" charset="-122"/>
+                <a:cs typeface="Malgun Gothic" pitchFamily="34" charset="-120"/>
+              </a:rPr>
+              <a:t>기능: 에이징, 부스트, 이중 수준 JFI 측정</a:t>
+            </a:r>
             <a:endParaRPr lang="en-US" sz="900" dirty="0"/>
           </a:p>
         </p:txBody>
       </p:sp>
       <p:sp>
         <p:nvSpPr>
-          <p:cNvPr id="27" name="Text 25"/>
-          <p:cNvSpPr/>
-          <p:nvPr/>
-        </p:nvSpPr>
-        <p:spPr>
-          <a:xfrm>
-            <a:off x="3194000" y="2368153"/>
-            <a:ext cx="1657100" cy="123825"/>
+          <p:cNvPr id="28" name="Text 26"/>
+          <p:cNvSpPr/>
+          <p:nvPr/>
+        </p:nvSpPr>
+        <p:spPr>
+          <a:xfrm>
+            <a:off x="4497288" y="2736354"/>
+            <a:ext cx="152412" cy="180975"/>
           </a:xfrm>
           <a:prstGeom prst="rect">
             <a:avLst/>
@@ -4067,45 +4106,6 @@
               <a:buNone/>
             </a:pPr>
             <a:r>
-              <a:rPr lang="en-US" sz="800" i="1" dirty="0">
-                <a:solidFill>
-                  <a:srgbClr val="666666"/>
-                </a:solidFill>
-                <a:latin typeface="Malgun Gothic" pitchFamily="34" charset="0"/>
-                <a:ea typeface="Malgun Gothic" pitchFamily="34" charset="-122"/>
-                <a:cs typeface="Malgun Gothic" pitchFamily="34" charset="-120"/>
-              </a:rPr>
-              <a:t>기능: 에이징, 부스트, 이중 수준 JFI 측정</a:t>
-            </a:r>
-            <a:endParaRPr lang="en-US" sz="800" dirty="0"/>
-          </a:p>
-        </p:txBody>
-      </p:sp>
-      <p:sp>
-        <p:nvSpPr>
-          <p:cNvPr id="28" name="Text 26"/>
-          <p:cNvSpPr/>
-          <p:nvPr/>
-        </p:nvSpPr>
-        <p:spPr>
-          <a:xfrm>
-            <a:off x="4497288" y="2688729"/>
-            <a:ext cx="152412" cy="180975"/>
-          </a:xfrm>
-          <a:prstGeom prst="rect">
-            <a:avLst/>
-          </a:prstGeom>
-          <a:noFill/>
-          <a:ln/>
-        </p:spPr>
-        <p:txBody>
-          <a:bodyPr wrap="square" lIns="0" tIns="0" rIns="0" bIns="0" rtlCol="0" anchor="t"/>
-          <a:lstStyle/>
-          <a:p>
-            <a:pPr algn="l" indent="0" marL="0">
-              <a:buNone/>
-            </a:pPr>
-            <a:r>
               <a:rPr lang="en-US" sz="1200" dirty="0">
                 <a:solidFill>
                   <a:srgbClr val="888888"/>
@@ -4128,8 +4128,8 @@
         </p:nvSpPr>
         <p:spPr>
           <a:xfrm>
-            <a:off x="381000" y="2945904"/>
-            <a:ext cx="5857429" cy="577751"/>
+            <a:off x="381000" y="2993529"/>
+            <a:ext cx="5857429" cy="596801"/>
           </a:xfrm>
           <a:prstGeom prst="rect">
             <a:avLst/>
@@ -4137,7 +4137,7 @@
           <a:noFill/>
           <a:ln w="19050">
             <a:solidFill>
-              <a:srgbClr val="333333"/>
+              <a:srgbClr val="2B579A"/>
             </a:solidFill>
           </a:ln>
         </p:spPr>
@@ -4160,14 +4160,14 @@
         </p:nvSpPr>
         <p:spPr>
           <a:xfrm>
-            <a:off x="400050" y="3026866"/>
+            <a:off x="400050" y="3084016"/>
             <a:ext cx="2590800" cy="415826"/>
           </a:xfrm>
           <a:prstGeom prst="rect">
             <a:avLst/>
           </a:prstGeom>
           <a:solidFill>
-            <a:srgbClr val="555555"/>
+            <a:srgbClr val="4472C4"/>
           </a:solidFill>
           <a:ln/>
         </p:spPr>
@@ -4190,7 +4190,7 @@
         </p:nvSpPr>
         <p:spPr>
           <a:xfrm>
-            <a:off x="552450" y="3153817"/>
+            <a:off x="552450" y="3210967"/>
             <a:ext cx="2331720" cy="161925"/>
           </a:xfrm>
           <a:prstGeom prst="rect">
@@ -4229,7 +4229,7 @@
         </p:nvSpPr>
         <p:spPr>
           <a:xfrm>
-            <a:off x="3194000" y="3158579"/>
+            <a:off x="3194000" y="3215729"/>
             <a:ext cx="1890120" cy="152400"/>
           </a:xfrm>
           <a:prstGeom prst="rect">
@@ -4268,8 +4268,8 @@
         </p:nvSpPr>
         <p:spPr>
           <a:xfrm>
-            <a:off x="6339929" y="2945904"/>
-            <a:ext cx="2423071" cy="577751"/>
+            <a:off x="6339929" y="2993529"/>
+            <a:ext cx="2423071" cy="596801"/>
           </a:xfrm>
           <a:prstGeom prst="rect">
             <a:avLst/>
@@ -4277,7 +4277,7 @@
           <a:noFill/>
           <a:ln w="19050">
             <a:solidFill>
-              <a:srgbClr val="333333"/>
+              <a:srgbClr val="2B579A"/>
             </a:solidFill>
           </a:ln>
         </p:spPr>
@@ -4300,14 +4300,14 @@
         </p:nvSpPr>
         <p:spPr>
           <a:xfrm>
-            <a:off x="6358979" y="2964954"/>
-            <a:ext cx="992981" cy="539651"/>
+            <a:off x="6358979" y="3012579"/>
+            <a:ext cx="992981" cy="558701"/>
           </a:xfrm>
           <a:prstGeom prst="rect">
             <a:avLst/>
           </a:prstGeom>
           <a:solidFill>
-            <a:srgbClr val="333333"/>
+            <a:srgbClr val="2B579A"/>
           </a:solidFill>
           <a:ln/>
         </p:spPr>
@@ -4330,7 +4330,7 @@
         </p:nvSpPr>
         <p:spPr>
           <a:xfrm>
-            <a:off x="6511379" y="3091904"/>
+            <a:off x="6511379" y="3139529"/>
             <a:ext cx="701945" cy="161925"/>
           </a:xfrm>
           <a:prstGeom prst="rect">
@@ -4369,8 +4369,8 @@
         </p:nvSpPr>
         <p:spPr>
           <a:xfrm>
-            <a:off x="6511379" y="3253829"/>
-            <a:ext cx="701945" cy="123825"/>
+            <a:off x="6511379" y="3301454"/>
+            <a:ext cx="701945" cy="142875"/>
           </a:xfrm>
           <a:prstGeom prst="rect">
             <a:avLst/>
@@ -4386,7 +4386,7 @@
               <a:buNone/>
             </a:pPr>
             <a:r>
-              <a:rPr lang="en-US" sz="800" dirty="0">
+              <a:rPr lang="en-US" sz="900" dirty="0">
                 <a:solidFill>
                   <a:srgbClr val="CCCCCC"/>
                 </a:solidFill>
@@ -4396,7 +4396,7 @@
               </a:rPr>
               <a:t>(외부 서비스)</a:t>
             </a:r>
-            <a:endParaRPr lang="en-US" sz="800" dirty="0"/>
+            <a:endParaRPr lang="en-US" sz="900" dirty="0"/>
           </a:p>
         </p:txBody>
       </p:sp>
@@ -4408,7 +4408,7 @@
         </p:nvSpPr>
         <p:spPr>
           <a:xfrm>
-            <a:off x="7555111" y="3163342"/>
+            <a:off x="7555111" y="3220492"/>
             <a:ext cx="410328" cy="142875"/>
           </a:xfrm>
           <a:prstGeom prst="rect">
@@ -4447,7 +4447,7 @@
         </p:nvSpPr>
         <p:spPr>
           <a:xfrm>
-            <a:off x="7957393" y="3172867"/>
+            <a:off x="7957393" y="3230017"/>
             <a:ext cx="595074" cy="123825"/>
           </a:xfrm>
           <a:prstGeom prst="rect">
@@ -4581,7 +4581,7 @@
         <p:spPr>
           <a:xfrm>
             <a:off x="406301" y="279202"/>
-            <a:ext cx="8498026" cy="123825"/>
+            <a:ext cx="8498026" cy="142875"/>
           </a:xfrm>
           <a:prstGeom prst="rect">
             <a:avLst/>
@@ -4597,7 +4597,7 @@
               <a:buNone/>
             </a:pPr>
             <a:r>
-              <a:rPr lang="en-US" sz="800" b="1" dirty="0">
+              <a:rPr lang="en-US" sz="900" b="1" dirty="0">
                 <a:solidFill>
                   <a:srgbClr val="888888"/>
                 </a:solidFill>
@@ -4607,7 +4607,7 @@
               </a:rPr>
               <a:t>단계 1: 요청 수신</a:t>
             </a:r>
-            <a:endParaRPr lang="en-US" sz="800" dirty="0"/>
+            <a:endParaRPr lang="en-US" sz="900" dirty="0"/>
           </a:p>
         </p:txBody>
       </p:sp>
@@ -4619,18 +4619,18 @@
         </p:nvSpPr>
         <p:spPr>
           <a:xfrm>
-            <a:off x="304800" y="479078"/>
-            <a:ext cx="1561951" cy="631627"/>
+            <a:off x="304800" y="498128"/>
+            <a:ext cx="1561951" cy="669727"/>
           </a:xfrm>
           <a:prstGeom prst="rect">
             <a:avLst/>
           </a:prstGeom>
           <a:solidFill>
-            <a:srgbClr val="333333"/>
+            <a:srgbClr val="2B579A"/>
           </a:solidFill>
           <a:ln w="19050">
             <a:solidFill>
-              <a:srgbClr val="333333"/>
+              <a:srgbClr val="2B579A"/>
             </a:solidFill>
           </a:ln>
         </p:spPr>
@@ -4653,7 +4653,7 @@
         </p:nvSpPr>
         <p:spPr>
           <a:xfrm>
-            <a:off x="438101" y="599629"/>
+            <a:off x="438101" y="618679"/>
             <a:ext cx="1295349" cy="152400"/>
           </a:xfrm>
           <a:prstGeom prst="rect">
@@ -4692,8 +4692,8 @@
         </p:nvSpPr>
         <p:spPr>
           <a:xfrm>
-            <a:off x="438101" y="752029"/>
-            <a:ext cx="1295349" cy="123825"/>
+            <a:off x="438101" y="771079"/>
+            <a:ext cx="1295349" cy="142875"/>
           </a:xfrm>
           <a:prstGeom prst="rect">
             <a:avLst/>
@@ -4709,7 +4709,7 @@
               <a:buNone/>
             </a:pPr>
             <a:r>
-              <a:rPr lang="en-US" sz="750" dirty="0">
+              <a:rPr lang="en-US" sz="900" dirty="0">
                 <a:solidFill>
                   <a:srgbClr val="CCCCCC"/>
                 </a:solidFill>
@@ -4719,7 +4719,7 @@
               </a:rPr>
               <a:t>REST API 호출</a:t>
             </a:r>
-            <a:endParaRPr lang="en-US" sz="750" dirty="0"/>
+            <a:endParaRPr lang="en-US" sz="900" dirty="0"/>
           </a:p>
         </p:txBody>
       </p:sp>
@@ -4731,8 +4731,8 @@
         </p:nvSpPr>
         <p:spPr>
           <a:xfrm>
-            <a:off x="438101" y="875854"/>
-            <a:ext cx="1295349" cy="114300"/>
+            <a:off x="438101" y="913954"/>
+            <a:ext cx="1295349" cy="133350"/>
           </a:xfrm>
           <a:prstGeom prst="rect">
             <a:avLst/>
@@ -4748,7 +4748,7 @@
               <a:buNone/>
             </a:pPr>
             <a:r>
-              <a:rPr lang="en-US" sz="750" dirty="0">
+              <a:rPr lang="en-US" sz="900" dirty="0">
                 <a:solidFill>
                   <a:srgbClr val="CCCCCC"/>
                 </a:solidFill>
@@ -4758,7 +4758,7 @@
               </a:rPr>
               <a:t>POST /api/requests</a:t>
             </a:r>
-            <a:endParaRPr lang="en-US" sz="750" dirty="0"/>
+            <a:endParaRPr lang="en-US" sz="900" dirty="0"/>
           </a:p>
         </p:txBody>
       </p:sp>
@@ -4770,7 +4770,7 @@
         </p:nvSpPr>
         <p:spPr>
           <a:xfrm>
-            <a:off x="1942951" y="690116"/>
+            <a:off x="1942951" y="728216"/>
             <a:ext cx="181407" cy="209550"/>
           </a:xfrm>
           <a:prstGeom prst="rect">
@@ -4789,7 +4789,7 @@
             <a:r>
               <a:rPr lang="en-US" sz="1400" dirty="0">
                 <a:solidFill>
-                  <a:srgbClr val="333333"/>
+                  <a:srgbClr val="2B579A"/>
                 </a:solidFill>
                 <a:latin typeface="Malgun Gothic" pitchFamily="34" charset="0"/>
                 <a:ea typeface="Malgun Gothic" pitchFamily="34" charset="-122"/>
@@ -4809,8 +4809,8 @@
         </p:nvSpPr>
         <p:spPr>
           <a:xfrm>
-            <a:off x="2197001" y="479078"/>
-            <a:ext cx="4749998" cy="631627"/>
+            <a:off x="2197001" y="498128"/>
+            <a:ext cx="4749998" cy="669727"/>
           </a:xfrm>
           <a:prstGeom prst="rect">
             <a:avLst/>
@@ -4820,7 +4820,7 @@
           </a:solidFill>
           <a:ln w="19050">
             <a:solidFill>
-              <a:srgbClr val="333333"/>
+              <a:srgbClr val="2B579A"/>
             </a:solidFill>
           </a:ln>
         </p:spPr>
@@ -4843,7 +4843,7 @@
         </p:nvSpPr>
         <p:spPr>
           <a:xfrm>
-            <a:off x="2298421" y="656779"/>
+            <a:off x="2298421" y="685354"/>
             <a:ext cx="4547158" cy="152400"/>
           </a:xfrm>
           <a:prstGeom prst="rect">
@@ -4882,8 +4882,8 @@
         </p:nvSpPr>
         <p:spPr>
           <a:xfrm>
-            <a:off x="2298421" y="809179"/>
-            <a:ext cx="4547158" cy="123825"/>
+            <a:off x="2298421" y="837754"/>
+            <a:ext cx="4547158" cy="142875"/>
           </a:xfrm>
           <a:prstGeom prst="rect">
             <a:avLst/>
@@ -4899,7 +4899,7 @@
               <a:buNone/>
             </a:pPr>
             <a:r>
-              <a:rPr lang="en-US" sz="750" dirty="0">
+              <a:rPr lang="en-US" sz="900" dirty="0">
                 <a:solidFill>
                   <a:srgbClr val="666666"/>
                 </a:solidFill>
@@ -4909,7 +4909,7 @@
               </a:rPr>
               <a:t>요청 검증 · 테넌트 식별 · 우선순위 할당</a:t>
             </a:r>
-            <a:endParaRPr lang="en-US" sz="750" dirty="0"/>
+            <a:endParaRPr lang="en-US" sz="900" dirty="0"/>
           </a:p>
         </p:txBody>
       </p:sp>
@@ -4921,7 +4921,7 @@
         </p:nvSpPr>
         <p:spPr>
           <a:xfrm>
-            <a:off x="7023199" y="690116"/>
+            <a:off x="7023199" y="728216"/>
             <a:ext cx="181407" cy="209550"/>
           </a:xfrm>
           <a:prstGeom prst="rect">
@@ -4940,7 +4940,7 @@
             <a:r>
               <a:rPr lang="en-US" sz="1400" dirty="0">
                 <a:solidFill>
-                  <a:srgbClr val="333333"/>
+                  <a:srgbClr val="2B579A"/>
                 </a:solidFill>
                 <a:latin typeface="Malgun Gothic" pitchFamily="34" charset="0"/>
                 <a:ea typeface="Malgun Gothic" pitchFamily="34" charset="-122"/>
@@ -4960,8 +4960,8 @@
         </p:nvSpPr>
         <p:spPr>
           <a:xfrm>
-            <a:off x="7277249" y="479078"/>
-            <a:ext cx="1561951" cy="631627"/>
+            <a:off x="7277249" y="498128"/>
+            <a:ext cx="1561951" cy="669727"/>
           </a:xfrm>
           <a:prstGeom prst="rect">
             <a:avLst/>
@@ -4971,7 +4971,7 @@
           </a:solidFill>
           <a:ln w="19050">
             <a:solidFill>
-              <a:srgbClr val="333333"/>
+              <a:srgbClr val="2B579A"/>
             </a:solidFill>
           </a:ln>
         </p:spPr>
@@ -4994,7 +4994,7 @@
         </p:nvSpPr>
         <p:spPr>
           <a:xfrm>
-            <a:off x="7410550" y="609154"/>
+            <a:off x="7410550" y="623441"/>
             <a:ext cx="1295349" cy="142875"/>
           </a:xfrm>
           <a:prstGeom prst="rect">
@@ -5033,8 +5033,8 @@
         </p:nvSpPr>
         <p:spPr>
           <a:xfrm>
-            <a:off x="7410550" y="752029"/>
-            <a:ext cx="1295349" cy="123825"/>
+            <a:off x="7410550" y="766316"/>
+            <a:ext cx="1295349" cy="142875"/>
           </a:xfrm>
           <a:prstGeom prst="rect">
             <a:avLst/>
@@ -5050,7 +5050,7 @@
               <a:buNone/>
             </a:pPr>
             <a:r>
-              <a:rPr lang="en-US" sz="750" dirty="0">
+              <a:rPr lang="en-US" sz="900" dirty="0">
                 <a:solidFill>
                   <a:srgbClr val="666666"/>
                 </a:solidFill>
@@ -5060,7 +5060,7 @@
               </a:rPr>
               <a:t>토큰 버킷 확인</a:t>
             </a:r>
-            <a:endParaRPr lang="en-US" sz="750" dirty="0"/>
+            <a:endParaRPr lang="en-US" sz="900" dirty="0"/>
           </a:p>
         </p:txBody>
       </p:sp>
@@ -5072,8 +5072,8 @@
         </p:nvSpPr>
         <p:spPr>
           <a:xfrm>
-            <a:off x="7410550" y="875854"/>
-            <a:ext cx="1295349" cy="104775"/>
+            <a:off x="7410550" y="909191"/>
+            <a:ext cx="1295349" cy="133350"/>
           </a:xfrm>
           <a:prstGeom prst="rect">
             <a:avLst/>
@@ -5089,7 +5089,7 @@
               <a:buNone/>
             </a:pPr>
             <a:r>
-              <a:rPr lang="en-US" sz="700" i="1" dirty="0">
+              <a:rPr lang="en-US" sz="850" i="1" dirty="0">
                 <a:solidFill>
                   <a:srgbClr val="999999"/>
                 </a:solidFill>
@@ -5099,7 +5099,7 @@
               </a:rPr>
               <a:t>한도 초과 시 거부</a:t>
             </a:r>
-            <a:endParaRPr lang="en-US" sz="700" dirty="0"/>
+            <a:endParaRPr lang="en-US" sz="850" dirty="0"/>
           </a:p>
         </p:txBody>
       </p:sp>
@@ -5111,7 +5111,7 @@
         </p:nvSpPr>
         <p:spPr>
           <a:xfrm>
-            <a:off x="4497288" y="1161306"/>
+            <a:off x="4497288" y="1218456"/>
             <a:ext cx="152412" cy="180975"/>
           </a:xfrm>
           <a:prstGeom prst="rect">
@@ -5150,8 +5150,8 @@
         </p:nvSpPr>
         <p:spPr>
           <a:xfrm>
-            <a:off x="406301" y="1392882"/>
-            <a:ext cx="8498026" cy="123825"/>
+            <a:off x="406301" y="1450032"/>
+            <a:ext cx="8498026" cy="142875"/>
           </a:xfrm>
           <a:prstGeom prst="rect">
             <a:avLst/>
@@ -5167,7 +5167,7 @@
               <a:buNone/>
             </a:pPr>
             <a:r>
-              <a:rPr lang="en-US" sz="800" b="1" dirty="0">
+              <a:rPr lang="en-US" sz="900" b="1" dirty="0">
                 <a:solidFill>
                   <a:srgbClr val="888888"/>
                 </a:solidFill>
@@ -5177,7 +5177,7 @@
               </a:rPr>
               <a:t>단계 2: 스케줄링 결정 (런타임 교체 가능)</a:t>
             </a:r>
-            <a:endParaRPr lang="en-US" sz="800" dirty="0"/>
+            <a:endParaRPr lang="en-US" sz="900" dirty="0"/>
           </a:p>
         </p:txBody>
       </p:sp>
@@ -5189,8 +5189,8 @@
         </p:nvSpPr>
         <p:spPr>
           <a:xfrm>
-            <a:off x="304800" y="1592759"/>
-            <a:ext cx="2076450" cy="514350"/>
+            <a:off x="304800" y="1668959"/>
+            <a:ext cx="2076450" cy="533400"/>
           </a:xfrm>
           <a:prstGeom prst="rect">
             <a:avLst/>
@@ -5200,7 +5200,7 @@
           </a:solidFill>
           <a:ln w="9525">
             <a:solidFill>
-              <a:srgbClr val="555555"/>
+              <a:srgbClr val="4472C4"/>
             </a:solidFill>
           </a:ln>
         </p:spPr>
@@ -5223,7 +5223,46 @@
         </p:nvSpPr>
         <p:spPr>
           <a:xfrm>
-            <a:off x="397282" y="1730871"/>
+            <a:off x="397282" y="1797546"/>
+            <a:ext cx="1891486" cy="142875"/>
+          </a:xfrm>
+          <a:prstGeom prst="rect">
+            <a:avLst/>
+          </a:prstGeom>
+          <a:noFill/>
+          <a:ln/>
+        </p:spPr>
+        <p:txBody>
+          <a:bodyPr wrap="square" lIns="0" tIns="0" rIns="0" bIns="0" rtlCol="0" anchor="t"/>
+          <a:lstStyle/>
+          <a:p>
+            <a:pPr algn="ctr" indent="0" marL="0">
+              <a:buNone/>
+            </a:pPr>
+            <a:r>
+              <a:rPr lang="en-US" sz="1000" b="1" dirty="0">
+                <a:solidFill>
+                  <a:srgbClr val="333333"/>
+                </a:solidFill>
+                <a:latin typeface="Malgun Gothic" pitchFamily="34" charset="0"/>
+                <a:ea typeface="Malgun Gothic" pitchFamily="34" charset="-122"/>
+                <a:cs typeface="Malgun Gothic" pitchFamily="34" charset="-120"/>
+              </a:rPr>
+              <a:t>FCFS</a:t>
+            </a:r>
+            <a:endParaRPr lang="en-US" sz="1000" dirty="0"/>
+          </a:p>
+        </p:txBody>
+      </p:sp>
+      <p:sp>
+        <p:nvSpPr>
+          <p:cNvPr id="20" name="Text 18"/>
+          <p:cNvSpPr/>
+          <p:nvPr/>
+        </p:nvSpPr>
+        <p:spPr>
+          <a:xfrm>
+            <a:off x="397282" y="1940421"/>
             <a:ext cx="1891486" cy="133350"/>
           </a:xfrm>
           <a:prstGeom prst="rect">
@@ -5240,46 +5279,7 @@
               <a:buNone/>
             </a:pPr>
             <a:r>
-              <a:rPr lang="en-US" sz="900" b="1" dirty="0">
-                <a:solidFill>
-                  <a:srgbClr val="333333"/>
-                </a:solidFill>
-                <a:latin typeface="Malgun Gothic" pitchFamily="34" charset="0"/>
-                <a:ea typeface="Malgun Gothic" pitchFamily="34" charset="-122"/>
-                <a:cs typeface="Malgun Gothic" pitchFamily="34" charset="-120"/>
-              </a:rPr>
-              <a:t>FCFS</a:t>
-            </a:r>
-            <a:endParaRPr lang="en-US" sz="900" dirty="0"/>
-          </a:p>
-        </p:txBody>
-      </p:sp>
-      <p:sp>
-        <p:nvSpPr>
-          <p:cNvPr id="20" name="Text 18"/>
-          <p:cNvSpPr/>
-          <p:nvPr/>
-        </p:nvSpPr>
-        <p:spPr>
-          <a:xfrm>
-            <a:off x="397282" y="1864221"/>
-            <a:ext cx="1891486" cy="104775"/>
-          </a:xfrm>
-          <a:prstGeom prst="rect">
-            <a:avLst/>
-          </a:prstGeom>
-          <a:noFill/>
-          <a:ln/>
-        </p:spPr>
-        <p:txBody>
-          <a:bodyPr wrap="square" lIns="0" tIns="0" rIns="0" bIns="0" rtlCol="0" anchor="t"/>
-          <a:lstStyle/>
-          <a:p>
-            <a:pPr algn="ctr" indent="0" marL="0">
-              <a:buNone/>
-            </a:pPr>
-            <a:r>
-              <a:rPr lang="en-US" sz="700" dirty="0">
+              <a:rPr lang="en-US" sz="850" dirty="0">
                 <a:solidFill>
                   <a:srgbClr val="666666"/>
                 </a:solidFill>
@@ -5289,7 +5289,7 @@
               </a:rPr>
               <a:t>도착 순서</a:t>
             </a:r>
-            <a:endParaRPr lang="en-US" sz="700" dirty="0"/>
+            <a:endParaRPr lang="en-US" sz="850" dirty="0"/>
           </a:p>
         </p:txBody>
       </p:sp>
@@ -5301,8 +5301,8 @@
         </p:nvSpPr>
         <p:spPr>
           <a:xfrm>
-            <a:off x="2457450" y="1592759"/>
-            <a:ext cx="2076450" cy="514350"/>
+            <a:off x="2457450" y="1668959"/>
+            <a:ext cx="2076450" cy="533400"/>
           </a:xfrm>
           <a:prstGeom prst="rect">
             <a:avLst/>
@@ -5312,7 +5312,7 @@
           </a:solidFill>
           <a:ln w="9525">
             <a:solidFill>
-              <a:srgbClr val="555555"/>
+              <a:srgbClr val="4472C4"/>
             </a:solidFill>
           </a:ln>
         </p:spPr>
@@ -5335,7 +5335,46 @@
         </p:nvSpPr>
         <p:spPr>
           <a:xfrm>
-            <a:off x="2549932" y="1730871"/>
+            <a:off x="2549932" y="1797546"/>
+            <a:ext cx="1891486" cy="142875"/>
+          </a:xfrm>
+          <a:prstGeom prst="rect">
+            <a:avLst/>
+          </a:prstGeom>
+          <a:noFill/>
+          <a:ln/>
+        </p:spPr>
+        <p:txBody>
+          <a:bodyPr wrap="square" lIns="0" tIns="0" rIns="0" bIns="0" rtlCol="0" anchor="t"/>
+          <a:lstStyle/>
+          <a:p>
+            <a:pPr algn="ctr" indent="0" marL="0">
+              <a:buNone/>
+            </a:pPr>
+            <a:r>
+              <a:rPr lang="en-US" sz="1000" b="1" dirty="0">
+                <a:solidFill>
+                  <a:srgbClr val="333333"/>
+                </a:solidFill>
+                <a:latin typeface="Malgun Gothic" pitchFamily="34" charset="0"/>
+                <a:ea typeface="Malgun Gothic" pitchFamily="34" charset="-122"/>
+                <a:cs typeface="Malgun Gothic" pitchFamily="34" charset="-120"/>
+              </a:rPr>
+              <a:t>Priority</a:t>
+            </a:r>
+            <a:endParaRPr lang="en-US" sz="1000" dirty="0"/>
+          </a:p>
+        </p:txBody>
+      </p:sp>
+      <p:sp>
+        <p:nvSpPr>
+          <p:cNvPr id="23" name="Text 21"/>
+          <p:cNvSpPr/>
+          <p:nvPr/>
+        </p:nvSpPr>
+        <p:spPr>
+          <a:xfrm>
+            <a:off x="2549932" y="1940421"/>
             <a:ext cx="1891486" cy="133350"/>
           </a:xfrm>
           <a:prstGeom prst="rect">
@@ -5352,46 +5391,7 @@
               <a:buNone/>
             </a:pPr>
             <a:r>
-              <a:rPr lang="en-US" sz="900" b="1" dirty="0">
-                <a:solidFill>
-                  <a:srgbClr val="333333"/>
-                </a:solidFill>
-                <a:latin typeface="Malgun Gothic" pitchFamily="34" charset="0"/>
-                <a:ea typeface="Malgun Gothic" pitchFamily="34" charset="-122"/>
-                <a:cs typeface="Malgun Gothic" pitchFamily="34" charset="-120"/>
-              </a:rPr>
-              <a:t>Priority</a:t>
-            </a:r>
-            <a:endParaRPr lang="en-US" sz="900" dirty="0"/>
-          </a:p>
-        </p:txBody>
-      </p:sp>
-      <p:sp>
-        <p:nvSpPr>
-          <p:cNvPr id="23" name="Text 21"/>
-          <p:cNvSpPr/>
-          <p:nvPr/>
-        </p:nvSpPr>
-        <p:spPr>
-          <a:xfrm>
-            <a:off x="2549932" y="1864221"/>
-            <a:ext cx="1891486" cy="104775"/>
-          </a:xfrm>
-          <a:prstGeom prst="rect">
-            <a:avLst/>
-          </a:prstGeom>
-          <a:noFill/>
-          <a:ln/>
-        </p:spPr>
-        <p:txBody>
-          <a:bodyPr wrap="square" lIns="0" tIns="0" rIns="0" bIns="0" rtlCol="0" anchor="t"/>
-          <a:lstStyle/>
-          <a:p>
-            <a:pPr algn="ctr" indent="0" marL="0">
-              <a:buNone/>
-            </a:pPr>
-            <a:r>
-              <a:rPr lang="en-US" sz="700" dirty="0">
+              <a:rPr lang="en-US" sz="850" dirty="0">
                 <a:solidFill>
                   <a:srgbClr val="666666"/>
                 </a:solidFill>
@@ -5401,7 +5401,7 @@
               </a:rPr>
               <a:t>4단계 + 에이징</a:t>
             </a:r>
-            <a:endParaRPr lang="en-US" sz="700" dirty="0"/>
+            <a:endParaRPr lang="en-US" sz="850" dirty="0"/>
           </a:p>
         </p:txBody>
       </p:sp>
@@ -5413,8 +5413,8 @@
         </p:nvSpPr>
         <p:spPr>
           <a:xfrm>
-            <a:off x="4610100" y="1592759"/>
-            <a:ext cx="2076450" cy="514350"/>
+            <a:off x="4610100" y="1668959"/>
+            <a:ext cx="2076450" cy="533400"/>
           </a:xfrm>
           <a:prstGeom prst="rect">
             <a:avLst/>
@@ -5447,7 +5447,7 @@
         </p:nvSpPr>
         <p:spPr>
           <a:xfrm>
-            <a:off x="4702582" y="1678484"/>
+            <a:off x="4702582" y="1754684"/>
             <a:ext cx="1891486" cy="133350"/>
           </a:xfrm>
           <a:prstGeom prst="rect">
@@ -5486,7 +5486,7 @@
         </p:nvSpPr>
         <p:spPr>
           <a:xfrm>
-            <a:off x="4702582" y="1811834"/>
+            <a:off x="4702582" y="1888034"/>
             <a:ext cx="1891486" cy="104775"/>
           </a:xfrm>
           <a:prstGeom prst="rect">
@@ -5525,8 +5525,8 @@
         </p:nvSpPr>
         <p:spPr>
           <a:xfrm>
-            <a:off x="4702582" y="1916609"/>
-            <a:ext cx="1891486" cy="104775"/>
+            <a:off x="4702582" y="1992809"/>
+            <a:ext cx="1891486" cy="123825"/>
           </a:xfrm>
           <a:prstGeom prst="rect">
             <a:avLst/>
@@ -5542,7 +5542,7 @@
               <a:buNone/>
             </a:pPr>
             <a:r>
-              <a:rPr lang="en-US" sz="650" i="1" dirty="0">
+              <a:rPr lang="en-US" sz="800" i="1" dirty="0">
                 <a:solidFill>
                   <a:srgbClr val="888888"/>
                 </a:solidFill>
@@ -5552,7 +5552,7 @@
               </a:rPr>
               <a:t>Q0:500ms Q1:1.5s Q2:4s Q3:무제한</a:t>
             </a:r>
-            <a:endParaRPr lang="en-US" sz="650" dirty="0"/>
+            <a:endParaRPr lang="en-US" sz="800" dirty="0"/>
           </a:p>
         </p:txBody>
       </p:sp>
@@ -5564,8 +5564,8 @@
         </p:nvSpPr>
         <p:spPr>
           <a:xfrm>
-            <a:off x="6762750" y="1592759"/>
-            <a:ext cx="2076450" cy="514350"/>
+            <a:off x="6762750" y="1668959"/>
+            <a:ext cx="2076450" cy="533400"/>
           </a:xfrm>
           <a:prstGeom prst="rect">
             <a:avLst/>
@@ -5598,7 +5598,7 @@
         </p:nvSpPr>
         <p:spPr>
           <a:xfrm>
-            <a:off x="6855232" y="1678484"/>
+            <a:off x="6855232" y="1754684"/>
             <a:ext cx="1891486" cy="133350"/>
           </a:xfrm>
           <a:prstGeom prst="rect">
@@ -5637,7 +5637,7 @@
         </p:nvSpPr>
         <p:spPr>
           <a:xfrm>
-            <a:off x="6855232" y="1811834"/>
+            <a:off x="6855232" y="1888034"/>
             <a:ext cx="1891486" cy="104775"/>
           </a:xfrm>
           <a:prstGeom prst="rect">
@@ -5676,8 +5676,8 @@
         </p:nvSpPr>
         <p:spPr>
           <a:xfrm>
-            <a:off x="6855232" y="1916609"/>
-            <a:ext cx="1891486" cy="104775"/>
+            <a:off x="6855232" y="1992809"/>
+            <a:ext cx="1891486" cy="123825"/>
           </a:xfrm>
           <a:prstGeom prst="rect">
             <a:avLst/>
@@ -5693,7 +5693,7 @@
               <a:buNone/>
             </a:pPr>
             <a:r>
-              <a:rPr lang="en-US" sz="650" i="1" dirty="0">
+              <a:rPr lang="en-US" sz="800" i="1" dirty="0">
                 <a:solidFill>
                   <a:srgbClr val="888888"/>
                 </a:solidFill>
@@ -5703,7 +5703,7 @@
               </a:rPr>
               <a:t>가중치: 100/50/10/1</a:t>
             </a:r>
-            <a:endParaRPr lang="en-US" sz="650" dirty="0"/>
+            <a:endParaRPr lang="en-US" sz="800" dirty="0"/>
           </a:p>
         </p:txBody>
       </p:sp>
@@ -5715,8 +5715,8 @@
         </p:nvSpPr>
         <p:spPr>
           <a:xfrm>
-            <a:off x="3470225" y="2145060"/>
-            <a:ext cx="2247620" cy="114300"/>
+            <a:off x="3313212" y="2240310"/>
+            <a:ext cx="2567928" cy="123825"/>
           </a:xfrm>
           <a:prstGeom prst="rect">
             <a:avLst/>
@@ -5732,7 +5732,7 @@
               <a:buNone/>
             </a:pPr>
             <a:r>
-              <a:rPr lang="en-US" sz="700" i="1" dirty="0">
+              <a:rPr lang="en-US" sz="800" i="1" dirty="0">
                 <a:solidFill>
                   <a:srgbClr val="999999"/>
                 </a:solidFill>
@@ -5742,7 +5742,7 @@
               </a:rPr>
               <a:t>PUT /api/scheduler → 런타임 알고리즘 전환 (재시작 불필요)</a:t>
             </a:r>
-            <a:endParaRPr lang="en-US" sz="700" dirty="0"/>
+            <a:endParaRPr lang="en-US" sz="800" dirty="0"/>
           </a:p>
         </p:txBody>
       </p:sp>
@@ -5754,7 +5754,7 @@
         </p:nvSpPr>
         <p:spPr>
           <a:xfrm>
-            <a:off x="4497288" y="2297311"/>
+            <a:off x="4497288" y="2402086"/>
             <a:ext cx="152412" cy="180975"/>
           </a:xfrm>
           <a:prstGeom prst="rect">
@@ -5793,8 +5793,8 @@
         </p:nvSpPr>
         <p:spPr>
           <a:xfrm>
-            <a:off x="406301" y="2528888"/>
-            <a:ext cx="8498026" cy="123825"/>
+            <a:off x="406301" y="2633663"/>
+            <a:ext cx="8498026" cy="142875"/>
           </a:xfrm>
           <a:prstGeom prst="rect">
             <a:avLst/>
@@ -5810,7 +5810,7 @@
               <a:buNone/>
             </a:pPr>
             <a:r>
-              <a:rPr lang="en-US" sz="800" b="1" dirty="0">
+              <a:rPr lang="en-US" sz="900" b="1" dirty="0">
                 <a:solidFill>
                   <a:srgbClr val="888888"/>
                 </a:solidFill>
@@ -5820,7 +5820,7 @@
               </a:rPr>
               <a:t>단계 3: 실행 및 응답</a:t>
             </a:r>
-            <a:endParaRPr lang="en-US" sz="800" dirty="0"/>
+            <a:endParaRPr lang="en-US" sz="900" dirty="0"/>
           </a:p>
         </p:txBody>
       </p:sp>
@@ -5832,8 +5832,8 @@
         </p:nvSpPr>
         <p:spPr>
           <a:xfrm>
-            <a:off x="304800" y="2728764"/>
-            <a:ext cx="4749998" cy="641152"/>
+            <a:off x="304800" y="2852589"/>
+            <a:ext cx="4749998" cy="679252"/>
           </a:xfrm>
           <a:prstGeom prst="rect">
             <a:avLst/>
@@ -5843,7 +5843,7 @@
           </a:solidFill>
           <a:ln w="19050">
             <a:solidFill>
-              <a:srgbClr val="333333"/>
+              <a:srgbClr val="2B579A"/>
             </a:solidFill>
           </a:ln>
         </p:spPr>
@@ -5866,7 +5866,7 @@
         </p:nvSpPr>
         <p:spPr>
           <a:xfrm>
-            <a:off x="406220" y="2911227"/>
+            <a:off x="406220" y="3044577"/>
             <a:ext cx="4547158" cy="152400"/>
           </a:xfrm>
           <a:prstGeom prst="rect">
@@ -5905,8 +5905,8 @@
         </p:nvSpPr>
         <p:spPr>
           <a:xfrm>
-            <a:off x="406220" y="3063627"/>
-            <a:ext cx="4547158" cy="123825"/>
+            <a:off x="406220" y="3196977"/>
+            <a:ext cx="4547158" cy="142875"/>
           </a:xfrm>
           <a:prstGeom prst="rect">
             <a:avLst/>
@@ -5922,7 +5922,7 @@
               <a:buNone/>
             </a:pPr>
             <a:r>
-              <a:rPr lang="en-US" sz="750" dirty="0">
+              <a:rPr lang="en-US" sz="900" dirty="0">
                 <a:solidFill>
                   <a:srgbClr val="666666"/>
                 </a:solidFill>
@@ -5932,7 +5932,7 @@
               </a:rPr>
               <a:t>다음 요청 추출 · LLM 백엔드로 전달</a:t>
             </a:r>
-            <a:endParaRPr lang="en-US" sz="750" dirty="0"/>
+            <a:endParaRPr lang="en-US" sz="900" dirty="0"/>
           </a:p>
         </p:txBody>
       </p:sp>
@@ -5944,7 +5944,7 @@
         </p:nvSpPr>
         <p:spPr>
           <a:xfrm>
-            <a:off x="5130998" y="2944564"/>
+            <a:off x="5130998" y="3087439"/>
             <a:ext cx="181407" cy="209550"/>
           </a:xfrm>
           <a:prstGeom prst="rect">
@@ -5963,7 +5963,7 @@
             <a:r>
               <a:rPr lang="en-US" sz="1400" dirty="0">
                 <a:solidFill>
-                  <a:srgbClr val="333333"/>
+                  <a:srgbClr val="2B579A"/>
                 </a:solidFill>
                 <a:latin typeface="Malgun Gothic" pitchFamily="34" charset="0"/>
                 <a:ea typeface="Malgun Gothic" pitchFamily="34" charset="-122"/>
@@ -5983,18 +5983,18 @@
         </p:nvSpPr>
         <p:spPr>
           <a:xfrm>
-            <a:off x="5385048" y="2728764"/>
-            <a:ext cx="1688902" cy="641152"/>
+            <a:off x="5385048" y="2852589"/>
+            <a:ext cx="1688902" cy="679252"/>
           </a:xfrm>
           <a:prstGeom prst="rect">
             <a:avLst/>
           </a:prstGeom>
           <a:solidFill>
-            <a:srgbClr val="333333"/>
+            <a:srgbClr val="2B579A"/>
           </a:solidFill>
           <a:ln w="19050">
             <a:solidFill>
-              <a:srgbClr val="333333"/>
+              <a:srgbClr val="2B579A"/>
             </a:solidFill>
           </a:ln>
         </p:spPr>
@@ -6017,7 +6017,7 @@
         </p:nvSpPr>
         <p:spPr>
           <a:xfrm>
-            <a:off x="5517079" y="2915989"/>
+            <a:off x="5517079" y="3049339"/>
             <a:ext cx="1424839" cy="142875"/>
           </a:xfrm>
           <a:prstGeom prst="rect">
@@ -6056,8 +6056,8 @@
         </p:nvSpPr>
         <p:spPr>
           <a:xfrm>
-            <a:off x="5517079" y="3058864"/>
-            <a:ext cx="1424839" cy="123825"/>
+            <a:off x="5517079" y="3192214"/>
+            <a:ext cx="1424839" cy="142875"/>
           </a:xfrm>
           <a:prstGeom prst="rect">
             <a:avLst/>
@@ -6073,7 +6073,7 @@
               <a:buNone/>
             </a:pPr>
             <a:r>
-              <a:rPr lang="en-US" sz="750" dirty="0">
+              <a:rPr lang="en-US" sz="900" dirty="0">
                 <a:solidFill>
                   <a:srgbClr val="CCCCCC"/>
                 </a:solidFill>
@@ -6083,7 +6083,7 @@
               </a:rPr>
               <a:t>로컬 추론</a:t>
             </a:r>
-            <a:endParaRPr lang="en-US" sz="750" dirty="0"/>
+            <a:endParaRPr lang="en-US" sz="900" dirty="0"/>
           </a:p>
         </p:txBody>
       </p:sp>
@@ -6095,7 +6095,7 @@
         </p:nvSpPr>
         <p:spPr>
           <a:xfrm>
-            <a:off x="7150150" y="2944564"/>
+            <a:off x="7150150" y="3087439"/>
             <a:ext cx="181407" cy="209550"/>
           </a:xfrm>
           <a:prstGeom prst="rect">
@@ -6114,7 +6114,7 @@
             <a:r>
               <a:rPr lang="en-US" sz="1400" dirty="0">
                 <a:solidFill>
-                  <a:srgbClr val="333333"/>
+                  <a:srgbClr val="2B579A"/>
                 </a:solidFill>
                 <a:latin typeface="Malgun Gothic" pitchFamily="34" charset="0"/>
                 <a:ea typeface="Malgun Gothic" pitchFamily="34" charset="-122"/>
@@ -6134,8 +6134,8 @@
         </p:nvSpPr>
         <p:spPr>
           <a:xfrm>
-            <a:off x="7404199" y="2728764"/>
-            <a:ext cx="1435001" cy="641152"/>
+            <a:off x="7404199" y="2852589"/>
+            <a:ext cx="1435001" cy="679252"/>
           </a:xfrm>
           <a:prstGeom prst="rect">
             <a:avLst/>
@@ -6145,7 +6145,7 @@
           </a:solidFill>
           <a:ln w="19050">
             <a:solidFill>
-              <a:srgbClr val="333333"/>
+              <a:srgbClr val="2B579A"/>
             </a:solidFill>
           </a:ln>
         </p:spPr>
@@ -6168,7 +6168,7 @@
         </p:nvSpPr>
         <p:spPr>
           <a:xfrm>
-            <a:off x="7538770" y="2849314"/>
+            <a:off x="7538770" y="2973139"/>
             <a:ext cx="1165860" cy="152400"/>
           </a:xfrm>
           <a:prstGeom prst="rect">
@@ -6207,8 +6207,8 @@
         </p:nvSpPr>
         <p:spPr>
           <a:xfrm>
-            <a:off x="7538770" y="3001714"/>
-            <a:ext cx="1165860" cy="123825"/>
+            <a:off x="7538770" y="3125539"/>
+            <a:ext cx="1165860" cy="142875"/>
           </a:xfrm>
           <a:prstGeom prst="rect">
             <a:avLst/>
@@ -6224,7 +6224,7 @@
               <a:buNone/>
             </a:pPr>
             <a:r>
-              <a:rPr lang="en-US" sz="750" dirty="0">
+              <a:rPr lang="en-US" sz="900" dirty="0">
                 <a:solidFill>
                   <a:srgbClr val="666666"/>
                 </a:solidFill>
@@ -6234,7 +6234,7 @@
               </a:rPr>
               <a:t>대기시간 기록</a:t>
             </a:r>
-            <a:endParaRPr lang="en-US" sz="750" dirty="0"/>
+            <a:endParaRPr lang="en-US" sz="900" dirty="0"/>
           </a:p>
         </p:txBody>
       </p:sp>
@@ -6246,8 +6246,8 @@
         </p:nvSpPr>
         <p:spPr>
           <a:xfrm>
-            <a:off x="7538770" y="3125539"/>
-            <a:ext cx="1165860" cy="123825"/>
+            <a:off x="7538770" y="3268414"/>
+            <a:ext cx="1165860" cy="142875"/>
           </a:xfrm>
           <a:prstGeom prst="rect">
             <a:avLst/>
@@ -6263,7 +6263,7 @@
               <a:buNone/>
             </a:pPr>
             <a:r>
-              <a:rPr lang="en-US" sz="750" dirty="0">
+              <a:rPr lang="en-US" sz="900" dirty="0">
                 <a:solidFill>
                   <a:srgbClr val="666666"/>
                 </a:solidFill>
@@ -6273,7 +6273,7 @@
               </a:rPr>
               <a:t>JFI 계산</a:t>
             </a:r>
-            <a:endParaRPr lang="en-US" sz="750" dirty="0"/>
+            <a:endParaRPr lang="en-US" sz="900" dirty="0"/>
           </a:p>
         </p:txBody>
       </p:sp>

--- a/04-proposal/figures/proposal-figures.pptx
+++ b/04-proposal/figures/proposal-figures.pptx
@@ -5784,7 +5784,7 @@
                 <a:ea typeface="Malgun Gothic" pitchFamily="34" charset="-122"/>
                 <a:cs typeface="Malgun Gothic" pitchFamily="34" charset="-120"/>
               </a:rPr>
-              <a:t>Q0:500ms Q1:1,500ms Q2:4,000ms Q3:무제한</a:t>
+              <a:t>Q0:1,000ms Q1:3,000ms Q2:8,000ms Q3:무제한</a:t>
             </a:r>
             <a:endParaRPr lang="en-US" sz="800" dirty="0"/>
           </a:p>

--- a/04-proposal/figures/proposal-figures.pptx
+++ b/04-proposal/figures/proposal-figures.pptx
@@ -2155,7 +2155,7 @@
                 <a:ea typeface="Malgun Gothic" pitchFamily="34" charset="-122"/>
                 <a:cs typeface="Malgun Gothic" pitchFamily="34" charset="-120"/>
               </a:rPr>
-              <a:t>선점형 스케줄링</a:t>
+              <a:t>비선점형 적응</a:t>
             </a:r>
             <a:endParaRPr lang="en-US" sz="950" dirty="0"/>
           </a:p>
@@ -5745,7 +5745,7 @@
                 <a:ea typeface="Malgun Gothic" pitchFamily="34" charset="-122"/>
                 <a:cs typeface="Malgun Gothic" pitchFamily="34" charset="-120"/>
               </a:rPr>
-              <a:t>4단계 큐 + 선점</a:t>
+              <a:t>4단계 큐 + 완료 후 피드백</a:t>
             </a:r>
             <a:endParaRPr lang="en-US" sz="700" dirty="0"/>
           </a:p>
@@ -6567,7 +6567,7 @@
                 <a:ea typeface="Malgun Gothic" pitchFamily="34" charset="-122"/>
                 <a:cs typeface="Malgun Gothic" pitchFamily="34" charset="-120"/>
               </a:rPr>
-              <a:t>핵심: 에이징/부스트로 기아 방지 · MLFQ 선점으로 짧은 요청 우선 · JFI로 공정성 측정</a:t>
+              <a:t>핵심: 에이징/부스트로 기아 방지 · MLFQ 완료 후 피드백으로 적응형 분류 · JFI로 공정성 측정</a:t>
             </a:r>
             <a:endParaRPr lang="en-US" sz="750" dirty="0"/>
           </a:p>

--- a/04-proposal/figures/proposal-figures.pptx
+++ b/04-proposal/figures/proposal-figures.pptx
@@ -1703,7 +1703,7 @@
         <p:spPr>
           <a:xfrm>
             <a:off x="2644676" y="1596479"/>
-            <a:ext cx="1727448" cy="600075"/>
+            <a:ext cx="1727448" cy="304800"/>
           </a:xfrm>
           <a:prstGeom prst="rect">
             <a:avLst/>
@@ -1728,7 +1728,7 @@
                 <a:ea typeface="Malgun Gothic" pitchFamily="34" charset="-122"/>
                 <a:cs typeface="Malgun Gothic" pitchFamily="34" charset="-120"/>
               </a:rPr>
-              <a:t>4단계 우선순위 (URGENT~LOW)</a:t>
+              <a:t>등급/긴급도 기반 우선순위</a:t>
             </a:r>
             <a:endParaRPr lang="en-US" sz="950" dirty="0"/>
           </a:p>
@@ -1750,24 +1750,6 @@
             </a:r>
             <a:endParaRPr lang="en-US" sz="950" dirty="0"/>
           </a:p>
-          <a:p>
-            <a:pPr algn="l" marL="88900" indent="-88900">
-              <a:buSzPct val="100000"/>
-              <a:buChar char="•"/>
-            </a:pPr>
-            <a:r>
-              <a:rPr lang="en-US" sz="950" dirty="0">
-                <a:solidFill>
-                  <a:srgbClr val="333333"/>
-                </a:solidFill>
-                <a:latin typeface="Malgun Gothic" pitchFamily="34" charset="0"/>
-                <a:ea typeface="Malgun Gothic" pitchFamily="34" charset="-122"/>
-                <a:cs typeface="Malgun Gothic" pitchFamily="34" charset="-120"/>
-              </a:rPr>
-              <a:t>동적 우선순위 조정</a:t>
-            </a:r>
-            <a:endParaRPr lang="en-US" sz="950" dirty="0"/>
-          </a:p>
         </p:txBody>
       </p:sp>
       <p:sp>
@@ -1778,7 +1760,7 @@
         </p:nvSpPr>
         <p:spPr>
           <a:xfrm>
-            <a:off x="2644676" y="2518618"/>
+            <a:off x="2644676" y="2223343"/>
             <a:ext cx="1727448" cy="0"/>
           </a:xfrm>
           <a:prstGeom prst="line">
@@ -1801,7 +1783,7 @@
         </p:nvSpPr>
         <p:spPr>
           <a:xfrm>
-            <a:off x="2644676" y="2323356"/>
+            <a:off x="2644676" y="2028081"/>
             <a:ext cx="1761997" cy="152400"/>
           </a:xfrm>
           <a:prstGeom prst="rect">
@@ -1840,7 +1822,7 @@
         </p:nvSpPr>
         <p:spPr>
           <a:xfrm>
-            <a:off x="2644676" y="2612082"/>
+            <a:off x="2644676" y="2316807"/>
             <a:ext cx="1761997" cy="152400"/>
           </a:xfrm>
           <a:prstGeom prst="rect">
@@ -2094,7 +2076,7 @@
         <p:spPr>
           <a:xfrm>
             <a:off x="4772025" y="1596479"/>
-            <a:ext cx="1727299" cy="457200"/>
+            <a:ext cx="1727299" cy="304800"/>
           </a:xfrm>
           <a:prstGeom prst="rect">
             <a:avLst/>
@@ -2119,7 +2101,7 @@
                 <a:ea typeface="Malgun Gothic" pitchFamily="34" charset="-122"/>
                 <a:cs typeface="Malgun Gothic" pitchFamily="34" charset="-120"/>
               </a:rPr>
-              <a:t>적응형 분류</a:t>
+              <a:t>실행 특성 관찰 후 분류</a:t>
             </a:r>
             <a:endParaRPr lang="en-US" sz="950" dirty="0"/>
           </a:p>
@@ -2137,28 +2119,10 @@
                 <a:ea typeface="Malgun Gothic" pitchFamily="34" charset="-122"/>
                 <a:cs typeface="Malgun Gothic" pitchFamily="34" charset="-120"/>
               </a:rPr>
-              <a:t>큐별 타임 퀀텀</a:t>
+              <a:t>다단계 큐 구조</a:t>
             </a:r>
             <a:endParaRPr lang="en-US" sz="950" dirty="0"/>
           </a:p>
-          <a:p>
-            <a:pPr algn="l" marL="88900" indent="-88900">
-              <a:buSzPct val="100000"/>
-              <a:buChar char="•"/>
-            </a:pPr>
-            <a:r>
-              <a:rPr lang="en-US" sz="950" dirty="0">
-                <a:solidFill>
-                  <a:srgbClr val="333333"/>
-                </a:solidFill>
-                <a:latin typeface="Malgun Gothic" pitchFamily="34" charset="0"/>
-                <a:ea typeface="Malgun Gothic" pitchFamily="34" charset="-122"/>
-                <a:cs typeface="Malgun Gothic" pitchFamily="34" charset="-120"/>
-              </a:rPr>
-              <a:t>비선점형 적응</a:t>
-            </a:r>
-            <a:endParaRPr lang="en-US" sz="950" dirty="0"/>
-          </a:p>
         </p:txBody>
       </p:sp>
       <p:sp>
@@ -2169,7 +2133,7 @@
         </p:nvSpPr>
         <p:spPr>
           <a:xfrm>
-            <a:off x="4772025" y="2375743"/>
+            <a:off x="4772025" y="2223343"/>
             <a:ext cx="1727299" cy="0"/>
           </a:xfrm>
           <a:prstGeom prst="line">
@@ -2192,7 +2156,7 @@
         </p:nvSpPr>
         <p:spPr>
           <a:xfrm>
-            <a:off x="4772025" y="2180481"/>
+            <a:off x="4772025" y="2028081"/>
             <a:ext cx="1761845" cy="152400"/>
           </a:xfrm>
           <a:prstGeom prst="rect">
@@ -2231,7 +2195,7 @@
         </p:nvSpPr>
         <p:spPr>
           <a:xfrm>
-            <a:off x="4772025" y="2469207"/>
+            <a:off x="4772025" y="2316807"/>
             <a:ext cx="1761845" cy="152400"/>
           </a:xfrm>
           <a:prstGeom prst="rect">
@@ -2485,7 +2449,7 @@
         <p:spPr>
           <a:xfrm>
             <a:off x="6899225" y="1596479"/>
-            <a:ext cx="1727299" cy="457200"/>
+            <a:ext cx="1727299" cy="304800"/>
           </a:xfrm>
           <a:prstGeom prst="rect">
             <a:avLst/>
@@ -2510,7 +2474,7 @@
                 <a:ea typeface="Malgun Gothic" pitchFamily="34" charset="-122"/>
                 <a:cs typeface="Malgun Gothic" pitchFamily="34" charset="-120"/>
               </a:rPr>
-              <a:t>가중치 비례 서비스</a:t>
+              <a:t>등급별 가중치 비례 배분</a:t>
             </a:r>
             <a:endParaRPr lang="en-US" sz="950" dirty="0"/>
           </a:p>
@@ -2528,28 +2492,10 @@
                 <a:ea typeface="Malgun Gothic" pitchFamily="34" charset="-122"/>
                 <a:cs typeface="Malgun Gothic" pitchFamily="34" charset="-120"/>
               </a:rPr>
-              <a:t>가상 종료 시각 계산</a:t>
+              <a:t>공정성 지표(JFI) 측정</a:t>
             </a:r>
             <a:endParaRPr lang="en-US" sz="950" dirty="0"/>
           </a:p>
-          <a:p>
-            <a:pPr algn="l" marL="88900" indent="-88900">
-              <a:buSzPct val="100000"/>
-              <a:buChar char="•"/>
-            </a:pPr>
-            <a:r>
-              <a:rPr lang="en-US" sz="950" dirty="0">
-                <a:solidFill>
-                  <a:srgbClr val="333333"/>
-                </a:solidFill>
-                <a:latin typeface="Malgun Gothic" pitchFamily="34" charset="0"/>
-                <a:ea typeface="Malgun Gothic" pitchFamily="34" charset="-122"/>
-                <a:cs typeface="Malgun Gothic" pitchFamily="34" charset="-120"/>
-              </a:rPr>
-              <a:t>JFI 공정성 지표</a:t>
-            </a:r>
-            <a:endParaRPr lang="en-US" sz="950" dirty="0"/>
-          </a:p>
         </p:txBody>
       </p:sp>
       <p:sp>
@@ -2560,7 +2506,7 @@
         </p:nvSpPr>
         <p:spPr>
           <a:xfrm>
-            <a:off x="6899225" y="2375743"/>
+            <a:off x="6899225" y="2223343"/>
             <a:ext cx="1727299" cy="0"/>
           </a:xfrm>
           <a:prstGeom prst="line">
@@ -2583,7 +2529,7 @@
         </p:nvSpPr>
         <p:spPr>
           <a:xfrm>
-            <a:off x="6899225" y="2180481"/>
+            <a:off x="6899225" y="2028081"/>
             <a:ext cx="1761845" cy="152400"/>
           </a:xfrm>
           <a:prstGeom prst="rect">
@@ -2622,7 +2568,7 @@
         </p:nvSpPr>
         <p:spPr>
           <a:xfrm>
-            <a:off x="6899225" y="2469207"/>
+            <a:off x="6899225" y="2316807"/>
             <a:ext cx="1761845" cy="152400"/>
           </a:xfrm>
           <a:prstGeom prst="rect">
@@ -2653,7 +2599,7 @@
                 <a:ea typeface="Malgun Gothic" pitchFamily="34" charset="-122"/>
                 <a:cs typeface="Malgun Gothic" pitchFamily="34" charset="-120"/>
               </a:rPr>
-              <a:t>VFT 계산 부담</a:t>
+              <a:t>스케줄링 계산 부담</a:t>
             </a:r>
             <a:endParaRPr lang="en-US" sz="950" dirty="0"/>
           </a:p>
@@ -5424,7 +5370,7 @@
         <p:spPr>
           <a:xfrm>
             <a:off x="304800" y="1668959"/>
-            <a:ext cx="2076450" cy="647700"/>
+            <a:ext cx="2076450" cy="447675"/>
           </a:xfrm>
           <a:prstGeom prst="rect">
             <a:avLst/>
@@ -5457,7 +5403,7 @@
         </p:nvSpPr>
         <p:spPr>
           <a:xfrm>
-            <a:off x="397282" y="1854696"/>
+            <a:off x="397282" y="1754684"/>
             <a:ext cx="1891486" cy="142875"/>
           </a:xfrm>
           <a:prstGeom prst="rect">
@@ -5496,7 +5442,7 @@
         </p:nvSpPr>
         <p:spPr>
           <a:xfrm>
-            <a:off x="397282" y="1997571"/>
+            <a:off x="397282" y="1897559"/>
             <a:ext cx="1891486" cy="133350"/>
           </a:xfrm>
           <a:prstGeom prst="rect">
@@ -5536,7 +5482,7 @@
         <p:spPr>
           <a:xfrm>
             <a:off x="2457450" y="1668959"/>
-            <a:ext cx="2076450" cy="647700"/>
+            <a:ext cx="2076450" cy="447675"/>
           </a:xfrm>
           <a:prstGeom prst="rect">
             <a:avLst/>
@@ -5569,7 +5515,7 @@
         </p:nvSpPr>
         <p:spPr>
           <a:xfrm>
-            <a:off x="2549932" y="1854696"/>
+            <a:off x="2549932" y="1754684"/>
             <a:ext cx="1891486" cy="142875"/>
           </a:xfrm>
           <a:prstGeom prst="rect">
@@ -5608,7 +5554,7 @@
         </p:nvSpPr>
         <p:spPr>
           <a:xfrm>
-            <a:off x="2549932" y="1997571"/>
+            <a:off x="2549932" y="1897559"/>
             <a:ext cx="1891486" cy="133350"/>
           </a:xfrm>
           <a:prstGeom prst="rect">
@@ -5648,7 +5594,7 @@
         <p:spPr>
           <a:xfrm>
             <a:off x="4610100" y="1668959"/>
-            <a:ext cx="2076450" cy="647700"/>
+            <a:ext cx="2076450" cy="447675"/>
           </a:xfrm>
           <a:prstGeom prst="rect">
             <a:avLst/>
@@ -5681,7 +5627,7 @@
         </p:nvSpPr>
         <p:spPr>
           <a:xfrm>
-            <a:off x="4702582" y="1754684"/>
+            <a:off x="4702582" y="1764209"/>
             <a:ext cx="1891486" cy="133350"/>
           </a:xfrm>
           <a:prstGeom prst="rect">
@@ -5720,8 +5666,8 @@
         </p:nvSpPr>
         <p:spPr>
           <a:xfrm>
-            <a:off x="4702582" y="1888034"/>
-            <a:ext cx="1891486" cy="104775"/>
+            <a:off x="4702582" y="1897559"/>
+            <a:ext cx="1891486" cy="123825"/>
           </a:xfrm>
           <a:prstGeom prst="rect">
             <a:avLst/>
@@ -5737,7 +5683,7 @@
               <a:buNone/>
             </a:pPr>
             <a:r>
-              <a:rPr lang="en-US" sz="700" dirty="0">
+              <a:rPr lang="en-US" sz="800" dirty="0">
                 <a:solidFill>
                   <a:srgbClr val="555555"/>
                 </a:solidFill>
@@ -5745,9 +5691,9 @@
                 <a:ea typeface="Malgun Gothic" pitchFamily="34" charset="-122"/>
                 <a:cs typeface="Malgun Gothic" pitchFamily="34" charset="-120"/>
               </a:rPr>
-              <a:t>4단계 큐 + 완료 후 피드백</a:t>
-            </a:r>
-            <a:endParaRPr lang="en-US" sz="700" dirty="0"/>
+              <a:t>다단계 큐 + 피드백</a:t>
+            </a:r>
+            <a:endParaRPr lang="en-US" sz="800" dirty="0"/>
           </a:p>
         </p:txBody>
       </p:sp>
@@ -5759,47 +5705,8 @@
         </p:nvSpPr>
         <p:spPr>
           <a:xfrm>
-            <a:off x="4702582" y="1992809"/>
-            <a:ext cx="1891486" cy="238125"/>
-          </a:xfrm>
-          <a:prstGeom prst="rect">
-            <a:avLst/>
-          </a:prstGeom>
-          <a:noFill/>
-          <a:ln/>
-        </p:spPr>
-        <p:txBody>
-          <a:bodyPr wrap="square" lIns="0" tIns="0" rIns="0" bIns="0" rtlCol="0" anchor="t"/>
-          <a:lstStyle/>
-          <a:p>
-            <a:pPr algn="ctr" indent="0" marL="0">
-              <a:buNone/>
-            </a:pPr>
-            <a:r>
-              <a:rPr lang="en-US" sz="800" i="1" dirty="0">
-                <a:solidFill>
-                  <a:srgbClr val="888888"/>
-                </a:solidFill>
-                <a:latin typeface="Malgun Gothic" pitchFamily="34" charset="0"/>
-                <a:ea typeface="Malgun Gothic" pitchFamily="34" charset="-122"/>
-                <a:cs typeface="Malgun Gothic" pitchFamily="34" charset="-120"/>
-              </a:rPr>
-              <a:t>Q0:1,000ms Q1:3,000ms Q2:8,000ms Q3:무제한</a:t>
-            </a:r>
-            <a:endParaRPr lang="en-US" sz="800" dirty="0"/>
-          </a:p>
-        </p:txBody>
-      </p:sp>
-      <p:sp>
-        <p:nvSpPr>
-          <p:cNvPr id="28" name="Text 26"/>
-          <p:cNvSpPr/>
-          <p:nvPr/>
-        </p:nvSpPr>
-        <p:spPr>
-          <a:xfrm>
             <a:off x="6762750" y="1668959"/>
-            <a:ext cx="2076450" cy="647700"/>
+            <a:ext cx="2076450" cy="447675"/>
           </a:xfrm>
           <a:prstGeom prst="rect">
             <a:avLst/>
@@ -5826,14 +5733,53 @@
       </p:sp>
       <p:sp>
         <p:nvSpPr>
+          <p:cNvPr id="28" name="Text 26"/>
+          <p:cNvSpPr/>
+          <p:nvPr/>
+        </p:nvSpPr>
+        <p:spPr>
+          <a:xfrm>
+            <a:off x="6855232" y="1764209"/>
+            <a:ext cx="1891486" cy="133350"/>
+          </a:xfrm>
+          <a:prstGeom prst="rect">
+            <a:avLst/>
+          </a:prstGeom>
+          <a:noFill/>
+          <a:ln/>
+        </p:spPr>
+        <p:txBody>
+          <a:bodyPr wrap="square" lIns="0" tIns="0" rIns="0" bIns="0" rtlCol="0" anchor="t"/>
+          <a:lstStyle/>
+          <a:p>
+            <a:pPr algn="ctr" indent="0" marL="0">
+              <a:buNone/>
+            </a:pPr>
+            <a:r>
+              <a:rPr lang="en-US" sz="900" b="1" dirty="0">
+                <a:solidFill>
+                  <a:srgbClr val="2B579A"/>
+                </a:solidFill>
+                <a:latin typeface="Malgun Gothic" pitchFamily="34" charset="0"/>
+                <a:ea typeface="Malgun Gothic" pitchFamily="34" charset="-122"/>
+                <a:cs typeface="Malgun Gothic" pitchFamily="34" charset="-120"/>
+              </a:rPr>
+              <a:t>WFQ</a:t>
+            </a:r>
+            <a:endParaRPr lang="en-US" sz="900" dirty="0"/>
+          </a:p>
+        </p:txBody>
+      </p:sp>
+      <p:sp>
+        <p:nvSpPr>
           <p:cNvPr id="29" name="Text 27"/>
           <p:cNvSpPr/>
           <p:nvPr/>
         </p:nvSpPr>
         <p:spPr>
           <a:xfrm>
-            <a:off x="6855232" y="1811834"/>
-            <a:ext cx="1891486" cy="133350"/>
+            <a:off x="6855232" y="1897559"/>
+            <a:ext cx="1891486" cy="123825"/>
           </a:xfrm>
           <a:prstGeom prst="rect">
             <a:avLst/>
@@ -5849,15 +5795,132 @@
               <a:buNone/>
             </a:pPr>
             <a:r>
+              <a:rPr lang="en-US" sz="800" dirty="0">
+                <a:solidFill>
+                  <a:srgbClr val="555555"/>
+                </a:solidFill>
+                <a:latin typeface="Malgun Gothic" pitchFamily="34" charset="0"/>
+                <a:ea typeface="Malgun Gothic" pitchFamily="34" charset="-122"/>
+                <a:cs typeface="Malgun Gothic" pitchFamily="34" charset="-120"/>
+              </a:rPr>
+              <a:t>가중치 비례 배분</a:t>
+            </a:r>
+            <a:endParaRPr lang="en-US" sz="800" dirty="0"/>
+          </a:p>
+        </p:txBody>
+      </p:sp>
+      <p:sp>
+        <p:nvSpPr>
+          <p:cNvPr id="30" name="Text 28"/>
+          <p:cNvSpPr/>
+          <p:nvPr/>
+        </p:nvSpPr>
+        <p:spPr>
+          <a:xfrm>
+            <a:off x="3313212" y="2154585"/>
+            <a:ext cx="2567928" cy="123825"/>
+          </a:xfrm>
+          <a:prstGeom prst="rect">
+            <a:avLst/>
+          </a:prstGeom>
+          <a:noFill/>
+          <a:ln/>
+        </p:spPr>
+        <p:txBody>
+          <a:bodyPr wrap="square" lIns="0" tIns="0" rIns="0" bIns="0" rtlCol="0" anchor="t"/>
+          <a:lstStyle/>
+          <a:p>
+            <a:pPr algn="l" indent="0" marL="0">
+              <a:buNone/>
+            </a:pPr>
+            <a:r>
+              <a:rPr lang="en-US" sz="800" i="1" dirty="0">
+                <a:solidFill>
+                  <a:srgbClr val="999999"/>
+                </a:solidFill>
+                <a:latin typeface="Malgun Gothic" pitchFamily="34" charset="0"/>
+                <a:ea typeface="Malgun Gothic" pitchFamily="34" charset="-122"/>
+                <a:cs typeface="Malgun Gothic" pitchFamily="34" charset="-120"/>
+              </a:rPr>
+              <a:t>PUT /api/scheduler → 런타임 알고리즘 전환 (재시작 불필요)</a:t>
+            </a:r>
+            <a:endParaRPr lang="en-US" sz="800" dirty="0"/>
+          </a:p>
+        </p:txBody>
+      </p:sp>
+      <p:sp>
+        <p:nvSpPr>
+          <p:cNvPr id="31" name="Text 29"/>
+          <p:cNvSpPr/>
+          <p:nvPr/>
+        </p:nvSpPr>
+        <p:spPr>
+          <a:xfrm>
+            <a:off x="4497288" y="2316361"/>
+            <a:ext cx="152412" cy="180975"/>
+          </a:xfrm>
+          <a:prstGeom prst="rect">
+            <a:avLst/>
+          </a:prstGeom>
+          <a:noFill/>
+          <a:ln/>
+        </p:spPr>
+        <p:txBody>
+          <a:bodyPr wrap="square" lIns="0" tIns="0" rIns="0" bIns="0" rtlCol="0" anchor="t"/>
+          <a:lstStyle/>
+          <a:p>
+            <a:pPr algn="l" indent="0" marL="0">
+              <a:buNone/>
+            </a:pPr>
+            <a:r>
+              <a:rPr lang="en-US" sz="1200" dirty="0">
+                <a:solidFill>
+                  <a:srgbClr val="888888"/>
+                </a:solidFill>
+                <a:latin typeface="Malgun Gothic" pitchFamily="34" charset="0"/>
+                <a:ea typeface="Malgun Gothic" pitchFamily="34" charset="-122"/>
+                <a:cs typeface="Malgun Gothic" pitchFamily="34" charset="-120"/>
+              </a:rPr>
+              <a:t>▼</a:t>
+            </a:r>
+            <a:endParaRPr lang="en-US" sz="1200" dirty="0"/>
+          </a:p>
+        </p:txBody>
+      </p:sp>
+      <p:sp>
+        <p:nvSpPr>
+          <p:cNvPr id="32" name="Text 30"/>
+          <p:cNvSpPr/>
+          <p:nvPr/>
+        </p:nvSpPr>
+        <p:spPr>
+          <a:xfrm>
+            <a:off x="406301" y="2547938"/>
+            <a:ext cx="8498026" cy="142875"/>
+          </a:xfrm>
+          <a:prstGeom prst="rect">
+            <a:avLst/>
+          </a:prstGeom>
+          <a:noFill/>
+          <a:ln/>
+        </p:spPr>
+        <p:txBody>
+          <a:bodyPr wrap="square" lIns="0" tIns="0" rIns="0" bIns="0" rtlCol="0" anchor="t"/>
+          <a:lstStyle/>
+          <a:p>
+            <a:pPr algn="l" indent="0" marL="0">
+              <a:buNone/>
+            </a:pPr>
+            <a:r>
               <a:rPr lang="en-US" sz="900" b="1" dirty="0">
                 <a:solidFill>
-                  <a:srgbClr val="2B579A"/>
-                </a:solidFill>
-                <a:latin typeface="Malgun Gothic" pitchFamily="34" charset="0"/>
-                <a:ea typeface="Malgun Gothic" pitchFamily="34" charset="-122"/>
-                <a:cs typeface="Malgun Gothic" pitchFamily="34" charset="-120"/>
-              </a:rPr>
-              <a:t>WFQ</a:t>
+                  <a:srgbClr val="888888"/>
+                </a:solidFill>
+                <a:latin typeface="Malgun Gothic" pitchFamily="34" charset="0"/>
+                <a:ea typeface="Malgun Gothic" pitchFamily="34" charset="-122"/>
+                <a:cs typeface="Malgun Gothic" pitchFamily="34" charset="-120"/>
+              </a:rPr>
+              <a:t>단계 3: 실행 및 응답</a:t>
             </a:r>
             <a:endParaRPr lang="en-US" sz="900" dirty="0"/>
           </a:p>
@@ -5865,208 +5928,13 @@
       </p:sp>
       <p:sp>
         <p:nvSpPr>
-          <p:cNvPr id="30" name="Text 28"/>
-          <p:cNvSpPr/>
-          <p:nvPr/>
-        </p:nvSpPr>
-        <p:spPr>
-          <a:xfrm>
-            <a:off x="6855232" y="1945184"/>
-            <a:ext cx="1891486" cy="104775"/>
-          </a:xfrm>
-          <a:prstGeom prst="rect">
-            <a:avLst/>
-          </a:prstGeom>
-          <a:noFill/>
-          <a:ln/>
-        </p:spPr>
-        <p:txBody>
-          <a:bodyPr wrap="square" lIns="0" tIns="0" rIns="0" bIns="0" rtlCol="0" anchor="t"/>
-          <a:lstStyle/>
-          <a:p>
-            <a:pPr algn="ctr" indent="0" marL="0">
-              <a:buNone/>
-            </a:pPr>
-            <a:r>
-              <a:rPr lang="en-US" sz="700" dirty="0">
-                <a:solidFill>
-                  <a:srgbClr val="555555"/>
-                </a:solidFill>
-                <a:latin typeface="Malgun Gothic" pitchFamily="34" charset="0"/>
-                <a:ea typeface="Malgun Gothic" pitchFamily="34" charset="-122"/>
-                <a:cs typeface="Malgun Gothic" pitchFamily="34" charset="-120"/>
-              </a:rPr>
-              <a:t>가상 종료 시각</a:t>
-            </a:r>
-            <a:endParaRPr lang="en-US" sz="700" dirty="0"/>
-          </a:p>
-        </p:txBody>
-      </p:sp>
-      <p:sp>
-        <p:nvSpPr>
-          <p:cNvPr id="31" name="Text 29"/>
-          <p:cNvSpPr/>
-          <p:nvPr/>
-        </p:nvSpPr>
-        <p:spPr>
-          <a:xfrm>
-            <a:off x="6855232" y="2049959"/>
-            <a:ext cx="1891486" cy="123825"/>
-          </a:xfrm>
-          <a:prstGeom prst="rect">
-            <a:avLst/>
-          </a:prstGeom>
-          <a:noFill/>
-          <a:ln/>
-        </p:spPr>
-        <p:txBody>
-          <a:bodyPr wrap="square" lIns="0" tIns="0" rIns="0" bIns="0" rtlCol="0" anchor="t"/>
-          <a:lstStyle/>
-          <a:p>
-            <a:pPr algn="ctr" indent="0" marL="0">
-              <a:buNone/>
-            </a:pPr>
-            <a:r>
-              <a:rPr lang="en-US" sz="800" i="1" dirty="0">
-                <a:solidFill>
-                  <a:srgbClr val="888888"/>
-                </a:solidFill>
-                <a:latin typeface="Malgun Gothic" pitchFamily="34" charset="0"/>
-                <a:ea typeface="Malgun Gothic" pitchFamily="34" charset="-122"/>
-                <a:cs typeface="Malgun Gothic" pitchFamily="34" charset="-120"/>
-              </a:rPr>
-              <a:t>가중치: 100/50/10/1</a:t>
-            </a:r>
-            <a:endParaRPr lang="en-US" sz="800" dirty="0"/>
-          </a:p>
-        </p:txBody>
-      </p:sp>
-      <p:sp>
-        <p:nvSpPr>
-          <p:cNvPr id="32" name="Text 30"/>
-          <p:cNvSpPr/>
-          <p:nvPr/>
-        </p:nvSpPr>
-        <p:spPr>
-          <a:xfrm>
-            <a:off x="3313212" y="2354610"/>
-            <a:ext cx="2567928" cy="123825"/>
-          </a:xfrm>
-          <a:prstGeom prst="rect">
-            <a:avLst/>
-          </a:prstGeom>
-          <a:noFill/>
-          <a:ln/>
-        </p:spPr>
-        <p:txBody>
-          <a:bodyPr wrap="square" lIns="0" tIns="0" rIns="0" bIns="0" rtlCol="0" anchor="t"/>
-          <a:lstStyle/>
-          <a:p>
-            <a:pPr algn="l" indent="0" marL="0">
-              <a:buNone/>
-            </a:pPr>
-            <a:r>
-              <a:rPr lang="en-US" sz="800" i="1" dirty="0">
-                <a:solidFill>
-                  <a:srgbClr val="999999"/>
-                </a:solidFill>
-                <a:latin typeface="Malgun Gothic" pitchFamily="34" charset="0"/>
-                <a:ea typeface="Malgun Gothic" pitchFamily="34" charset="-122"/>
-                <a:cs typeface="Malgun Gothic" pitchFamily="34" charset="-120"/>
-              </a:rPr>
-              <a:t>PUT /api/scheduler → 런타임 알고리즘 전환 (재시작 불필요)</a:t>
-            </a:r>
-            <a:endParaRPr lang="en-US" sz="800" dirty="0"/>
-          </a:p>
-        </p:txBody>
-      </p:sp>
-      <p:sp>
-        <p:nvSpPr>
           <p:cNvPr id="33" name="Text 31"/>
           <p:cNvSpPr/>
           <p:nvPr/>
         </p:nvSpPr>
         <p:spPr>
           <a:xfrm>
-            <a:off x="4497288" y="2516386"/>
-            <a:ext cx="152412" cy="180975"/>
-          </a:xfrm>
-          <a:prstGeom prst="rect">
-            <a:avLst/>
-          </a:prstGeom>
-          <a:noFill/>
-          <a:ln/>
-        </p:spPr>
-        <p:txBody>
-          <a:bodyPr wrap="square" lIns="0" tIns="0" rIns="0" bIns="0" rtlCol="0" anchor="t"/>
-          <a:lstStyle/>
-          <a:p>
-            <a:pPr algn="l" indent="0" marL="0">
-              <a:buNone/>
-            </a:pPr>
-            <a:r>
-              <a:rPr lang="en-US" sz="1200" dirty="0">
-                <a:solidFill>
-                  <a:srgbClr val="888888"/>
-                </a:solidFill>
-                <a:latin typeface="Malgun Gothic" pitchFamily="34" charset="0"/>
-                <a:ea typeface="Malgun Gothic" pitchFamily="34" charset="-122"/>
-                <a:cs typeface="Malgun Gothic" pitchFamily="34" charset="-120"/>
-              </a:rPr>
-              <a:t>▼</a:t>
-            </a:r>
-            <a:endParaRPr lang="en-US" sz="1200" dirty="0"/>
-          </a:p>
-        </p:txBody>
-      </p:sp>
-      <p:sp>
-        <p:nvSpPr>
-          <p:cNvPr id="34" name="Text 32"/>
-          <p:cNvSpPr/>
-          <p:nvPr/>
-        </p:nvSpPr>
-        <p:spPr>
-          <a:xfrm>
-            <a:off x="406301" y="2747963"/>
-            <a:ext cx="8498026" cy="142875"/>
-          </a:xfrm>
-          <a:prstGeom prst="rect">
-            <a:avLst/>
-          </a:prstGeom>
-          <a:noFill/>
-          <a:ln/>
-        </p:spPr>
-        <p:txBody>
-          <a:bodyPr wrap="square" lIns="0" tIns="0" rIns="0" bIns="0" rtlCol="0" anchor="t"/>
-          <a:lstStyle/>
-          <a:p>
-            <a:pPr algn="l" indent="0" marL="0">
-              <a:buNone/>
-            </a:pPr>
-            <a:r>
-              <a:rPr lang="en-US" sz="900" b="1" dirty="0">
-                <a:solidFill>
-                  <a:srgbClr val="888888"/>
-                </a:solidFill>
-                <a:latin typeface="Malgun Gothic" pitchFamily="34" charset="0"/>
-                <a:ea typeface="Malgun Gothic" pitchFamily="34" charset="-122"/>
-                <a:cs typeface="Malgun Gothic" pitchFamily="34" charset="-120"/>
-              </a:rPr>
-              <a:t>단계 3: 실행 및 응답</a:t>
-            </a:r>
-            <a:endParaRPr lang="en-US" sz="900" dirty="0"/>
-          </a:p>
-        </p:txBody>
-      </p:sp>
-      <p:sp>
-        <p:nvSpPr>
-          <p:cNvPr id="35" name="Text 33"/>
-          <p:cNvSpPr/>
-          <p:nvPr/>
-        </p:nvSpPr>
-        <p:spPr>
-          <a:xfrm>
-            <a:off x="304800" y="2966889"/>
+            <a:off x="304800" y="2766864"/>
             <a:ext cx="4749998" cy="679252"/>
           </a:xfrm>
           <a:prstGeom prst="rect">
@@ -6094,40 +5962,118 @@
       </p:sp>
       <p:sp>
         <p:nvSpPr>
+          <p:cNvPr id="34" name="Text 32"/>
+          <p:cNvSpPr/>
+          <p:nvPr/>
+        </p:nvSpPr>
+        <p:spPr>
+          <a:xfrm>
+            <a:off x="406220" y="2958852"/>
+            <a:ext cx="4547158" cy="152400"/>
+          </a:xfrm>
+          <a:prstGeom prst="rect">
+            <a:avLst/>
+          </a:prstGeom>
+          <a:noFill/>
+          <a:ln/>
+        </p:spPr>
+        <p:txBody>
+          <a:bodyPr wrap="square" lIns="0" tIns="0" rIns="0" bIns="0" rtlCol="0" anchor="t"/>
+          <a:lstStyle/>
+          <a:p>
+            <a:pPr algn="ctr" indent="0" marL="0">
+              <a:buNone/>
+            </a:pPr>
+            <a:r>
+              <a:rPr lang="en-US" sz="1000" b="1" dirty="0">
+                <a:solidFill>
+                  <a:srgbClr val="333333"/>
+                </a:solidFill>
+                <a:latin typeface="Malgun Gothic" pitchFamily="34" charset="0"/>
+                <a:ea typeface="Malgun Gothic" pitchFamily="34" charset="-122"/>
+                <a:cs typeface="Malgun Gothic" pitchFamily="34" charset="-120"/>
+              </a:rPr>
+              <a:t>스케줄러</a:t>
+            </a:r>
+            <a:endParaRPr lang="en-US" sz="1000" dirty="0"/>
+          </a:p>
+        </p:txBody>
+      </p:sp>
+      <p:sp>
+        <p:nvSpPr>
+          <p:cNvPr id="35" name="Text 33"/>
+          <p:cNvSpPr/>
+          <p:nvPr/>
+        </p:nvSpPr>
+        <p:spPr>
+          <a:xfrm>
+            <a:off x="406220" y="3111252"/>
+            <a:ext cx="4547158" cy="142875"/>
+          </a:xfrm>
+          <a:prstGeom prst="rect">
+            <a:avLst/>
+          </a:prstGeom>
+          <a:noFill/>
+          <a:ln/>
+        </p:spPr>
+        <p:txBody>
+          <a:bodyPr wrap="square" lIns="0" tIns="0" rIns="0" bIns="0" rtlCol="0" anchor="t"/>
+          <a:lstStyle/>
+          <a:p>
+            <a:pPr algn="ctr" indent="0" marL="0">
+              <a:buNone/>
+            </a:pPr>
+            <a:r>
+              <a:rPr lang="en-US" sz="900" dirty="0">
+                <a:solidFill>
+                  <a:srgbClr val="666666"/>
+                </a:solidFill>
+                <a:latin typeface="Malgun Gothic" pitchFamily="34" charset="0"/>
+                <a:ea typeface="Malgun Gothic" pitchFamily="34" charset="-122"/>
+                <a:cs typeface="Malgun Gothic" pitchFamily="34" charset="-120"/>
+              </a:rPr>
+              <a:t>다음 요청 추출 · LLM 백엔드로 전달</a:t>
+            </a:r>
+            <a:endParaRPr lang="en-US" sz="900" dirty="0"/>
+          </a:p>
+        </p:txBody>
+      </p:sp>
+      <p:sp>
+        <p:nvSpPr>
           <p:cNvPr id="36" name="Text 34"/>
           <p:cNvSpPr/>
           <p:nvPr/>
         </p:nvSpPr>
         <p:spPr>
           <a:xfrm>
-            <a:off x="406220" y="3158877"/>
-            <a:ext cx="4547158" cy="152400"/>
-          </a:xfrm>
-          <a:prstGeom prst="rect">
-            <a:avLst/>
-          </a:prstGeom>
-          <a:noFill/>
-          <a:ln/>
-        </p:spPr>
-        <p:txBody>
-          <a:bodyPr wrap="square" lIns="0" tIns="0" rIns="0" bIns="0" rtlCol="0" anchor="t"/>
-          <a:lstStyle/>
-          <a:p>
-            <a:pPr algn="ctr" indent="0" marL="0">
-              <a:buNone/>
-            </a:pPr>
-            <a:r>
-              <a:rPr lang="en-US" sz="1000" b="1" dirty="0">
-                <a:solidFill>
-                  <a:srgbClr val="333333"/>
-                </a:solidFill>
-                <a:latin typeface="Malgun Gothic" pitchFamily="34" charset="0"/>
-                <a:ea typeface="Malgun Gothic" pitchFamily="34" charset="-122"/>
-                <a:cs typeface="Malgun Gothic" pitchFamily="34" charset="-120"/>
-              </a:rPr>
-              <a:t>스케줄러</a:t>
-            </a:r>
-            <a:endParaRPr lang="en-US" sz="1000" dirty="0"/>
+            <a:off x="5130998" y="3001714"/>
+            <a:ext cx="181407" cy="209550"/>
+          </a:xfrm>
+          <a:prstGeom prst="rect">
+            <a:avLst/>
+          </a:prstGeom>
+          <a:noFill/>
+          <a:ln/>
+        </p:spPr>
+        <p:txBody>
+          <a:bodyPr wrap="square" lIns="0" tIns="0" rIns="0" bIns="0" rtlCol="0" anchor="t"/>
+          <a:lstStyle/>
+          <a:p>
+            <a:pPr algn="l" indent="0" marL="0">
+              <a:buNone/>
+            </a:pPr>
+            <a:r>
+              <a:rPr lang="en-US" sz="1400" dirty="0">
+                <a:solidFill>
+                  <a:srgbClr val="2B579A"/>
+                </a:solidFill>
+                <a:latin typeface="Malgun Gothic" pitchFamily="34" charset="0"/>
+                <a:ea typeface="Malgun Gothic" pitchFamily="34" charset="-122"/>
+                <a:cs typeface="Malgun Gothic" pitchFamily="34" charset="-120"/>
+              </a:rPr>
+              <a:t>→</a:t>
+            </a:r>
+            <a:endParaRPr lang="en-US" sz="1400" dirty="0"/>
           </a:p>
         </p:txBody>
       </p:sp>
@@ -6139,85 +6085,7 @@
         </p:nvSpPr>
         <p:spPr>
           <a:xfrm>
-            <a:off x="406220" y="3311277"/>
-            <a:ext cx="4547158" cy="142875"/>
-          </a:xfrm>
-          <a:prstGeom prst="rect">
-            <a:avLst/>
-          </a:prstGeom>
-          <a:noFill/>
-          <a:ln/>
-        </p:spPr>
-        <p:txBody>
-          <a:bodyPr wrap="square" lIns="0" tIns="0" rIns="0" bIns="0" rtlCol="0" anchor="t"/>
-          <a:lstStyle/>
-          <a:p>
-            <a:pPr algn="ctr" indent="0" marL="0">
-              <a:buNone/>
-            </a:pPr>
-            <a:r>
-              <a:rPr lang="en-US" sz="900" dirty="0">
-                <a:solidFill>
-                  <a:srgbClr val="666666"/>
-                </a:solidFill>
-                <a:latin typeface="Malgun Gothic" pitchFamily="34" charset="0"/>
-                <a:ea typeface="Malgun Gothic" pitchFamily="34" charset="-122"/>
-                <a:cs typeface="Malgun Gothic" pitchFamily="34" charset="-120"/>
-              </a:rPr>
-              <a:t>다음 요청 추출 · LLM 백엔드로 전달</a:t>
-            </a:r>
-            <a:endParaRPr lang="en-US" sz="900" dirty="0"/>
-          </a:p>
-        </p:txBody>
-      </p:sp>
-      <p:sp>
-        <p:nvSpPr>
-          <p:cNvPr id="38" name="Text 36"/>
-          <p:cNvSpPr/>
-          <p:nvPr/>
-        </p:nvSpPr>
-        <p:spPr>
-          <a:xfrm>
-            <a:off x="5130998" y="3201739"/>
-            <a:ext cx="181407" cy="209550"/>
-          </a:xfrm>
-          <a:prstGeom prst="rect">
-            <a:avLst/>
-          </a:prstGeom>
-          <a:noFill/>
-          <a:ln/>
-        </p:spPr>
-        <p:txBody>
-          <a:bodyPr wrap="square" lIns="0" tIns="0" rIns="0" bIns="0" rtlCol="0" anchor="t"/>
-          <a:lstStyle/>
-          <a:p>
-            <a:pPr algn="l" indent="0" marL="0">
-              <a:buNone/>
-            </a:pPr>
-            <a:r>
-              <a:rPr lang="en-US" sz="1400" dirty="0">
-                <a:solidFill>
-                  <a:srgbClr val="2B579A"/>
-                </a:solidFill>
-                <a:latin typeface="Malgun Gothic" pitchFamily="34" charset="0"/>
-                <a:ea typeface="Malgun Gothic" pitchFamily="34" charset="-122"/>
-                <a:cs typeface="Malgun Gothic" pitchFamily="34" charset="-120"/>
-              </a:rPr>
-              <a:t>→</a:t>
-            </a:r>
-            <a:endParaRPr lang="en-US" sz="1400" dirty="0"/>
-          </a:p>
-        </p:txBody>
-      </p:sp>
-      <p:sp>
-        <p:nvSpPr>
-          <p:cNvPr id="39" name="Text 37"/>
-          <p:cNvSpPr/>
-          <p:nvPr/>
-        </p:nvSpPr>
-        <p:spPr>
-          <a:xfrm>
-            <a:off x="5385048" y="2966889"/>
+            <a:off x="5385048" y="2766864"/>
             <a:ext cx="1688902" cy="679252"/>
           </a:xfrm>
           <a:prstGeom prst="rect">
@@ -6245,40 +6113,118 @@
       </p:sp>
       <p:sp>
         <p:nvSpPr>
+          <p:cNvPr id="38" name="Text 36"/>
+          <p:cNvSpPr/>
+          <p:nvPr/>
+        </p:nvSpPr>
+        <p:spPr>
+          <a:xfrm>
+            <a:off x="5517079" y="2963614"/>
+            <a:ext cx="1424839" cy="142875"/>
+          </a:xfrm>
+          <a:prstGeom prst="rect">
+            <a:avLst/>
+          </a:prstGeom>
+          <a:noFill/>
+          <a:ln/>
+        </p:spPr>
+        <p:txBody>
+          <a:bodyPr wrap="square" lIns="0" tIns="0" rIns="0" bIns="0" rtlCol="0" anchor="t"/>
+          <a:lstStyle/>
+          <a:p>
+            <a:pPr algn="ctr" indent="0" marL="0">
+              <a:buNone/>
+            </a:pPr>
+            <a:r>
+              <a:rPr lang="en-US" sz="1000" b="1" dirty="0">
+                <a:solidFill>
+                  <a:srgbClr val="FFFFFF"/>
+                </a:solidFill>
+                <a:latin typeface="Malgun Gothic" pitchFamily="34" charset="0"/>
+                <a:ea typeface="Malgun Gothic" pitchFamily="34" charset="-122"/>
+                <a:cs typeface="Malgun Gothic" pitchFamily="34" charset="-120"/>
+              </a:rPr>
+              <a:t>Ollama (LLM)</a:t>
+            </a:r>
+            <a:endParaRPr lang="en-US" sz="1000" dirty="0"/>
+          </a:p>
+        </p:txBody>
+      </p:sp>
+      <p:sp>
+        <p:nvSpPr>
+          <p:cNvPr id="39" name="Text 37"/>
+          <p:cNvSpPr/>
+          <p:nvPr/>
+        </p:nvSpPr>
+        <p:spPr>
+          <a:xfrm>
+            <a:off x="5517079" y="3106489"/>
+            <a:ext cx="1424839" cy="142875"/>
+          </a:xfrm>
+          <a:prstGeom prst="rect">
+            <a:avLst/>
+          </a:prstGeom>
+          <a:noFill/>
+          <a:ln/>
+        </p:spPr>
+        <p:txBody>
+          <a:bodyPr wrap="square" lIns="0" tIns="0" rIns="0" bIns="0" rtlCol="0" anchor="t"/>
+          <a:lstStyle/>
+          <a:p>
+            <a:pPr algn="ctr" indent="0" marL="0">
+              <a:buNone/>
+            </a:pPr>
+            <a:r>
+              <a:rPr lang="en-US" sz="900" dirty="0">
+                <a:solidFill>
+                  <a:srgbClr val="CCCCCC"/>
+                </a:solidFill>
+                <a:latin typeface="Malgun Gothic" pitchFamily="34" charset="0"/>
+                <a:ea typeface="Malgun Gothic" pitchFamily="34" charset="-122"/>
+                <a:cs typeface="Malgun Gothic" pitchFamily="34" charset="-120"/>
+              </a:rPr>
+              <a:t>로컬 추론</a:t>
+            </a:r>
+            <a:endParaRPr lang="en-US" sz="900" dirty="0"/>
+          </a:p>
+        </p:txBody>
+      </p:sp>
+      <p:sp>
+        <p:nvSpPr>
           <p:cNvPr id="40" name="Text 38"/>
           <p:cNvSpPr/>
           <p:nvPr/>
         </p:nvSpPr>
         <p:spPr>
           <a:xfrm>
-            <a:off x="5517079" y="3163639"/>
-            <a:ext cx="1424839" cy="142875"/>
-          </a:xfrm>
-          <a:prstGeom prst="rect">
-            <a:avLst/>
-          </a:prstGeom>
-          <a:noFill/>
-          <a:ln/>
-        </p:spPr>
-        <p:txBody>
-          <a:bodyPr wrap="square" lIns="0" tIns="0" rIns="0" bIns="0" rtlCol="0" anchor="t"/>
-          <a:lstStyle/>
-          <a:p>
-            <a:pPr algn="ctr" indent="0" marL="0">
-              <a:buNone/>
-            </a:pPr>
-            <a:r>
-              <a:rPr lang="en-US" sz="1000" b="1" dirty="0">
-                <a:solidFill>
-                  <a:srgbClr val="FFFFFF"/>
-                </a:solidFill>
-                <a:latin typeface="Malgun Gothic" pitchFamily="34" charset="0"/>
-                <a:ea typeface="Malgun Gothic" pitchFamily="34" charset="-122"/>
-                <a:cs typeface="Malgun Gothic" pitchFamily="34" charset="-120"/>
-              </a:rPr>
-              <a:t>Ollama (LLM)</a:t>
-            </a:r>
-            <a:endParaRPr lang="en-US" sz="1000" dirty="0"/>
+            <a:off x="7150150" y="3001714"/>
+            <a:ext cx="181407" cy="209550"/>
+          </a:xfrm>
+          <a:prstGeom prst="rect">
+            <a:avLst/>
+          </a:prstGeom>
+          <a:noFill/>
+          <a:ln/>
+        </p:spPr>
+        <p:txBody>
+          <a:bodyPr wrap="square" lIns="0" tIns="0" rIns="0" bIns="0" rtlCol="0" anchor="t"/>
+          <a:lstStyle/>
+          <a:p>
+            <a:pPr algn="l" indent="0" marL="0">
+              <a:buNone/>
+            </a:pPr>
+            <a:r>
+              <a:rPr lang="en-US" sz="1400" dirty="0">
+                <a:solidFill>
+                  <a:srgbClr val="2B579A"/>
+                </a:solidFill>
+                <a:latin typeface="Malgun Gothic" pitchFamily="34" charset="0"/>
+                <a:ea typeface="Malgun Gothic" pitchFamily="34" charset="-122"/>
+                <a:cs typeface="Malgun Gothic" pitchFamily="34" charset="-120"/>
+              </a:rPr>
+              <a:t>→</a:t>
+            </a:r>
+            <a:endParaRPr lang="en-US" sz="1400" dirty="0"/>
           </a:p>
         </p:txBody>
       </p:sp>
@@ -6290,85 +6236,7 @@
         </p:nvSpPr>
         <p:spPr>
           <a:xfrm>
-            <a:off x="5517079" y="3306514"/>
-            <a:ext cx="1424839" cy="142875"/>
-          </a:xfrm>
-          <a:prstGeom prst="rect">
-            <a:avLst/>
-          </a:prstGeom>
-          <a:noFill/>
-          <a:ln/>
-        </p:spPr>
-        <p:txBody>
-          <a:bodyPr wrap="square" lIns="0" tIns="0" rIns="0" bIns="0" rtlCol="0" anchor="t"/>
-          <a:lstStyle/>
-          <a:p>
-            <a:pPr algn="ctr" indent="0" marL="0">
-              <a:buNone/>
-            </a:pPr>
-            <a:r>
-              <a:rPr lang="en-US" sz="900" dirty="0">
-                <a:solidFill>
-                  <a:srgbClr val="CCCCCC"/>
-                </a:solidFill>
-                <a:latin typeface="Malgun Gothic" pitchFamily="34" charset="0"/>
-                <a:ea typeface="Malgun Gothic" pitchFamily="34" charset="-122"/>
-                <a:cs typeface="Malgun Gothic" pitchFamily="34" charset="-120"/>
-              </a:rPr>
-              <a:t>로컬 추론</a:t>
-            </a:r>
-            <a:endParaRPr lang="en-US" sz="900" dirty="0"/>
-          </a:p>
-        </p:txBody>
-      </p:sp>
-      <p:sp>
-        <p:nvSpPr>
-          <p:cNvPr id="42" name="Text 40"/>
-          <p:cNvSpPr/>
-          <p:nvPr/>
-        </p:nvSpPr>
-        <p:spPr>
-          <a:xfrm>
-            <a:off x="7150150" y="3201739"/>
-            <a:ext cx="181407" cy="209550"/>
-          </a:xfrm>
-          <a:prstGeom prst="rect">
-            <a:avLst/>
-          </a:prstGeom>
-          <a:noFill/>
-          <a:ln/>
-        </p:spPr>
-        <p:txBody>
-          <a:bodyPr wrap="square" lIns="0" tIns="0" rIns="0" bIns="0" rtlCol="0" anchor="t"/>
-          <a:lstStyle/>
-          <a:p>
-            <a:pPr algn="l" indent="0" marL="0">
-              <a:buNone/>
-            </a:pPr>
-            <a:r>
-              <a:rPr lang="en-US" sz="1400" dirty="0">
-                <a:solidFill>
-                  <a:srgbClr val="2B579A"/>
-                </a:solidFill>
-                <a:latin typeface="Malgun Gothic" pitchFamily="34" charset="0"/>
-                <a:ea typeface="Malgun Gothic" pitchFamily="34" charset="-122"/>
-                <a:cs typeface="Malgun Gothic" pitchFamily="34" charset="-120"/>
-              </a:rPr>
-              <a:t>→</a:t>
-            </a:r>
-            <a:endParaRPr lang="en-US" sz="1400" dirty="0"/>
-          </a:p>
-        </p:txBody>
-      </p:sp>
-      <p:sp>
-        <p:nvSpPr>
-          <p:cNvPr id="43" name="Text 41"/>
-          <p:cNvSpPr/>
-          <p:nvPr/>
-        </p:nvSpPr>
-        <p:spPr>
-          <a:xfrm>
-            <a:off x="7404199" y="2966889"/>
+            <a:off x="7404199" y="2766864"/>
             <a:ext cx="1435001" cy="679252"/>
           </a:xfrm>
           <a:prstGeom prst="rect">
@@ -6396,14 +6264,92 @@
       </p:sp>
       <p:sp>
         <p:nvSpPr>
+          <p:cNvPr id="42" name="Text 40"/>
+          <p:cNvSpPr/>
+          <p:nvPr/>
+        </p:nvSpPr>
+        <p:spPr>
+          <a:xfrm>
+            <a:off x="7538770" y="2887414"/>
+            <a:ext cx="1165860" cy="152400"/>
+          </a:xfrm>
+          <a:prstGeom prst="rect">
+            <a:avLst/>
+          </a:prstGeom>
+          <a:noFill/>
+          <a:ln/>
+        </p:spPr>
+        <p:txBody>
+          <a:bodyPr wrap="square" lIns="0" tIns="0" rIns="0" bIns="0" rtlCol="0" anchor="t"/>
+          <a:lstStyle/>
+          <a:p>
+            <a:pPr algn="ctr" indent="0" marL="0">
+              <a:buNone/>
+            </a:pPr>
+            <a:r>
+              <a:rPr lang="en-US" sz="1000" b="1" dirty="0">
+                <a:solidFill>
+                  <a:srgbClr val="333333"/>
+                </a:solidFill>
+                <a:latin typeface="Malgun Gothic" pitchFamily="34" charset="0"/>
+                <a:ea typeface="Malgun Gothic" pitchFamily="34" charset="-122"/>
+                <a:cs typeface="Malgun Gothic" pitchFamily="34" charset="-120"/>
+              </a:rPr>
+              <a:t>응답</a:t>
+            </a:r>
+            <a:endParaRPr lang="en-US" sz="1000" dirty="0"/>
+          </a:p>
+        </p:txBody>
+      </p:sp>
+      <p:sp>
+        <p:nvSpPr>
+          <p:cNvPr id="43" name="Text 41"/>
+          <p:cNvSpPr/>
+          <p:nvPr/>
+        </p:nvSpPr>
+        <p:spPr>
+          <a:xfrm>
+            <a:off x="7538770" y="3039814"/>
+            <a:ext cx="1165860" cy="142875"/>
+          </a:xfrm>
+          <a:prstGeom prst="rect">
+            <a:avLst/>
+          </a:prstGeom>
+          <a:noFill/>
+          <a:ln/>
+        </p:spPr>
+        <p:txBody>
+          <a:bodyPr wrap="square" lIns="0" tIns="0" rIns="0" bIns="0" rtlCol="0" anchor="t"/>
+          <a:lstStyle/>
+          <a:p>
+            <a:pPr algn="ctr" indent="0" marL="0">
+              <a:buNone/>
+            </a:pPr>
+            <a:r>
+              <a:rPr lang="en-US" sz="900" dirty="0">
+                <a:solidFill>
+                  <a:srgbClr val="666666"/>
+                </a:solidFill>
+                <a:latin typeface="Malgun Gothic" pitchFamily="34" charset="0"/>
+                <a:ea typeface="Malgun Gothic" pitchFamily="34" charset="-122"/>
+                <a:cs typeface="Malgun Gothic" pitchFamily="34" charset="-120"/>
+              </a:rPr>
+              <a:t>대기시간 기록</a:t>
+            </a:r>
+            <a:endParaRPr lang="en-US" sz="900" dirty="0"/>
+          </a:p>
+        </p:txBody>
+      </p:sp>
+      <p:sp>
+        <p:nvSpPr>
           <p:cNvPr id="44" name="Text 42"/>
           <p:cNvSpPr/>
           <p:nvPr/>
         </p:nvSpPr>
         <p:spPr>
           <a:xfrm>
-            <a:off x="7538770" y="3087439"/>
-            <a:ext cx="1165860" cy="152400"/>
+            <a:off x="7538770" y="3182689"/>
+            <a:ext cx="1165860" cy="142875"/>
           </a:xfrm>
           <a:prstGeom prst="rect">
             <a:avLst/>
@@ -6419,45 +6365,6 @@
               <a:buNone/>
             </a:pPr>
             <a:r>
-              <a:rPr lang="en-US" sz="1000" b="1" dirty="0">
-                <a:solidFill>
-                  <a:srgbClr val="333333"/>
-                </a:solidFill>
-                <a:latin typeface="Malgun Gothic" pitchFamily="34" charset="0"/>
-                <a:ea typeface="Malgun Gothic" pitchFamily="34" charset="-122"/>
-                <a:cs typeface="Malgun Gothic" pitchFamily="34" charset="-120"/>
-              </a:rPr>
-              <a:t>응답</a:t>
-            </a:r>
-            <a:endParaRPr lang="en-US" sz="1000" dirty="0"/>
-          </a:p>
-        </p:txBody>
-      </p:sp>
-      <p:sp>
-        <p:nvSpPr>
-          <p:cNvPr id="45" name="Text 43"/>
-          <p:cNvSpPr/>
-          <p:nvPr/>
-        </p:nvSpPr>
-        <p:spPr>
-          <a:xfrm>
-            <a:off x="7538770" y="3239839"/>
-            <a:ext cx="1165860" cy="142875"/>
-          </a:xfrm>
-          <a:prstGeom prst="rect">
-            <a:avLst/>
-          </a:prstGeom>
-          <a:noFill/>
-          <a:ln/>
-        </p:spPr>
-        <p:txBody>
-          <a:bodyPr wrap="square" lIns="0" tIns="0" rIns="0" bIns="0" rtlCol="0" anchor="t"/>
-          <a:lstStyle/>
-          <a:p>
-            <a:pPr algn="ctr" indent="0" marL="0">
-              <a:buNone/>
-            </a:pPr>
-            <a:r>
               <a:rPr lang="en-US" sz="900" dirty="0">
                 <a:solidFill>
                   <a:srgbClr val="666666"/>
@@ -6466,7 +6373,7 @@
                 <a:ea typeface="Malgun Gothic" pitchFamily="34" charset="-122"/>
                 <a:cs typeface="Malgun Gothic" pitchFamily="34" charset="-120"/>
               </a:rPr>
-              <a:t>대기시간 기록</a:t>
+              <a:t>JFI 계산</a:t>
             </a:r>
             <a:endParaRPr lang="en-US" sz="900" dirty="0"/>
           </a:p>
@@ -6474,46 +6381,7 @@
       </p:sp>
       <p:sp>
         <p:nvSpPr>
-          <p:cNvPr id="46" name="Text 44"/>
-          <p:cNvSpPr/>
-          <p:nvPr/>
-        </p:nvSpPr>
-        <p:spPr>
-          <a:xfrm>
-            <a:off x="7538770" y="3382714"/>
-            <a:ext cx="1165860" cy="142875"/>
-          </a:xfrm>
-          <a:prstGeom prst="rect">
-            <a:avLst/>
-          </a:prstGeom>
-          <a:noFill/>
-          <a:ln/>
-        </p:spPr>
-        <p:txBody>
-          <a:bodyPr wrap="square" lIns="0" tIns="0" rIns="0" bIns="0" rtlCol="0" anchor="t"/>
-          <a:lstStyle/>
-          <a:p>
-            <a:pPr algn="ctr" indent="0" marL="0">
-              <a:buNone/>
-            </a:pPr>
-            <a:r>
-              <a:rPr lang="en-US" sz="900" dirty="0">
-                <a:solidFill>
-                  <a:srgbClr val="666666"/>
-                </a:solidFill>
-                <a:latin typeface="Malgun Gothic" pitchFamily="34" charset="0"/>
-                <a:ea typeface="Malgun Gothic" pitchFamily="34" charset="-122"/>
-                <a:cs typeface="Malgun Gothic" pitchFamily="34" charset="-120"/>
-              </a:rPr>
-              <a:t>JFI 계산</a:t>
-            </a:r>
-            <a:endParaRPr lang="en-US" sz="900" dirty="0"/>
-          </a:p>
-        </p:txBody>
-      </p:sp>
-      <p:sp>
-        <p:nvSpPr>
-          <p:cNvPr id="47" name="Shape 45"/>
+          <p:cNvPr id="45" name="Shape 43"/>
           <p:cNvSpPr/>
           <p:nvPr/>
         </p:nvSpPr>
@@ -6536,7 +6404,7 @@
       </p:sp>
       <p:sp>
         <p:nvSpPr>
-          <p:cNvPr id="48" name="Text 46"/>
+          <p:cNvPr id="46" name="Text 44"/>
           <p:cNvSpPr/>
           <p:nvPr/>
         </p:nvSpPr>

--- a/04-proposal/figures/proposal-figures.pptx
+++ b/04-proposal/figures/proposal-figures.pptx
@@ -7,10 +7,9 @@
   <p:sldIdLst>
     <p:sldId id="256" r:id="rId2"/>
     <p:sldId id="257" r:id="rId3"/>
-    <p:sldId id="258" r:id="rId4"/>
   </p:sldIdLst>
   <p:notesMasterIdLst>
-    <p:notesMasterId r:id="rId5"/>
+    <p:notesMasterId r:id="rId4"/>
   </p:notesMasterIdLst>
   <p:sldSz cx="9144000" cy="5143500"/>
   <p:notesSz cx="5143500" cy="9144000"/>
@@ -616,94 +615,6 @@
             <a:fld id="{F7021451-1387-4CA6-816F-3879F97B5CBC}" type="slidenum">
               <a:rPr lang="en-US"/>
               <a:t>2</a:t>
-            </a:fld>
-            <a:endParaRPr lang="en-US"/>
-          </a:p>
-        </p:txBody>
-      </p:sp>
-    </p:spTree>
-    <p:extLst>
-      <p:ext uri="{BB962C8B-B14F-4D97-AF65-F5344CB8AC3E}">
-        <p14:creationId xmlns:p14="http://schemas.microsoft.com/office/powerpoint/2010/main" val="1024086991"/>
-      </p:ext>
-    </p:extLst>
-  </p:cSld>
-  <p:clrMapOvr>
-    <a:masterClrMapping/>
-  </p:clrMapOvr>
-</p:notes>
-</file>
-
-<file path=ppt/notesSlides/notesSlide3.xml><?xml version="1.0" encoding="utf-8"?>
-<p:notes xmlns:a="http://schemas.openxmlformats.org/drawingml/2006/main" xmlns:r="http://schemas.openxmlformats.org/officeDocument/2006/relationships" xmlns:p="http://schemas.openxmlformats.org/presentationml/2006/main">
-  <p:cSld>
-    <p:spTree>
-      <p:nvGrpSpPr>
-        <p:cNvPr id="1" name=""/>
-        <p:cNvGrpSpPr/>
-        <p:nvPr/>
-      </p:nvGrpSpPr>
-      <p:grpSpPr>
-        <a:xfrm>
-          <a:off x="0" y="0"/>
-          <a:ext cx="0" cy="0"/>
-          <a:chOff x="0" y="0"/>
-          <a:chExt cx="0" cy="0"/>
-        </a:xfrm>
-      </p:grpSpPr>
-      <p:sp>
-        <p:nvSpPr>
-          <p:cNvPr id="2" name="Slide Image Placeholder 1"/>
-          <p:cNvSpPr>
-            <a:spLocks noGrp="1" noRot="1" noChangeAspect="1"/>
-          </p:cNvSpPr>
-          <p:nvPr>
-            <p:ph type="sldImg"/>
-          </p:nvPr>
-        </p:nvSpPr>
-        <p:spPr/>
-      </p:sp>
-      <p:sp>
-        <p:nvSpPr>
-          <p:cNvPr id="3" name="Notes Placeholder 2"/>
-          <p:cNvSpPr>
-            <a:spLocks noGrp="1"/>
-          </p:cNvSpPr>
-          <p:nvPr>
-            <p:ph type="body" idx="1"/>
-          </p:nvPr>
-        </p:nvSpPr>
-        <p:spPr/>
-        <p:txBody>
-          <a:bodyPr/>
-          <a:lstStyle/>
-          <a:p>
-            <a:r>
-              <a:rPr lang="en-US" dirty="0"/>
-              <a:t/>
-            </a:r>
-            <a:endParaRPr lang="en-US" dirty="0"/>
-          </a:p>
-        </p:txBody>
-      </p:sp>
-      <p:sp>
-        <p:nvSpPr>
-          <p:cNvPr id="4" name="Slide Number Placeholder 3"/>
-          <p:cNvSpPr>
-            <a:spLocks noGrp="1"/>
-          </p:cNvSpPr>
-          <p:nvPr>
-            <p:ph type="sldNum" sz="quarter" idx="10"/>
-          </p:nvPr>
-        </p:nvSpPr>
-        <p:spPr/>
-        <p:txBody>
-          <a:bodyPr/>
-          <a:lstStyle/>
-          <a:p>
-            <a:fld id="{F7021451-1387-4CA6-816F-3879F97B5CBC}" type="slidenum">
-              <a:rPr lang="en-US"/>
-              <a:t>3</a:t>
             </a:fld>
             <a:endParaRPr lang="en-US"/>
           </a:p>
@@ -3191,13 +3102,107 @@
         </p:nvSpPr>
         <p:spPr>
           <a:xfrm>
-            <a:off x="381000" y="253901"/>
-            <a:ext cx="8382000" cy="453926"/>
-          </a:xfrm>
-          <a:prstGeom prst="rect">
-            <a:avLst/>
-          </a:prstGeom>
-          <a:noFill/>
+            <a:off x="304800" y="203150"/>
+            <a:ext cx="3746599" cy="403027"/>
+          </a:xfrm>
+          <a:prstGeom prst="rect">
+            <a:avLst/>
+          </a:prstGeom>
+          <a:solidFill>
+            <a:srgbClr val="2B579A"/>
+          </a:solidFill>
+          <a:ln/>
+        </p:spPr>
+        <p:txBody>
+          <a:bodyPr wrap="square" rtlCol="0" anchor="ctr"/>
+          <a:lstStyle/>
+          <a:p>
+            <a:pPr indent="0" marL="0">
+              <a:buNone/>
+            </a:pPr>
+            <a:endParaRPr lang="en-US" dirty="0"/>
+          </a:p>
+        </p:txBody>
+      </p:sp>
+      <p:sp>
+        <p:nvSpPr>
+          <p:cNvPr id="3" name="Shape 1"/>
+          <p:cNvSpPr/>
+          <p:nvPr/>
+        </p:nvSpPr>
+        <p:spPr>
+          <a:xfrm>
+            <a:off x="304800" y="596652"/>
+            <a:ext cx="3746599" cy="0"/>
+          </a:xfrm>
+          <a:prstGeom prst="line">
+            <a:avLst/>
+          </a:prstGeom>
+          <a:noFill/>
+          <a:ln w="19050">
+            <a:solidFill>
+              <a:srgbClr val="2B579A"/>
+            </a:solidFill>
+            <a:prstDash val="solid"/>
+          </a:ln>
+        </p:spPr>
+      </p:sp>
+      <p:sp>
+        <p:nvSpPr>
+          <p:cNvPr id="4" name="Text 2"/>
+          <p:cNvSpPr/>
+          <p:nvPr/>
+        </p:nvSpPr>
+        <p:spPr>
+          <a:xfrm>
+            <a:off x="396823" y="304651"/>
+            <a:ext cx="3562552" cy="180975"/>
+          </a:xfrm>
+          <a:prstGeom prst="rect">
+            <a:avLst/>
+          </a:prstGeom>
+          <a:noFill/>
+          <a:ln/>
+        </p:spPr>
+        <p:txBody>
+          <a:bodyPr wrap="square" lIns="0" tIns="0" rIns="0" bIns="0" rtlCol="0" anchor="t"/>
+          <a:lstStyle/>
+          <a:p>
+            <a:pPr algn="ctr" indent="0" marL="0">
+              <a:buNone/>
+            </a:pPr>
+            <a:r>
+              <a:rPr lang="en-US" sz="1200" b="1" dirty="0">
+                <a:solidFill>
+                  <a:srgbClr val="FFFFFF"/>
+                </a:solidFill>
+                <a:latin typeface="Malgun Gothic" pitchFamily="34" charset="0"/>
+                <a:ea typeface="Malgun Gothic" pitchFamily="34" charset="-122"/>
+                <a:cs typeface="Malgun Gothic" pitchFamily="34" charset="-120"/>
+              </a:rPr>
+              <a:t>OS 프로세스 스케줄링</a:t>
+            </a:r>
+            <a:endParaRPr lang="en-US" sz="1200" dirty="0"/>
+          </a:p>
+        </p:txBody>
+      </p:sp>
+      <p:sp>
+        <p:nvSpPr>
+          <p:cNvPr id="5" name="Text 3"/>
+          <p:cNvSpPr/>
+          <p:nvPr/>
+        </p:nvSpPr>
+        <p:spPr>
+          <a:xfrm>
+            <a:off x="304800" y="682377"/>
+            <a:ext cx="3746599" cy="536377"/>
+          </a:xfrm>
+          <a:prstGeom prst="rect">
+            <a:avLst/>
+          </a:prstGeom>
+          <a:solidFill>
+            <a:srgbClr val="F0F4FA"/>
+          </a:solidFill>
           <a:ln w="19050">
             <a:solidFill>
               <a:srgbClr val="2B579A"/>
@@ -3217,166 +3222,99 @@
       </p:sp>
       <p:sp>
         <p:nvSpPr>
-          <p:cNvPr id="3" name="Text 1"/>
-          <p:cNvSpPr/>
-          <p:nvPr/>
-        </p:nvSpPr>
-        <p:spPr>
-          <a:xfrm>
-            <a:off x="400050" y="272951"/>
-            <a:ext cx="2590800" cy="415826"/>
+          <p:cNvPr id="6" name="Text 4"/>
+          <p:cNvSpPr/>
+          <p:nvPr/>
+        </p:nvSpPr>
+        <p:spPr>
+          <a:xfrm>
+            <a:off x="476250" y="802928"/>
+            <a:ext cx="3471773" cy="152400"/>
+          </a:xfrm>
+          <a:prstGeom prst="rect">
+            <a:avLst/>
+          </a:prstGeom>
+          <a:noFill/>
+          <a:ln/>
+        </p:spPr>
+        <p:txBody>
+          <a:bodyPr wrap="square" lIns="0" tIns="0" rIns="0" bIns="0" rtlCol="0" anchor="t"/>
+          <a:lstStyle/>
+          <a:p>
+            <a:pPr algn="l" indent="0" marL="0">
+              <a:buNone/>
+            </a:pPr>
+            <a:r>
+              <a:rPr lang="en-US" sz="1000" b="1" dirty="0">
+                <a:solidFill>
+                  <a:srgbClr val="2B579A"/>
+                </a:solidFill>
+                <a:latin typeface="Malgun Gothic" pitchFamily="34" charset="0"/>
+                <a:ea typeface="Malgun Gothic" pitchFamily="34" charset="-122"/>
+                <a:cs typeface="Malgun Gothic" pitchFamily="34" charset="-120"/>
+              </a:rPr>
+              <a:t>프로세스 (Process)</a:t>
+            </a:r>
+            <a:endParaRPr lang="en-US" sz="1000" dirty="0"/>
+          </a:p>
+        </p:txBody>
+      </p:sp>
+      <p:sp>
+        <p:nvSpPr>
+          <p:cNvPr id="7" name="Text 5"/>
+          <p:cNvSpPr/>
+          <p:nvPr/>
+        </p:nvSpPr>
+        <p:spPr>
+          <a:xfrm>
+            <a:off x="476250" y="955328"/>
+            <a:ext cx="3471773" cy="142875"/>
+          </a:xfrm>
+          <a:prstGeom prst="rect">
+            <a:avLst/>
+          </a:prstGeom>
+          <a:noFill/>
+          <a:ln/>
+        </p:spPr>
+        <p:txBody>
+          <a:bodyPr wrap="square" lIns="0" tIns="0" rIns="0" bIns="0" rtlCol="0" anchor="t"/>
+          <a:lstStyle/>
+          <a:p>
+            <a:pPr algn="l" indent="0" marL="0">
+              <a:buNone/>
+            </a:pPr>
+            <a:r>
+              <a:rPr lang="en-US" sz="900" dirty="0">
+                <a:solidFill>
+                  <a:srgbClr val="555555"/>
+                </a:solidFill>
+                <a:latin typeface="Malgun Gothic" pitchFamily="34" charset="0"/>
+                <a:ea typeface="Malgun Gothic" pitchFamily="34" charset="-122"/>
+                <a:cs typeface="Malgun Gothic" pitchFamily="34" charset="-120"/>
+              </a:rPr>
+              <a:t>CPU 시간을 할당받는 기본 단위</a:t>
+            </a:r>
+            <a:endParaRPr lang="en-US" sz="900" dirty="0"/>
+          </a:p>
+        </p:txBody>
+      </p:sp>
+      <p:sp>
+        <p:nvSpPr>
+          <p:cNvPr id="8" name="Text 6"/>
+          <p:cNvSpPr/>
+          <p:nvPr/>
+        </p:nvSpPr>
+        <p:spPr>
+          <a:xfrm>
+            <a:off x="304800" y="1294954"/>
+            <a:ext cx="3746599" cy="536377"/>
           </a:xfrm>
           <a:prstGeom prst="rect">
             <a:avLst/>
           </a:prstGeom>
           <a:solidFill>
-            <a:srgbClr val="2B579A"/>
+            <a:srgbClr val="F0F4FA"/>
           </a:solidFill>
-          <a:ln/>
-        </p:spPr>
-        <p:txBody>
-          <a:bodyPr wrap="square" rtlCol="0" anchor="ctr"/>
-          <a:lstStyle/>
-          <a:p>
-            <a:pPr indent="0" marL="0">
-              <a:buNone/>
-            </a:pPr>
-            <a:endParaRPr lang="en-US" dirty="0"/>
-          </a:p>
-        </p:txBody>
-      </p:sp>
-      <p:sp>
-        <p:nvSpPr>
-          <p:cNvPr id="4" name="Text 2"/>
-          <p:cNvSpPr/>
-          <p:nvPr/>
-        </p:nvSpPr>
-        <p:spPr>
-          <a:xfrm>
-            <a:off x="552450" y="399901"/>
-            <a:ext cx="2331720" cy="161925"/>
-          </a:xfrm>
-          <a:prstGeom prst="rect">
-            <a:avLst/>
-          </a:prstGeom>
-          <a:noFill/>
-          <a:ln/>
-        </p:spPr>
-        <p:txBody>
-          <a:bodyPr wrap="square" lIns="0" tIns="0" rIns="0" bIns="0" rtlCol="0" anchor="t"/>
-          <a:lstStyle/>
-          <a:p>
-            <a:pPr algn="l" indent="0" marL="0">
-              <a:buNone/>
-            </a:pPr>
-            <a:r>
-              <a:rPr lang="en-US" sz="1100" b="1" dirty="0">
-                <a:solidFill>
-                  <a:srgbClr val="FFFFFF"/>
-                </a:solidFill>
-                <a:latin typeface="Malgun Gothic" pitchFamily="34" charset="0"/>
-                <a:ea typeface="Malgun Gothic" pitchFamily="34" charset="-122"/>
-                <a:cs typeface="Malgun Gothic" pitchFamily="34" charset="-120"/>
-              </a:rPr>
-              <a:t>클라이언트 계층</a:t>
-            </a:r>
-            <a:endParaRPr lang="en-US" sz="1100" dirty="0"/>
-          </a:p>
-        </p:txBody>
-      </p:sp>
-      <p:sp>
-        <p:nvSpPr>
-          <p:cNvPr id="5" name="Text 3"/>
-          <p:cNvSpPr/>
-          <p:nvPr/>
-        </p:nvSpPr>
-        <p:spPr>
-          <a:xfrm>
-            <a:off x="3194000" y="404664"/>
-            <a:ext cx="1176942" cy="152400"/>
-          </a:xfrm>
-          <a:prstGeom prst="rect">
-            <a:avLst/>
-          </a:prstGeom>
-          <a:noFill/>
-          <a:ln/>
-        </p:spPr>
-        <p:txBody>
-          <a:bodyPr wrap="square" lIns="0" tIns="0" rIns="0" bIns="0" rtlCol="0" anchor="t"/>
-          <a:lstStyle/>
-          <a:p>
-            <a:pPr algn="l" indent="0" marL="0">
-              <a:buNone/>
-            </a:pPr>
-            <a:r>
-              <a:rPr lang="en-US" sz="1000" dirty="0">
-                <a:solidFill>
-                  <a:srgbClr val="333333"/>
-                </a:solidFill>
-                <a:latin typeface="Malgun Gothic" pitchFamily="34" charset="0"/>
-                <a:ea typeface="Malgun Gothic" pitchFamily="34" charset="-122"/>
-                <a:cs typeface="Malgun Gothic" pitchFamily="34" charset="-120"/>
-              </a:rPr>
-              <a:t>REST API 클라이언트</a:t>
-            </a:r>
-            <a:endParaRPr lang="en-US" sz="1000" dirty="0"/>
-          </a:p>
-        </p:txBody>
-      </p:sp>
-      <p:sp>
-        <p:nvSpPr>
-          <p:cNvPr id="6" name="Text 4"/>
-          <p:cNvSpPr/>
-          <p:nvPr/>
-        </p:nvSpPr>
-        <p:spPr>
-          <a:xfrm>
-            <a:off x="4497288" y="784027"/>
-            <a:ext cx="152412" cy="180975"/>
-          </a:xfrm>
-          <a:prstGeom prst="rect">
-            <a:avLst/>
-          </a:prstGeom>
-          <a:noFill/>
-          <a:ln/>
-        </p:spPr>
-        <p:txBody>
-          <a:bodyPr wrap="square" lIns="0" tIns="0" rIns="0" bIns="0" rtlCol="0" anchor="t"/>
-          <a:lstStyle/>
-          <a:p>
-            <a:pPr algn="l" indent="0" marL="0">
-              <a:buNone/>
-            </a:pPr>
-            <a:r>
-              <a:rPr lang="en-US" sz="1200" dirty="0">
-                <a:solidFill>
-                  <a:srgbClr val="888888"/>
-                </a:solidFill>
-                <a:latin typeface="Malgun Gothic" pitchFamily="34" charset="0"/>
-                <a:ea typeface="Malgun Gothic" pitchFamily="34" charset="-122"/>
-                <a:cs typeface="Malgun Gothic" pitchFamily="34" charset="-120"/>
-              </a:rPr>
-              <a:t>▼</a:t>
-            </a:r>
-            <a:endParaRPr lang="en-US" sz="1200" dirty="0"/>
-          </a:p>
-        </p:txBody>
-      </p:sp>
-      <p:sp>
-        <p:nvSpPr>
-          <p:cNvPr id="7" name="Text 5"/>
-          <p:cNvSpPr/>
-          <p:nvPr/>
-        </p:nvSpPr>
-        <p:spPr>
-          <a:xfrm>
-            <a:off x="381000" y="1041202"/>
-            <a:ext cx="8382000" cy="587276"/>
-          </a:xfrm>
-          <a:prstGeom prst="rect">
-            <a:avLst/>
-          </a:prstGeom>
-          <a:noFill/>
           <a:ln w="19050">
             <a:solidFill>
               <a:srgbClr val="2B579A"/>
@@ -3396,14 +3334,472 @@
       </p:sp>
       <p:sp>
         <p:nvSpPr>
-          <p:cNvPr id="8" name="Text 6"/>
-          <p:cNvSpPr/>
-          <p:nvPr/>
-        </p:nvSpPr>
-        <p:spPr>
-          <a:xfrm>
-            <a:off x="400050" y="1060252"/>
-            <a:ext cx="2590800" cy="549176"/>
+          <p:cNvPr id="9" name="Text 7"/>
+          <p:cNvSpPr/>
+          <p:nvPr/>
+        </p:nvSpPr>
+        <p:spPr>
+          <a:xfrm>
+            <a:off x="476250" y="1415504"/>
+            <a:ext cx="3471773" cy="152400"/>
+          </a:xfrm>
+          <a:prstGeom prst="rect">
+            <a:avLst/>
+          </a:prstGeom>
+          <a:noFill/>
+          <a:ln/>
+        </p:spPr>
+        <p:txBody>
+          <a:bodyPr wrap="square" lIns="0" tIns="0" rIns="0" bIns="0" rtlCol="0" anchor="t"/>
+          <a:lstStyle/>
+          <a:p>
+            <a:pPr algn="l" indent="0" marL="0">
+              <a:buNone/>
+            </a:pPr>
+            <a:r>
+              <a:rPr lang="en-US" sz="1000" b="1" dirty="0">
+                <a:solidFill>
+                  <a:srgbClr val="2B579A"/>
+                </a:solidFill>
+                <a:latin typeface="Malgun Gothic" pitchFamily="34" charset="0"/>
+                <a:ea typeface="Malgun Gothic" pitchFamily="34" charset="-122"/>
+                <a:cs typeface="Malgun Gothic" pitchFamily="34" charset="-120"/>
+              </a:rPr>
+              <a:t>CPU 시간 배분</a:t>
+            </a:r>
+            <a:endParaRPr lang="en-US" sz="1000" dirty="0"/>
+          </a:p>
+        </p:txBody>
+      </p:sp>
+      <p:sp>
+        <p:nvSpPr>
+          <p:cNvPr id="10" name="Text 8"/>
+          <p:cNvSpPr/>
+          <p:nvPr/>
+        </p:nvSpPr>
+        <p:spPr>
+          <a:xfrm>
+            <a:off x="476250" y="1567904"/>
+            <a:ext cx="3471773" cy="142875"/>
+          </a:xfrm>
+          <a:prstGeom prst="rect">
+            <a:avLst/>
+          </a:prstGeom>
+          <a:noFill/>
+          <a:ln/>
+        </p:spPr>
+        <p:txBody>
+          <a:bodyPr wrap="square" lIns="0" tIns="0" rIns="0" bIns="0" rtlCol="0" anchor="t"/>
+          <a:lstStyle/>
+          <a:p>
+            <a:pPr algn="l" indent="0" marL="0">
+              <a:buNone/>
+            </a:pPr>
+            <a:r>
+              <a:rPr lang="en-US" sz="900" dirty="0">
+                <a:solidFill>
+                  <a:srgbClr val="555555"/>
+                </a:solidFill>
+                <a:latin typeface="Malgun Gothic" pitchFamily="34" charset="0"/>
+                <a:ea typeface="Malgun Gothic" pitchFamily="34" charset="-122"/>
+                <a:cs typeface="Malgun Gothic" pitchFamily="34" charset="-120"/>
+              </a:rPr>
+              <a:t>타임 퀀텀 단위로 분할 할당</a:t>
+            </a:r>
+            <a:endParaRPr lang="en-US" sz="900" dirty="0"/>
+          </a:p>
+        </p:txBody>
+      </p:sp>
+      <p:sp>
+        <p:nvSpPr>
+          <p:cNvPr id="11" name="Text 9"/>
+          <p:cNvSpPr/>
+          <p:nvPr/>
+        </p:nvSpPr>
+        <p:spPr>
+          <a:xfrm>
+            <a:off x="304800" y="1907530"/>
+            <a:ext cx="3746599" cy="536377"/>
+          </a:xfrm>
+          <a:prstGeom prst="rect">
+            <a:avLst/>
+          </a:prstGeom>
+          <a:solidFill>
+            <a:srgbClr val="F0F4FA"/>
+          </a:solidFill>
+          <a:ln w="19050">
+            <a:solidFill>
+              <a:srgbClr val="2B579A"/>
+            </a:solidFill>
+          </a:ln>
+        </p:spPr>
+        <p:txBody>
+          <a:bodyPr wrap="square" rtlCol="0" anchor="ctr"/>
+          <a:lstStyle/>
+          <a:p>
+            <a:pPr indent="0" marL="0">
+              <a:buNone/>
+            </a:pPr>
+            <a:endParaRPr lang="en-US" dirty="0"/>
+          </a:p>
+        </p:txBody>
+      </p:sp>
+      <p:sp>
+        <p:nvSpPr>
+          <p:cNvPr id="12" name="Text 10"/>
+          <p:cNvSpPr/>
+          <p:nvPr/>
+        </p:nvSpPr>
+        <p:spPr>
+          <a:xfrm>
+            <a:off x="476250" y="2028081"/>
+            <a:ext cx="3471773" cy="152400"/>
+          </a:xfrm>
+          <a:prstGeom prst="rect">
+            <a:avLst/>
+          </a:prstGeom>
+          <a:noFill/>
+          <a:ln/>
+        </p:spPr>
+        <p:txBody>
+          <a:bodyPr wrap="square" lIns="0" tIns="0" rIns="0" bIns="0" rtlCol="0" anchor="t"/>
+          <a:lstStyle/>
+          <a:p>
+            <a:pPr algn="l" indent="0" marL="0">
+              <a:buNone/>
+            </a:pPr>
+            <a:r>
+              <a:rPr lang="en-US" sz="1000" b="1" dirty="0">
+                <a:solidFill>
+                  <a:srgbClr val="2B579A"/>
+                </a:solidFill>
+                <a:latin typeface="Malgun Gothic" pitchFamily="34" charset="0"/>
+                <a:ea typeface="Malgun Gothic" pitchFamily="34" charset="-122"/>
+                <a:cs typeface="Malgun Gothic" pitchFamily="34" charset="-120"/>
+              </a:rPr>
+              <a:t>선점형 (Preemptive)</a:t>
+            </a:r>
+            <a:endParaRPr lang="en-US" sz="1000" dirty="0"/>
+          </a:p>
+        </p:txBody>
+      </p:sp>
+      <p:sp>
+        <p:nvSpPr>
+          <p:cNvPr id="13" name="Text 11"/>
+          <p:cNvSpPr/>
+          <p:nvPr/>
+        </p:nvSpPr>
+        <p:spPr>
+          <a:xfrm>
+            <a:off x="476250" y="2180481"/>
+            <a:ext cx="3471773" cy="142875"/>
+          </a:xfrm>
+          <a:prstGeom prst="rect">
+            <a:avLst/>
+          </a:prstGeom>
+          <a:noFill/>
+          <a:ln/>
+        </p:spPr>
+        <p:txBody>
+          <a:bodyPr wrap="square" lIns="0" tIns="0" rIns="0" bIns="0" rtlCol="0" anchor="t"/>
+          <a:lstStyle/>
+          <a:p>
+            <a:pPr algn="l" indent="0" marL="0">
+              <a:buNone/>
+            </a:pPr>
+            <a:r>
+              <a:rPr lang="en-US" sz="900" dirty="0">
+                <a:solidFill>
+                  <a:srgbClr val="555555"/>
+                </a:solidFill>
+                <a:latin typeface="Malgun Gothic" pitchFamily="34" charset="0"/>
+                <a:ea typeface="Malgun Gothic" pitchFamily="34" charset="-122"/>
+                <a:cs typeface="Malgun Gothic" pitchFamily="34" charset="-120"/>
+              </a:rPr>
+              <a:t>실행 중 프로세스를 중단 가능</a:t>
+            </a:r>
+            <a:endParaRPr lang="en-US" sz="900" dirty="0"/>
+          </a:p>
+        </p:txBody>
+      </p:sp>
+      <p:sp>
+        <p:nvSpPr>
+          <p:cNvPr id="14" name="Text 12"/>
+          <p:cNvSpPr/>
+          <p:nvPr/>
+        </p:nvSpPr>
+        <p:spPr>
+          <a:xfrm>
+            <a:off x="304800" y="2520107"/>
+            <a:ext cx="3746599" cy="526852"/>
+          </a:xfrm>
+          <a:prstGeom prst="rect">
+            <a:avLst/>
+          </a:prstGeom>
+          <a:solidFill>
+            <a:srgbClr val="F0F4FA"/>
+          </a:solidFill>
+          <a:ln w="19050">
+            <a:solidFill>
+              <a:srgbClr val="2B579A"/>
+            </a:solidFill>
+          </a:ln>
+        </p:spPr>
+        <p:txBody>
+          <a:bodyPr wrap="square" rtlCol="0" anchor="ctr"/>
+          <a:lstStyle/>
+          <a:p>
+            <a:pPr indent="0" marL="0">
+              <a:buNone/>
+            </a:pPr>
+            <a:endParaRPr lang="en-US" dirty="0"/>
+          </a:p>
+        </p:txBody>
+      </p:sp>
+      <p:sp>
+        <p:nvSpPr>
+          <p:cNvPr id="15" name="Text 13"/>
+          <p:cNvSpPr/>
+          <p:nvPr/>
+        </p:nvSpPr>
+        <p:spPr>
+          <a:xfrm>
+            <a:off x="476250" y="2640657"/>
+            <a:ext cx="3471773" cy="152400"/>
+          </a:xfrm>
+          <a:prstGeom prst="rect">
+            <a:avLst/>
+          </a:prstGeom>
+          <a:noFill/>
+          <a:ln/>
+        </p:spPr>
+        <p:txBody>
+          <a:bodyPr wrap="square" lIns="0" tIns="0" rIns="0" bIns="0" rtlCol="0" anchor="t"/>
+          <a:lstStyle/>
+          <a:p>
+            <a:pPr algn="l" indent="0" marL="0">
+              <a:buNone/>
+            </a:pPr>
+            <a:r>
+              <a:rPr lang="en-US" sz="1000" b="1" dirty="0">
+                <a:solidFill>
+                  <a:srgbClr val="2B579A"/>
+                </a:solidFill>
+                <a:latin typeface="Malgun Gothic" pitchFamily="34" charset="0"/>
+                <a:ea typeface="Malgun Gothic" pitchFamily="34" charset="-122"/>
+                <a:cs typeface="Malgun Gothic" pitchFamily="34" charset="-120"/>
+              </a:rPr>
+              <a:t>스케줄링 알고리즘</a:t>
+            </a:r>
+            <a:endParaRPr lang="en-US" sz="1000" dirty="0"/>
+          </a:p>
+        </p:txBody>
+      </p:sp>
+      <p:sp>
+        <p:nvSpPr>
+          <p:cNvPr id="16" name="Text 14"/>
+          <p:cNvSpPr/>
+          <p:nvPr/>
+        </p:nvSpPr>
+        <p:spPr>
+          <a:xfrm>
+            <a:off x="476250" y="2793057"/>
+            <a:ext cx="3471773" cy="133350"/>
+          </a:xfrm>
+          <a:prstGeom prst="rect">
+            <a:avLst/>
+          </a:prstGeom>
+          <a:noFill/>
+          <a:ln/>
+        </p:spPr>
+        <p:txBody>
+          <a:bodyPr wrap="square" lIns="0" tIns="0" rIns="0" bIns="0" rtlCol="0" anchor="t"/>
+          <a:lstStyle/>
+          <a:p>
+            <a:pPr algn="l" indent="0" marL="0">
+              <a:buNone/>
+            </a:pPr>
+            <a:r>
+              <a:rPr lang="en-US" sz="900" dirty="0">
+                <a:solidFill>
+                  <a:srgbClr val="555555"/>
+                </a:solidFill>
+                <a:latin typeface="Malgun Gothic" pitchFamily="34" charset="0"/>
+                <a:ea typeface="Malgun Gothic" pitchFamily="34" charset="-122"/>
+                <a:cs typeface="Malgun Gothic" pitchFamily="34" charset="-120"/>
+              </a:rPr>
+              <a:t>FCFS, Priority, MLFQ, WFQ</a:t>
+            </a:r>
+            <a:endParaRPr lang="en-US" sz="900" dirty="0"/>
+          </a:p>
+        </p:txBody>
+      </p:sp>
+      <p:sp>
+        <p:nvSpPr>
+          <p:cNvPr id="17" name="Text 15"/>
+          <p:cNvSpPr/>
+          <p:nvPr/>
+        </p:nvSpPr>
+        <p:spPr>
+          <a:xfrm>
+            <a:off x="4470350" y="1282898"/>
+            <a:ext cx="207365" cy="247650"/>
+          </a:xfrm>
+          <a:prstGeom prst="rect">
+            <a:avLst/>
+          </a:prstGeom>
+          <a:noFill/>
+          <a:ln/>
+        </p:spPr>
+        <p:txBody>
+          <a:bodyPr wrap="square" lIns="0" tIns="0" rIns="0" bIns="0" rtlCol="0" anchor="t"/>
+          <a:lstStyle/>
+          <a:p>
+            <a:pPr algn="l" indent="0" marL="0">
+              <a:buNone/>
+            </a:pPr>
+            <a:r>
+              <a:rPr lang="en-US" sz="1600" dirty="0">
+                <a:solidFill>
+                  <a:srgbClr val="888888"/>
+                </a:solidFill>
+                <a:latin typeface="Malgun Gothic" pitchFamily="34" charset="0"/>
+                <a:ea typeface="Malgun Gothic" pitchFamily="34" charset="-122"/>
+                <a:cs typeface="Malgun Gothic" pitchFamily="34" charset="-120"/>
+              </a:rPr>
+              <a:t>→</a:t>
+            </a:r>
+            <a:endParaRPr lang="en-US" sz="1600" dirty="0"/>
+          </a:p>
+        </p:txBody>
+      </p:sp>
+      <p:sp>
+        <p:nvSpPr>
+          <p:cNvPr id="18" name="Text 16"/>
+          <p:cNvSpPr/>
+          <p:nvPr/>
+        </p:nvSpPr>
+        <p:spPr>
+          <a:xfrm>
+            <a:off x="4470350" y="2019449"/>
+            <a:ext cx="207365" cy="247650"/>
+          </a:xfrm>
+          <a:prstGeom prst="rect">
+            <a:avLst/>
+          </a:prstGeom>
+          <a:noFill/>
+          <a:ln/>
+        </p:spPr>
+        <p:txBody>
+          <a:bodyPr wrap="square" lIns="0" tIns="0" rIns="0" bIns="0" rtlCol="0" anchor="t"/>
+          <a:lstStyle/>
+          <a:p>
+            <a:pPr algn="l" indent="0" marL="0">
+              <a:buNone/>
+            </a:pPr>
+            <a:r>
+              <a:rPr lang="en-US" sz="1600" dirty="0">
+                <a:solidFill>
+                  <a:srgbClr val="888888"/>
+                </a:solidFill>
+                <a:latin typeface="Malgun Gothic" pitchFamily="34" charset="0"/>
+                <a:ea typeface="Malgun Gothic" pitchFamily="34" charset="-122"/>
+                <a:cs typeface="Malgun Gothic" pitchFamily="34" charset="-120"/>
+              </a:rPr>
+              <a:t>→</a:t>
+            </a:r>
+            <a:endParaRPr lang="en-US" sz="1600" dirty="0"/>
+          </a:p>
+        </p:txBody>
+      </p:sp>
+      <p:sp>
+        <p:nvSpPr>
+          <p:cNvPr id="19" name="Text 17"/>
+          <p:cNvSpPr/>
+          <p:nvPr/>
+        </p:nvSpPr>
+        <p:spPr>
+          <a:xfrm>
+            <a:off x="4380012" y="2755999"/>
+            <a:ext cx="391504" cy="247650"/>
+          </a:xfrm>
+          <a:prstGeom prst="rect">
+            <a:avLst/>
+          </a:prstGeom>
+          <a:noFill/>
+          <a:ln/>
+        </p:spPr>
+        <p:txBody>
+          <a:bodyPr wrap="square" lIns="0" tIns="0" rIns="0" bIns="0" rtlCol="0" anchor="t"/>
+          <a:lstStyle/>
+          <a:p>
+            <a:pPr algn="l" indent="0" marL="0">
+              <a:buNone/>
+            </a:pPr>
+            <a:r>
+              <a:rPr lang="en-US" sz="1600" b="1" dirty="0">
+                <a:solidFill>
+                  <a:srgbClr val="C0392B"/>
+                </a:solidFill>
+                <a:latin typeface="Malgun Gothic" pitchFamily="34" charset="0"/>
+                <a:ea typeface="Malgun Gothic" pitchFamily="34" charset="-122"/>
+                <a:cs typeface="Malgun Gothic" pitchFamily="34" charset="-120"/>
+              </a:rPr>
+              <a:t>→ ?</a:t>
+            </a:r>
+            <a:endParaRPr lang="en-US" sz="1600" dirty="0"/>
+          </a:p>
+        </p:txBody>
+      </p:sp>
+      <p:sp>
+        <p:nvSpPr>
+          <p:cNvPr id="20" name="Text 18"/>
+          <p:cNvSpPr/>
+          <p:nvPr/>
+        </p:nvSpPr>
+        <p:spPr>
+          <a:xfrm>
+            <a:off x="4470350" y="3492550"/>
+            <a:ext cx="207365" cy="247650"/>
+          </a:xfrm>
+          <a:prstGeom prst="rect">
+            <a:avLst/>
+          </a:prstGeom>
+          <a:noFill/>
+          <a:ln/>
+        </p:spPr>
+        <p:txBody>
+          <a:bodyPr wrap="square" lIns="0" tIns="0" rIns="0" bIns="0" rtlCol="0" anchor="t"/>
+          <a:lstStyle/>
+          <a:p>
+            <a:pPr algn="l" indent="0" marL="0">
+              <a:buNone/>
+            </a:pPr>
+            <a:r>
+              <a:rPr lang="en-US" sz="1600" dirty="0">
+                <a:solidFill>
+                  <a:srgbClr val="888888"/>
+                </a:solidFill>
+                <a:latin typeface="Malgun Gothic" pitchFamily="34" charset="0"/>
+                <a:ea typeface="Malgun Gothic" pitchFamily="34" charset="-122"/>
+                <a:cs typeface="Malgun Gothic" pitchFamily="34" charset="-120"/>
+              </a:rPr>
+              <a:t>→</a:t>
+            </a:r>
+            <a:endParaRPr lang="en-US" sz="1600" dirty="0"/>
+          </a:p>
+        </p:txBody>
+      </p:sp>
+      <p:sp>
+        <p:nvSpPr>
+          <p:cNvPr id="21" name="Text 19"/>
+          <p:cNvSpPr/>
+          <p:nvPr/>
+        </p:nvSpPr>
+        <p:spPr>
+          <a:xfrm>
+            <a:off x="5092601" y="203150"/>
+            <a:ext cx="3746599" cy="403027"/>
           </a:xfrm>
           <a:prstGeom prst="rect">
             <a:avLst/>
@@ -3426,30 +3822,53 @@
       </p:sp>
       <p:sp>
         <p:nvSpPr>
-          <p:cNvPr id="9" name="Text 7"/>
-          <p:cNvSpPr/>
-          <p:nvPr/>
-        </p:nvSpPr>
-        <p:spPr>
-          <a:xfrm>
-            <a:off x="552450" y="1187202"/>
-            <a:ext cx="2331720" cy="161925"/>
-          </a:xfrm>
-          <a:prstGeom prst="rect">
-            <a:avLst/>
-          </a:prstGeom>
-          <a:noFill/>
-          <a:ln/>
-        </p:spPr>
-        <p:txBody>
-          <a:bodyPr wrap="square" lIns="0" tIns="0" rIns="0" bIns="0" rtlCol="0" anchor="t"/>
-          <a:lstStyle/>
-          <a:p>
-            <a:pPr algn="l" indent="0" marL="0">
-              <a:buNone/>
-            </a:pPr>
-            <a:r>
-              <a:rPr lang="en-US" sz="1100" b="1" dirty="0">
+          <p:cNvPr id="22" name="Shape 20"/>
+          <p:cNvSpPr/>
+          <p:nvPr/>
+        </p:nvSpPr>
+        <p:spPr>
+          <a:xfrm>
+            <a:off x="5092601" y="596652"/>
+            <a:ext cx="3746599" cy="0"/>
+          </a:xfrm>
+          <a:prstGeom prst="line">
+            <a:avLst/>
+          </a:prstGeom>
+          <a:noFill/>
+          <a:ln w="19050">
+            <a:solidFill>
+              <a:srgbClr val="4472C4"/>
+            </a:solidFill>
+            <a:prstDash val="solid"/>
+          </a:ln>
+        </p:spPr>
+      </p:sp>
+      <p:sp>
+        <p:nvSpPr>
+          <p:cNvPr id="23" name="Text 21"/>
+          <p:cNvSpPr/>
+          <p:nvPr/>
+        </p:nvSpPr>
+        <p:spPr>
+          <a:xfrm>
+            <a:off x="5184624" y="304651"/>
+            <a:ext cx="3562552" cy="180975"/>
+          </a:xfrm>
+          <a:prstGeom prst="rect">
+            <a:avLst/>
+          </a:prstGeom>
+          <a:noFill/>
+          <a:ln/>
+        </p:spPr>
+        <p:txBody>
+          <a:bodyPr wrap="square" lIns="0" tIns="0" rIns="0" bIns="0" rtlCol="0" anchor="t"/>
+          <a:lstStyle/>
+          <a:p>
+            <a:pPr algn="ctr" indent="0" marL="0">
+              <a:buNone/>
+            </a:pPr>
+            <a:r>
+              <a:rPr lang="en-US" sz="1200" b="1" dirty="0">
                 <a:solidFill>
                   <a:srgbClr val="FFFFFF"/>
                 </a:solidFill>
@@ -3457,124 +3876,7 @@
                 <a:ea typeface="Malgun Gothic" pitchFamily="34" charset="-122"/>
                 <a:cs typeface="Malgun Gothic" pitchFamily="34" charset="-120"/>
               </a:rPr>
-              <a:t>API 계층</a:t>
-            </a:r>
-            <a:endParaRPr lang="en-US" sz="1100" dirty="0"/>
-          </a:p>
-        </p:txBody>
-      </p:sp>
-      <p:sp>
-        <p:nvSpPr>
-          <p:cNvPr id="10" name="Text 8"/>
-          <p:cNvSpPr/>
-          <p:nvPr/>
-        </p:nvSpPr>
-        <p:spPr>
-          <a:xfrm>
-            <a:off x="552450" y="1349127"/>
-            <a:ext cx="2331720" cy="133350"/>
-          </a:xfrm>
-          <a:prstGeom prst="rect">
-            <a:avLst/>
-          </a:prstGeom>
-          <a:noFill/>
-          <a:ln/>
-        </p:spPr>
-        <p:txBody>
-          <a:bodyPr wrap="square" lIns="0" tIns="0" rIns="0" bIns="0" rtlCol="0" anchor="t"/>
-          <a:lstStyle/>
-          <a:p>
-            <a:pPr algn="l" indent="0" marL="0">
-              <a:buNone/>
-            </a:pPr>
-            <a:r>
-              <a:rPr lang="en-US" sz="900" dirty="0">
-                <a:solidFill>
-                  <a:srgbClr val="CCCCCC"/>
-                </a:solidFill>
-                <a:latin typeface="Malgun Gothic" pitchFamily="34" charset="0"/>
-                <a:ea typeface="Malgun Gothic" pitchFamily="34" charset="-122"/>
-                <a:cs typeface="Malgun Gothic" pitchFamily="34" charset="-120"/>
-              </a:rPr>
-              <a:t>(Express.js)</a:t>
-            </a:r>
-            <a:endParaRPr lang="en-US" sz="900" dirty="0"/>
-          </a:p>
-        </p:txBody>
-      </p:sp>
-      <p:sp>
-        <p:nvSpPr>
-          <p:cNvPr id="11" name="Text 9"/>
-          <p:cNvSpPr/>
-          <p:nvPr/>
-        </p:nvSpPr>
-        <p:spPr>
-          <a:xfrm>
-            <a:off x="3194000" y="1258639"/>
-            <a:ext cx="2596316" cy="152400"/>
-          </a:xfrm>
-          <a:prstGeom prst="rect">
-            <a:avLst/>
-          </a:prstGeom>
-          <a:noFill/>
-          <a:ln/>
-        </p:spPr>
-        <p:txBody>
-          <a:bodyPr wrap="square" lIns="0" tIns="0" rIns="0" bIns="0" rtlCol="0" anchor="t"/>
-          <a:lstStyle/>
-          <a:p>
-            <a:pPr algn="l" indent="0" marL="0">
-              <a:buNone/>
-            </a:pPr>
-            <a:r>
-              <a:rPr lang="en-US" sz="1000" dirty="0">
-                <a:solidFill>
-                  <a:srgbClr val="333333"/>
-                </a:solidFill>
-                <a:latin typeface="Malgun Gothic" pitchFamily="34" charset="0"/>
-                <a:ea typeface="Malgun Gothic" pitchFamily="34" charset="-122"/>
-                <a:cs typeface="Malgun Gothic" pitchFamily="34" charset="-120"/>
-              </a:rPr>
-              <a:t>요청 관리 · 스케줄러 관리 · 통계/공정성 · 상태 확인</a:t>
-            </a:r>
-            <a:endParaRPr lang="en-US" sz="1000" dirty="0"/>
-          </a:p>
-        </p:txBody>
-      </p:sp>
-      <p:sp>
-        <p:nvSpPr>
-          <p:cNvPr id="12" name="Text 10"/>
-          <p:cNvSpPr/>
-          <p:nvPr/>
-        </p:nvSpPr>
-        <p:spPr>
-          <a:xfrm>
-            <a:off x="4497288" y="1704677"/>
-            <a:ext cx="152412" cy="180975"/>
-          </a:xfrm>
-          <a:prstGeom prst="rect">
-            <a:avLst/>
-          </a:prstGeom>
-          <a:noFill/>
-          <a:ln/>
-        </p:spPr>
-        <p:txBody>
-          <a:bodyPr wrap="square" lIns="0" tIns="0" rIns="0" bIns="0" rtlCol="0" anchor="t"/>
-          <a:lstStyle/>
-          <a:p>
-            <a:pPr algn="l" indent="0" marL="0">
-              <a:buNone/>
-            </a:pPr>
-            <a:r>
-              <a:rPr lang="en-US" sz="1200" dirty="0">
-                <a:solidFill>
-                  <a:srgbClr val="888888"/>
-                </a:solidFill>
-                <a:latin typeface="Malgun Gothic" pitchFamily="34" charset="0"/>
-                <a:ea typeface="Malgun Gothic" pitchFamily="34" charset="-122"/>
-                <a:cs typeface="Malgun Gothic" pitchFamily="34" charset="-120"/>
-              </a:rPr>
-              <a:t>▼</a:t>
+              <a:t>LLM API 요청 관리</a:t>
             </a:r>
             <a:endParaRPr lang="en-US" sz="1200" dirty="0"/>
           </a:p>
@@ -3582,19 +3884,21 @@
       </p:sp>
       <p:sp>
         <p:nvSpPr>
-          <p:cNvPr id="13" name="Text 11"/>
-          <p:cNvSpPr/>
-          <p:nvPr/>
-        </p:nvSpPr>
-        <p:spPr>
-          <a:xfrm>
-            <a:off x="381000" y="1961852"/>
-            <a:ext cx="8382000" cy="587276"/>
-          </a:xfrm>
-          <a:prstGeom prst="rect">
-            <a:avLst/>
-          </a:prstGeom>
-          <a:noFill/>
+          <p:cNvPr id="24" name="Text 22"/>
+          <p:cNvSpPr/>
+          <p:nvPr/>
+        </p:nvSpPr>
+        <p:spPr>
+          <a:xfrm>
+            <a:off x="5092601" y="682377"/>
+            <a:ext cx="3746599" cy="536377"/>
+          </a:xfrm>
+          <a:prstGeom prst="rect">
+            <a:avLst/>
+          </a:prstGeom>
+          <a:solidFill>
+            <a:srgbClr val="F0F6FC"/>
+          </a:solidFill>
           <a:ln w="19050">
             <a:solidFill>
               <a:srgbClr val="4472C4"/>
@@ -3614,208 +3918,102 @@
       </p:sp>
       <p:sp>
         <p:nvSpPr>
-          <p:cNvPr id="14" name="Text 12"/>
-          <p:cNvSpPr/>
-          <p:nvPr/>
-        </p:nvSpPr>
-        <p:spPr>
-          <a:xfrm>
-            <a:off x="400050" y="1980902"/>
-            <a:ext cx="2590800" cy="549176"/>
+          <p:cNvPr id="25" name="Text 23"/>
+          <p:cNvSpPr/>
+          <p:nvPr/>
+        </p:nvSpPr>
+        <p:spPr>
+          <a:xfrm>
+            <a:off x="5264051" y="802928"/>
+            <a:ext cx="3471773" cy="152400"/>
+          </a:xfrm>
+          <a:prstGeom prst="rect">
+            <a:avLst/>
+          </a:prstGeom>
+          <a:noFill/>
+          <a:ln/>
+        </p:spPr>
+        <p:txBody>
+          <a:bodyPr wrap="square" lIns="0" tIns="0" rIns="0" bIns="0" rtlCol="0" anchor="t"/>
+          <a:lstStyle/>
+          <a:p>
+            <a:pPr algn="l" indent="0" marL="0">
+              <a:buNone/>
+            </a:pPr>
+            <a:r>
+              <a:rPr lang="en-US" sz="1000" b="1" dirty="0">
+                <a:solidFill>
+                  <a:srgbClr val="4472C4"/>
+                </a:solidFill>
+                <a:latin typeface="Malgun Gothic" pitchFamily="34" charset="0"/>
+                <a:ea typeface="Malgun Gothic" pitchFamily="34" charset="-122"/>
+                <a:cs typeface="Malgun Gothic" pitchFamily="34" charset="-120"/>
+              </a:rPr>
+              <a:t>LLM API 요청</a:t>
+            </a:r>
+            <a:endParaRPr lang="en-US" sz="1000" dirty="0"/>
+          </a:p>
+        </p:txBody>
+      </p:sp>
+      <p:sp>
+        <p:nvSpPr>
+          <p:cNvPr id="26" name="Text 24"/>
+          <p:cNvSpPr/>
+          <p:nvPr/>
+        </p:nvSpPr>
+        <p:spPr>
+          <a:xfrm>
+            <a:off x="5264051" y="955328"/>
+            <a:ext cx="3471773" cy="142875"/>
+          </a:xfrm>
+          <a:prstGeom prst="rect">
+            <a:avLst/>
+          </a:prstGeom>
+          <a:noFill/>
+          <a:ln/>
+        </p:spPr>
+        <p:txBody>
+          <a:bodyPr wrap="square" lIns="0" tIns="0" rIns="0" bIns="0" rtlCol="0" anchor="t"/>
+          <a:lstStyle/>
+          <a:p>
+            <a:pPr algn="l" indent="0" marL="0">
+              <a:buNone/>
+            </a:pPr>
+            <a:r>
+              <a:rPr lang="en-US" sz="900" dirty="0">
+                <a:solidFill>
+                  <a:srgbClr val="555555"/>
+                </a:solidFill>
+                <a:latin typeface="Malgun Gothic" pitchFamily="34" charset="0"/>
+                <a:ea typeface="Malgun Gothic" pitchFamily="34" charset="-122"/>
+                <a:cs typeface="Malgun Gothic" pitchFamily="34" charset="-120"/>
+              </a:rPr>
+              <a:t>LLM 추론 시간을 할당받는 단위</a:t>
+            </a:r>
+            <a:endParaRPr lang="en-US" sz="900" dirty="0"/>
+          </a:p>
+        </p:txBody>
+      </p:sp>
+      <p:sp>
+        <p:nvSpPr>
+          <p:cNvPr id="27" name="Text 25"/>
+          <p:cNvSpPr/>
+          <p:nvPr/>
+        </p:nvSpPr>
+        <p:spPr>
+          <a:xfrm>
+            <a:off x="5092601" y="1294954"/>
+            <a:ext cx="3746599" cy="536377"/>
           </a:xfrm>
           <a:prstGeom prst="rect">
             <a:avLst/>
           </a:prstGeom>
           <a:solidFill>
-            <a:srgbClr val="4472C4"/>
+            <a:srgbClr val="F0F6FC"/>
           </a:solidFill>
-          <a:ln/>
-        </p:spPr>
-        <p:txBody>
-          <a:bodyPr wrap="square" rtlCol="0" anchor="ctr"/>
-          <a:lstStyle/>
-          <a:p>
-            <a:pPr indent="0" marL="0">
-              <a:buNone/>
-            </a:pPr>
-            <a:endParaRPr lang="en-US" dirty="0"/>
-          </a:p>
-        </p:txBody>
-      </p:sp>
-      <p:sp>
-        <p:nvSpPr>
-          <p:cNvPr id="15" name="Text 13"/>
-          <p:cNvSpPr/>
-          <p:nvPr/>
-        </p:nvSpPr>
-        <p:spPr>
-          <a:xfrm>
-            <a:off x="552450" y="2107853"/>
-            <a:ext cx="2331720" cy="152400"/>
-          </a:xfrm>
-          <a:prstGeom prst="rect">
-            <a:avLst/>
-          </a:prstGeom>
-          <a:noFill/>
-          <a:ln/>
-        </p:spPr>
-        <p:txBody>
-          <a:bodyPr wrap="square" lIns="0" tIns="0" rIns="0" bIns="0" rtlCol="0" anchor="t"/>
-          <a:lstStyle/>
-          <a:p>
-            <a:pPr algn="l" indent="0" marL="0">
-              <a:buNone/>
-            </a:pPr>
-            <a:r>
-              <a:rPr lang="en-US" sz="1100" b="1" dirty="0">
-                <a:solidFill>
-                  <a:srgbClr val="FFFFFF"/>
-                </a:solidFill>
-                <a:latin typeface="Malgun Gothic" pitchFamily="34" charset="0"/>
-                <a:ea typeface="Malgun Gothic" pitchFamily="34" charset="-122"/>
-                <a:cs typeface="Malgun Gothic" pitchFamily="34" charset="-120"/>
-              </a:rPr>
-              <a:t>Rate Limiter</a:t>
-            </a:r>
-            <a:endParaRPr lang="en-US" sz="1100" dirty="0"/>
-          </a:p>
-        </p:txBody>
-      </p:sp>
-      <p:sp>
-        <p:nvSpPr>
-          <p:cNvPr id="16" name="Text 14"/>
-          <p:cNvSpPr/>
-          <p:nvPr/>
-        </p:nvSpPr>
-        <p:spPr>
-          <a:xfrm>
-            <a:off x="552450" y="2260253"/>
-            <a:ext cx="2331720" cy="142875"/>
-          </a:xfrm>
-          <a:prstGeom prst="rect">
-            <a:avLst/>
-          </a:prstGeom>
-          <a:noFill/>
-          <a:ln/>
-        </p:spPr>
-        <p:txBody>
-          <a:bodyPr wrap="square" lIns="0" tIns="0" rIns="0" bIns="0" rtlCol="0" anchor="t"/>
-          <a:lstStyle/>
-          <a:p>
-            <a:pPr algn="l" indent="0" marL="0">
-              <a:buNone/>
-            </a:pPr>
-            <a:r>
-              <a:rPr lang="en-US" sz="900" dirty="0">
-                <a:solidFill>
-                  <a:srgbClr val="CCCCCC"/>
-                </a:solidFill>
-                <a:latin typeface="Malgun Gothic" pitchFamily="34" charset="0"/>
-                <a:ea typeface="Malgun Gothic" pitchFamily="34" charset="-122"/>
-                <a:cs typeface="Malgun Gothic" pitchFamily="34" charset="-120"/>
-              </a:rPr>
-              <a:t>(전처리 단계)</a:t>
-            </a:r>
-            <a:endParaRPr lang="en-US" sz="900" dirty="0"/>
-          </a:p>
-        </p:txBody>
-      </p:sp>
-      <p:sp>
-        <p:nvSpPr>
-          <p:cNvPr id="17" name="Text 15"/>
-          <p:cNvSpPr/>
-          <p:nvPr/>
-        </p:nvSpPr>
-        <p:spPr>
-          <a:xfrm>
-            <a:off x="3194000" y="2179290"/>
-            <a:ext cx="3008465" cy="152400"/>
-          </a:xfrm>
-          <a:prstGeom prst="rect">
-            <a:avLst/>
-          </a:prstGeom>
-          <a:noFill/>
-          <a:ln/>
-        </p:spPr>
-        <p:txBody>
-          <a:bodyPr wrap="square" lIns="0" tIns="0" rIns="0" bIns="0" rtlCol="0" anchor="t"/>
-          <a:lstStyle/>
-          <a:p>
-            <a:pPr algn="l" indent="0" marL="0">
-              <a:buNone/>
-            </a:pPr>
-            <a:r>
-              <a:rPr lang="en-US" sz="1000" dirty="0">
-                <a:solidFill>
-                  <a:srgbClr val="333333"/>
-                </a:solidFill>
-                <a:latin typeface="Malgun Gothic" pitchFamily="34" charset="0"/>
-                <a:ea typeface="Malgun Gothic" pitchFamily="34" charset="-122"/>
-                <a:cs typeface="Malgun Gothic" pitchFamily="34" charset="-120"/>
-              </a:rPr>
-              <a:t>토큰 버킷 알고리즘 · 테넌트별 요청 빈도 제한 · 과부하 방지</a:t>
-            </a:r>
-            <a:endParaRPr lang="en-US" sz="1000" dirty="0"/>
-          </a:p>
-        </p:txBody>
-      </p:sp>
-      <p:sp>
-        <p:nvSpPr>
-          <p:cNvPr id="18" name="Text 16"/>
-          <p:cNvSpPr/>
-          <p:nvPr/>
-        </p:nvSpPr>
-        <p:spPr>
-          <a:xfrm>
-            <a:off x="4497288" y="2625328"/>
-            <a:ext cx="152412" cy="180975"/>
-          </a:xfrm>
-          <a:prstGeom prst="rect">
-            <a:avLst/>
-          </a:prstGeom>
-          <a:noFill/>
-          <a:ln/>
-        </p:spPr>
-        <p:txBody>
-          <a:bodyPr wrap="square" lIns="0" tIns="0" rIns="0" bIns="0" rtlCol="0" anchor="t"/>
-          <a:lstStyle/>
-          <a:p>
-            <a:pPr algn="l" indent="0" marL="0">
-              <a:buNone/>
-            </a:pPr>
-            <a:r>
-              <a:rPr lang="en-US" sz="1200" dirty="0">
-                <a:solidFill>
-                  <a:srgbClr val="888888"/>
-                </a:solidFill>
-                <a:latin typeface="Malgun Gothic" pitchFamily="34" charset="0"/>
-                <a:ea typeface="Malgun Gothic" pitchFamily="34" charset="-122"/>
-                <a:cs typeface="Malgun Gothic" pitchFamily="34" charset="-120"/>
-              </a:rPr>
-              <a:t>▼</a:t>
-            </a:r>
-            <a:endParaRPr lang="en-US" sz="1200" dirty="0"/>
-          </a:p>
-        </p:txBody>
-      </p:sp>
-      <p:sp>
-        <p:nvSpPr>
-          <p:cNvPr id="19" name="Text 17"/>
-          <p:cNvSpPr/>
-          <p:nvPr/>
-        </p:nvSpPr>
-        <p:spPr>
-          <a:xfrm>
-            <a:off x="381000" y="2882503"/>
-            <a:ext cx="8382000" cy="698302"/>
-          </a:xfrm>
-          <a:prstGeom prst="rect">
-            <a:avLst/>
-          </a:prstGeom>
-          <a:noFill/>
           <a:ln w="19050">
             <a:solidFill>
-              <a:srgbClr val="2B579A"/>
+              <a:srgbClr val="4472C4"/>
             </a:solidFill>
           </a:ln>
         </p:spPr>
@@ -3832,130 +4030,102 @@
       </p:sp>
       <p:sp>
         <p:nvSpPr>
-          <p:cNvPr id="20" name="Text 18"/>
-          <p:cNvSpPr/>
-          <p:nvPr/>
-        </p:nvSpPr>
-        <p:spPr>
-          <a:xfrm>
-            <a:off x="400050" y="2952304"/>
-            <a:ext cx="2590800" cy="558701"/>
+          <p:cNvPr id="28" name="Text 26"/>
+          <p:cNvSpPr/>
+          <p:nvPr/>
+        </p:nvSpPr>
+        <p:spPr>
+          <a:xfrm>
+            <a:off x="5264051" y="1415504"/>
+            <a:ext cx="3471773" cy="152400"/>
+          </a:xfrm>
+          <a:prstGeom prst="rect">
+            <a:avLst/>
+          </a:prstGeom>
+          <a:noFill/>
+          <a:ln/>
+        </p:spPr>
+        <p:txBody>
+          <a:bodyPr wrap="square" lIns="0" tIns="0" rIns="0" bIns="0" rtlCol="0" anchor="t"/>
+          <a:lstStyle/>
+          <a:p>
+            <a:pPr algn="l" indent="0" marL="0">
+              <a:buNone/>
+            </a:pPr>
+            <a:r>
+              <a:rPr lang="en-US" sz="1000" b="1" dirty="0">
+                <a:solidFill>
+                  <a:srgbClr val="4472C4"/>
+                </a:solidFill>
+                <a:latin typeface="Malgun Gothic" pitchFamily="34" charset="0"/>
+                <a:ea typeface="Malgun Gothic" pitchFamily="34" charset="-122"/>
+                <a:cs typeface="Malgun Gothic" pitchFamily="34" charset="-120"/>
+              </a:rPr>
+              <a:t>LLM 추론 시간 배분</a:t>
+            </a:r>
+            <a:endParaRPr lang="en-US" sz="1000" dirty="0"/>
+          </a:p>
+        </p:txBody>
+      </p:sp>
+      <p:sp>
+        <p:nvSpPr>
+          <p:cNvPr id="29" name="Text 27"/>
+          <p:cNvSpPr/>
+          <p:nvPr/>
+        </p:nvSpPr>
+        <p:spPr>
+          <a:xfrm>
+            <a:off x="5264051" y="1567904"/>
+            <a:ext cx="3471773" cy="142875"/>
+          </a:xfrm>
+          <a:prstGeom prst="rect">
+            <a:avLst/>
+          </a:prstGeom>
+          <a:noFill/>
+          <a:ln/>
+        </p:spPr>
+        <p:txBody>
+          <a:bodyPr wrap="square" lIns="0" tIns="0" rIns="0" bIns="0" rtlCol="0" anchor="t"/>
+          <a:lstStyle/>
+          <a:p>
+            <a:pPr algn="l" indent="0" marL="0">
+              <a:buNone/>
+            </a:pPr>
+            <a:r>
+              <a:rPr lang="en-US" sz="900" dirty="0">
+                <a:solidFill>
+                  <a:srgbClr val="555555"/>
+                </a:solidFill>
+                <a:latin typeface="Malgun Gothic" pitchFamily="34" charset="0"/>
+                <a:ea typeface="Malgun Gothic" pitchFamily="34" charset="-122"/>
+                <a:cs typeface="Malgun Gothic" pitchFamily="34" charset="-120"/>
+              </a:rPr>
+              <a:t>테넌트 등급에 따른 자원 배분</a:t>
+            </a:r>
+            <a:endParaRPr lang="en-US" sz="900" dirty="0"/>
+          </a:p>
+        </p:txBody>
+      </p:sp>
+      <p:sp>
+        <p:nvSpPr>
+          <p:cNvPr id="30" name="Text 28"/>
+          <p:cNvSpPr/>
+          <p:nvPr/>
+        </p:nvSpPr>
+        <p:spPr>
+          <a:xfrm>
+            <a:off x="5092601" y="1907530"/>
+            <a:ext cx="3746599" cy="536377"/>
           </a:xfrm>
           <a:prstGeom prst="rect">
             <a:avLst/>
           </a:prstGeom>
           <a:solidFill>
-            <a:srgbClr val="2B579A"/>
+            <a:srgbClr val="FDF2F2"/>
           </a:solidFill>
-          <a:ln/>
-        </p:spPr>
-        <p:txBody>
-          <a:bodyPr wrap="square" rtlCol="0" anchor="ctr"/>
-          <a:lstStyle/>
-          <a:p>
-            <a:pPr indent="0" marL="0">
-              <a:buNone/>
-            </a:pPr>
-            <a:endParaRPr lang="en-US" dirty="0"/>
-          </a:p>
-        </p:txBody>
-      </p:sp>
-      <p:sp>
-        <p:nvSpPr>
-          <p:cNvPr id="21" name="Text 19"/>
-          <p:cNvSpPr/>
-          <p:nvPr/>
-        </p:nvSpPr>
-        <p:spPr>
-          <a:xfrm>
-            <a:off x="552450" y="3079254"/>
-            <a:ext cx="2331720" cy="161925"/>
-          </a:xfrm>
-          <a:prstGeom prst="rect">
-            <a:avLst/>
-          </a:prstGeom>
-          <a:noFill/>
-          <a:ln/>
-        </p:spPr>
-        <p:txBody>
-          <a:bodyPr wrap="square" lIns="0" tIns="0" rIns="0" bIns="0" rtlCol="0" anchor="t"/>
-          <a:lstStyle/>
-          <a:p>
-            <a:pPr algn="l" indent="0" marL="0">
-              <a:buNone/>
-            </a:pPr>
-            <a:r>
-              <a:rPr lang="en-US" sz="1100" b="1" dirty="0">
-                <a:solidFill>
-                  <a:srgbClr val="FFFFFF"/>
-                </a:solidFill>
-                <a:latin typeface="Malgun Gothic" pitchFamily="34" charset="0"/>
-                <a:ea typeface="Malgun Gothic" pitchFamily="34" charset="-122"/>
-                <a:cs typeface="Malgun Gothic" pitchFamily="34" charset="-120"/>
-              </a:rPr>
-              <a:t>스케줄러 엔진</a:t>
-            </a:r>
-            <a:endParaRPr lang="en-US" sz="1100" dirty="0"/>
-          </a:p>
-        </p:txBody>
-      </p:sp>
-      <p:sp>
-        <p:nvSpPr>
-          <p:cNvPr id="22" name="Text 20"/>
-          <p:cNvSpPr/>
-          <p:nvPr/>
-        </p:nvSpPr>
-        <p:spPr>
-          <a:xfrm>
-            <a:off x="552450" y="3241179"/>
-            <a:ext cx="2331720" cy="142875"/>
-          </a:xfrm>
-          <a:prstGeom prst="rect">
-            <a:avLst/>
-          </a:prstGeom>
-          <a:noFill/>
-          <a:ln/>
-        </p:spPr>
-        <p:txBody>
-          <a:bodyPr wrap="square" lIns="0" tIns="0" rIns="0" bIns="0" rtlCol="0" anchor="t"/>
-          <a:lstStyle/>
-          <a:p>
-            <a:pPr algn="l" indent="0" marL="0">
-              <a:buNone/>
-            </a:pPr>
-            <a:r>
-              <a:rPr lang="en-US" sz="900" dirty="0">
-                <a:solidFill>
-                  <a:srgbClr val="CCCCCC"/>
-                </a:solidFill>
-                <a:latin typeface="Malgun Gothic" pitchFamily="34" charset="0"/>
-                <a:ea typeface="Malgun Gothic" pitchFamily="34" charset="-122"/>
-                <a:cs typeface="Malgun Gothic" pitchFamily="34" charset="-120"/>
-              </a:rPr>
-              <a:t>(런타임 교체 가능)</a:t>
-            </a:r>
-            <a:endParaRPr lang="en-US" sz="900" dirty="0"/>
-          </a:p>
-        </p:txBody>
-      </p:sp>
-      <p:sp>
-        <p:nvSpPr>
-          <p:cNvPr id="23" name="Text 21"/>
-          <p:cNvSpPr/>
-          <p:nvPr/>
-        </p:nvSpPr>
-        <p:spPr>
-          <a:xfrm>
-            <a:off x="3194000" y="3003054"/>
-            <a:ext cx="604540" cy="238125"/>
-          </a:xfrm>
-          <a:prstGeom prst="rect">
-            <a:avLst/>
-          </a:prstGeom>
-          <a:noFill/>
-          <a:ln w="9525">
+          <a:ln w="19050">
             <a:solidFill>
-              <a:srgbClr val="2B579A"/>
+              <a:srgbClr val="C0392B"/>
             </a:solidFill>
           </a:ln>
         </p:spPr>
@@ -3972,14 +4142,14 @@
       </p:sp>
       <p:sp>
         <p:nvSpPr>
-          <p:cNvPr id="24" name="Text 22"/>
-          <p:cNvSpPr/>
-          <p:nvPr/>
-        </p:nvSpPr>
-        <p:spPr>
-          <a:xfrm>
-            <a:off x="3330476" y="3050679"/>
-            <a:ext cx="338221" cy="142875"/>
+          <p:cNvPr id="31" name="Text 29"/>
+          <p:cNvSpPr/>
+          <p:nvPr/>
+        </p:nvSpPr>
+        <p:spPr>
+          <a:xfrm>
+            <a:off x="5264051" y="2028081"/>
+            <a:ext cx="3471773" cy="152400"/>
           </a:xfrm>
           <a:prstGeom prst="rect">
             <a:avLst/>
@@ -3997,13 +4167,13 @@
             <a:r>
               <a:rPr lang="en-US" sz="1000" b="1" dirty="0">
                 <a:solidFill>
-                  <a:srgbClr val="333333"/>
-                </a:solidFill>
-                <a:latin typeface="Malgun Gothic" pitchFamily="34" charset="0"/>
-                <a:ea typeface="Malgun Gothic" pitchFamily="34" charset="-122"/>
-                <a:cs typeface="Malgun Gothic" pitchFamily="34" charset="-120"/>
-              </a:rPr>
-              <a:t>FCFS</a:t>
+                  <a:srgbClr val="C0392B"/>
+                </a:solidFill>
+                <a:latin typeface="Malgun Gothic" pitchFamily="34" charset="0"/>
+                <a:ea typeface="Malgun Gothic" pitchFamily="34" charset="-122"/>
+                <a:cs typeface="Malgun Gothic" pitchFamily="34" charset="-120"/>
+              </a:rPr>
+              <a:t>비선점형 (Non-preemptive)</a:t>
             </a:r>
             <a:endParaRPr lang="en-US" sz="1000" dirty="0"/>
           </a:p>
@@ -4011,22 +4181,63 @@
       </p:sp>
       <p:sp>
         <p:nvSpPr>
-          <p:cNvPr id="25" name="Text 23"/>
-          <p:cNvSpPr/>
-          <p:nvPr/>
-        </p:nvSpPr>
-        <p:spPr>
-          <a:xfrm>
-            <a:off x="3874740" y="3003054"/>
-            <a:ext cx="717500" cy="238125"/>
-          </a:xfrm>
-          <a:prstGeom prst="rect">
-            <a:avLst/>
-          </a:prstGeom>
-          <a:noFill/>
-          <a:ln w="9525">
+          <p:cNvPr id="32" name="Text 30"/>
+          <p:cNvSpPr/>
+          <p:nvPr/>
+        </p:nvSpPr>
+        <p:spPr>
+          <a:xfrm>
+            <a:off x="5264051" y="2180481"/>
+            <a:ext cx="3471773" cy="142875"/>
+          </a:xfrm>
+          <a:prstGeom prst="rect">
+            <a:avLst/>
+          </a:prstGeom>
+          <a:noFill/>
+          <a:ln/>
+        </p:spPr>
+        <p:txBody>
+          <a:bodyPr wrap="square" lIns="0" tIns="0" rIns="0" bIns="0" rtlCol="0" anchor="t"/>
+          <a:lstStyle/>
+          <a:p>
+            <a:pPr algn="l" indent="0" marL="0">
+              <a:buNone/>
+            </a:pPr>
+            <a:r>
+              <a:rPr lang="en-US" sz="900" dirty="0">
+                <a:solidFill>
+                  <a:srgbClr val="555555"/>
+                </a:solidFill>
+                <a:latin typeface="Malgun Gothic" pitchFamily="34" charset="0"/>
+                <a:ea typeface="Malgun Gothic" pitchFamily="34" charset="-122"/>
+                <a:cs typeface="Malgun Gothic" pitchFamily="34" charset="-120"/>
+              </a:rPr>
+              <a:t>LLM 추론은 중단 불가</a:t>
+            </a:r>
+            <a:endParaRPr lang="en-US" sz="900" dirty="0"/>
+          </a:p>
+        </p:txBody>
+      </p:sp>
+      <p:sp>
+        <p:nvSpPr>
+          <p:cNvPr id="33" name="Text 31"/>
+          <p:cNvSpPr/>
+          <p:nvPr/>
+        </p:nvSpPr>
+        <p:spPr>
+          <a:xfrm>
+            <a:off x="5092601" y="2520107"/>
+            <a:ext cx="3746599" cy="536377"/>
+          </a:xfrm>
+          <a:prstGeom prst="rect">
+            <a:avLst/>
+          </a:prstGeom>
+          <a:solidFill>
+            <a:srgbClr val="F0F6FC"/>
+          </a:solidFill>
+          <a:ln w="19050">
             <a:solidFill>
-              <a:srgbClr val="2B579A"/>
+              <a:srgbClr val="4472C4"/>
             </a:solidFill>
           </a:ln>
         </p:spPr>
@@ -4043,14 +4254,14 @@
       </p:sp>
       <p:sp>
         <p:nvSpPr>
-          <p:cNvPr id="26" name="Text 24"/>
-          <p:cNvSpPr/>
-          <p:nvPr/>
-        </p:nvSpPr>
-        <p:spPr>
-          <a:xfrm>
-            <a:off x="4011216" y="3050679"/>
-            <a:ext cx="453441" cy="142875"/>
+          <p:cNvPr id="34" name="Text 32"/>
+          <p:cNvSpPr/>
+          <p:nvPr/>
+        </p:nvSpPr>
+        <p:spPr>
+          <a:xfrm>
+            <a:off x="5264051" y="2640657"/>
+            <a:ext cx="3471773" cy="152400"/>
           </a:xfrm>
           <a:prstGeom prst="rect">
             <a:avLst/>
@@ -4068,13 +4279,13 @@
             <a:r>
               <a:rPr lang="en-US" sz="1000" b="1" dirty="0">
                 <a:solidFill>
-                  <a:srgbClr val="333333"/>
-                </a:solidFill>
-                <a:latin typeface="Malgun Gothic" pitchFamily="34" charset="0"/>
-                <a:ea typeface="Malgun Gothic" pitchFamily="34" charset="-122"/>
-                <a:cs typeface="Malgun Gothic" pitchFamily="34" charset="-120"/>
-              </a:rPr>
-              <a:t>Priority</a:t>
+                  <a:srgbClr val="4472C4"/>
+                </a:solidFill>
+                <a:latin typeface="Malgun Gothic" pitchFamily="34" charset="0"/>
+                <a:ea typeface="Malgun Gothic" pitchFamily="34" charset="-122"/>
+                <a:cs typeface="Malgun Gothic" pitchFamily="34" charset="-120"/>
+              </a:rPr>
+              <a:t>요청 처리 순서 결정</a:t>
             </a:r>
             <a:endParaRPr lang="en-US" sz="1000" dirty="0"/>
           </a:p>
@@ -4082,22 +4293,63 @@
       </p:sp>
       <p:sp>
         <p:nvSpPr>
-          <p:cNvPr id="27" name="Text 25"/>
-          <p:cNvSpPr/>
-          <p:nvPr/>
-        </p:nvSpPr>
-        <p:spPr>
-          <a:xfrm>
-            <a:off x="4668441" y="3003054"/>
-            <a:ext cx="632668" cy="238125"/>
-          </a:xfrm>
-          <a:prstGeom prst="rect">
-            <a:avLst/>
-          </a:prstGeom>
-          <a:noFill/>
-          <a:ln w="9525">
+          <p:cNvPr id="35" name="Text 33"/>
+          <p:cNvSpPr/>
+          <p:nvPr/>
+        </p:nvSpPr>
+        <p:spPr>
+          <a:xfrm>
+            <a:off x="5264051" y="2793057"/>
+            <a:ext cx="3471773" cy="142875"/>
+          </a:xfrm>
+          <a:prstGeom prst="rect">
+            <a:avLst/>
+          </a:prstGeom>
+          <a:noFill/>
+          <a:ln/>
+        </p:spPr>
+        <p:txBody>
+          <a:bodyPr wrap="square" lIns="0" tIns="0" rIns="0" bIns="0" rtlCol="0" anchor="t"/>
+          <a:lstStyle/>
+          <a:p>
+            <a:pPr algn="l" indent="0" marL="0">
+              <a:buNone/>
+            </a:pPr>
+            <a:r>
+              <a:rPr lang="en-US" sz="900" dirty="0">
+                <a:solidFill>
+                  <a:srgbClr val="555555"/>
+                </a:solidFill>
+                <a:latin typeface="Malgun Gothic" pitchFamily="34" charset="0"/>
+                <a:ea typeface="Malgun Gothic" pitchFamily="34" charset="-122"/>
+                <a:cs typeface="Malgun Gothic" pitchFamily="34" charset="-120"/>
+              </a:rPr>
+              <a:t>LLM 환경에 맞게 적응 필요</a:t>
+            </a:r>
+            <a:endParaRPr lang="en-US" sz="900" dirty="0"/>
+          </a:p>
+        </p:txBody>
+      </p:sp>
+      <p:sp>
+        <p:nvSpPr>
+          <p:cNvPr id="36" name="Text 34"/>
+          <p:cNvSpPr/>
+          <p:nvPr/>
+        </p:nvSpPr>
+        <p:spPr>
+          <a:xfrm>
+            <a:off x="304800" y="4464397"/>
+            <a:ext cx="8534400" cy="393502"/>
+          </a:xfrm>
+          <a:prstGeom prst="rect">
+            <a:avLst/>
+          </a:prstGeom>
+          <a:solidFill>
+            <a:srgbClr val="FDF2F2"/>
+          </a:solidFill>
+          <a:ln w="19050">
             <a:solidFill>
-              <a:srgbClr val="2B579A"/>
+              <a:srgbClr val="C0392B"/>
             </a:solidFill>
           </a:ln>
         </p:spPr>
@@ -4114,38 +4366,38 @@
       </p:sp>
       <p:sp>
         <p:nvSpPr>
-          <p:cNvPr id="28" name="Text 26"/>
-          <p:cNvSpPr/>
-          <p:nvPr/>
-        </p:nvSpPr>
-        <p:spPr>
-          <a:xfrm>
-            <a:off x="4804916" y="3050679"/>
-            <a:ext cx="366912" cy="142875"/>
-          </a:xfrm>
-          <a:prstGeom prst="rect">
-            <a:avLst/>
-          </a:prstGeom>
-          <a:noFill/>
-          <a:ln/>
-        </p:spPr>
-        <p:txBody>
-          <a:bodyPr wrap="square" lIns="0" tIns="0" rIns="0" bIns="0" rtlCol="0" anchor="t"/>
-          <a:lstStyle/>
-          <a:p>
-            <a:pPr algn="l" indent="0" marL="0">
+          <p:cNvPr id="37" name="Text 35"/>
+          <p:cNvSpPr/>
+          <p:nvPr/>
+        </p:nvSpPr>
+        <p:spPr>
+          <a:xfrm>
+            <a:off x="446100" y="4584948"/>
+            <a:ext cx="8251799" cy="152400"/>
+          </a:xfrm>
+          <a:prstGeom prst="rect">
+            <a:avLst/>
+          </a:prstGeom>
+          <a:noFill/>
+          <a:ln/>
+        </p:spPr>
+        <p:txBody>
+          <a:bodyPr wrap="square" lIns="0" tIns="0" rIns="0" bIns="0" rtlCol="0" anchor="t"/>
+          <a:lstStyle/>
+          <a:p>
+            <a:pPr algn="ctr" indent="0" marL="0">
               <a:buNone/>
             </a:pPr>
             <a:r>
               <a:rPr lang="en-US" sz="1000" b="1" dirty="0">
                 <a:solidFill>
-                  <a:srgbClr val="333333"/>
-                </a:solidFill>
-                <a:latin typeface="Malgun Gothic" pitchFamily="34" charset="0"/>
-                <a:ea typeface="Malgun Gothic" pitchFamily="34" charset="-122"/>
-                <a:cs typeface="Malgun Gothic" pitchFamily="34" charset="-120"/>
-              </a:rPr>
-              <a:t>MLFQ</a:t>
+                  <a:srgbClr val="C0392B"/>
+                </a:solidFill>
+                <a:latin typeface="Malgun Gothic" pitchFamily="34" charset="0"/>
+                <a:ea typeface="Malgun Gothic" pitchFamily="34" charset="-122"/>
+                <a:cs typeface="Malgun Gothic" pitchFamily="34" charset="-120"/>
+              </a:rPr>
+              <a:t>핵심 연구 과제: 선점형 OS 스케줄링을 비선점형 LLM 환경에 어떻게 적응시킬 것인가?</a:t>
             </a:r>
             <a:endParaRPr lang="en-US" sz="1000" dirty="0"/>
           </a:p>
@@ -4153,521 +4405,14 @@
       </p:sp>
       <p:sp>
         <p:nvSpPr>
-          <p:cNvPr id="29" name="Text 27"/>
-          <p:cNvSpPr/>
-          <p:nvPr/>
-        </p:nvSpPr>
-        <p:spPr>
-          <a:xfrm>
-            <a:off x="5377309" y="3003054"/>
-            <a:ext cx="569119" cy="238125"/>
-          </a:xfrm>
-          <a:prstGeom prst="rect">
-            <a:avLst/>
-          </a:prstGeom>
-          <a:noFill/>
-          <a:ln w="9525">
-            <a:solidFill>
-              <a:srgbClr val="2B579A"/>
-            </a:solidFill>
-          </a:ln>
-        </p:spPr>
-        <p:txBody>
-          <a:bodyPr wrap="square" rtlCol="0" anchor="ctr"/>
-          <a:lstStyle/>
-          <a:p>
-            <a:pPr indent="0" marL="0">
-              <a:buNone/>
-            </a:pPr>
-            <a:endParaRPr lang="en-US" dirty="0"/>
-          </a:p>
-        </p:txBody>
-      </p:sp>
-      <p:sp>
-        <p:nvSpPr>
-          <p:cNvPr id="30" name="Text 28"/>
-          <p:cNvSpPr/>
-          <p:nvPr/>
-        </p:nvSpPr>
-        <p:spPr>
-          <a:xfrm>
-            <a:off x="5513784" y="3050679"/>
-            <a:ext cx="302091" cy="142875"/>
-          </a:xfrm>
-          <a:prstGeom prst="rect">
-            <a:avLst/>
-          </a:prstGeom>
-          <a:noFill/>
-          <a:ln/>
-        </p:spPr>
-        <p:txBody>
-          <a:bodyPr wrap="square" lIns="0" tIns="0" rIns="0" bIns="0" rtlCol="0" anchor="t"/>
-          <a:lstStyle/>
-          <a:p>
-            <a:pPr algn="l" indent="0" marL="0">
-              <a:buNone/>
-            </a:pPr>
-            <a:r>
-              <a:rPr lang="en-US" sz="1000" b="1" dirty="0">
-                <a:solidFill>
-                  <a:srgbClr val="333333"/>
-                </a:solidFill>
-                <a:latin typeface="Malgun Gothic" pitchFamily="34" charset="0"/>
-                <a:ea typeface="Malgun Gothic" pitchFamily="34" charset="-122"/>
-                <a:cs typeface="Malgun Gothic" pitchFamily="34" charset="-120"/>
-              </a:rPr>
-              <a:t>WFQ</a:t>
-            </a:r>
-            <a:endParaRPr lang="en-US" sz="1000" dirty="0"/>
-          </a:p>
-        </p:txBody>
-      </p:sp>
-      <p:sp>
-        <p:nvSpPr>
-          <p:cNvPr id="31" name="Text 29"/>
-          <p:cNvSpPr/>
-          <p:nvPr/>
-        </p:nvSpPr>
-        <p:spPr>
-          <a:xfrm>
-            <a:off x="3194000" y="3317379"/>
-            <a:ext cx="1998661" cy="142875"/>
-          </a:xfrm>
-          <a:prstGeom prst="rect">
-            <a:avLst/>
-          </a:prstGeom>
-          <a:noFill/>
-          <a:ln/>
-        </p:spPr>
-        <p:txBody>
-          <a:bodyPr wrap="square" lIns="0" tIns="0" rIns="0" bIns="0" rtlCol="0" anchor="t"/>
-          <a:lstStyle/>
-          <a:p>
-            <a:pPr algn="l" indent="0" marL="0">
-              <a:buNone/>
-            </a:pPr>
-            <a:r>
-              <a:rPr lang="en-US" sz="900" i="1" dirty="0">
-                <a:solidFill>
-                  <a:srgbClr val="666666"/>
-                </a:solidFill>
-                <a:latin typeface="Malgun Gothic" pitchFamily="34" charset="0"/>
-                <a:ea typeface="Malgun Gothic" pitchFamily="34" charset="-122"/>
-                <a:cs typeface="Malgun Gothic" pitchFamily="34" charset="-120"/>
-              </a:rPr>
-              <a:t>기능: 에이징, 부스트, 두 가지 수준 JFI 측정</a:t>
-            </a:r>
-            <a:endParaRPr lang="en-US" sz="900" dirty="0"/>
-          </a:p>
-        </p:txBody>
-      </p:sp>
-      <p:sp>
-        <p:nvSpPr>
-          <p:cNvPr id="32" name="Text 30"/>
-          <p:cNvSpPr/>
-          <p:nvPr/>
-        </p:nvSpPr>
-        <p:spPr>
-          <a:xfrm>
-            <a:off x="4497288" y="3657005"/>
-            <a:ext cx="152412" cy="180975"/>
-          </a:xfrm>
-          <a:prstGeom prst="rect">
-            <a:avLst/>
-          </a:prstGeom>
-          <a:noFill/>
-          <a:ln/>
-        </p:spPr>
-        <p:txBody>
-          <a:bodyPr wrap="square" lIns="0" tIns="0" rIns="0" bIns="0" rtlCol="0" anchor="t"/>
-          <a:lstStyle/>
-          <a:p>
-            <a:pPr algn="l" indent="0" marL="0">
-              <a:buNone/>
-            </a:pPr>
-            <a:r>
-              <a:rPr lang="en-US" sz="1200" dirty="0">
-                <a:solidFill>
-                  <a:srgbClr val="888888"/>
-                </a:solidFill>
-                <a:latin typeface="Malgun Gothic" pitchFamily="34" charset="0"/>
-                <a:ea typeface="Malgun Gothic" pitchFamily="34" charset="-122"/>
-                <a:cs typeface="Malgun Gothic" pitchFamily="34" charset="-120"/>
-              </a:rPr>
-              <a:t>▼</a:t>
-            </a:r>
-            <a:endParaRPr lang="en-US" sz="1200" dirty="0"/>
-          </a:p>
-        </p:txBody>
-      </p:sp>
-      <p:sp>
-        <p:nvSpPr>
-          <p:cNvPr id="33" name="Text 31"/>
-          <p:cNvSpPr/>
-          <p:nvPr/>
-        </p:nvSpPr>
-        <p:spPr>
-          <a:xfrm>
-            <a:off x="381000" y="3914180"/>
-            <a:ext cx="5857429" cy="596801"/>
-          </a:xfrm>
-          <a:prstGeom prst="rect">
-            <a:avLst/>
-          </a:prstGeom>
-          <a:noFill/>
-          <a:ln w="19050">
-            <a:solidFill>
-              <a:srgbClr val="2B579A"/>
-            </a:solidFill>
-          </a:ln>
-        </p:spPr>
-        <p:txBody>
-          <a:bodyPr wrap="square" rtlCol="0" anchor="ctr"/>
-          <a:lstStyle/>
-          <a:p>
-            <a:pPr indent="0" marL="0">
-              <a:buNone/>
-            </a:pPr>
-            <a:endParaRPr lang="en-US" dirty="0"/>
-          </a:p>
-        </p:txBody>
-      </p:sp>
-      <p:sp>
-        <p:nvSpPr>
-          <p:cNvPr id="34" name="Text 32"/>
-          <p:cNvSpPr/>
-          <p:nvPr/>
-        </p:nvSpPr>
-        <p:spPr>
-          <a:xfrm>
-            <a:off x="400050" y="4004667"/>
-            <a:ext cx="2590800" cy="415826"/>
-          </a:xfrm>
-          <a:prstGeom prst="rect">
-            <a:avLst/>
-          </a:prstGeom>
-          <a:solidFill>
-            <a:srgbClr val="4472C4"/>
-          </a:solidFill>
-          <a:ln/>
-        </p:spPr>
-        <p:txBody>
-          <a:bodyPr wrap="square" rtlCol="0" anchor="ctr"/>
-          <a:lstStyle/>
-          <a:p>
-            <a:pPr indent="0" marL="0">
-              <a:buNone/>
-            </a:pPr>
-            <a:endParaRPr lang="en-US" dirty="0"/>
-          </a:p>
-        </p:txBody>
-      </p:sp>
-      <p:sp>
-        <p:nvSpPr>
-          <p:cNvPr id="35" name="Text 33"/>
-          <p:cNvSpPr/>
-          <p:nvPr/>
-        </p:nvSpPr>
-        <p:spPr>
-          <a:xfrm>
-            <a:off x="552450" y="4131618"/>
-            <a:ext cx="2331720" cy="161925"/>
-          </a:xfrm>
-          <a:prstGeom prst="rect">
-            <a:avLst/>
-          </a:prstGeom>
-          <a:noFill/>
-          <a:ln/>
-        </p:spPr>
-        <p:txBody>
-          <a:bodyPr wrap="square" lIns="0" tIns="0" rIns="0" bIns="0" rtlCol="0" anchor="t"/>
-          <a:lstStyle/>
-          <a:p>
-            <a:pPr algn="l" indent="0" marL="0">
-              <a:buNone/>
-            </a:pPr>
-            <a:r>
-              <a:rPr lang="en-US" sz="1100" b="1" dirty="0">
-                <a:solidFill>
-                  <a:srgbClr val="FFFFFF"/>
-                </a:solidFill>
-                <a:latin typeface="Malgun Gothic" pitchFamily="34" charset="0"/>
-                <a:ea typeface="Malgun Gothic" pitchFamily="34" charset="-122"/>
-                <a:cs typeface="Malgun Gothic" pitchFamily="34" charset="-120"/>
-              </a:rPr>
-              <a:t>저장소 계층</a:t>
-            </a:r>
-            <a:endParaRPr lang="en-US" sz="1100" dirty="0"/>
-          </a:p>
-        </p:txBody>
-      </p:sp>
-      <p:sp>
-        <p:nvSpPr>
-          <p:cNvPr id="36" name="Text 34"/>
-          <p:cNvSpPr/>
-          <p:nvPr/>
-        </p:nvSpPr>
-        <p:spPr>
-          <a:xfrm>
-            <a:off x="3194000" y="4136380"/>
-            <a:ext cx="1890120" cy="152400"/>
-          </a:xfrm>
-          <a:prstGeom prst="rect">
-            <a:avLst/>
-          </a:prstGeom>
-          <a:noFill/>
-          <a:ln/>
-        </p:spPr>
-        <p:txBody>
-          <a:bodyPr wrap="square" lIns="0" tIns="0" rIns="0" bIns="0" rtlCol="0" anchor="t"/>
-          <a:lstStyle/>
-          <a:p>
-            <a:pPr algn="l" indent="0" marL="0">
-              <a:buNone/>
-            </a:pPr>
-            <a:r>
-              <a:rPr lang="en-US" sz="1000" dirty="0">
-                <a:solidFill>
-                  <a:srgbClr val="333333"/>
-                </a:solidFill>
-                <a:latin typeface="Malgun Gothic" pitchFamily="34" charset="0"/>
-                <a:ea typeface="Malgun Gothic" pitchFamily="34" charset="-122"/>
-                <a:cs typeface="Malgun Gothic" pitchFamily="34" charset="-120"/>
-              </a:rPr>
-              <a:t>메모리 배열 (큐) · JSON 파일 (로그)</a:t>
-            </a:r>
-            <a:endParaRPr lang="en-US" sz="1000" dirty="0"/>
-          </a:p>
-        </p:txBody>
-      </p:sp>
-      <p:sp>
-        <p:nvSpPr>
-          <p:cNvPr id="37" name="Text 35"/>
-          <p:cNvSpPr/>
-          <p:nvPr/>
-        </p:nvSpPr>
-        <p:spPr>
-          <a:xfrm>
-            <a:off x="6339929" y="3914180"/>
-            <a:ext cx="2423071" cy="596801"/>
-          </a:xfrm>
-          <a:prstGeom prst="rect">
-            <a:avLst/>
-          </a:prstGeom>
-          <a:noFill/>
-          <a:ln w="19050">
-            <a:solidFill>
-              <a:srgbClr val="2B579A"/>
-            </a:solidFill>
-          </a:ln>
-        </p:spPr>
-        <p:txBody>
-          <a:bodyPr wrap="square" rtlCol="0" anchor="ctr"/>
-          <a:lstStyle/>
-          <a:p>
-            <a:pPr indent="0" marL="0">
-              <a:buNone/>
-            </a:pPr>
-            <a:endParaRPr lang="en-US" dirty="0"/>
-          </a:p>
-        </p:txBody>
-      </p:sp>
-      <p:sp>
-        <p:nvSpPr>
-          <p:cNvPr id="38" name="Text 36"/>
-          <p:cNvSpPr/>
-          <p:nvPr/>
-        </p:nvSpPr>
-        <p:spPr>
-          <a:xfrm>
-            <a:off x="6358979" y="3933230"/>
-            <a:ext cx="992981" cy="558701"/>
-          </a:xfrm>
-          <a:prstGeom prst="rect">
-            <a:avLst/>
-          </a:prstGeom>
-          <a:solidFill>
-            <a:srgbClr val="2B579A"/>
-          </a:solidFill>
-          <a:ln/>
-        </p:spPr>
-        <p:txBody>
-          <a:bodyPr wrap="square" rtlCol="0" anchor="ctr"/>
-          <a:lstStyle/>
-          <a:p>
-            <a:pPr indent="0" marL="0">
-              <a:buNone/>
-            </a:pPr>
-            <a:endParaRPr lang="en-US" dirty="0"/>
-          </a:p>
-        </p:txBody>
-      </p:sp>
-      <p:sp>
-        <p:nvSpPr>
-          <p:cNvPr id="39" name="Text 37"/>
-          <p:cNvSpPr/>
-          <p:nvPr/>
-        </p:nvSpPr>
-        <p:spPr>
-          <a:xfrm>
-            <a:off x="6511379" y="4060180"/>
-            <a:ext cx="701945" cy="161925"/>
-          </a:xfrm>
-          <a:prstGeom prst="rect">
-            <a:avLst/>
-          </a:prstGeom>
-          <a:noFill/>
-          <a:ln/>
-        </p:spPr>
-        <p:txBody>
-          <a:bodyPr wrap="square" lIns="0" tIns="0" rIns="0" bIns="0" rtlCol="0" anchor="t"/>
-          <a:lstStyle/>
-          <a:p>
-            <a:pPr algn="l" indent="0" marL="0">
-              <a:buNone/>
-            </a:pPr>
-            <a:r>
-              <a:rPr lang="en-US" sz="1100" b="1" dirty="0">
-                <a:solidFill>
-                  <a:srgbClr val="FFFFFF"/>
-                </a:solidFill>
-                <a:latin typeface="Malgun Gothic" pitchFamily="34" charset="0"/>
-                <a:ea typeface="Malgun Gothic" pitchFamily="34" charset="-122"/>
-                <a:cs typeface="Malgun Gothic" pitchFamily="34" charset="-120"/>
-              </a:rPr>
-              <a:t>LLM 백엔드</a:t>
-            </a:r>
-            <a:endParaRPr lang="en-US" sz="1100" dirty="0"/>
-          </a:p>
-        </p:txBody>
-      </p:sp>
-      <p:sp>
-        <p:nvSpPr>
-          <p:cNvPr id="40" name="Text 38"/>
-          <p:cNvSpPr/>
-          <p:nvPr/>
-        </p:nvSpPr>
-        <p:spPr>
-          <a:xfrm>
-            <a:off x="6511379" y="4222105"/>
-            <a:ext cx="701945" cy="142875"/>
-          </a:xfrm>
-          <a:prstGeom prst="rect">
-            <a:avLst/>
-          </a:prstGeom>
-          <a:noFill/>
-          <a:ln/>
-        </p:spPr>
-        <p:txBody>
-          <a:bodyPr wrap="square" lIns="0" tIns="0" rIns="0" bIns="0" rtlCol="0" anchor="t"/>
-          <a:lstStyle/>
-          <a:p>
-            <a:pPr algn="l" indent="0" marL="0">
-              <a:buNone/>
-            </a:pPr>
-            <a:r>
-              <a:rPr lang="en-US" sz="900" dirty="0">
-                <a:solidFill>
-                  <a:srgbClr val="CCCCCC"/>
-                </a:solidFill>
-                <a:latin typeface="Malgun Gothic" pitchFamily="34" charset="0"/>
-                <a:ea typeface="Malgun Gothic" pitchFamily="34" charset="-122"/>
-                <a:cs typeface="Malgun Gothic" pitchFamily="34" charset="-120"/>
-              </a:rPr>
-              <a:t>(외부 서비스)</a:t>
-            </a:r>
-            <a:endParaRPr lang="en-US" sz="900" dirty="0"/>
-          </a:p>
-        </p:txBody>
-      </p:sp>
-      <p:sp>
-        <p:nvSpPr>
-          <p:cNvPr id="41" name="Text 39"/>
-          <p:cNvSpPr/>
-          <p:nvPr/>
-        </p:nvSpPr>
-        <p:spPr>
-          <a:xfrm>
-            <a:off x="7555111" y="4141143"/>
-            <a:ext cx="410328" cy="142875"/>
-          </a:xfrm>
-          <a:prstGeom prst="rect">
-            <a:avLst/>
-          </a:prstGeom>
-          <a:noFill/>
-          <a:ln/>
-        </p:spPr>
-        <p:txBody>
-          <a:bodyPr wrap="square" lIns="0" tIns="0" rIns="0" bIns="0" rtlCol="0" anchor="t"/>
-          <a:lstStyle/>
-          <a:p>
-            <a:pPr algn="l" indent="0" marL="0">
-              <a:buNone/>
-            </a:pPr>
-            <a:r>
-              <a:rPr lang="en-US" sz="1000" dirty="0">
-                <a:solidFill>
-                  <a:srgbClr val="333333"/>
-                </a:solidFill>
-                <a:latin typeface="Malgun Gothic" pitchFamily="34" charset="0"/>
-                <a:ea typeface="Malgun Gothic" pitchFamily="34" charset="-122"/>
-                <a:cs typeface="Malgun Gothic" pitchFamily="34" charset="-120"/>
-              </a:rPr>
-              <a:t>Ollama</a:t>
-            </a:r>
-            <a:endParaRPr lang="en-US" sz="1000" dirty="0"/>
-          </a:p>
-        </p:txBody>
-      </p:sp>
-      <p:sp>
-        <p:nvSpPr>
-          <p:cNvPr id="42" name="Text 40"/>
-          <p:cNvSpPr/>
-          <p:nvPr/>
-        </p:nvSpPr>
-        <p:spPr>
-          <a:xfrm>
-            <a:off x="7957393" y="4150668"/>
-            <a:ext cx="595074" cy="123825"/>
-          </a:xfrm>
-          <a:prstGeom prst="rect">
-            <a:avLst/>
-          </a:prstGeom>
-          <a:noFill/>
-          <a:ln/>
-        </p:spPr>
-        <p:txBody>
-          <a:bodyPr wrap="square" lIns="0" tIns="0" rIns="0" bIns="0" rtlCol="0" anchor="t"/>
-          <a:lstStyle/>
-          <a:p>
-            <a:pPr algn="l" indent="0" marL="0">
-              <a:buNone/>
-            </a:pPr>
-            <a:r>
-              <a:rPr lang="en-US" sz="800" dirty="0">
-                <a:solidFill>
-                  <a:srgbClr val="666666"/>
-                </a:solidFill>
-                <a:latin typeface="Malgun Gothic" pitchFamily="34" charset="0"/>
-                <a:ea typeface="Malgun Gothic" pitchFamily="34" charset="-122"/>
-                <a:cs typeface="Malgun Gothic" pitchFamily="34" charset="-120"/>
-              </a:rPr>
-              <a:t>로컬 추론 엔진</a:t>
-            </a:r>
-            <a:endParaRPr lang="en-US" sz="800" dirty="0"/>
-          </a:p>
-        </p:txBody>
-      </p:sp>
-      <p:sp>
-        <p:nvSpPr>
-          <p:cNvPr id="43" name="Shape 41"/>
-          <p:cNvSpPr/>
-          <p:nvPr/>
-        </p:nvSpPr>
-        <p:spPr>
-          <a:xfrm>
-            <a:off x="381000" y="4872186"/>
-            <a:ext cx="8382000" cy="0"/>
+          <p:cNvPr id="38" name="Shape 36"/>
+          <p:cNvSpPr/>
+          <p:nvPr/>
+        </p:nvSpPr>
+        <p:spPr>
+          <a:xfrm>
+            <a:off x="304800" y="4862661"/>
+            <a:ext cx="8534400" cy="0"/>
           </a:xfrm>
           <a:prstGeom prst="line">
             <a:avLst/>
@@ -4683,1728 +4428,7 @@
       </p:sp>
       <p:sp>
         <p:nvSpPr>
-          <p:cNvPr id="44" name="Text 42"/>
-          <p:cNvSpPr/>
-          <p:nvPr/>
-        </p:nvSpPr>
-        <p:spPr>
-          <a:xfrm>
-            <a:off x="381000" y="4927699"/>
-            <a:ext cx="8549640" cy="114300"/>
-          </a:xfrm>
-          <a:prstGeom prst="rect">
-            <a:avLst/>
-          </a:prstGeom>
-          <a:noFill/>
-          <a:ln/>
-        </p:spPr>
-        <p:txBody>
-          <a:bodyPr wrap="square" lIns="0" tIns="0" rIns="0" bIns="0" rtlCol="0" anchor="t"/>
-          <a:lstStyle/>
-          <a:p>
-            <a:pPr algn="l" indent="0" marL="0">
-              <a:buNone/>
-            </a:pPr>
-            <a:r>
-              <a:rPr lang="en-US" sz="750" i="1" dirty="0">
-                <a:solidFill>
-                  <a:srgbClr val="999999"/>
-                </a:solidFill>
-                <a:latin typeface="Malgun Gothic" pitchFamily="34" charset="0"/>
-                <a:ea typeface="Malgun Gothic" pitchFamily="34" charset="-122"/>
-                <a:cs typeface="Malgun Gothic" pitchFamily="34" charset="-120"/>
-              </a:rPr>
-              <a:t>Node.js 22 LTS + Express.js 4.18</a:t>
-            </a:r>
-            <a:endParaRPr lang="en-US" sz="750" dirty="0"/>
-          </a:p>
-        </p:txBody>
-      </p:sp>
-    </p:spTree>
-  </p:cSld>
-  <p:clrMapOvr>
-    <a:masterClrMapping/>
-  </p:clrMapOvr>
-</p:sld>
-</file>
-
-<file path=ppt/slides/slide3.xml><?xml version="1.0" encoding="utf-8"?>
-<p:sld xmlns:a="http://schemas.openxmlformats.org/drawingml/2006/main" xmlns:r="http://schemas.openxmlformats.org/officeDocument/2006/relationships" xmlns:p="http://schemas.openxmlformats.org/presentationml/2006/main">
-  <p:cSld name="Slide 3">
-    <p:bg>
-      <p:bgPr>
-        <a:solidFill>
-          <a:srgbClr val="FFFFFF"/>
-        </a:solidFill>
-      </p:bgPr>
-    </p:bg>
-    <p:spTree>
-      <p:nvGrpSpPr>
-        <p:cNvPr id="1" name=""/>
-        <p:cNvGrpSpPr/>
-        <p:nvPr/>
-      </p:nvGrpSpPr>
-      <p:grpSpPr>
-        <a:xfrm>
-          <a:off x="0" y="0"/>
-          <a:ext cx="0" cy="0"/>
-          <a:chOff x="0" y="0"/>
-          <a:chExt cx="0" cy="0"/>
-        </a:xfrm>
-      </p:grpSpPr>
-      <p:sp>
-        <p:nvSpPr>
-          <p:cNvPr id="2" name="Text 0"/>
-          <p:cNvSpPr/>
-          <p:nvPr/>
-        </p:nvSpPr>
-        <p:spPr>
-          <a:xfrm>
-            <a:off x="406301" y="279202"/>
-            <a:ext cx="8498026" cy="142875"/>
-          </a:xfrm>
-          <a:prstGeom prst="rect">
-            <a:avLst/>
-          </a:prstGeom>
-          <a:noFill/>
-          <a:ln/>
-        </p:spPr>
-        <p:txBody>
-          <a:bodyPr wrap="square" lIns="0" tIns="0" rIns="0" bIns="0" rtlCol="0" anchor="t"/>
-          <a:lstStyle/>
-          <a:p>
-            <a:pPr algn="l" indent="0" marL="0">
-              <a:buNone/>
-            </a:pPr>
-            <a:r>
-              <a:rPr lang="en-US" sz="900" b="1" dirty="0">
-                <a:solidFill>
-                  <a:srgbClr val="888888"/>
-                </a:solidFill>
-                <a:latin typeface="Malgun Gothic" pitchFamily="34" charset="0"/>
-                <a:ea typeface="Malgun Gothic" pitchFamily="34" charset="-122"/>
-                <a:cs typeface="Malgun Gothic" pitchFamily="34" charset="-120"/>
-              </a:rPr>
-              <a:t>단계 1: 요청 수신</a:t>
-            </a:r>
-            <a:endParaRPr lang="en-US" sz="900" dirty="0"/>
-          </a:p>
-        </p:txBody>
-      </p:sp>
-      <p:sp>
-        <p:nvSpPr>
-          <p:cNvPr id="3" name="Text 1"/>
-          <p:cNvSpPr/>
-          <p:nvPr/>
-        </p:nvSpPr>
-        <p:spPr>
-          <a:xfrm>
-            <a:off x="304800" y="498128"/>
-            <a:ext cx="1561951" cy="669727"/>
-          </a:xfrm>
-          <a:prstGeom prst="rect">
-            <a:avLst/>
-          </a:prstGeom>
-          <a:solidFill>
-            <a:srgbClr val="2B579A"/>
-          </a:solidFill>
-          <a:ln w="19050">
-            <a:solidFill>
-              <a:srgbClr val="2B579A"/>
-            </a:solidFill>
-          </a:ln>
-        </p:spPr>
-        <p:txBody>
-          <a:bodyPr wrap="square" rtlCol="0" anchor="ctr"/>
-          <a:lstStyle/>
-          <a:p>
-            <a:pPr indent="0" marL="0">
-              <a:buNone/>
-            </a:pPr>
-            <a:endParaRPr lang="en-US" dirty="0"/>
-          </a:p>
-        </p:txBody>
-      </p:sp>
-      <p:sp>
-        <p:nvSpPr>
-          <p:cNvPr id="4" name="Text 2"/>
-          <p:cNvSpPr/>
-          <p:nvPr/>
-        </p:nvSpPr>
-        <p:spPr>
-          <a:xfrm>
-            <a:off x="438101" y="618679"/>
-            <a:ext cx="1295349" cy="152400"/>
-          </a:xfrm>
-          <a:prstGeom prst="rect">
-            <a:avLst/>
-          </a:prstGeom>
-          <a:noFill/>
-          <a:ln/>
-        </p:spPr>
-        <p:txBody>
-          <a:bodyPr wrap="square" lIns="0" tIns="0" rIns="0" bIns="0" rtlCol="0" anchor="t"/>
-          <a:lstStyle/>
-          <a:p>
-            <a:pPr algn="ctr" indent="0" marL="0">
-              <a:buNone/>
-            </a:pPr>
-            <a:r>
-              <a:rPr lang="en-US" sz="1000" b="1" dirty="0">
-                <a:solidFill>
-                  <a:srgbClr val="FFFFFF"/>
-                </a:solidFill>
-                <a:latin typeface="Malgun Gothic" pitchFamily="34" charset="0"/>
-                <a:ea typeface="Malgun Gothic" pitchFamily="34" charset="-122"/>
-                <a:cs typeface="Malgun Gothic" pitchFamily="34" charset="-120"/>
-              </a:rPr>
-              <a:t>클라이언트</a:t>
-            </a:r>
-            <a:endParaRPr lang="en-US" sz="1000" dirty="0"/>
-          </a:p>
-        </p:txBody>
-      </p:sp>
-      <p:sp>
-        <p:nvSpPr>
-          <p:cNvPr id="5" name="Text 3"/>
-          <p:cNvSpPr/>
-          <p:nvPr/>
-        </p:nvSpPr>
-        <p:spPr>
-          <a:xfrm>
-            <a:off x="438101" y="771079"/>
-            <a:ext cx="1295349" cy="142875"/>
-          </a:xfrm>
-          <a:prstGeom prst="rect">
-            <a:avLst/>
-          </a:prstGeom>
-          <a:noFill/>
-          <a:ln/>
-        </p:spPr>
-        <p:txBody>
-          <a:bodyPr wrap="square" lIns="0" tIns="0" rIns="0" bIns="0" rtlCol="0" anchor="t"/>
-          <a:lstStyle/>
-          <a:p>
-            <a:pPr algn="ctr" indent="0" marL="0">
-              <a:buNone/>
-            </a:pPr>
-            <a:r>
-              <a:rPr lang="en-US" sz="900" dirty="0">
-                <a:solidFill>
-                  <a:srgbClr val="CCCCCC"/>
-                </a:solidFill>
-                <a:latin typeface="Malgun Gothic" pitchFamily="34" charset="0"/>
-                <a:ea typeface="Malgun Gothic" pitchFamily="34" charset="-122"/>
-                <a:cs typeface="Malgun Gothic" pitchFamily="34" charset="-120"/>
-              </a:rPr>
-              <a:t>REST API 호출</a:t>
-            </a:r>
-            <a:endParaRPr lang="en-US" sz="900" dirty="0"/>
-          </a:p>
-        </p:txBody>
-      </p:sp>
-      <p:sp>
-        <p:nvSpPr>
-          <p:cNvPr id="6" name="Text 4"/>
-          <p:cNvSpPr/>
-          <p:nvPr/>
-        </p:nvSpPr>
-        <p:spPr>
-          <a:xfrm>
-            <a:off x="438101" y="913954"/>
-            <a:ext cx="1295349" cy="133350"/>
-          </a:xfrm>
-          <a:prstGeom prst="rect">
-            <a:avLst/>
-          </a:prstGeom>
-          <a:noFill/>
-          <a:ln/>
-        </p:spPr>
-        <p:txBody>
-          <a:bodyPr wrap="square" lIns="0" tIns="0" rIns="0" bIns="0" rtlCol="0" anchor="t"/>
-          <a:lstStyle/>
-          <a:p>
-            <a:pPr algn="ctr" indent="0" marL="0">
-              <a:buNone/>
-            </a:pPr>
-            <a:r>
-              <a:rPr lang="en-US" sz="900" dirty="0">
-                <a:solidFill>
-                  <a:srgbClr val="CCCCCC"/>
-                </a:solidFill>
-                <a:latin typeface="Malgun Gothic" pitchFamily="34" charset="0"/>
-                <a:ea typeface="Malgun Gothic" pitchFamily="34" charset="-122"/>
-                <a:cs typeface="Malgun Gothic" pitchFamily="34" charset="-120"/>
-              </a:rPr>
-              <a:t>POST /api/requests</a:t>
-            </a:r>
-            <a:endParaRPr lang="en-US" sz="900" dirty="0"/>
-          </a:p>
-        </p:txBody>
-      </p:sp>
-      <p:sp>
-        <p:nvSpPr>
-          <p:cNvPr id="7" name="Text 5"/>
-          <p:cNvSpPr/>
-          <p:nvPr/>
-        </p:nvSpPr>
-        <p:spPr>
-          <a:xfrm>
-            <a:off x="1942951" y="728216"/>
-            <a:ext cx="181407" cy="209550"/>
-          </a:xfrm>
-          <a:prstGeom prst="rect">
-            <a:avLst/>
-          </a:prstGeom>
-          <a:noFill/>
-          <a:ln/>
-        </p:spPr>
-        <p:txBody>
-          <a:bodyPr wrap="square" lIns="0" tIns="0" rIns="0" bIns="0" rtlCol="0" anchor="t"/>
-          <a:lstStyle/>
-          <a:p>
-            <a:pPr algn="l" indent="0" marL="0">
-              <a:buNone/>
-            </a:pPr>
-            <a:r>
-              <a:rPr lang="en-US" sz="1400" dirty="0">
-                <a:solidFill>
-                  <a:srgbClr val="2B579A"/>
-                </a:solidFill>
-                <a:latin typeface="Malgun Gothic" pitchFamily="34" charset="0"/>
-                <a:ea typeface="Malgun Gothic" pitchFamily="34" charset="-122"/>
-                <a:cs typeface="Malgun Gothic" pitchFamily="34" charset="-120"/>
-              </a:rPr>
-              <a:t>→</a:t>
-            </a:r>
-            <a:endParaRPr lang="en-US" sz="1400" dirty="0"/>
-          </a:p>
-        </p:txBody>
-      </p:sp>
-      <p:sp>
-        <p:nvSpPr>
-          <p:cNvPr id="8" name="Text 6"/>
-          <p:cNvSpPr/>
-          <p:nvPr/>
-        </p:nvSpPr>
-        <p:spPr>
-          <a:xfrm>
-            <a:off x="2197001" y="498128"/>
-            <a:ext cx="4749998" cy="669727"/>
-          </a:xfrm>
-          <a:prstGeom prst="rect">
-            <a:avLst/>
-          </a:prstGeom>
-          <a:solidFill>
-            <a:srgbClr val="F5F5F5"/>
-          </a:solidFill>
-          <a:ln w="19050">
-            <a:solidFill>
-              <a:srgbClr val="2B579A"/>
-            </a:solidFill>
-          </a:ln>
-        </p:spPr>
-        <p:txBody>
-          <a:bodyPr wrap="square" rtlCol="0" anchor="ctr"/>
-          <a:lstStyle/>
-          <a:p>
-            <a:pPr indent="0" marL="0">
-              <a:buNone/>
-            </a:pPr>
-            <a:endParaRPr lang="en-US" dirty="0"/>
-          </a:p>
-        </p:txBody>
-      </p:sp>
-      <p:sp>
-        <p:nvSpPr>
-          <p:cNvPr id="9" name="Text 7"/>
-          <p:cNvSpPr/>
-          <p:nvPr/>
-        </p:nvSpPr>
-        <p:spPr>
-          <a:xfrm>
-            <a:off x="2298421" y="685354"/>
-            <a:ext cx="4547158" cy="152400"/>
-          </a:xfrm>
-          <a:prstGeom prst="rect">
-            <a:avLst/>
-          </a:prstGeom>
-          <a:noFill/>
-          <a:ln/>
-        </p:spPr>
-        <p:txBody>
-          <a:bodyPr wrap="square" lIns="0" tIns="0" rIns="0" bIns="0" rtlCol="0" anchor="t"/>
-          <a:lstStyle/>
-          <a:p>
-            <a:pPr algn="ctr" indent="0" marL="0">
-              <a:buNone/>
-            </a:pPr>
-            <a:r>
-              <a:rPr lang="en-US" sz="1000" b="1" dirty="0">
-                <a:solidFill>
-                  <a:srgbClr val="333333"/>
-                </a:solidFill>
-                <a:latin typeface="Malgun Gothic" pitchFamily="34" charset="0"/>
-                <a:ea typeface="Malgun Gothic" pitchFamily="34" charset="-122"/>
-                <a:cs typeface="Malgun Gothic" pitchFamily="34" charset="-120"/>
-              </a:rPr>
-              <a:t>API 계층 (Express.js)</a:t>
-            </a:r>
-            <a:endParaRPr lang="en-US" sz="1000" dirty="0"/>
-          </a:p>
-        </p:txBody>
-      </p:sp>
-      <p:sp>
-        <p:nvSpPr>
-          <p:cNvPr id="10" name="Text 8"/>
-          <p:cNvSpPr/>
-          <p:nvPr/>
-        </p:nvSpPr>
-        <p:spPr>
-          <a:xfrm>
-            <a:off x="2298421" y="837754"/>
-            <a:ext cx="4547158" cy="142875"/>
-          </a:xfrm>
-          <a:prstGeom prst="rect">
-            <a:avLst/>
-          </a:prstGeom>
-          <a:noFill/>
-          <a:ln/>
-        </p:spPr>
-        <p:txBody>
-          <a:bodyPr wrap="square" lIns="0" tIns="0" rIns="0" bIns="0" rtlCol="0" anchor="t"/>
-          <a:lstStyle/>
-          <a:p>
-            <a:pPr algn="ctr" indent="0" marL="0">
-              <a:buNone/>
-            </a:pPr>
-            <a:r>
-              <a:rPr lang="en-US" sz="900" dirty="0">
-                <a:solidFill>
-                  <a:srgbClr val="666666"/>
-                </a:solidFill>
-                <a:latin typeface="Malgun Gothic" pitchFamily="34" charset="0"/>
-                <a:ea typeface="Malgun Gothic" pitchFamily="34" charset="-122"/>
-                <a:cs typeface="Malgun Gothic" pitchFamily="34" charset="-120"/>
-              </a:rPr>
-              <a:t>요청 검증 · 테넌트 식별 · 우선순위 할당</a:t>
-            </a:r>
-            <a:endParaRPr lang="en-US" sz="900" dirty="0"/>
-          </a:p>
-        </p:txBody>
-      </p:sp>
-      <p:sp>
-        <p:nvSpPr>
-          <p:cNvPr id="11" name="Text 9"/>
-          <p:cNvSpPr/>
-          <p:nvPr/>
-        </p:nvSpPr>
-        <p:spPr>
-          <a:xfrm>
-            <a:off x="7023199" y="728216"/>
-            <a:ext cx="181407" cy="209550"/>
-          </a:xfrm>
-          <a:prstGeom prst="rect">
-            <a:avLst/>
-          </a:prstGeom>
-          <a:noFill/>
-          <a:ln/>
-        </p:spPr>
-        <p:txBody>
-          <a:bodyPr wrap="square" lIns="0" tIns="0" rIns="0" bIns="0" rtlCol="0" anchor="t"/>
-          <a:lstStyle/>
-          <a:p>
-            <a:pPr algn="l" indent="0" marL="0">
-              <a:buNone/>
-            </a:pPr>
-            <a:r>
-              <a:rPr lang="en-US" sz="1400" dirty="0">
-                <a:solidFill>
-                  <a:srgbClr val="2B579A"/>
-                </a:solidFill>
-                <a:latin typeface="Malgun Gothic" pitchFamily="34" charset="0"/>
-                <a:ea typeface="Malgun Gothic" pitchFamily="34" charset="-122"/>
-                <a:cs typeface="Malgun Gothic" pitchFamily="34" charset="-120"/>
-              </a:rPr>
-              <a:t>→</a:t>
-            </a:r>
-            <a:endParaRPr lang="en-US" sz="1400" dirty="0"/>
-          </a:p>
-        </p:txBody>
-      </p:sp>
-      <p:sp>
-        <p:nvSpPr>
-          <p:cNvPr id="12" name="Text 10"/>
-          <p:cNvSpPr/>
-          <p:nvPr/>
-        </p:nvSpPr>
-        <p:spPr>
-          <a:xfrm>
-            <a:off x="7277249" y="498128"/>
-            <a:ext cx="1561951" cy="669727"/>
-          </a:xfrm>
-          <a:prstGeom prst="rect">
-            <a:avLst/>
-          </a:prstGeom>
-          <a:solidFill>
-            <a:srgbClr val="F5F5F5"/>
-          </a:solidFill>
-          <a:ln w="19050">
-            <a:solidFill>
-              <a:srgbClr val="2B579A"/>
-            </a:solidFill>
-          </a:ln>
-        </p:spPr>
-        <p:txBody>
-          <a:bodyPr wrap="square" rtlCol="0" anchor="ctr"/>
-          <a:lstStyle/>
-          <a:p>
-            <a:pPr indent="0" marL="0">
-              <a:buNone/>
-            </a:pPr>
-            <a:endParaRPr lang="en-US" dirty="0"/>
-          </a:p>
-        </p:txBody>
-      </p:sp>
-      <p:sp>
-        <p:nvSpPr>
-          <p:cNvPr id="13" name="Text 11"/>
-          <p:cNvSpPr/>
-          <p:nvPr/>
-        </p:nvSpPr>
-        <p:spPr>
-          <a:xfrm>
-            <a:off x="7410550" y="623441"/>
-            <a:ext cx="1295349" cy="142875"/>
-          </a:xfrm>
-          <a:prstGeom prst="rect">
-            <a:avLst/>
-          </a:prstGeom>
-          <a:noFill/>
-          <a:ln/>
-        </p:spPr>
-        <p:txBody>
-          <a:bodyPr wrap="square" lIns="0" tIns="0" rIns="0" bIns="0" rtlCol="0" anchor="t"/>
-          <a:lstStyle/>
-          <a:p>
-            <a:pPr algn="ctr" indent="0" marL="0">
-              <a:buNone/>
-            </a:pPr>
-            <a:r>
-              <a:rPr lang="en-US" sz="1000" b="1" dirty="0">
-                <a:solidFill>
-                  <a:srgbClr val="333333"/>
-                </a:solidFill>
-                <a:latin typeface="Malgun Gothic" pitchFamily="34" charset="0"/>
-                <a:ea typeface="Malgun Gothic" pitchFamily="34" charset="-122"/>
-                <a:cs typeface="Malgun Gothic" pitchFamily="34" charset="-120"/>
-              </a:rPr>
-              <a:t>Rate Limiter</a:t>
-            </a:r>
-            <a:endParaRPr lang="en-US" sz="1000" dirty="0"/>
-          </a:p>
-        </p:txBody>
-      </p:sp>
-      <p:sp>
-        <p:nvSpPr>
-          <p:cNvPr id="14" name="Text 12"/>
-          <p:cNvSpPr/>
-          <p:nvPr/>
-        </p:nvSpPr>
-        <p:spPr>
-          <a:xfrm>
-            <a:off x="7410550" y="766316"/>
-            <a:ext cx="1295349" cy="142875"/>
-          </a:xfrm>
-          <a:prstGeom prst="rect">
-            <a:avLst/>
-          </a:prstGeom>
-          <a:noFill/>
-          <a:ln/>
-        </p:spPr>
-        <p:txBody>
-          <a:bodyPr wrap="square" lIns="0" tIns="0" rIns="0" bIns="0" rtlCol="0" anchor="t"/>
-          <a:lstStyle/>
-          <a:p>
-            <a:pPr algn="ctr" indent="0" marL="0">
-              <a:buNone/>
-            </a:pPr>
-            <a:r>
-              <a:rPr lang="en-US" sz="900" dirty="0">
-                <a:solidFill>
-                  <a:srgbClr val="666666"/>
-                </a:solidFill>
-                <a:latin typeface="Malgun Gothic" pitchFamily="34" charset="0"/>
-                <a:ea typeface="Malgun Gothic" pitchFamily="34" charset="-122"/>
-                <a:cs typeface="Malgun Gothic" pitchFamily="34" charset="-120"/>
-              </a:rPr>
-              <a:t>토큰 버킷 확인</a:t>
-            </a:r>
-            <a:endParaRPr lang="en-US" sz="900" dirty="0"/>
-          </a:p>
-        </p:txBody>
-      </p:sp>
-      <p:sp>
-        <p:nvSpPr>
-          <p:cNvPr id="15" name="Text 13"/>
-          <p:cNvSpPr/>
-          <p:nvPr/>
-        </p:nvSpPr>
-        <p:spPr>
-          <a:xfrm>
-            <a:off x="7410550" y="909191"/>
-            <a:ext cx="1295349" cy="133350"/>
-          </a:xfrm>
-          <a:prstGeom prst="rect">
-            <a:avLst/>
-          </a:prstGeom>
-          <a:noFill/>
-          <a:ln/>
-        </p:spPr>
-        <p:txBody>
-          <a:bodyPr wrap="square" lIns="0" tIns="0" rIns="0" bIns="0" rtlCol="0" anchor="t"/>
-          <a:lstStyle/>
-          <a:p>
-            <a:pPr algn="ctr" indent="0" marL="0">
-              <a:buNone/>
-            </a:pPr>
-            <a:r>
-              <a:rPr lang="en-US" sz="850" i="1" dirty="0">
-                <a:solidFill>
-                  <a:srgbClr val="999999"/>
-                </a:solidFill>
-                <a:latin typeface="Malgun Gothic" pitchFamily="34" charset="0"/>
-                <a:ea typeface="Malgun Gothic" pitchFamily="34" charset="-122"/>
-                <a:cs typeface="Malgun Gothic" pitchFamily="34" charset="-120"/>
-              </a:rPr>
-              <a:t>한도 초과 시 거부</a:t>
-            </a:r>
-            <a:endParaRPr lang="en-US" sz="850" dirty="0"/>
-          </a:p>
-        </p:txBody>
-      </p:sp>
-      <p:sp>
-        <p:nvSpPr>
-          <p:cNvPr id="16" name="Text 14"/>
-          <p:cNvSpPr/>
-          <p:nvPr/>
-        </p:nvSpPr>
-        <p:spPr>
-          <a:xfrm>
-            <a:off x="4497288" y="1218456"/>
-            <a:ext cx="152412" cy="180975"/>
-          </a:xfrm>
-          <a:prstGeom prst="rect">
-            <a:avLst/>
-          </a:prstGeom>
-          <a:noFill/>
-          <a:ln/>
-        </p:spPr>
-        <p:txBody>
-          <a:bodyPr wrap="square" lIns="0" tIns="0" rIns="0" bIns="0" rtlCol="0" anchor="t"/>
-          <a:lstStyle/>
-          <a:p>
-            <a:pPr algn="l" indent="0" marL="0">
-              <a:buNone/>
-            </a:pPr>
-            <a:r>
-              <a:rPr lang="en-US" sz="1200" dirty="0">
-                <a:solidFill>
-                  <a:srgbClr val="888888"/>
-                </a:solidFill>
-                <a:latin typeface="Malgun Gothic" pitchFamily="34" charset="0"/>
-                <a:ea typeface="Malgun Gothic" pitchFamily="34" charset="-122"/>
-                <a:cs typeface="Malgun Gothic" pitchFamily="34" charset="-120"/>
-              </a:rPr>
-              <a:t>▼</a:t>
-            </a:r>
-            <a:endParaRPr lang="en-US" sz="1200" dirty="0"/>
-          </a:p>
-        </p:txBody>
-      </p:sp>
-      <p:sp>
-        <p:nvSpPr>
-          <p:cNvPr id="17" name="Text 15"/>
-          <p:cNvSpPr/>
-          <p:nvPr/>
-        </p:nvSpPr>
-        <p:spPr>
-          <a:xfrm>
-            <a:off x="406301" y="1450032"/>
-            <a:ext cx="8498026" cy="142875"/>
-          </a:xfrm>
-          <a:prstGeom prst="rect">
-            <a:avLst/>
-          </a:prstGeom>
-          <a:noFill/>
-          <a:ln/>
-        </p:spPr>
-        <p:txBody>
-          <a:bodyPr wrap="square" lIns="0" tIns="0" rIns="0" bIns="0" rtlCol="0" anchor="t"/>
-          <a:lstStyle/>
-          <a:p>
-            <a:pPr algn="l" indent="0" marL="0">
-              <a:buNone/>
-            </a:pPr>
-            <a:r>
-              <a:rPr lang="en-US" sz="900" b="1" dirty="0">
-                <a:solidFill>
-                  <a:srgbClr val="888888"/>
-                </a:solidFill>
-                <a:latin typeface="Malgun Gothic" pitchFamily="34" charset="0"/>
-                <a:ea typeface="Malgun Gothic" pitchFamily="34" charset="-122"/>
-                <a:cs typeface="Malgun Gothic" pitchFamily="34" charset="-120"/>
-              </a:rPr>
-              <a:t>단계 2: 스케줄링 결정 (런타임 교체 가능)</a:t>
-            </a:r>
-            <a:endParaRPr lang="en-US" sz="900" dirty="0"/>
-          </a:p>
-        </p:txBody>
-      </p:sp>
-      <p:sp>
-        <p:nvSpPr>
-          <p:cNvPr id="18" name="Text 16"/>
-          <p:cNvSpPr/>
-          <p:nvPr/>
-        </p:nvSpPr>
-        <p:spPr>
-          <a:xfrm>
-            <a:off x="304800" y="1668959"/>
-            <a:ext cx="2076450" cy="447675"/>
-          </a:xfrm>
-          <a:prstGeom prst="rect">
-            <a:avLst/>
-          </a:prstGeom>
-          <a:solidFill>
-            <a:srgbClr val="E8E8E8"/>
-          </a:solidFill>
-          <a:ln w="9525">
-            <a:solidFill>
-              <a:srgbClr val="4472C4"/>
-            </a:solidFill>
-          </a:ln>
-        </p:spPr>
-        <p:txBody>
-          <a:bodyPr wrap="square" rtlCol="0" anchor="ctr"/>
-          <a:lstStyle/>
-          <a:p>
-            <a:pPr indent="0" marL="0">
-              <a:buNone/>
-            </a:pPr>
-            <a:endParaRPr lang="en-US" dirty="0"/>
-          </a:p>
-        </p:txBody>
-      </p:sp>
-      <p:sp>
-        <p:nvSpPr>
-          <p:cNvPr id="19" name="Text 17"/>
-          <p:cNvSpPr/>
-          <p:nvPr/>
-        </p:nvSpPr>
-        <p:spPr>
-          <a:xfrm>
-            <a:off x="397282" y="1754684"/>
-            <a:ext cx="1891486" cy="142875"/>
-          </a:xfrm>
-          <a:prstGeom prst="rect">
-            <a:avLst/>
-          </a:prstGeom>
-          <a:noFill/>
-          <a:ln/>
-        </p:spPr>
-        <p:txBody>
-          <a:bodyPr wrap="square" lIns="0" tIns="0" rIns="0" bIns="0" rtlCol="0" anchor="t"/>
-          <a:lstStyle/>
-          <a:p>
-            <a:pPr algn="ctr" indent="0" marL="0">
-              <a:buNone/>
-            </a:pPr>
-            <a:r>
-              <a:rPr lang="en-US" sz="1000" b="1" dirty="0">
-                <a:solidFill>
-                  <a:srgbClr val="333333"/>
-                </a:solidFill>
-                <a:latin typeface="Malgun Gothic" pitchFamily="34" charset="0"/>
-                <a:ea typeface="Malgun Gothic" pitchFamily="34" charset="-122"/>
-                <a:cs typeface="Malgun Gothic" pitchFamily="34" charset="-120"/>
-              </a:rPr>
-              <a:t>FCFS</a:t>
-            </a:r>
-            <a:endParaRPr lang="en-US" sz="1000" dirty="0"/>
-          </a:p>
-        </p:txBody>
-      </p:sp>
-      <p:sp>
-        <p:nvSpPr>
-          <p:cNvPr id="20" name="Text 18"/>
-          <p:cNvSpPr/>
-          <p:nvPr/>
-        </p:nvSpPr>
-        <p:spPr>
-          <a:xfrm>
-            <a:off x="397282" y="1897559"/>
-            <a:ext cx="1891486" cy="133350"/>
-          </a:xfrm>
-          <a:prstGeom prst="rect">
-            <a:avLst/>
-          </a:prstGeom>
-          <a:noFill/>
-          <a:ln/>
-        </p:spPr>
-        <p:txBody>
-          <a:bodyPr wrap="square" lIns="0" tIns="0" rIns="0" bIns="0" rtlCol="0" anchor="t"/>
-          <a:lstStyle/>
-          <a:p>
-            <a:pPr algn="ctr" indent="0" marL="0">
-              <a:buNone/>
-            </a:pPr>
-            <a:r>
-              <a:rPr lang="en-US" sz="850" dirty="0">
-                <a:solidFill>
-                  <a:srgbClr val="666666"/>
-                </a:solidFill>
-                <a:latin typeface="Malgun Gothic" pitchFamily="34" charset="0"/>
-                <a:ea typeface="Malgun Gothic" pitchFamily="34" charset="-122"/>
-                <a:cs typeface="Malgun Gothic" pitchFamily="34" charset="-120"/>
-              </a:rPr>
-              <a:t>도착 순서</a:t>
-            </a:r>
-            <a:endParaRPr lang="en-US" sz="850" dirty="0"/>
-          </a:p>
-        </p:txBody>
-      </p:sp>
-      <p:sp>
-        <p:nvSpPr>
-          <p:cNvPr id="21" name="Text 19"/>
-          <p:cNvSpPr/>
-          <p:nvPr/>
-        </p:nvSpPr>
-        <p:spPr>
-          <a:xfrm>
-            <a:off x="2457450" y="1668959"/>
-            <a:ext cx="2076450" cy="447675"/>
-          </a:xfrm>
-          <a:prstGeom prst="rect">
-            <a:avLst/>
-          </a:prstGeom>
-          <a:solidFill>
-            <a:srgbClr val="E8E8E8"/>
-          </a:solidFill>
-          <a:ln w="9525">
-            <a:solidFill>
-              <a:srgbClr val="4472C4"/>
-            </a:solidFill>
-          </a:ln>
-        </p:spPr>
-        <p:txBody>
-          <a:bodyPr wrap="square" rtlCol="0" anchor="ctr"/>
-          <a:lstStyle/>
-          <a:p>
-            <a:pPr indent="0" marL="0">
-              <a:buNone/>
-            </a:pPr>
-            <a:endParaRPr lang="en-US" dirty="0"/>
-          </a:p>
-        </p:txBody>
-      </p:sp>
-      <p:sp>
-        <p:nvSpPr>
-          <p:cNvPr id="22" name="Text 20"/>
-          <p:cNvSpPr/>
-          <p:nvPr/>
-        </p:nvSpPr>
-        <p:spPr>
-          <a:xfrm>
-            <a:off x="2549932" y="1754684"/>
-            <a:ext cx="1891486" cy="142875"/>
-          </a:xfrm>
-          <a:prstGeom prst="rect">
-            <a:avLst/>
-          </a:prstGeom>
-          <a:noFill/>
-          <a:ln/>
-        </p:spPr>
-        <p:txBody>
-          <a:bodyPr wrap="square" lIns="0" tIns="0" rIns="0" bIns="0" rtlCol="0" anchor="t"/>
-          <a:lstStyle/>
-          <a:p>
-            <a:pPr algn="ctr" indent="0" marL="0">
-              <a:buNone/>
-            </a:pPr>
-            <a:r>
-              <a:rPr lang="en-US" sz="1000" b="1" dirty="0">
-                <a:solidFill>
-                  <a:srgbClr val="333333"/>
-                </a:solidFill>
-                <a:latin typeface="Malgun Gothic" pitchFamily="34" charset="0"/>
-                <a:ea typeface="Malgun Gothic" pitchFamily="34" charset="-122"/>
-                <a:cs typeface="Malgun Gothic" pitchFamily="34" charset="-120"/>
-              </a:rPr>
-              <a:t>Priority</a:t>
-            </a:r>
-            <a:endParaRPr lang="en-US" sz="1000" dirty="0"/>
-          </a:p>
-        </p:txBody>
-      </p:sp>
-      <p:sp>
-        <p:nvSpPr>
-          <p:cNvPr id="23" name="Text 21"/>
-          <p:cNvSpPr/>
-          <p:nvPr/>
-        </p:nvSpPr>
-        <p:spPr>
-          <a:xfrm>
-            <a:off x="2549932" y="1897559"/>
-            <a:ext cx="1891486" cy="133350"/>
-          </a:xfrm>
-          <a:prstGeom prst="rect">
-            <a:avLst/>
-          </a:prstGeom>
-          <a:noFill/>
-          <a:ln/>
-        </p:spPr>
-        <p:txBody>
-          <a:bodyPr wrap="square" lIns="0" tIns="0" rIns="0" bIns="0" rtlCol="0" anchor="t"/>
-          <a:lstStyle/>
-          <a:p>
-            <a:pPr algn="ctr" indent="0" marL="0">
-              <a:buNone/>
-            </a:pPr>
-            <a:r>
-              <a:rPr lang="en-US" sz="850" dirty="0">
-                <a:solidFill>
-                  <a:srgbClr val="666666"/>
-                </a:solidFill>
-                <a:latin typeface="Malgun Gothic" pitchFamily="34" charset="0"/>
-                <a:ea typeface="Malgun Gothic" pitchFamily="34" charset="-122"/>
-                <a:cs typeface="Malgun Gothic" pitchFamily="34" charset="-120"/>
-              </a:rPr>
-              <a:t>4단계 + 에이징</a:t>
-            </a:r>
-            <a:endParaRPr lang="en-US" sz="850" dirty="0"/>
-          </a:p>
-        </p:txBody>
-      </p:sp>
-      <p:sp>
-        <p:nvSpPr>
-          <p:cNvPr id="24" name="Text 22"/>
-          <p:cNvSpPr/>
-          <p:nvPr/>
-        </p:nvSpPr>
-        <p:spPr>
-          <a:xfrm>
-            <a:off x="4610100" y="1668959"/>
-            <a:ext cx="2076450" cy="447675"/>
-          </a:xfrm>
-          <a:prstGeom prst="rect">
-            <a:avLst/>
-          </a:prstGeom>
-          <a:solidFill>
-            <a:srgbClr val="D5E8F0"/>
-          </a:solidFill>
-          <a:ln w="9525">
-            <a:solidFill>
-              <a:srgbClr val="2B579A"/>
-            </a:solidFill>
-          </a:ln>
-        </p:spPr>
-        <p:txBody>
-          <a:bodyPr wrap="square" rtlCol="0" anchor="ctr"/>
-          <a:lstStyle/>
-          <a:p>
-            <a:pPr indent="0" marL="0">
-              <a:buNone/>
-            </a:pPr>
-            <a:endParaRPr lang="en-US" dirty="0"/>
-          </a:p>
-        </p:txBody>
-      </p:sp>
-      <p:sp>
-        <p:nvSpPr>
-          <p:cNvPr id="25" name="Text 23"/>
-          <p:cNvSpPr/>
-          <p:nvPr/>
-        </p:nvSpPr>
-        <p:spPr>
-          <a:xfrm>
-            <a:off x="4702582" y="1764209"/>
-            <a:ext cx="1891486" cy="133350"/>
-          </a:xfrm>
-          <a:prstGeom prst="rect">
-            <a:avLst/>
-          </a:prstGeom>
-          <a:noFill/>
-          <a:ln/>
-        </p:spPr>
-        <p:txBody>
-          <a:bodyPr wrap="square" lIns="0" tIns="0" rIns="0" bIns="0" rtlCol="0" anchor="t"/>
-          <a:lstStyle/>
-          <a:p>
-            <a:pPr algn="ctr" indent="0" marL="0">
-              <a:buNone/>
-            </a:pPr>
-            <a:r>
-              <a:rPr lang="en-US" sz="900" b="1" dirty="0">
-                <a:solidFill>
-                  <a:srgbClr val="2B579A"/>
-                </a:solidFill>
-                <a:latin typeface="Malgun Gothic" pitchFamily="34" charset="0"/>
-                <a:ea typeface="Malgun Gothic" pitchFamily="34" charset="-122"/>
-                <a:cs typeface="Malgun Gothic" pitchFamily="34" charset="-120"/>
-              </a:rPr>
-              <a:t>MLFQ</a:t>
-            </a:r>
-            <a:endParaRPr lang="en-US" sz="900" dirty="0"/>
-          </a:p>
-        </p:txBody>
-      </p:sp>
-      <p:sp>
-        <p:nvSpPr>
-          <p:cNvPr id="26" name="Text 24"/>
-          <p:cNvSpPr/>
-          <p:nvPr/>
-        </p:nvSpPr>
-        <p:spPr>
-          <a:xfrm>
-            <a:off x="4702582" y="1897559"/>
-            <a:ext cx="1891486" cy="123825"/>
-          </a:xfrm>
-          <a:prstGeom prst="rect">
-            <a:avLst/>
-          </a:prstGeom>
-          <a:noFill/>
-          <a:ln/>
-        </p:spPr>
-        <p:txBody>
-          <a:bodyPr wrap="square" lIns="0" tIns="0" rIns="0" bIns="0" rtlCol="0" anchor="t"/>
-          <a:lstStyle/>
-          <a:p>
-            <a:pPr algn="ctr" indent="0" marL="0">
-              <a:buNone/>
-            </a:pPr>
-            <a:r>
-              <a:rPr lang="en-US" sz="800" dirty="0">
-                <a:solidFill>
-                  <a:srgbClr val="555555"/>
-                </a:solidFill>
-                <a:latin typeface="Malgun Gothic" pitchFamily="34" charset="0"/>
-                <a:ea typeface="Malgun Gothic" pitchFamily="34" charset="-122"/>
-                <a:cs typeface="Malgun Gothic" pitchFamily="34" charset="-120"/>
-              </a:rPr>
-              <a:t>다단계 큐 + 피드백</a:t>
-            </a:r>
-            <a:endParaRPr lang="en-US" sz="800" dirty="0"/>
-          </a:p>
-        </p:txBody>
-      </p:sp>
-      <p:sp>
-        <p:nvSpPr>
-          <p:cNvPr id="27" name="Text 25"/>
-          <p:cNvSpPr/>
-          <p:nvPr/>
-        </p:nvSpPr>
-        <p:spPr>
-          <a:xfrm>
-            <a:off x="6762750" y="1668959"/>
-            <a:ext cx="2076450" cy="447675"/>
-          </a:xfrm>
-          <a:prstGeom prst="rect">
-            <a:avLst/>
-          </a:prstGeom>
-          <a:solidFill>
-            <a:srgbClr val="D5E8F0"/>
-          </a:solidFill>
-          <a:ln w="9525">
-            <a:solidFill>
-              <a:srgbClr val="2B579A"/>
-            </a:solidFill>
-          </a:ln>
-        </p:spPr>
-        <p:txBody>
-          <a:bodyPr wrap="square" rtlCol="0" anchor="ctr"/>
-          <a:lstStyle/>
-          <a:p>
-            <a:pPr indent="0" marL="0">
-              <a:buNone/>
-            </a:pPr>
-            <a:endParaRPr lang="en-US" dirty="0"/>
-          </a:p>
-        </p:txBody>
-      </p:sp>
-      <p:sp>
-        <p:nvSpPr>
-          <p:cNvPr id="28" name="Text 26"/>
-          <p:cNvSpPr/>
-          <p:nvPr/>
-        </p:nvSpPr>
-        <p:spPr>
-          <a:xfrm>
-            <a:off x="6855232" y="1764209"/>
-            <a:ext cx="1891486" cy="133350"/>
-          </a:xfrm>
-          <a:prstGeom prst="rect">
-            <a:avLst/>
-          </a:prstGeom>
-          <a:noFill/>
-          <a:ln/>
-        </p:spPr>
-        <p:txBody>
-          <a:bodyPr wrap="square" lIns="0" tIns="0" rIns="0" bIns="0" rtlCol="0" anchor="t"/>
-          <a:lstStyle/>
-          <a:p>
-            <a:pPr algn="ctr" indent="0" marL="0">
-              <a:buNone/>
-            </a:pPr>
-            <a:r>
-              <a:rPr lang="en-US" sz="900" b="1" dirty="0">
-                <a:solidFill>
-                  <a:srgbClr val="2B579A"/>
-                </a:solidFill>
-                <a:latin typeface="Malgun Gothic" pitchFamily="34" charset="0"/>
-                <a:ea typeface="Malgun Gothic" pitchFamily="34" charset="-122"/>
-                <a:cs typeface="Malgun Gothic" pitchFamily="34" charset="-120"/>
-              </a:rPr>
-              <a:t>WFQ</a:t>
-            </a:r>
-            <a:endParaRPr lang="en-US" sz="900" dirty="0"/>
-          </a:p>
-        </p:txBody>
-      </p:sp>
-      <p:sp>
-        <p:nvSpPr>
-          <p:cNvPr id="29" name="Text 27"/>
-          <p:cNvSpPr/>
-          <p:nvPr/>
-        </p:nvSpPr>
-        <p:spPr>
-          <a:xfrm>
-            <a:off x="6855232" y="1897559"/>
-            <a:ext cx="1891486" cy="123825"/>
-          </a:xfrm>
-          <a:prstGeom prst="rect">
-            <a:avLst/>
-          </a:prstGeom>
-          <a:noFill/>
-          <a:ln/>
-        </p:spPr>
-        <p:txBody>
-          <a:bodyPr wrap="square" lIns="0" tIns="0" rIns="0" bIns="0" rtlCol="0" anchor="t"/>
-          <a:lstStyle/>
-          <a:p>
-            <a:pPr algn="ctr" indent="0" marL="0">
-              <a:buNone/>
-            </a:pPr>
-            <a:r>
-              <a:rPr lang="en-US" sz="800" dirty="0">
-                <a:solidFill>
-                  <a:srgbClr val="555555"/>
-                </a:solidFill>
-                <a:latin typeface="Malgun Gothic" pitchFamily="34" charset="0"/>
-                <a:ea typeface="Malgun Gothic" pitchFamily="34" charset="-122"/>
-                <a:cs typeface="Malgun Gothic" pitchFamily="34" charset="-120"/>
-              </a:rPr>
-              <a:t>가중치 비례 배분</a:t>
-            </a:r>
-            <a:endParaRPr lang="en-US" sz="800" dirty="0"/>
-          </a:p>
-        </p:txBody>
-      </p:sp>
-      <p:sp>
-        <p:nvSpPr>
-          <p:cNvPr id="30" name="Text 28"/>
-          <p:cNvSpPr/>
-          <p:nvPr/>
-        </p:nvSpPr>
-        <p:spPr>
-          <a:xfrm>
-            <a:off x="3313212" y="2154585"/>
-            <a:ext cx="2567928" cy="123825"/>
-          </a:xfrm>
-          <a:prstGeom prst="rect">
-            <a:avLst/>
-          </a:prstGeom>
-          <a:noFill/>
-          <a:ln/>
-        </p:spPr>
-        <p:txBody>
-          <a:bodyPr wrap="square" lIns="0" tIns="0" rIns="0" bIns="0" rtlCol="0" anchor="t"/>
-          <a:lstStyle/>
-          <a:p>
-            <a:pPr algn="l" indent="0" marL="0">
-              <a:buNone/>
-            </a:pPr>
-            <a:r>
-              <a:rPr lang="en-US" sz="800" i="1" dirty="0">
-                <a:solidFill>
-                  <a:srgbClr val="999999"/>
-                </a:solidFill>
-                <a:latin typeface="Malgun Gothic" pitchFamily="34" charset="0"/>
-                <a:ea typeface="Malgun Gothic" pitchFamily="34" charset="-122"/>
-                <a:cs typeface="Malgun Gothic" pitchFamily="34" charset="-120"/>
-              </a:rPr>
-              <a:t>PUT /api/scheduler → 런타임 알고리즘 전환 (재시작 불필요)</a:t>
-            </a:r>
-            <a:endParaRPr lang="en-US" sz="800" dirty="0"/>
-          </a:p>
-        </p:txBody>
-      </p:sp>
-      <p:sp>
-        <p:nvSpPr>
-          <p:cNvPr id="31" name="Text 29"/>
-          <p:cNvSpPr/>
-          <p:nvPr/>
-        </p:nvSpPr>
-        <p:spPr>
-          <a:xfrm>
-            <a:off x="4497288" y="2316361"/>
-            <a:ext cx="152412" cy="180975"/>
-          </a:xfrm>
-          <a:prstGeom prst="rect">
-            <a:avLst/>
-          </a:prstGeom>
-          <a:noFill/>
-          <a:ln/>
-        </p:spPr>
-        <p:txBody>
-          <a:bodyPr wrap="square" lIns="0" tIns="0" rIns="0" bIns="0" rtlCol="0" anchor="t"/>
-          <a:lstStyle/>
-          <a:p>
-            <a:pPr algn="l" indent="0" marL="0">
-              <a:buNone/>
-            </a:pPr>
-            <a:r>
-              <a:rPr lang="en-US" sz="1200" dirty="0">
-                <a:solidFill>
-                  <a:srgbClr val="888888"/>
-                </a:solidFill>
-                <a:latin typeface="Malgun Gothic" pitchFamily="34" charset="0"/>
-                <a:ea typeface="Malgun Gothic" pitchFamily="34" charset="-122"/>
-                <a:cs typeface="Malgun Gothic" pitchFamily="34" charset="-120"/>
-              </a:rPr>
-              <a:t>▼</a:t>
-            </a:r>
-            <a:endParaRPr lang="en-US" sz="1200" dirty="0"/>
-          </a:p>
-        </p:txBody>
-      </p:sp>
-      <p:sp>
-        <p:nvSpPr>
-          <p:cNvPr id="32" name="Text 30"/>
-          <p:cNvSpPr/>
-          <p:nvPr/>
-        </p:nvSpPr>
-        <p:spPr>
-          <a:xfrm>
-            <a:off x="406301" y="2547938"/>
-            <a:ext cx="8498026" cy="142875"/>
-          </a:xfrm>
-          <a:prstGeom prst="rect">
-            <a:avLst/>
-          </a:prstGeom>
-          <a:noFill/>
-          <a:ln/>
-        </p:spPr>
-        <p:txBody>
-          <a:bodyPr wrap="square" lIns="0" tIns="0" rIns="0" bIns="0" rtlCol="0" anchor="t"/>
-          <a:lstStyle/>
-          <a:p>
-            <a:pPr algn="l" indent="0" marL="0">
-              <a:buNone/>
-            </a:pPr>
-            <a:r>
-              <a:rPr lang="en-US" sz="900" b="1" dirty="0">
-                <a:solidFill>
-                  <a:srgbClr val="888888"/>
-                </a:solidFill>
-                <a:latin typeface="Malgun Gothic" pitchFamily="34" charset="0"/>
-                <a:ea typeface="Malgun Gothic" pitchFamily="34" charset="-122"/>
-                <a:cs typeface="Malgun Gothic" pitchFamily="34" charset="-120"/>
-              </a:rPr>
-              <a:t>단계 3: 실행 및 응답</a:t>
-            </a:r>
-            <a:endParaRPr lang="en-US" sz="900" dirty="0"/>
-          </a:p>
-        </p:txBody>
-      </p:sp>
-      <p:sp>
-        <p:nvSpPr>
-          <p:cNvPr id="33" name="Text 31"/>
-          <p:cNvSpPr/>
-          <p:nvPr/>
-        </p:nvSpPr>
-        <p:spPr>
-          <a:xfrm>
-            <a:off x="304800" y="2766864"/>
-            <a:ext cx="4749998" cy="679252"/>
-          </a:xfrm>
-          <a:prstGeom prst="rect">
-            <a:avLst/>
-          </a:prstGeom>
-          <a:solidFill>
-            <a:srgbClr val="F5F5F5"/>
-          </a:solidFill>
-          <a:ln w="19050">
-            <a:solidFill>
-              <a:srgbClr val="2B579A"/>
-            </a:solidFill>
-          </a:ln>
-        </p:spPr>
-        <p:txBody>
-          <a:bodyPr wrap="square" rtlCol="0" anchor="ctr"/>
-          <a:lstStyle/>
-          <a:p>
-            <a:pPr indent="0" marL="0">
-              <a:buNone/>
-            </a:pPr>
-            <a:endParaRPr lang="en-US" dirty="0"/>
-          </a:p>
-        </p:txBody>
-      </p:sp>
-      <p:sp>
-        <p:nvSpPr>
-          <p:cNvPr id="34" name="Text 32"/>
-          <p:cNvSpPr/>
-          <p:nvPr/>
-        </p:nvSpPr>
-        <p:spPr>
-          <a:xfrm>
-            <a:off x="406220" y="2958852"/>
-            <a:ext cx="4547158" cy="152400"/>
-          </a:xfrm>
-          <a:prstGeom prst="rect">
-            <a:avLst/>
-          </a:prstGeom>
-          <a:noFill/>
-          <a:ln/>
-        </p:spPr>
-        <p:txBody>
-          <a:bodyPr wrap="square" lIns="0" tIns="0" rIns="0" bIns="0" rtlCol="0" anchor="t"/>
-          <a:lstStyle/>
-          <a:p>
-            <a:pPr algn="ctr" indent="0" marL="0">
-              <a:buNone/>
-            </a:pPr>
-            <a:r>
-              <a:rPr lang="en-US" sz="1000" b="1" dirty="0">
-                <a:solidFill>
-                  <a:srgbClr val="333333"/>
-                </a:solidFill>
-                <a:latin typeface="Malgun Gothic" pitchFamily="34" charset="0"/>
-                <a:ea typeface="Malgun Gothic" pitchFamily="34" charset="-122"/>
-                <a:cs typeface="Malgun Gothic" pitchFamily="34" charset="-120"/>
-              </a:rPr>
-              <a:t>스케줄러</a:t>
-            </a:r>
-            <a:endParaRPr lang="en-US" sz="1000" dirty="0"/>
-          </a:p>
-        </p:txBody>
-      </p:sp>
-      <p:sp>
-        <p:nvSpPr>
-          <p:cNvPr id="35" name="Text 33"/>
-          <p:cNvSpPr/>
-          <p:nvPr/>
-        </p:nvSpPr>
-        <p:spPr>
-          <a:xfrm>
-            <a:off x="406220" y="3111252"/>
-            <a:ext cx="4547158" cy="142875"/>
-          </a:xfrm>
-          <a:prstGeom prst="rect">
-            <a:avLst/>
-          </a:prstGeom>
-          <a:noFill/>
-          <a:ln/>
-        </p:spPr>
-        <p:txBody>
-          <a:bodyPr wrap="square" lIns="0" tIns="0" rIns="0" bIns="0" rtlCol="0" anchor="t"/>
-          <a:lstStyle/>
-          <a:p>
-            <a:pPr algn="ctr" indent="0" marL="0">
-              <a:buNone/>
-            </a:pPr>
-            <a:r>
-              <a:rPr lang="en-US" sz="900" dirty="0">
-                <a:solidFill>
-                  <a:srgbClr val="666666"/>
-                </a:solidFill>
-                <a:latin typeface="Malgun Gothic" pitchFamily="34" charset="0"/>
-                <a:ea typeface="Malgun Gothic" pitchFamily="34" charset="-122"/>
-                <a:cs typeface="Malgun Gothic" pitchFamily="34" charset="-120"/>
-              </a:rPr>
-              <a:t>다음 요청 추출 · LLM 백엔드로 전달</a:t>
-            </a:r>
-            <a:endParaRPr lang="en-US" sz="900" dirty="0"/>
-          </a:p>
-        </p:txBody>
-      </p:sp>
-      <p:sp>
-        <p:nvSpPr>
-          <p:cNvPr id="36" name="Text 34"/>
-          <p:cNvSpPr/>
-          <p:nvPr/>
-        </p:nvSpPr>
-        <p:spPr>
-          <a:xfrm>
-            <a:off x="5130998" y="3001714"/>
-            <a:ext cx="181407" cy="209550"/>
-          </a:xfrm>
-          <a:prstGeom prst="rect">
-            <a:avLst/>
-          </a:prstGeom>
-          <a:noFill/>
-          <a:ln/>
-        </p:spPr>
-        <p:txBody>
-          <a:bodyPr wrap="square" lIns="0" tIns="0" rIns="0" bIns="0" rtlCol="0" anchor="t"/>
-          <a:lstStyle/>
-          <a:p>
-            <a:pPr algn="l" indent="0" marL="0">
-              <a:buNone/>
-            </a:pPr>
-            <a:r>
-              <a:rPr lang="en-US" sz="1400" dirty="0">
-                <a:solidFill>
-                  <a:srgbClr val="2B579A"/>
-                </a:solidFill>
-                <a:latin typeface="Malgun Gothic" pitchFamily="34" charset="0"/>
-                <a:ea typeface="Malgun Gothic" pitchFamily="34" charset="-122"/>
-                <a:cs typeface="Malgun Gothic" pitchFamily="34" charset="-120"/>
-              </a:rPr>
-              <a:t>→</a:t>
-            </a:r>
-            <a:endParaRPr lang="en-US" sz="1400" dirty="0"/>
-          </a:p>
-        </p:txBody>
-      </p:sp>
-      <p:sp>
-        <p:nvSpPr>
-          <p:cNvPr id="37" name="Text 35"/>
-          <p:cNvSpPr/>
-          <p:nvPr/>
-        </p:nvSpPr>
-        <p:spPr>
-          <a:xfrm>
-            <a:off x="5385048" y="2766864"/>
-            <a:ext cx="1688902" cy="679252"/>
-          </a:xfrm>
-          <a:prstGeom prst="rect">
-            <a:avLst/>
-          </a:prstGeom>
-          <a:solidFill>
-            <a:srgbClr val="2B579A"/>
-          </a:solidFill>
-          <a:ln w="19050">
-            <a:solidFill>
-              <a:srgbClr val="2B579A"/>
-            </a:solidFill>
-          </a:ln>
-        </p:spPr>
-        <p:txBody>
-          <a:bodyPr wrap="square" rtlCol="0" anchor="ctr"/>
-          <a:lstStyle/>
-          <a:p>
-            <a:pPr indent="0" marL="0">
-              <a:buNone/>
-            </a:pPr>
-            <a:endParaRPr lang="en-US" dirty="0"/>
-          </a:p>
-        </p:txBody>
-      </p:sp>
-      <p:sp>
-        <p:nvSpPr>
-          <p:cNvPr id="38" name="Text 36"/>
-          <p:cNvSpPr/>
-          <p:nvPr/>
-        </p:nvSpPr>
-        <p:spPr>
-          <a:xfrm>
-            <a:off x="5517079" y="2963614"/>
-            <a:ext cx="1424839" cy="142875"/>
-          </a:xfrm>
-          <a:prstGeom prst="rect">
-            <a:avLst/>
-          </a:prstGeom>
-          <a:noFill/>
-          <a:ln/>
-        </p:spPr>
-        <p:txBody>
-          <a:bodyPr wrap="square" lIns="0" tIns="0" rIns="0" bIns="0" rtlCol="0" anchor="t"/>
-          <a:lstStyle/>
-          <a:p>
-            <a:pPr algn="ctr" indent="0" marL="0">
-              <a:buNone/>
-            </a:pPr>
-            <a:r>
-              <a:rPr lang="en-US" sz="1000" b="1" dirty="0">
-                <a:solidFill>
-                  <a:srgbClr val="FFFFFF"/>
-                </a:solidFill>
-                <a:latin typeface="Malgun Gothic" pitchFamily="34" charset="0"/>
-                <a:ea typeface="Malgun Gothic" pitchFamily="34" charset="-122"/>
-                <a:cs typeface="Malgun Gothic" pitchFamily="34" charset="-120"/>
-              </a:rPr>
-              <a:t>Ollama (LLM)</a:t>
-            </a:r>
-            <a:endParaRPr lang="en-US" sz="1000" dirty="0"/>
-          </a:p>
-        </p:txBody>
-      </p:sp>
-      <p:sp>
-        <p:nvSpPr>
           <p:cNvPr id="39" name="Text 37"/>
-          <p:cNvSpPr/>
-          <p:nvPr/>
-        </p:nvSpPr>
-        <p:spPr>
-          <a:xfrm>
-            <a:off x="5517079" y="3106489"/>
-            <a:ext cx="1424839" cy="142875"/>
-          </a:xfrm>
-          <a:prstGeom prst="rect">
-            <a:avLst/>
-          </a:prstGeom>
-          <a:noFill/>
-          <a:ln/>
-        </p:spPr>
-        <p:txBody>
-          <a:bodyPr wrap="square" lIns="0" tIns="0" rIns="0" bIns="0" rtlCol="0" anchor="t"/>
-          <a:lstStyle/>
-          <a:p>
-            <a:pPr algn="ctr" indent="0" marL="0">
-              <a:buNone/>
-            </a:pPr>
-            <a:r>
-              <a:rPr lang="en-US" sz="900" dirty="0">
-                <a:solidFill>
-                  <a:srgbClr val="CCCCCC"/>
-                </a:solidFill>
-                <a:latin typeface="Malgun Gothic" pitchFamily="34" charset="0"/>
-                <a:ea typeface="Malgun Gothic" pitchFamily="34" charset="-122"/>
-                <a:cs typeface="Malgun Gothic" pitchFamily="34" charset="-120"/>
-              </a:rPr>
-              <a:t>로컬 추론</a:t>
-            </a:r>
-            <a:endParaRPr lang="en-US" sz="900" dirty="0"/>
-          </a:p>
-        </p:txBody>
-      </p:sp>
-      <p:sp>
-        <p:nvSpPr>
-          <p:cNvPr id="40" name="Text 38"/>
-          <p:cNvSpPr/>
-          <p:nvPr/>
-        </p:nvSpPr>
-        <p:spPr>
-          <a:xfrm>
-            <a:off x="7150150" y="3001714"/>
-            <a:ext cx="181407" cy="209550"/>
-          </a:xfrm>
-          <a:prstGeom prst="rect">
-            <a:avLst/>
-          </a:prstGeom>
-          <a:noFill/>
-          <a:ln/>
-        </p:spPr>
-        <p:txBody>
-          <a:bodyPr wrap="square" lIns="0" tIns="0" rIns="0" bIns="0" rtlCol="0" anchor="t"/>
-          <a:lstStyle/>
-          <a:p>
-            <a:pPr algn="l" indent="0" marL="0">
-              <a:buNone/>
-            </a:pPr>
-            <a:r>
-              <a:rPr lang="en-US" sz="1400" dirty="0">
-                <a:solidFill>
-                  <a:srgbClr val="2B579A"/>
-                </a:solidFill>
-                <a:latin typeface="Malgun Gothic" pitchFamily="34" charset="0"/>
-                <a:ea typeface="Malgun Gothic" pitchFamily="34" charset="-122"/>
-                <a:cs typeface="Malgun Gothic" pitchFamily="34" charset="-120"/>
-              </a:rPr>
-              <a:t>→</a:t>
-            </a:r>
-            <a:endParaRPr lang="en-US" sz="1400" dirty="0"/>
-          </a:p>
-        </p:txBody>
-      </p:sp>
-      <p:sp>
-        <p:nvSpPr>
-          <p:cNvPr id="41" name="Text 39"/>
-          <p:cNvSpPr/>
-          <p:nvPr/>
-        </p:nvSpPr>
-        <p:spPr>
-          <a:xfrm>
-            <a:off x="7404199" y="2766864"/>
-            <a:ext cx="1435001" cy="679252"/>
-          </a:xfrm>
-          <a:prstGeom prst="rect">
-            <a:avLst/>
-          </a:prstGeom>
-          <a:solidFill>
-            <a:srgbClr val="F5F5F5"/>
-          </a:solidFill>
-          <a:ln w="19050">
-            <a:solidFill>
-              <a:srgbClr val="2B579A"/>
-            </a:solidFill>
-          </a:ln>
-        </p:spPr>
-        <p:txBody>
-          <a:bodyPr wrap="square" rtlCol="0" anchor="ctr"/>
-          <a:lstStyle/>
-          <a:p>
-            <a:pPr indent="0" marL="0">
-              <a:buNone/>
-            </a:pPr>
-            <a:endParaRPr lang="en-US" dirty="0"/>
-          </a:p>
-        </p:txBody>
-      </p:sp>
-      <p:sp>
-        <p:nvSpPr>
-          <p:cNvPr id="42" name="Text 40"/>
-          <p:cNvSpPr/>
-          <p:nvPr/>
-        </p:nvSpPr>
-        <p:spPr>
-          <a:xfrm>
-            <a:off x="7538770" y="2887414"/>
-            <a:ext cx="1165860" cy="152400"/>
-          </a:xfrm>
-          <a:prstGeom prst="rect">
-            <a:avLst/>
-          </a:prstGeom>
-          <a:noFill/>
-          <a:ln/>
-        </p:spPr>
-        <p:txBody>
-          <a:bodyPr wrap="square" lIns="0" tIns="0" rIns="0" bIns="0" rtlCol="0" anchor="t"/>
-          <a:lstStyle/>
-          <a:p>
-            <a:pPr algn="ctr" indent="0" marL="0">
-              <a:buNone/>
-            </a:pPr>
-            <a:r>
-              <a:rPr lang="en-US" sz="1000" b="1" dirty="0">
-                <a:solidFill>
-                  <a:srgbClr val="333333"/>
-                </a:solidFill>
-                <a:latin typeface="Malgun Gothic" pitchFamily="34" charset="0"/>
-                <a:ea typeface="Malgun Gothic" pitchFamily="34" charset="-122"/>
-                <a:cs typeface="Malgun Gothic" pitchFamily="34" charset="-120"/>
-              </a:rPr>
-              <a:t>응답</a:t>
-            </a:r>
-            <a:endParaRPr lang="en-US" sz="1000" dirty="0"/>
-          </a:p>
-        </p:txBody>
-      </p:sp>
-      <p:sp>
-        <p:nvSpPr>
-          <p:cNvPr id="43" name="Text 41"/>
-          <p:cNvSpPr/>
-          <p:nvPr/>
-        </p:nvSpPr>
-        <p:spPr>
-          <a:xfrm>
-            <a:off x="7538770" y="3039814"/>
-            <a:ext cx="1165860" cy="142875"/>
-          </a:xfrm>
-          <a:prstGeom prst="rect">
-            <a:avLst/>
-          </a:prstGeom>
-          <a:noFill/>
-          <a:ln/>
-        </p:spPr>
-        <p:txBody>
-          <a:bodyPr wrap="square" lIns="0" tIns="0" rIns="0" bIns="0" rtlCol="0" anchor="t"/>
-          <a:lstStyle/>
-          <a:p>
-            <a:pPr algn="ctr" indent="0" marL="0">
-              <a:buNone/>
-            </a:pPr>
-            <a:r>
-              <a:rPr lang="en-US" sz="900" dirty="0">
-                <a:solidFill>
-                  <a:srgbClr val="666666"/>
-                </a:solidFill>
-                <a:latin typeface="Malgun Gothic" pitchFamily="34" charset="0"/>
-                <a:ea typeface="Malgun Gothic" pitchFamily="34" charset="-122"/>
-                <a:cs typeface="Malgun Gothic" pitchFamily="34" charset="-120"/>
-              </a:rPr>
-              <a:t>대기시간 기록</a:t>
-            </a:r>
-            <a:endParaRPr lang="en-US" sz="900" dirty="0"/>
-          </a:p>
-        </p:txBody>
-      </p:sp>
-      <p:sp>
-        <p:nvSpPr>
-          <p:cNvPr id="44" name="Text 42"/>
-          <p:cNvSpPr/>
-          <p:nvPr/>
-        </p:nvSpPr>
-        <p:spPr>
-          <a:xfrm>
-            <a:off x="7538770" y="3182689"/>
-            <a:ext cx="1165860" cy="142875"/>
-          </a:xfrm>
-          <a:prstGeom prst="rect">
-            <a:avLst/>
-          </a:prstGeom>
-          <a:noFill/>
-          <a:ln/>
-        </p:spPr>
-        <p:txBody>
-          <a:bodyPr wrap="square" lIns="0" tIns="0" rIns="0" bIns="0" rtlCol="0" anchor="t"/>
-          <a:lstStyle/>
-          <a:p>
-            <a:pPr algn="ctr" indent="0" marL="0">
-              <a:buNone/>
-            </a:pPr>
-            <a:r>
-              <a:rPr lang="en-US" sz="900" dirty="0">
-                <a:solidFill>
-                  <a:srgbClr val="666666"/>
-                </a:solidFill>
-                <a:latin typeface="Malgun Gothic" pitchFamily="34" charset="0"/>
-                <a:ea typeface="Malgun Gothic" pitchFamily="34" charset="-122"/>
-                <a:cs typeface="Malgun Gothic" pitchFamily="34" charset="-120"/>
-              </a:rPr>
-              <a:t>JFI 계산</a:t>
-            </a:r>
-            <a:endParaRPr lang="en-US" sz="900" dirty="0"/>
-          </a:p>
-        </p:txBody>
-      </p:sp>
-      <p:sp>
-        <p:nvSpPr>
-          <p:cNvPr id="45" name="Shape 43"/>
-          <p:cNvSpPr/>
-          <p:nvPr/>
-        </p:nvSpPr>
-        <p:spPr>
-          <a:xfrm>
-            <a:off x="304800" y="4862661"/>
-            <a:ext cx="8534400" cy="0"/>
-          </a:xfrm>
-          <a:prstGeom prst="line">
-            <a:avLst/>
-          </a:prstGeom>
-          <a:noFill/>
-          <a:ln w="9525">
-            <a:solidFill>
-              <a:srgbClr val="CCCCCC"/>
-            </a:solidFill>
-            <a:prstDash val="solid"/>
-          </a:ln>
-        </p:spPr>
-      </p:sp>
-      <p:sp>
-        <p:nvSpPr>
-          <p:cNvPr id="46" name="Text 44"/>
           <p:cNvSpPr/>
           <p:nvPr/>
         </p:nvSpPr>
@@ -6435,7 +4459,7 @@
                 <a:ea typeface="Malgun Gothic" pitchFamily="34" charset="-122"/>
                 <a:cs typeface="Malgun Gothic" pitchFamily="34" charset="-120"/>
               </a:rPr>
-              <a:t>핵심: 에이징/부스트로 기아 방지 · MLFQ 완료 후 피드백으로 적응형 분류 · JFI로 공정성 측정</a:t>
+              <a:t>예: MLFQ의 타임 퀀텀 초과 시 강등 → LLM에서는 요청 완료 후 피드백 기반 큐 재배치로 변환</a:t>
             </a:r>
             <a:endParaRPr lang="en-US" sz="750" dirty="0"/>
           </a:p>

--- a/04-proposal/figures/proposal-figures.pptx
+++ b/04-proposal/figures/proposal-figures.pptx
@@ -1015,7 +1015,7 @@
         <p:spPr>
           <a:xfrm>
             <a:off x="381000" y="498425"/>
-            <a:ext cx="2000250" cy="3067943"/>
+            <a:ext cx="2000250" cy="3959572"/>
           </a:xfrm>
           <a:prstGeom prst="rect">
             <a:avLst/>
@@ -1406,7 +1406,7 @@
         <p:spPr>
           <a:xfrm>
             <a:off x="2508200" y="498425"/>
-            <a:ext cx="2000399" cy="3067943"/>
+            <a:ext cx="2000399" cy="3959572"/>
           </a:xfrm>
           <a:prstGeom prst="rect">
             <a:avLst/>
@@ -1779,7 +1779,7 @@
         <p:spPr>
           <a:xfrm>
             <a:off x="4635550" y="498425"/>
-            <a:ext cx="2000250" cy="3067943"/>
+            <a:ext cx="2000250" cy="3959572"/>
           </a:xfrm>
           <a:prstGeom prst="rect">
             <a:avLst/>
@@ -2152,7 +2152,7 @@
         <p:spPr>
           <a:xfrm>
             <a:off x="6762750" y="498425"/>
-            <a:ext cx="2000250" cy="3067943"/>
+            <a:ext cx="2000250" cy="3959572"/>
           </a:xfrm>
           <a:prstGeom prst="rect">
             <a:avLst/>
@@ -2518,351 +2518,7 @@
       </p:sp>
       <p:sp>
         <p:nvSpPr>
-          <p:cNvPr id="43" name="Text 41"/>
-          <p:cNvSpPr/>
-          <p:nvPr/>
-        </p:nvSpPr>
-        <p:spPr>
-          <a:xfrm>
-            <a:off x="381000" y="3667869"/>
-            <a:ext cx="8549640" cy="142875"/>
-          </a:xfrm>
-          <a:prstGeom prst="rect">
-            <a:avLst/>
-          </a:prstGeom>
-          <a:noFill/>
-          <a:ln/>
-        </p:spPr>
-        <p:txBody>
-          <a:bodyPr wrap="square" lIns="0" tIns="0" rIns="0" bIns="0" rtlCol="0" anchor="t"/>
-          <a:lstStyle/>
-          <a:p>
-            <a:pPr algn="l" indent="0" marL="0">
-              <a:spcBef>
-                <a:spcPts val="800"/>
-              </a:spcBef>
-              <a:spcAft>
-                <a:spcPts val="400"/>
-              </a:spcAft>
-              <a:buNone/>
-            </a:pPr>
-            <a:r>
-              <a:rPr lang="en-US" sz="900" b="1" dirty="0">
-                <a:solidFill>
-                  <a:srgbClr val="4472C4"/>
-                </a:solidFill>
-                <a:latin typeface="Malgun Gothic" pitchFamily="34" charset="0"/>
-                <a:ea typeface="Malgun Gothic" pitchFamily="34" charset="-122"/>
-                <a:cs typeface="Malgun Gothic" pitchFamily="34" charset="-120"/>
-              </a:rPr>
-              <a:t>보조 기능 (전처리 단계)</a:t>
-            </a:r>
-            <a:endParaRPr lang="en-US" sz="900" dirty="0"/>
-          </a:p>
-        </p:txBody>
-      </p:sp>
-      <p:sp>
-        <p:nvSpPr>
-          <p:cNvPr id="44" name="Text 42"/>
-          <p:cNvSpPr/>
-          <p:nvPr/>
-        </p:nvSpPr>
-        <p:spPr>
-          <a:xfrm>
-            <a:off x="381000" y="3861495"/>
-            <a:ext cx="8401050" cy="596503"/>
-          </a:xfrm>
-          <a:prstGeom prst="rect">
-            <a:avLst/>
-          </a:prstGeom>
-          <a:noFill/>
-          <a:ln w="9525">
-            <a:solidFill>
-              <a:srgbClr val="2B579A"/>
-            </a:solidFill>
-          </a:ln>
-        </p:spPr>
-        <p:txBody>
-          <a:bodyPr wrap="square" rtlCol="0" anchor="ctr"/>
-          <a:lstStyle/>
-          <a:p>
-            <a:pPr indent="0" marL="0">
-              <a:buNone/>
-            </a:pPr>
-            <a:endParaRPr lang="en-US" dirty="0"/>
-          </a:p>
-        </p:txBody>
-      </p:sp>
-      <p:sp>
-        <p:nvSpPr>
-          <p:cNvPr id="45" name="Text 43"/>
-          <p:cNvSpPr/>
-          <p:nvPr/>
-        </p:nvSpPr>
-        <p:spPr>
-          <a:xfrm>
-            <a:off x="390525" y="3871020"/>
-            <a:ext cx="8382000" cy="298252"/>
-          </a:xfrm>
-          <a:prstGeom prst="rect">
-            <a:avLst/>
-          </a:prstGeom>
-          <a:solidFill>
-            <a:srgbClr val="4472C4"/>
-          </a:solidFill>
-          <a:ln/>
-        </p:spPr>
-        <p:txBody>
-          <a:bodyPr wrap="square" rtlCol="0" anchor="ctr"/>
-          <a:lstStyle/>
-          <a:p>
-            <a:pPr indent="0" marL="0">
-              <a:buNone/>
-            </a:pPr>
-            <a:endParaRPr lang="en-US" dirty="0"/>
-          </a:p>
-        </p:txBody>
-      </p:sp>
-      <p:sp>
-        <p:nvSpPr>
-          <p:cNvPr id="46" name="Text 44"/>
-          <p:cNvSpPr/>
-          <p:nvPr/>
-        </p:nvSpPr>
-        <p:spPr>
-          <a:xfrm>
-            <a:off x="517475" y="3934420"/>
-            <a:ext cx="898380" cy="171450"/>
-          </a:xfrm>
-          <a:prstGeom prst="rect">
-            <a:avLst/>
-          </a:prstGeom>
-          <a:noFill/>
-          <a:ln/>
-        </p:spPr>
-        <p:txBody>
-          <a:bodyPr wrap="square" lIns="0" tIns="0" rIns="0" bIns="0" rtlCol="0" anchor="t"/>
-          <a:lstStyle/>
-          <a:p>
-            <a:pPr algn="l" indent="0" marL="0">
-              <a:buNone/>
-            </a:pPr>
-            <a:r>
-              <a:rPr lang="en-US" sz="1200" b="1" dirty="0">
-                <a:solidFill>
-                  <a:srgbClr val="FFFFFF"/>
-                </a:solidFill>
-                <a:latin typeface="Malgun Gothic" pitchFamily="34" charset="0"/>
-                <a:ea typeface="Malgun Gothic" pitchFamily="34" charset="-122"/>
-                <a:cs typeface="Malgun Gothic" pitchFamily="34" charset="-120"/>
-              </a:rPr>
-              <a:t>Rate Limiter</a:t>
-            </a:r>
-            <a:endParaRPr lang="en-US" sz="1200" dirty="0"/>
-          </a:p>
-        </p:txBody>
-      </p:sp>
-      <p:sp>
-        <p:nvSpPr>
-          <p:cNvPr id="47" name="Text 45"/>
-          <p:cNvSpPr/>
-          <p:nvPr/>
-        </p:nvSpPr>
-        <p:spPr>
-          <a:xfrm>
-            <a:off x="1550640" y="3953470"/>
-            <a:ext cx="822933" cy="133350"/>
-          </a:xfrm>
-          <a:prstGeom prst="rect">
-            <a:avLst/>
-          </a:prstGeom>
-          <a:noFill/>
-          <a:ln/>
-        </p:spPr>
-        <p:txBody>
-          <a:bodyPr wrap="square" lIns="0" tIns="0" rIns="0" bIns="0" rtlCol="0" anchor="t"/>
-          <a:lstStyle/>
-          <a:p>
-            <a:pPr algn="l" indent="0" marL="0">
-              <a:buNone/>
-            </a:pPr>
-            <a:r>
-              <a:rPr lang="en-US" sz="850" dirty="0">
-                <a:solidFill>
-                  <a:srgbClr val="DDDDDD"/>
-                </a:solidFill>
-                <a:latin typeface="Malgun Gothic" pitchFamily="34" charset="0"/>
-                <a:ea typeface="Malgun Gothic" pitchFamily="34" charset="-122"/>
-                <a:cs typeface="Malgun Gothic" pitchFamily="34" charset="-120"/>
-              </a:rPr>
-              <a:t>토큰 버킷 알고리즘</a:t>
-            </a:r>
-            <a:endParaRPr lang="en-US" sz="850" dirty="0"/>
-          </a:p>
-        </p:txBody>
-      </p:sp>
-      <p:sp>
-        <p:nvSpPr>
-          <p:cNvPr id="48" name="Text 46"/>
-          <p:cNvSpPr/>
-          <p:nvPr/>
-        </p:nvSpPr>
-        <p:spPr>
-          <a:xfrm>
-            <a:off x="517475" y="4232672"/>
-            <a:ext cx="1454593" cy="152400"/>
-          </a:xfrm>
-          <a:prstGeom prst="rect">
-            <a:avLst/>
-          </a:prstGeom>
-          <a:noFill/>
-          <a:ln/>
-        </p:spPr>
-        <p:txBody>
-          <a:bodyPr wrap="square" lIns="0" tIns="0" rIns="0" bIns="0" rtlCol="0" anchor="t"/>
-          <a:lstStyle/>
-          <a:p>
-            <a:pPr algn="l" indent="0" marL="0">
-              <a:buNone/>
-            </a:pPr>
-            <a:r>
-              <a:rPr lang="en-US" sz="950" b="1" dirty="0">
-                <a:solidFill>
-                  <a:srgbClr val="333333"/>
-                </a:solidFill>
-                <a:latin typeface="Malgun Gothic" pitchFamily="34" charset="0"/>
-                <a:ea typeface="Malgun Gothic" pitchFamily="34" charset="-122"/>
-                <a:cs typeface="Malgun Gothic" pitchFamily="34" charset="-120"/>
-              </a:rPr>
-              <a:t>역할:</a:t>
-            </a:r>
-            <a:pPr algn="l" indent="0" marL="0">
-              <a:buNone/>
-            </a:pPr>
-            <a:r>
-              <a:rPr lang="en-US" sz="950" dirty="0">
-                <a:solidFill>
-                  <a:srgbClr val="333333"/>
-                </a:solidFill>
-                <a:latin typeface="Malgun Gothic" pitchFamily="34" charset="0"/>
-                <a:ea typeface="Malgun Gothic" pitchFamily="34" charset="-122"/>
-                <a:cs typeface="Malgun Gothic" pitchFamily="34" charset="-120"/>
-              </a:rPr>
-              <a:t> 테넌트별 요청 빈도 제한</a:t>
-            </a:r>
-            <a:endParaRPr lang="en-US" sz="950" dirty="0"/>
-          </a:p>
-        </p:txBody>
-      </p:sp>
-      <p:sp>
-        <p:nvSpPr>
-          <p:cNvPr id="49" name="Text 47"/>
-          <p:cNvSpPr/>
-          <p:nvPr/>
-        </p:nvSpPr>
-        <p:spPr>
-          <a:xfrm>
-            <a:off x="2197447" y="4232672"/>
-            <a:ext cx="1101191" cy="152400"/>
-          </a:xfrm>
-          <a:prstGeom prst="rect">
-            <a:avLst/>
-          </a:prstGeom>
-          <a:noFill/>
-          <a:ln/>
-        </p:spPr>
-        <p:txBody>
-          <a:bodyPr wrap="square" lIns="0" tIns="0" rIns="0" bIns="0" rtlCol="0" anchor="t"/>
-          <a:lstStyle/>
-          <a:p>
-            <a:pPr algn="l" indent="0" marL="0">
-              <a:buNone/>
-            </a:pPr>
-            <a:r>
-              <a:rPr lang="en-US" sz="950" b="1" dirty="0">
-                <a:solidFill>
-                  <a:srgbClr val="333333"/>
-                </a:solidFill>
-                <a:latin typeface="Malgun Gothic" pitchFamily="34" charset="0"/>
-                <a:ea typeface="Malgun Gothic" pitchFamily="34" charset="-122"/>
-                <a:cs typeface="Malgun Gothic" pitchFamily="34" charset="-120"/>
-              </a:rPr>
-              <a:t>방법:</a:t>
-            </a:r>
-            <a:pPr algn="l" indent="0" marL="0">
-              <a:buNone/>
-            </a:pPr>
-            <a:r>
-              <a:rPr lang="en-US" sz="950" dirty="0">
-                <a:solidFill>
-                  <a:srgbClr val="333333"/>
-                </a:solidFill>
-                <a:latin typeface="Malgun Gothic" pitchFamily="34" charset="0"/>
-                <a:ea typeface="Malgun Gothic" pitchFamily="34" charset="-122"/>
-                <a:cs typeface="Malgun Gothic" pitchFamily="34" charset="-120"/>
-              </a:rPr>
-              <a:t> 버스트 용량 제어</a:t>
-            </a:r>
-            <a:endParaRPr lang="en-US" sz="950" dirty="0"/>
-          </a:p>
-        </p:txBody>
-      </p:sp>
-      <p:sp>
-        <p:nvSpPr>
-          <p:cNvPr id="50" name="Text 48"/>
-          <p:cNvSpPr/>
-          <p:nvPr/>
-        </p:nvSpPr>
-        <p:spPr>
-          <a:xfrm>
-            <a:off x="3530947" y="4232672"/>
-            <a:ext cx="1430000" cy="152400"/>
-          </a:xfrm>
-          <a:prstGeom prst="rect">
-            <a:avLst/>
-          </a:prstGeom>
-          <a:noFill/>
-          <a:ln/>
-        </p:spPr>
-        <p:txBody>
-          <a:bodyPr wrap="square" lIns="0" tIns="0" rIns="0" bIns="0" rtlCol="0" anchor="t"/>
-          <a:lstStyle/>
-          <a:p>
-            <a:pPr algn="l" indent="0" marL="0">
-              <a:buNone/>
-            </a:pPr>
-            <a:r>
-              <a:rPr lang="en-US" sz="950" b="1" dirty="0">
-                <a:solidFill>
-                  <a:srgbClr val="333333"/>
-                </a:solidFill>
-                <a:latin typeface="Malgun Gothic" pitchFamily="34" charset="0"/>
-                <a:ea typeface="Malgun Gothic" pitchFamily="34" charset="-122"/>
-                <a:cs typeface="Malgun Gothic" pitchFamily="34" charset="-120"/>
-              </a:rPr>
-              <a:t>목적:</a:t>
-            </a:r>
-            <a:pPr algn="l" indent="0" marL="0">
-              <a:buNone/>
-            </a:pPr>
-            <a:r>
-              <a:rPr lang="en-US" sz="950" dirty="0">
-                <a:solidFill>
-                  <a:srgbClr val="333333"/>
-                </a:solidFill>
-                <a:latin typeface="Malgun Gothic" pitchFamily="34" charset="0"/>
-                <a:ea typeface="Malgun Gothic" pitchFamily="34" charset="-122"/>
-                <a:cs typeface="Malgun Gothic" pitchFamily="34" charset="-120"/>
-              </a:rPr>
-              <a:t> 과부하 방지 (보조 수단)</a:t>
-            </a:r>
-            <a:endParaRPr lang="en-US" sz="950" dirty="0"/>
-          </a:p>
-        </p:txBody>
-      </p:sp>
-      <p:sp>
-        <p:nvSpPr>
-          <p:cNvPr id="51" name="Shape 49"/>
+          <p:cNvPr id="43" name="Shape 41"/>
           <p:cNvSpPr/>
           <p:nvPr/>
         </p:nvSpPr>
@@ -2885,7 +2541,7 @@
       </p:sp>
       <p:sp>
         <p:nvSpPr>
-          <p:cNvPr id="52" name="Text 50"/>
+          <p:cNvPr id="44" name="Text 42"/>
           <p:cNvSpPr/>
           <p:nvPr/>
         </p:nvSpPr>
@@ -2924,7 +2580,7 @@
       </p:sp>
       <p:sp>
         <p:nvSpPr>
-          <p:cNvPr id="53" name="Text 51"/>
+          <p:cNvPr id="45" name="Text 43"/>
           <p:cNvSpPr/>
           <p:nvPr/>
         </p:nvSpPr>
@@ -2963,7 +2619,7 @@
       </p:sp>
       <p:sp>
         <p:nvSpPr>
-          <p:cNvPr id="54" name="Text 52"/>
+          <p:cNvPr id="46" name="Text 44"/>
           <p:cNvSpPr/>
           <p:nvPr/>
         </p:nvSpPr>
@@ -3002,7 +2658,7 @@
       </p:sp>
       <p:sp>
         <p:nvSpPr>
-          <p:cNvPr id="55" name="Shape 53"/>
+          <p:cNvPr id="47" name="Shape 45"/>
           <p:cNvSpPr/>
           <p:nvPr/>
         </p:nvSpPr>
@@ -3025,7 +2681,7 @@
       </p:sp>
       <p:sp>
         <p:nvSpPr>
-          <p:cNvPr id="56" name="Text 54"/>
+          <p:cNvPr id="48" name="Text 46"/>
           <p:cNvSpPr/>
           <p:nvPr/>
         </p:nvSpPr>
@@ -4397,7 +4053,7 @@
                 <a:ea typeface="Malgun Gothic" pitchFamily="34" charset="-122"/>
                 <a:cs typeface="Malgun Gothic" pitchFamily="34" charset="-120"/>
               </a:rPr>
-              <a:t>핵심 연구 과제: 선점형 OS 스케줄링을 비선점형 LLM 환경에 어떻게 적응시킬 것인가?</a:t>
+              <a:t>핵심 과제: OS 스케줄링 알고리즘을 LLM 환경에 어떻게 적용할 수 있을까?</a:t>
             </a:r>
             <a:endParaRPr lang="en-US" sz="1000" dirty="0"/>
           </a:p>
@@ -4459,7 +4115,7 @@
                 <a:ea typeface="Malgun Gothic" pitchFamily="34" charset="-122"/>
                 <a:cs typeface="Malgun Gothic" pitchFamily="34" charset="-120"/>
               </a:rPr>
-              <a:t>예: MLFQ의 타임 퀀텀 초과 시 강등 → LLM에서는 요청 완료 후 피드백 기반 큐 재배치로 변환</a:t>
+              <a:t>OS에서는 실행 중인 작업을 중단할 수 있지만, LLM 추론은 중단이 어려움 → 이 차이를 어떻게 해결할지가 주요 과제</a:t>
             </a:r>
             <a:endParaRPr lang="en-US" sz="750" dirty="0"/>
           </a:p>

--- a/04-proposal/figures/proposal-figures.pptx
+++ b/04-proposal/figures/proposal-figures.pptx
@@ -2403,7 +2403,7 @@
                 <a:ea typeface="Malgun Gothic" pitchFamily="34" charset="-122"/>
                 <a:cs typeface="Malgun Gothic" pitchFamily="34" charset="-120"/>
               </a:rPr>
-              <a:t>공정성 지표(JFI) 측정</a:t>
+              <a:t>GPS 모델 근사 구현</a:t>
             </a:r>
             <a:endParaRPr lang="en-US" sz="950" dirty="0"/>
           </a:p>
@@ -2712,7 +2712,7 @@
                 <a:ea typeface="Malgun Gothic" pitchFamily="34" charset="-122"/>
                 <a:cs typeface="Malgun Gothic" pitchFamily="34" charset="-120"/>
               </a:rPr>
-              <a:t>[1] Silberschatz et al., Operating System Concepts, 10th ed., 2018.  [2] Arpaci-Dusseau, OSTEP, v1.10, 2023.  [3] Kurose &amp; Ross, Computer Networking, 8th ed., 2021.</a:t>
+              <a:t>[3] Silberschatz et al., Operating System Concepts, 10th ed., 2018.  [4] Arpaci-Dusseau, OSTEP, v1.10, 2023.  [5] Kurose &amp; Ross, Computer Networking, 9th ed., 2025.</a:t>
             </a:r>
             <a:endParaRPr lang="en-US" sz="700" dirty="0"/>
           </a:p>
@@ -3756,7 +3756,7 @@
                 <a:ea typeface="Malgun Gothic" pitchFamily="34" charset="-122"/>
                 <a:cs typeface="Malgun Gothic" pitchFamily="34" charset="-120"/>
               </a:rPr>
-              <a:t>테넌트 등급에 따른 자원 배분</a:t>
+              <a:t>사용자 등급에 따른 자원 배분</a:t>
             </a:r>
             <a:endParaRPr lang="en-US" sz="900" dirty="0"/>
           </a:p>

--- a/04-proposal/figures/proposal-figures.pptx
+++ b/04-proposal/figures/proposal-figures.pptx
@@ -2385,7 +2385,7 @@
                 <a:ea typeface="Malgun Gothic" pitchFamily="34" charset="-122"/>
                 <a:cs typeface="Malgun Gothic" pitchFamily="34" charset="-120"/>
               </a:rPr>
-              <a:t>등급별 가중치 비례 배분</a:t>
+              <a:t>가중치 비례 배분</a:t>
             </a:r>
             <a:endParaRPr lang="en-US" sz="950" dirty="0"/>
           </a:p>
